--- a/practice_github_advanced/fig/slide.pptx
+++ b/practice_github_advanced/fig/slide.pptx
@@ -5,7 +5,7 @@
     <p:sldMasterId id="2147483663" r:id="rId1"/>
   </p:sldMasterIdLst>
   <p:notesMasterIdLst>
-    <p:notesMasterId r:id="rId38"/>
+    <p:notesMasterId r:id="rId37"/>
   </p:notesMasterIdLst>
   <p:sldIdLst>
     <p:sldId id="256" r:id="rId2"/>
@@ -21,29 +21,28 @@
     <p:sldId id="404" r:id="rId12"/>
     <p:sldId id="435" r:id="rId13"/>
     <p:sldId id="406" r:id="rId14"/>
-    <p:sldId id="407" r:id="rId15"/>
-    <p:sldId id="409" r:id="rId16"/>
-    <p:sldId id="410" r:id="rId17"/>
-    <p:sldId id="411" r:id="rId18"/>
-    <p:sldId id="436" r:id="rId19"/>
-    <p:sldId id="437" r:id="rId20"/>
-    <p:sldId id="413" r:id="rId21"/>
-    <p:sldId id="414" r:id="rId22"/>
-    <p:sldId id="415" r:id="rId23"/>
-    <p:sldId id="416" r:id="rId24"/>
-    <p:sldId id="427" r:id="rId25"/>
-    <p:sldId id="430" r:id="rId26"/>
-    <p:sldId id="417" r:id="rId27"/>
-    <p:sldId id="418" r:id="rId28"/>
-    <p:sldId id="419" r:id="rId29"/>
-    <p:sldId id="420" r:id="rId30"/>
-    <p:sldId id="421" r:id="rId31"/>
-    <p:sldId id="422" r:id="rId32"/>
-    <p:sldId id="440" r:id="rId33"/>
-    <p:sldId id="438" r:id="rId34"/>
-    <p:sldId id="439" r:id="rId35"/>
-    <p:sldId id="441" r:id="rId36"/>
-    <p:sldId id="423" r:id="rId37"/>
+    <p:sldId id="409" r:id="rId15"/>
+    <p:sldId id="410" r:id="rId16"/>
+    <p:sldId id="411" r:id="rId17"/>
+    <p:sldId id="436" r:id="rId18"/>
+    <p:sldId id="437" r:id="rId19"/>
+    <p:sldId id="413" r:id="rId20"/>
+    <p:sldId id="414" r:id="rId21"/>
+    <p:sldId id="415" r:id="rId22"/>
+    <p:sldId id="416" r:id="rId23"/>
+    <p:sldId id="427" r:id="rId24"/>
+    <p:sldId id="430" r:id="rId25"/>
+    <p:sldId id="417" r:id="rId26"/>
+    <p:sldId id="418" r:id="rId27"/>
+    <p:sldId id="419" r:id="rId28"/>
+    <p:sldId id="420" r:id="rId29"/>
+    <p:sldId id="421" r:id="rId30"/>
+    <p:sldId id="422" r:id="rId31"/>
+    <p:sldId id="440" r:id="rId32"/>
+    <p:sldId id="438" r:id="rId33"/>
+    <p:sldId id="439" r:id="rId34"/>
+    <p:sldId id="441" r:id="rId35"/>
+    <p:sldId id="423" r:id="rId36"/>
   </p:sldIdLst>
   <p:sldSz cx="9144000" cy="6858000" type="screen4x3"/>
   <p:notesSz cx="6858000" cy="9144000"/>
@@ -242,7 +241,7 @@
           </a:lstStyle>
           <a:p>
             <a:fld id="{6B8D1B20-A248-FB47-8240-73C0C5F47C9D}" type="datetimeFigureOut">
-              <a:t>2024/11/8</a:t>
+              <a:t>2026/10/14</a:t>
             </a:fld>
             <a:endParaRPr kumimoji="1" lang="ja-JP" altLang="en-US"/>
           </a:p>
@@ -748,7 +747,7 @@
           <a:p>
             <a:fld id="{3DFA746F-AF1F-C048-A2ED-B38EF01E9631}" type="slidenum">
               <a:rPr lang="en-US" altLang="ja-JP" smtClean="0"/>
-              <a:t>34</a:t>
+              <a:t>33</a:t>
             </a:fld>
             <a:endParaRPr kumimoji="1" lang="ja-JP" altLang="en-US"/>
           </a:p>
@@ -1837,7 +1836,7 @@
         </p:blipFill>
         <p:spPr>
           <a:xfrm>
-            <a:off x="4644008" y="1988840"/>
+            <a:off x="4644008" y="1973309"/>
             <a:ext cx="4187752" cy="3687939"/>
           </a:xfrm>
           <a:prstGeom prst="rect">
@@ -3274,7 +3273,7 @@
           <p:cNvPr id="2" name="テキスト プレースホルダー 1">
             <a:extLst>
               <a:ext uri="{FF2B5EF4-FFF2-40B4-BE49-F238E27FC236}">
-                <a16:creationId xmlns:a16="http://schemas.microsoft.com/office/drawing/2014/main" id="{B1BB059B-CEE8-4B31-898C-E180B5C35D7E}"/>
+                <a16:creationId xmlns:a16="http://schemas.microsoft.com/office/drawing/2014/main" id="{9B004064-74B3-4C3A-A6AE-24808C59E811}"/>
               </a:ext>
             </a:extLst>
           </p:cNvPr>
@@ -3296,7 +3295,7 @@
             </a:r>
             <a:r>
               <a:rPr lang="en-US" altLang="ja-JP"/>
-              <a:t>1 - Step 2</a:t>
+              <a:t>1 - Step 3</a:t>
             </a:r>
             <a:endParaRPr kumimoji="1" lang="ja-JP" altLang="en-US"/>
           </a:p>
@@ -3304,10 +3303,10 @@
       </p:sp>
       <p:pic>
         <p:nvPicPr>
-          <p:cNvPr id="5" name="図 4">
-            <a:extLst>
-              <a:ext uri="{FF2B5EF4-FFF2-40B4-BE49-F238E27FC236}">
-                <a16:creationId xmlns:a16="http://schemas.microsoft.com/office/drawing/2014/main" id="{6720A0CC-41C7-42A7-A36B-1BAE2BB22F27}"/>
+          <p:cNvPr id="4" name="図 3">
+            <a:extLst>
+              <a:ext uri="{FF2B5EF4-FFF2-40B4-BE49-F238E27FC236}">
+                <a16:creationId xmlns:a16="http://schemas.microsoft.com/office/drawing/2014/main" id="{2DD29521-8C8F-4F33-A7A8-49D2026845B2}"/>
               </a:ext>
             </a:extLst>
           </p:cNvPr>
@@ -3324,8 +3323,8 @@
         </p:blipFill>
         <p:spPr>
           <a:xfrm>
-            <a:off x="539552" y="3140968"/>
-            <a:ext cx="7109202" cy="3240360"/>
+            <a:off x="1331640" y="1412776"/>
+            <a:ext cx="5400600" cy="4716642"/>
           </a:xfrm>
           <a:prstGeom prst="rect">
             <a:avLst/>
@@ -3334,10 +3333,81 @@
       </p:pic>
       <p:sp>
         <p:nvSpPr>
-          <p:cNvPr id="6" name="正方形/長方形 5">
-            <a:extLst>
-              <a:ext uri="{FF2B5EF4-FFF2-40B4-BE49-F238E27FC236}">
-                <a16:creationId xmlns:a16="http://schemas.microsoft.com/office/drawing/2014/main" id="{BC7C992D-92A4-48F8-912F-7833C7D1AF5C}"/>
+          <p:cNvPr id="5" name="テキスト ボックス 4">
+            <a:extLst>
+              <a:ext uri="{FF2B5EF4-FFF2-40B4-BE49-F238E27FC236}">
+                <a16:creationId xmlns:a16="http://schemas.microsoft.com/office/drawing/2014/main" id="{2E680A15-8921-4C03-A8FC-9229C1BA7F57}"/>
+              </a:ext>
+            </a:extLst>
+          </p:cNvPr>
+          <p:cNvSpPr txBox="1"/>
+          <p:nvPr/>
+        </p:nvSpPr>
+        <p:spPr>
+          <a:xfrm>
+            <a:off x="2051720" y="908720"/>
+            <a:ext cx="3877985" cy="461665"/>
+          </a:xfrm>
+          <a:prstGeom prst="rect">
+            <a:avLst/>
+          </a:prstGeom>
+          <a:noFill/>
+        </p:spPr>
+        <p:txBody>
+          <a:bodyPr wrap="none" rtlCol="0">
+            <a:spAutoFit/>
+          </a:bodyPr>
+          <a:lstStyle/>
+          <a:p>
+            <a:r>
+              <a:rPr lang="ja-JP" altLang="en-US" sz="2400" dirty="0"/>
+              <a:t>数字認識できることを確認</a:t>
+            </a:r>
+            <a:endParaRPr kumimoji="1" lang="ja-JP" altLang="en-US" sz="2400" dirty="0"/>
+          </a:p>
+        </p:txBody>
+      </p:sp>
+      <p:sp>
+        <p:nvSpPr>
+          <p:cNvPr id="7" name="テキスト ボックス 6">
+            <a:extLst>
+              <a:ext uri="{FF2B5EF4-FFF2-40B4-BE49-F238E27FC236}">
+                <a16:creationId xmlns:a16="http://schemas.microsoft.com/office/drawing/2014/main" id="{B546189E-1E00-4298-958C-2808FBF3193C}"/>
+              </a:ext>
+            </a:extLst>
+          </p:cNvPr>
+          <p:cNvSpPr txBox="1"/>
+          <p:nvPr/>
+        </p:nvSpPr>
+        <p:spPr>
+          <a:xfrm>
+            <a:off x="1331640" y="6165304"/>
+            <a:ext cx="2262158" cy="369332"/>
+          </a:xfrm>
+          <a:prstGeom prst="rect">
+            <a:avLst/>
+          </a:prstGeom>
+          <a:noFill/>
+        </p:spPr>
+        <p:txBody>
+          <a:bodyPr wrap="none" rtlCol="0">
+            <a:spAutoFit/>
+          </a:bodyPr>
+          <a:lstStyle/>
+          <a:p>
+            <a:r>
+              <a:rPr kumimoji="1" lang="ja-JP" altLang="en-US"/>
+              <a:t>マウスでここに入力</a:t>
+            </a:r>
+          </a:p>
+        </p:txBody>
+      </p:sp>
+      <p:sp>
+        <p:nvSpPr>
+          <p:cNvPr id="11" name="四角形: 角を丸くする 10">
+            <a:extLst>
+              <a:ext uri="{FF2B5EF4-FFF2-40B4-BE49-F238E27FC236}">
+                <a16:creationId xmlns:a16="http://schemas.microsoft.com/office/drawing/2014/main" id="{3A6A6081-B2D2-4B2F-AC6C-28380693BFC0}"/>
               </a:ext>
             </a:extLst>
           </p:cNvPr>
@@ -3346,16 +3416,18 @@
         </p:nvSpPr>
         <p:spPr>
           <a:xfrm>
-            <a:off x="1528074" y="2924944"/>
-            <a:ext cx="6192688" cy="3744416"/>
-          </a:xfrm>
-          <a:prstGeom prst="rect">
-            <a:avLst/>
-          </a:prstGeom>
-          <a:noFill/>
-          <a:ln>
+            <a:off x="3455876" y="2348880"/>
+            <a:ext cx="504056" cy="576064"/>
+          </a:xfrm>
+          <a:prstGeom prst="roundRect">
+            <a:avLst>
+              <a:gd name="adj" fmla="val 1989"/>
+            </a:avLst>
+          </a:prstGeom>
+          <a:noFill/>
+          <a:ln w="38100">
             <a:solidFill>
-              <a:schemeClr val="tx1"/>
+              <a:srgbClr val="FF0000"/>
             </a:solidFill>
           </a:ln>
         </p:spPr>
@@ -3386,10 +3458,10 @@
       </p:sp>
       <p:sp>
         <p:nvSpPr>
-          <p:cNvPr id="4" name="テキスト ボックス 3">
-            <a:extLst>
-              <a:ext uri="{FF2B5EF4-FFF2-40B4-BE49-F238E27FC236}">
-                <a16:creationId xmlns:a16="http://schemas.microsoft.com/office/drawing/2014/main" id="{2E401B98-DF16-457E-B2BF-D30509ACD525}"/>
+          <p:cNvPr id="12" name="テキスト ボックス 11">
+            <a:extLst>
+              <a:ext uri="{FF2B5EF4-FFF2-40B4-BE49-F238E27FC236}">
+                <a16:creationId xmlns:a16="http://schemas.microsoft.com/office/drawing/2014/main" id="{E6330442-3FDA-4FB1-9CA6-93485B8E7141}"/>
               </a:ext>
             </a:extLst>
           </p:cNvPr>
@@ -3398,56 +3470,8 @@
         </p:nvSpPr>
         <p:spPr>
           <a:xfrm>
-            <a:off x="395536" y="1916832"/>
-            <a:ext cx="8280920" cy="523220"/>
-          </a:xfrm>
-          <a:prstGeom prst="rect">
-            <a:avLst/>
-          </a:prstGeom>
-          <a:noFill/>
-        </p:spPr>
-        <p:txBody>
-          <a:bodyPr wrap="square">
-            <a:spAutoFit/>
-          </a:bodyPr>
-          <a:lstStyle/>
-          <a:p>
-            <a:r>
-              <a:rPr lang="ja-JP" altLang="en-US" sz="2800" dirty="0"/>
-              <a:t>https://github-watanabe.github.io/pages-sample/</a:t>
-            </a:r>
-            <a:r>
-              <a:rPr lang="en-US" altLang="ja-JP" sz="2800" dirty="0">
-                <a:solidFill>
-                  <a:srgbClr val="FF0000"/>
-                </a:solidFill>
-              </a:rPr>
-              <a:t>?1</a:t>
-            </a:r>
-            <a:endParaRPr lang="ja-JP" altLang="en-US" sz="2800" dirty="0">
-              <a:solidFill>
-                <a:srgbClr val="FF0000"/>
-              </a:solidFill>
-            </a:endParaRPr>
-          </a:p>
-        </p:txBody>
-      </p:sp>
-      <p:sp>
-        <p:nvSpPr>
-          <p:cNvPr id="7" name="テキスト ボックス 6">
-            <a:extLst>
-              <a:ext uri="{FF2B5EF4-FFF2-40B4-BE49-F238E27FC236}">
-                <a16:creationId xmlns:a16="http://schemas.microsoft.com/office/drawing/2014/main" id="{D3A7BF75-4581-2407-4994-9D744DFAD12F}"/>
-              </a:ext>
-            </a:extLst>
-          </p:cNvPr>
-          <p:cNvSpPr txBox="1"/>
-          <p:nvPr/>
-        </p:nvSpPr>
-        <p:spPr>
-          <a:xfrm>
-            <a:off x="179512" y="1052736"/>
-            <a:ext cx="8085868" cy="830997"/>
+            <a:off x="4283968" y="1700808"/>
+            <a:ext cx="1107996" cy="369332"/>
           </a:xfrm>
           <a:prstGeom prst="rect">
             <a:avLst/>
@@ -3461,105 +3485,43 @@
           <a:lstStyle/>
           <a:p>
             <a:r>
-              <a:rPr lang="ja-JP" altLang="en-US" sz="2400" dirty="0"/>
-              <a:t>もし</a:t>
-            </a:r>
-            <a:r>
-              <a:rPr kumimoji="1" lang="en-US" altLang="ja-JP" sz="2400" dirty="0"/>
-              <a:t>404</a:t>
-            </a:r>
-            <a:r>
-              <a:rPr kumimoji="1" lang="ja-JP" altLang="en-US" sz="2400" dirty="0"/>
-              <a:t>と表示されたら、しばらく待ってから</a:t>
-            </a:r>
-            <a:r>
-              <a:rPr lang="ja-JP" altLang="en-US" sz="2400" dirty="0"/>
-              <a:t>アドレスの</a:t>
-            </a:r>
-            <a:endParaRPr lang="en-US" altLang="ja-JP" sz="2400" dirty="0"/>
-          </a:p>
-          <a:p>
-            <a:r>
-              <a:rPr lang="ja-JP" altLang="en-US" sz="2400" dirty="0"/>
-              <a:t>最後に「</a:t>
-            </a:r>
-            <a:r>
-              <a:rPr lang="en-US" altLang="ja-JP" sz="2400" dirty="0"/>
-              <a:t>?1</a:t>
-            </a:r>
-            <a:r>
-              <a:rPr lang="ja-JP" altLang="en-US" sz="2400" dirty="0"/>
-              <a:t>」を追加してエンターキーを入力</a:t>
-            </a:r>
-            <a:endParaRPr kumimoji="1" lang="ja-JP" altLang="en-US" sz="2400" dirty="0"/>
-          </a:p>
-        </p:txBody>
-      </p:sp>
-      <p:sp>
-        <p:nvSpPr>
-          <p:cNvPr id="8" name="テキスト ボックス 7">
-            <a:extLst>
-              <a:ext uri="{FF2B5EF4-FFF2-40B4-BE49-F238E27FC236}">
-                <a16:creationId xmlns:a16="http://schemas.microsoft.com/office/drawing/2014/main" id="{F559FFCA-B7A8-1E86-7796-F9ABDC437227}"/>
-              </a:ext>
-            </a:extLst>
-          </p:cNvPr>
-          <p:cNvSpPr txBox="1"/>
-          <p:nvPr/>
-        </p:nvSpPr>
-        <p:spPr>
-          <a:xfrm>
-            <a:off x="1691680" y="2420888"/>
-            <a:ext cx="2287806" cy="369332"/>
-          </a:xfrm>
-          <a:prstGeom prst="rect">
-            <a:avLst/>
-          </a:prstGeom>
-          <a:noFill/>
-        </p:spPr>
-        <p:txBody>
-          <a:bodyPr wrap="none" rtlCol="0">
-            <a:spAutoFit/>
-          </a:bodyPr>
-          <a:lstStyle/>
-          <a:p>
-            <a:r>
-              <a:rPr kumimoji="1" lang="en-US" altLang="ja-JP" dirty="0"/>
-              <a:t>GitHub</a:t>
-            </a:r>
-            <a:r>
-              <a:rPr kumimoji="1" lang="ja-JP" altLang="en-US" dirty="0"/>
-              <a:t>アカウント名</a:t>
-            </a:r>
+              <a:rPr lang="ja-JP" altLang="en-US"/>
+              <a:t>判定結果</a:t>
+            </a:r>
+            <a:endParaRPr kumimoji="1" lang="ja-JP" altLang="en-US"/>
           </a:p>
         </p:txBody>
       </p:sp>
       <p:cxnSp>
         <p:nvCxnSpPr>
-          <p:cNvPr id="10" name="直線コネクタ 9">
-            <a:extLst>
-              <a:ext uri="{FF2B5EF4-FFF2-40B4-BE49-F238E27FC236}">
-                <a16:creationId xmlns:a16="http://schemas.microsoft.com/office/drawing/2014/main" id="{642CB53E-691E-63EC-BC1D-57917722FCB3}"/>
-              </a:ext>
-            </a:extLst>
-          </p:cNvPr>
-          <p:cNvCxnSpPr/>
+          <p:cNvPr id="13" name="コネクタ: カギ線 12">
+            <a:extLst>
+              <a:ext uri="{FF2B5EF4-FFF2-40B4-BE49-F238E27FC236}">
+                <a16:creationId xmlns:a16="http://schemas.microsoft.com/office/drawing/2014/main" id="{05AFA731-9F44-462A-BBC4-32E2F38B72A6}"/>
+              </a:ext>
+            </a:extLst>
+          </p:cNvPr>
+          <p:cNvCxnSpPr>
+            <a:cxnSpLocks/>
+            <a:stCxn id="12" idx="2"/>
+            <a:endCxn id="11" idx="3"/>
+          </p:cNvCxnSpPr>
           <p:nvPr/>
         </p:nvCxnSpPr>
         <p:spPr>
-          <a:xfrm>
-            <a:off x="1547664" y="2348880"/>
-            <a:ext cx="2592288" cy="0"/>
-          </a:xfrm>
-          <a:prstGeom prst="line">
-            <a:avLst/>
-          </a:prstGeom>
-          <a:ln w="38100">
+          <a:xfrm rot="5400000">
+            <a:off x="4115563" y="1914509"/>
+            <a:ext cx="566772" cy="878034"/>
+          </a:xfrm>
+          <a:prstGeom prst="bentConnector2">
+            <a:avLst/>
+          </a:prstGeom>
+          <a:ln w="28575">
             <a:solidFill>
               <a:srgbClr val="FF0000"/>
             </a:solidFill>
             <a:headEnd type="none" w="med" len="med"/>
-            <a:tailEnd type="none" w="med" len="med"/>
+            <a:tailEnd type="triangle"/>
           </a:ln>
         </p:spPr>
         <p:style>
@@ -3577,10 +3539,52 @@
           </a:fontRef>
         </p:style>
       </p:cxnSp>
+      <p:sp>
+        <p:nvSpPr>
+          <p:cNvPr id="16" name="テキスト ボックス 15">
+            <a:extLst>
+              <a:ext uri="{FF2B5EF4-FFF2-40B4-BE49-F238E27FC236}">
+                <a16:creationId xmlns:a16="http://schemas.microsoft.com/office/drawing/2014/main" id="{3451E29B-5CC5-47EA-B467-31F2997401D3}"/>
+              </a:ext>
+            </a:extLst>
+          </p:cNvPr>
+          <p:cNvSpPr txBox="1"/>
+          <p:nvPr/>
+        </p:nvSpPr>
+        <p:spPr>
+          <a:xfrm>
+            <a:off x="3995936" y="6093296"/>
+            <a:ext cx="2492990" cy="646331"/>
+          </a:xfrm>
+          <a:prstGeom prst="rect">
+            <a:avLst/>
+          </a:prstGeom>
+          <a:noFill/>
+        </p:spPr>
+        <p:txBody>
+          <a:bodyPr wrap="none" rtlCol="0">
+            <a:spAutoFit/>
+          </a:bodyPr>
+          <a:lstStyle/>
+          <a:p>
+            <a:r>
+              <a:rPr lang="ja-JP" altLang="en-US" dirty="0"/>
+              <a:t>ニューラルネットへの</a:t>
+            </a:r>
+            <a:endParaRPr lang="en-US" altLang="ja-JP" dirty="0"/>
+          </a:p>
+          <a:p>
+            <a:r>
+              <a:rPr kumimoji="1" lang="ja-JP" altLang="en-US" dirty="0"/>
+              <a:t>入力画像</a:t>
+            </a:r>
+          </a:p>
+        </p:txBody>
+      </p:sp>
     </p:spTree>
     <p:extLst>
       <p:ext uri="{BB962C8B-B14F-4D97-AF65-F5344CB8AC3E}">
-        <p14:creationId xmlns:p14="http://schemas.microsoft.com/office/powerpoint/2010/main" val="3089741578"/>
+        <p14:creationId xmlns:p14="http://schemas.microsoft.com/office/powerpoint/2010/main" val="525025977"/>
       </p:ext>
     </p:extLst>
   </p:cSld>
@@ -3612,7 +3616,7 @@
           <p:cNvPr id="2" name="テキスト プレースホルダー 1">
             <a:extLst>
               <a:ext uri="{FF2B5EF4-FFF2-40B4-BE49-F238E27FC236}">
-                <a16:creationId xmlns:a16="http://schemas.microsoft.com/office/drawing/2014/main" id="{9B004064-74B3-4C3A-A6AE-24808C59E811}"/>
+                <a16:creationId xmlns:a16="http://schemas.microsoft.com/office/drawing/2014/main" id="{3AE04C9B-68F6-4D94-98E0-43D3CCA98AC7}"/>
               </a:ext>
             </a:extLst>
           </p:cNvPr>
@@ -3634,7 +3638,11 @@
             </a:r>
             <a:r>
               <a:rPr lang="en-US" altLang="ja-JP"/>
-              <a:t>1 - Step 3</a:t>
+              <a:t>1 - </a:t>
+            </a:r>
+            <a:r>
+              <a:rPr lang="ja-JP" altLang="en-US"/>
+              <a:t>レポート</a:t>
             </a:r>
             <a:endParaRPr kumimoji="1" lang="ja-JP" altLang="en-US"/>
           </a:p>
@@ -3645,7 +3653,7 @@
           <p:cNvPr id="4" name="図 3">
             <a:extLst>
               <a:ext uri="{FF2B5EF4-FFF2-40B4-BE49-F238E27FC236}">
-                <a16:creationId xmlns:a16="http://schemas.microsoft.com/office/drawing/2014/main" id="{2DD29521-8C8F-4F33-A7A8-49D2026845B2}"/>
+                <a16:creationId xmlns:a16="http://schemas.microsoft.com/office/drawing/2014/main" id="{02C588EE-F4F0-4C84-BEAF-94C23A0048BC}"/>
               </a:ext>
             </a:extLst>
           </p:cNvPr>
@@ -3662,8 +3670,8 @@
         </p:blipFill>
         <p:spPr>
           <a:xfrm>
-            <a:off x="1331640" y="1412776"/>
-            <a:ext cx="5400600" cy="4716642"/>
+            <a:off x="1619672" y="1916832"/>
+            <a:ext cx="5760640" cy="4868018"/>
           </a:xfrm>
           <a:prstGeom prst="rect">
             <a:avLst/>
@@ -3675,7 +3683,7 @@
           <p:cNvPr id="5" name="テキスト ボックス 4">
             <a:extLst>
               <a:ext uri="{FF2B5EF4-FFF2-40B4-BE49-F238E27FC236}">
-                <a16:creationId xmlns:a16="http://schemas.microsoft.com/office/drawing/2014/main" id="{2E680A15-8921-4C03-A8FC-9229C1BA7F57}"/>
+                <a16:creationId xmlns:a16="http://schemas.microsoft.com/office/drawing/2014/main" id="{A2A487E9-C2FF-4CF2-9BC0-9A7F4059FAB0}"/>
               </a:ext>
             </a:extLst>
           </p:cNvPr>
@@ -3684,8 +3692,8 @@
         </p:nvSpPr>
         <p:spPr>
           <a:xfrm>
-            <a:off x="2051720" y="908720"/>
-            <a:ext cx="3877985" cy="461665"/>
+            <a:off x="539552" y="1124744"/>
+            <a:ext cx="6853158" cy="707886"/>
           </a:xfrm>
           <a:prstGeom prst="rect">
             <a:avLst/>
@@ -3699,54 +3707,25 @@
           <a:lstStyle/>
           <a:p>
             <a:r>
-              <a:rPr lang="ja-JP" altLang="en-US" sz="2400" dirty="0"/>
-              <a:t>数字認識できることを確認</a:t>
-            </a:r>
-            <a:endParaRPr kumimoji="1" lang="ja-JP" altLang="en-US" sz="2400" dirty="0"/>
-          </a:p>
-        </p:txBody>
-      </p:sp>
-      <p:sp>
-        <p:nvSpPr>
-          <p:cNvPr id="7" name="テキスト ボックス 6">
-            <a:extLst>
-              <a:ext uri="{FF2B5EF4-FFF2-40B4-BE49-F238E27FC236}">
-                <a16:creationId xmlns:a16="http://schemas.microsoft.com/office/drawing/2014/main" id="{B546189E-1E00-4298-958C-2808FBF3193C}"/>
-              </a:ext>
-            </a:extLst>
-          </p:cNvPr>
-          <p:cNvSpPr txBox="1"/>
-          <p:nvPr/>
-        </p:nvSpPr>
-        <p:spPr>
-          <a:xfrm>
-            <a:off x="1331640" y="6165304"/>
-            <a:ext cx="2262158" cy="369332"/>
-          </a:xfrm>
-          <a:prstGeom prst="rect">
-            <a:avLst/>
-          </a:prstGeom>
-          <a:noFill/>
-        </p:spPr>
-        <p:txBody>
-          <a:bodyPr wrap="none" rtlCol="0">
-            <a:spAutoFit/>
-          </a:bodyPr>
-          <a:lstStyle/>
-          <a:p>
-            <a:r>
-              <a:rPr kumimoji="1" lang="ja-JP" altLang="en-US"/>
-              <a:t>マウスでここに入力</a:t>
-            </a:r>
-          </a:p>
-        </p:txBody>
-      </p:sp>
-      <p:sp>
-        <p:nvSpPr>
-          <p:cNvPr id="11" name="四角形: 角を丸くする 10">
-            <a:extLst>
-              <a:ext uri="{FF2B5EF4-FFF2-40B4-BE49-F238E27FC236}">
-                <a16:creationId xmlns:a16="http://schemas.microsoft.com/office/drawing/2014/main" id="{3A6A6081-B2D2-4B2F-AC6C-28380693BFC0}"/>
+              <a:rPr kumimoji="1" lang="ja-JP" altLang="en-US" sz="2000"/>
+              <a:t>認識が誤判定する結果を作り、スクリーンショットを提出</a:t>
+            </a:r>
+            <a:endParaRPr kumimoji="1" lang="en-US" altLang="ja-JP" sz="2000"/>
+          </a:p>
+          <a:p>
+            <a:r>
+              <a:rPr kumimoji="1" lang="ja-JP" altLang="en-US" sz="2000"/>
+              <a:t>なぜ誤判定したか考察すること</a:t>
+            </a:r>
+          </a:p>
+        </p:txBody>
+      </p:sp>
+      <p:sp>
+        <p:nvSpPr>
+          <p:cNvPr id="6" name="四角形: 角を丸くする 5">
+            <a:extLst>
+              <a:ext uri="{FF2B5EF4-FFF2-40B4-BE49-F238E27FC236}">
+                <a16:creationId xmlns:a16="http://schemas.microsoft.com/office/drawing/2014/main" id="{9498EA99-42E6-411C-B199-BE68162D0467}"/>
               </a:ext>
             </a:extLst>
           </p:cNvPr>
@@ -3755,7 +3734,7 @@
         </p:nvSpPr>
         <p:spPr>
           <a:xfrm>
-            <a:off x="3455876" y="2348880"/>
+            <a:off x="3779912" y="2914510"/>
             <a:ext cx="504056" cy="576064"/>
           </a:xfrm>
           <a:prstGeom prst="roundRect">
@@ -3797,10 +3776,10 @@
       </p:sp>
       <p:sp>
         <p:nvSpPr>
-          <p:cNvPr id="12" name="テキスト ボックス 11">
-            <a:extLst>
-              <a:ext uri="{FF2B5EF4-FFF2-40B4-BE49-F238E27FC236}">
-                <a16:creationId xmlns:a16="http://schemas.microsoft.com/office/drawing/2014/main" id="{E6330442-3FDA-4FB1-9CA6-93485B8E7141}"/>
+          <p:cNvPr id="7" name="テキスト ボックス 6">
+            <a:extLst>
+              <a:ext uri="{FF2B5EF4-FFF2-40B4-BE49-F238E27FC236}">
+                <a16:creationId xmlns:a16="http://schemas.microsoft.com/office/drawing/2014/main" id="{44CFBD43-AB7B-4708-9393-D1F075E8E0B7}"/>
               </a:ext>
             </a:extLst>
           </p:cNvPr>
@@ -3809,7 +3788,7 @@
         </p:nvSpPr>
         <p:spPr>
           <a:xfrm>
-            <a:off x="4283968" y="1700808"/>
+            <a:off x="4860032" y="2266438"/>
             <a:ext cx="1107996" cy="369332"/>
           </a:xfrm>
           <a:prstGeom prst="rect">
@@ -3825,7 +3804,7 @@
           <a:p>
             <a:r>
               <a:rPr lang="ja-JP" altLang="en-US"/>
-              <a:t>判定結果</a:t>
+              <a:t>判定失敗</a:t>
             </a:r>
             <a:endParaRPr kumimoji="1" lang="ja-JP" altLang="en-US"/>
           </a:p>
@@ -3833,24 +3812,24 @@
       </p:sp>
       <p:cxnSp>
         <p:nvCxnSpPr>
-          <p:cNvPr id="13" name="コネクタ: カギ線 12">
-            <a:extLst>
-              <a:ext uri="{FF2B5EF4-FFF2-40B4-BE49-F238E27FC236}">
-                <a16:creationId xmlns:a16="http://schemas.microsoft.com/office/drawing/2014/main" id="{05AFA731-9F44-462A-BBC4-32E2F38B72A6}"/>
+          <p:cNvPr id="8" name="コネクタ: カギ線 7">
+            <a:extLst>
+              <a:ext uri="{FF2B5EF4-FFF2-40B4-BE49-F238E27FC236}">
+                <a16:creationId xmlns:a16="http://schemas.microsoft.com/office/drawing/2014/main" id="{2259FF03-7F91-4549-8086-00712FFB8191}"/>
               </a:ext>
             </a:extLst>
           </p:cNvPr>
           <p:cNvCxnSpPr>
             <a:cxnSpLocks/>
-            <a:stCxn id="12" idx="2"/>
-            <a:endCxn id="11" idx="3"/>
+            <a:stCxn id="7" idx="2"/>
+            <a:endCxn id="6" idx="3"/>
           </p:cNvCxnSpPr>
           <p:nvPr/>
         </p:nvCxnSpPr>
         <p:spPr>
           <a:xfrm rot="5400000">
-            <a:off x="4115563" y="1914509"/>
-            <a:ext cx="566772" cy="878034"/>
+            <a:off x="4565613" y="2354125"/>
+            <a:ext cx="566772" cy="1130062"/>
           </a:xfrm>
           <a:prstGeom prst="bentConnector2">
             <a:avLst/>
@@ -3878,52 +3857,10 @@
           </a:fontRef>
         </p:style>
       </p:cxnSp>
-      <p:sp>
-        <p:nvSpPr>
-          <p:cNvPr id="16" name="テキスト ボックス 15">
-            <a:extLst>
-              <a:ext uri="{FF2B5EF4-FFF2-40B4-BE49-F238E27FC236}">
-                <a16:creationId xmlns:a16="http://schemas.microsoft.com/office/drawing/2014/main" id="{3451E29B-5CC5-47EA-B467-31F2997401D3}"/>
-              </a:ext>
-            </a:extLst>
-          </p:cNvPr>
-          <p:cNvSpPr txBox="1"/>
-          <p:nvPr/>
-        </p:nvSpPr>
-        <p:spPr>
-          <a:xfrm>
-            <a:off x="3995936" y="6093296"/>
-            <a:ext cx="2492990" cy="646331"/>
-          </a:xfrm>
-          <a:prstGeom prst="rect">
-            <a:avLst/>
-          </a:prstGeom>
-          <a:noFill/>
-        </p:spPr>
-        <p:txBody>
-          <a:bodyPr wrap="none" rtlCol="0">
-            <a:spAutoFit/>
-          </a:bodyPr>
-          <a:lstStyle/>
-          <a:p>
-            <a:r>
-              <a:rPr lang="ja-JP" altLang="en-US" dirty="0"/>
-              <a:t>ニューラルネットへの</a:t>
-            </a:r>
-            <a:endParaRPr lang="en-US" altLang="ja-JP" dirty="0"/>
-          </a:p>
-          <a:p>
-            <a:r>
-              <a:rPr kumimoji="1" lang="ja-JP" altLang="en-US" dirty="0"/>
-              <a:t>入力画像</a:t>
-            </a:r>
-          </a:p>
-        </p:txBody>
-      </p:sp>
     </p:spTree>
     <p:extLst>
       <p:ext uri="{BB962C8B-B14F-4D97-AF65-F5344CB8AC3E}">
-        <p14:creationId xmlns:p14="http://schemas.microsoft.com/office/powerpoint/2010/main" val="525025977"/>
+        <p14:creationId xmlns:p14="http://schemas.microsoft.com/office/powerpoint/2010/main" val="3198006327"/>
       </p:ext>
     </p:extLst>
   </p:cSld>
@@ -3950,49 +3887,12 @@
           <a:chExt cx="0" cy="0"/>
         </a:xfrm>
       </p:grpSpPr>
-      <p:sp>
-        <p:nvSpPr>
-          <p:cNvPr id="2" name="テキスト プレースホルダー 1">
-            <a:extLst>
-              <a:ext uri="{FF2B5EF4-FFF2-40B4-BE49-F238E27FC236}">
-                <a16:creationId xmlns:a16="http://schemas.microsoft.com/office/drawing/2014/main" id="{3AE04C9B-68F6-4D94-98E0-43D3CCA98AC7}"/>
-              </a:ext>
-            </a:extLst>
-          </p:cNvPr>
-          <p:cNvSpPr>
-            <a:spLocks noGrp="1"/>
-          </p:cNvSpPr>
-          <p:nvPr>
-            <p:ph type="body" sz="quarter" idx="10"/>
-          </p:nvPr>
-        </p:nvSpPr>
-        <p:spPr/>
-        <p:txBody>
-          <a:bodyPr/>
-          <a:lstStyle/>
-          <a:p>
-            <a:r>
-              <a:rPr lang="ja-JP" altLang="en-US"/>
-              <a:t>課題</a:t>
-            </a:r>
-            <a:r>
-              <a:rPr lang="en-US" altLang="ja-JP"/>
-              <a:t>1 - </a:t>
-            </a:r>
-            <a:r>
-              <a:rPr lang="ja-JP" altLang="en-US"/>
-              <a:t>レポート</a:t>
-            </a:r>
-            <a:endParaRPr kumimoji="1" lang="ja-JP" altLang="en-US"/>
-          </a:p>
-        </p:txBody>
-      </p:sp>
       <p:pic>
         <p:nvPicPr>
           <p:cNvPr id="4" name="図 3">
             <a:extLst>
               <a:ext uri="{FF2B5EF4-FFF2-40B4-BE49-F238E27FC236}">
-                <a16:creationId xmlns:a16="http://schemas.microsoft.com/office/drawing/2014/main" id="{02C588EE-F4F0-4C84-BEAF-94C23A0048BC}"/>
+                <a16:creationId xmlns:a16="http://schemas.microsoft.com/office/drawing/2014/main" id="{E8E5D315-0139-6820-C916-9CC899F28B4A}"/>
               </a:ext>
             </a:extLst>
           </p:cNvPr>
@@ -4009,8 +3909,8 @@
         </p:blipFill>
         <p:spPr>
           <a:xfrm>
-            <a:off x="1619672" y="1916832"/>
-            <a:ext cx="5760640" cy="4868018"/>
+            <a:off x="1187624" y="2060848"/>
+            <a:ext cx="6012160" cy="4165164"/>
           </a:xfrm>
           <a:prstGeom prst="rect">
             <a:avLst/>
@@ -4019,10 +3919,43 @@
       </p:pic>
       <p:sp>
         <p:nvSpPr>
-          <p:cNvPr id="5" name="テキスト ボックス 4">
-            <a:extLst>
-              <a:ext uri="{FF2B5EF4-FFF2-40B4-BE49-F238E27FC236}">
-                <a16:creationId xmlns:a16="http://schemas.microsoft.com/office/drawing/2014/main" id="{A2A487E9-C2FF-4CF2-9BC0-9A7F4059FAB0}"/>
+          <p:cNvPr id="2" name="テキスト プレースホルダー 1">
+            <a:extLst>
+              <a:ext uri="{FF2B5EF4-FFF2-40B4-BE49-F238E27FC236}">
+                <a16:creationId xmlns:a16="http://schemas.microsoft.com/office/drawing/2014/main" id="{C0A2E5A6-B2AB-4E05-84E8-E38112400E34}"/>
+              </a:ext>
+            </a:extLst>
+          </p:cNvPr>
+          <p:cNvSpPr>
+            <a:spLocks noGrp="1"/>
+          </p:cNvSpPr>
+          <p:nvPr>
+            <p:ph type="body" sz="quarter" idx="10"/>
+          </p:nvPr>
+        </p:nvSpPr>
+        <p:spPr/>
+        <p:txBody>
+          <a:bodyPr/>
+          <a:lstStyle/>
+          <a:p>
+            <a:r>
+              <a:rPr lang="ja-JP" altLang="en-US" dirty="0"/>
+              <a:t>課題</a:t>
+            </a:r>
+            <a:r>
+              <a:rPr lang="en-US" altLang="ja-JP" dirty="0"/>
+              <a:t>2 - Step 1</a:t>
+            </a:r>
+            <a:endParaRPr kumimoji="1" lang="ja-JP" altLang="en-US" dirty="0"/>
+          </a:p>
+        </p:txBody>
+      </p:sp>
+      <p:sp>
+        <p:nvSpPr>
+          <p:cNvPr id="8" name="テキスト ボックス 7">
+            <a:extLst>
+              <a:ext uri="{FF2B5EF4-FFF2-40B4-BE49-F238E27FC236}">
+                <a16:creationId xmlns:a16="http://schemas.microsoft.com/office/drawing/2014/main" id="{3579BC42-1E02-4098-8716-AF2722D1E547}"/>
               </a:ext>
             </a:extLst>
           </p:cNvPr>
@@ -4031,8 +3964,43 @@
         </p:nvSpPr>
         <p:spPr>
           <a:xfrm>
-            <a:off x="539552" y="1124744"/>
-            <a:ext cx="6853158" cy="707886"/>
+            <a:off x="323528" y="1124744"/>
+            <a:ext cx="4896544" cy="369332"/>
+          </a:xfrm>
+          <a:prstGeom prst="rect">
+            <a:avLst/>
+          </a:prstGeom>
+          <a:noFill/>
+        </p:spPr>
+        <p:txBody>
+          <a:bodyPr wrap="square">
+            <a:spAutoFit/>
+          </a:bodyPr>
+          <a:lstStyle/>
+          <a:p>
+            <a:r>
+              <a:rPr lang="ja-JP" altLang="en-US" dirty="0"/>
+              <a:t>https://github.com/appi-github/tyrano_sample</a:t>
+            </a:r>
+          </a:p>
+        </p:txBody>
+      </p:sp>
+      <p:sp>
+        <p:nvSpPr>
+          <p:cNvPr id="9" name="テキスト ボックス 8">
+            <a:extLst>
+              <a:ext uri="{FF2B5EF4-FFF2-40B4-BE49-F238E27FC236}">
+                <a16:creationId xmlns:a16="http://schemas.microsoft.com/office/drawing/2014/main" id="{6AFF404B-26FF-4BA0-BD6B-8734C8DE17C8}"/>
+              </a:ext>
+            </a:extLst>
+          </p:cNvPr>
+          <p:cNvSpPr txBox="1"/>
+          <p:nvPr/>
+        </p:nvSpPr>
+        <p:spPr>
+          <a:xfrm>
+            <a:off x="323528" y="1556792"/>
+            <a:ext cx="1261884" cy="369332"/>
           </a:xfrm>
           <a:prstGeom prst="rect">
             <a:avLst/>
@@ -4046,25 +4014,27 @@
           <a:lstStyle/>
           <a:p>
             <a:r>
-              <a:rPr kumimoji="1" lang="ja-JP" altLang="en-US" sz="2000"/>
-              <a:t>認識が誤判定する結果を作り、スクリーンショットを提出</a:t>
-            </a:r>
-            <a:endParaRPr kumimoji="1" lang="en-US" altLang="ja-JP" sz="2000"/>
-          </a:p>
-          <a:p>
-            <a:r>
-              <a:rPr kumimoji="1" lang="ja-JP" altLang="en-US" sz="2000"/>
-              <a:t>なぜ誤判定したか考察すること</a:t>
-            </a:r>
-          </a:p>
-        </p:txBody>
-      </p:sp>
-      <p:sp>
-        <p:nvSpPr>
-          <p:cNvPr id="6" name="四角形: 角を丸くする 5">
-            <a:extLst>
-              <a:ext uri="{FF2B5EF4-FFF2-40B4-BE49-F238E27FC236}">
-                <a16:creationId xmlns:a16="http://schemas.microsoft.com/office/drawing/2014/main" id="{9498EA99-42E6-411C-B199-BE68162D0467}"/>
+              <a:rPr lang="ja-JP" altLang="en-US"/>
+              <a:t>を</a:t>
+            </a:r>
+            <a:r>
+              <a:rPr lang="en-US" altLang="ja-JP"/>
+              <a:t>fork</a:t>
+            </a:r>
+            <a:r>
+              <a:rPr lang="ja-JP" altLang="en-US"/>
+              <a:t>する</a:t>
+            </a:r>
+            <a:endParaRPr kumimoji="1" lang="ja-JP" altLang="en-US"/>
+          </a:p>
+        </p:txBody>
+      </p:sp>
+      <p:sp>
+        <p:nvSpPr>
+          <p:cNvPr id="10" name="四角形: 角を丸くする 9">
+            <a:extLst>
+              <a:ext uri="{FF2B5EF4-FFF2-40B4-BE49-F238E27FC236}">
+                <a16:creationId xmlns:a16="http://schemas.microsoft.com/office/drawing/2014/main" id="{043EFE0D-978F-442A-9CF3-F2492F3ABD8C}"/>
               </a:ext>
             </a:extLst>
           </p:cNvPr>
@@ -4073,13 +4043,11 @@
         </p:nvSpPr>
         <p:spPr>
           <a:xfrm>
-            <a:off x="3779912" y="2914510"/>
-            <a:ext cx="504056" cy="576064"/>
+            <a:off x="5364088" y="2492896"/>
+            <a:ext cx="648072" cy="144016"/>
           </a:xfrm>
           <a:prstGeom prst="roundRect">
-            <a:avLst>
-              <a:gd name="adj" fmla="val 1989"/>
-            </a:avLst>
+            <a:avLst/>
           </a:prstGeom>
           <a:noFill/>
           <a:ln w="38100">
@@ -4113,93 +4081,10 @@
           </a:p>
         </p:txBody>
       </p:sp>
-      <p:sp>
-        <p:nvSpPr>
-          <p:cNvPr id="7" name="テキスト ボックス 6">
-            <a:extLst>
-              <a:ext uri="{FF2B5EF4-FFF2-40B4-BE49-F238E27FC236}">
-                <a16:creationId xmlns:a16="http://schemas.microsoft.com/office/drawing/2014/main" id="{44CFBD43-AB7B-4708-9393-D1F075E8E0B7}"/>
-              </a:ext>
-            </a:extLst>
-          </p:cNvPr>
-          <p:cNvSpPr txBox="1"/>
-          <p:nvPr/>
-        </p:nvSpPr>
-        <p:spPr>
-          <a:xfrm>
-            <a:off x="4860032" y="2266438"/>
-            <a:ext cx="1107996" cy="369332"/>
-          </a:xfrm>
-          <a:prstGeom prst="rect">
-            <a:avLst/>
-          </a:prstGeom>
-          <a:noFill/>
-        </p:spPr>
-        <p:txBody>
-          <a:bodyPr wrap="none" rtlCol="0">
-            <a:spAutoFit/>
-          </a:bodyPr>
-          <a:lstStyle/>
-          <a:p>
-            <a:r>
-              <a:rPr lang="ja-JP" altLang="en-US"/>
-              <a:t>判定失敗</a:t>
-            </a:r>
-            <a:endParaRPr kumimoji="1" lang="ja-JP" altLang="en-US"/>
-          </a:p>
-        </p:txBody>
-      </p:sp>
-      <p:cxnSp>
-        <p:nvCxnSpPr>
-          <p:cNvPr id="8" name="コネクタ: カギ線 7">
-            <a:extLst>
-              <a:ext uri="{FF2B5EF4-FFF2-40B4-BE49-F238E27FC236}">
-                <a16:creationId xmlns:a16="http://schemas.microsoft.com/office/drawing/2014/main" id="{2259FF03-7F91-4549-8086-00712FFB8191}"/>
-              </a:ext>
-            </a:extLst>
-          </p:cNvPr>
-          <p:cNvCxnSpPr>
-            <a:cxnSpLocks/>
-            <a:stCxn id="7" idx="2"/>
-            <a:endCxn id="6" idx="3"/>
-          </p:cNvCxnSpPr>
-          <p:nvPr/>
-        </p:nvCxnSpPr>
-        <p:spPr>
-          <a:xfrm rot="5400000">
-            <a:off x="4565613" y="2354125"/>
-            <a:ext cx="566772" cy="1130062"/>
-          </a:xfrm>
-          <a:prstGeom prst="bentConnector2">
-            <a:avLst/>
-          </a:prstGeom>
-          <a:ln w="28575">
-            <a:solidFill>
-              <a:srgbClr val="FF0000"/>
-            </a:solidFill>
-            <a:headEnd type="none" w="med" len="med"/>
-            <a:tailEnd type="triangle"/>
-          </a:ln>
-        </p:spPr>
-        <p:style>
-          <a:lnRef idx="1">
-            <a:schemeClr val="accent1"/>
-          </a:lnRef>
-          <a:fillRef idx="0">
-            <a:schemeClr val="accent1"/>
-          </a:fillRef>
-          <a:effectRef idx="0">
-            <a:schemeClr val="accent1"/>
-          </a:effectRef>
-          <a:fontRef idx="minor">
-            <a:schemeClr val="tx1"/>
-          </a:fontRef>
-        </p:style>
-      </p:cxnSp>
     </p:spTree>
     <p:extLst>
       <p:ext uri="{BB962C8B-B14F-4D97-AF65-F5344CB8AC3E}">
-        <p14:creationId xmlns:p14="http://schemas.microsoft.com/office/powerpoint/2010/main" val="3198006327"/>
+        <p14:creationId xmlns:p14="http://schemas.microsoft.com/office/powerpoint/2010/main" val="2255261583"/>
       </p:ext>
     </p:extLst>
   </p:cSld>
@@ -4228,10 +4113,10 @@
       </p:grpSpPr>
       <p:pic>
         <p:nvPicPr>
-          <p:cNvPr id="4" name="図 3">
-            <a:extLst>
-              <a:ext uri="{FF2B5EF4-FFF2-40B4-BE49-F238E27FC236}">
-                <a16:creationId xmlns:a16="http://schemas.microsoft.com/office/drawing/2014/main" id="{E8E5D315-0139-6820-C916-9CC899F28B4A}"/>
+          <p:cNvPr id="10" name="図 9">
+            <a:extLst>
+              <a:ext uri="{FF2B5EF4-FFF2-40B4-BE49-F238E27FC236}">
+                <a16:creationId xmlns:a16="http://schemas.microsoft.com/office/drawing/2014/main" id="{999F7510-B6E0-F3B9-8984-7475E31465DE}"/>
               </a:ext>
             </a:extLst>
           </p:cNvPr>
@@ -4248,8 +4133,8 @@
         </p:blipFill>
         <p:spPr>
           <a:xfrm>
-            <a:off x="1187624" y="2060848"/>
-            <a:ext cx="6012160" cy="4165164"/>
+            <a:off x="611560" y="1772816"/>
+            <a:ext cx="6804248" cy="4394852"/>
           </a:xfrm>
           <a:prstGeom prst="rect">
             <a:avLst/>
@@ -4261,7 +4146,7 @@
           <p:cNvPr id="2" name="テキスト プレースホルダー 1">
             <a:extLst>
               <a:ext uri="{FF2B5EF4-FFF2-40B4-BE49-F238E27FC236}">
-                <a16:creationId xmlns:a16="http://schemas.microsoft.com/office/drawing/2014/main" id="{C0A2E5A6-B2AB-4E05-84E8-E38112400E34}"/>
+                <a16:creationId xmlns:a16="http://schemas.microsoft.com/office/drawing/2014/main" id="{0186960E-25EF-3397-B016-9E71BBF77056}"/>
               </a:ext>
             </a:extLst>
           </p:cNvPr>
@@ -4283,7 +4168,7 @@
             </a:r>
             <a:r>
               <a:rPr lang="en-US" altLang="ja-JP" dirty="0"/>
-              <a:t>2 - Step 1</a:t>
+              <a:t>2 - Step 2</a:t>
             </a:r>
             <a:endParaRPr kumimoji="1" lang="ja-JP" altLang="en-US" dirty="0"/>
           </a:p>
@@ -4291,10 +4176,10 @@
       </p:sp>
       <p:sp>
         <p:nvSpPr>
-          <p:cNvPr id="8" name="テキスト ボックス 7">
-            <a:extLst>
-              <a:ext uri="{FF2B5EF4-FFF2-40B4-BE49-F238E27FC236}">
-                <a16:creationId xmlns:a16="http://schemas.microsoft.com/office/drawing/2014/main" id="{3579BC42-1E02-4098-8716-AF2722D1E547}"/>
+          <p:cNvPr id="5" name="テキスト ボックス 4">
+            <a:extLst>
+              <a:ext uri="{FF2B5EF4-FFF2-40B4-BE49-F238E27FC236}">
+                <a16:creationId xmlns:a16="http://schemas.microsoft.com/office/drawing/2014/main" id="{383546F6-9E37-75FD-3398-5B07AB81C498}"/>
               </a:ext>
             </a:extLst>
           </p:cNvPr>
@@ -4304,42 +4189,7 @@
         <p:spPr>
           <a:xfrm>
             <a:off x="323528" y="1124744"/>
-            <a:ext cx="4896544" cy="369332"/>
-          </a:xfrm>
-          <a:prstGeom prst="rect">
-            <a:avLst/>
-          </a:prstGeom>
-          <a:noFill/>
-        </p:spPr>
-        <p:txBody>
-          <a:bodyPr wrap="square">
-            <a:spAutoFit/>
-          </a:bodyPr>
-          <a:lstStyle/>
-          <a:p>
-            <a:r>
-              <a:rPr lang="ja-JP" altLang="en-US" dirty="0"/>
-              <a:t>https://github.com/appi-github/tyrano_sample</a:t>
-            </a:r>
-          </a:p>
-        </p:txBody>
-      </p:sp>
-      <p:sp>
-        <p:nvSpPr>
-          <p:cNvPr id="9" name="テキスト ボックス 8">
-            <a:extLst>
-              <a:ext uri="{FF2B5EF4-FFF2-40B4-BE49-F238E27FC236}">
-                <a16:creationId xmlns:a16="http://schemas.microsoft.com/office/drawing/2014/main" id="{6AFF404B-26FF-4BA0-BD6B-8734C8DE17C8}"/>
-              </a:ext>
-            </a:extLst>
-          </p:cNvPr>
-          <p:cNvSpPr txBox="1"/>
-          <p:nvPr/>
-        </p:nvSpPr>
-        <p:spPr>
-          <a:xfrm>
-            <a:off x="323528" y="1556792"/>
-            <a:ext cx="1261884" cy="369332"/>
+            <a:ext cx="5674951" cy="461665"/>
           </a:xfrm>
           <a:prstGeom prst="rect">
             <a:avLst/>
@@ -4353,27 +4203,26 @@
           <a:lstStyle/>
           <a:p>
             <a:r>
-              <a:rPr lang="ja-JP" altLang="en-US"/>
-              <a:t>を</a:t>
-            </a:r>
-            <a:r>
-              <a:rPr lang="en-US" altLang="ja-JP"/>
-              <a:t>fork</a:t>
-            </a:r>
-            <a:r>
-              <a:rPr lang="ja-JP" altLang="en-US"/>
-              <a:t>する</a:t>
-            </a:r>
-            <a:endParaRPr kumimoji="1" lang="ja-JP" altLang="en-US"/>
-          </a:p>
-        </p:txBody>
-      </p:sp>
-      <p:sp>
-        <p:nvSpPr>
-          <p:cNvPr id="10" name="四角形: 角を丸くする 9">
-            <a:extLst>
-              <a:ext uri="{FF2B5EF4-FFF2-40B4-BE49-F238E27FC236}">
-                <a16:creationId xmlns:a16="http://schemas.microsoft.com/office/drawing/2014/main" id="{043EFE0D-978F-442A-9CF3-F2492F3ABD8C}"/>
+              <a:rPr kumimoji="1" lang="ja-JP" altLang="en-US" sz="2400" dirty="0"/>
+              <a:t>先ほどと同様の手順で</a:t>
+            </a:r>
+            <a:r>
+              <a:rPr kumimoji="1" lang="en-US" altLang="ja-JP" sz="2400" dirty="0"/>
+              <a:t>Pages</a:t>
+            </a:r>
+            <a:r>
+              <a:rPr kumimoji="1" lang="ja-JP" altLang="en-US" sz="2400" dirty="0"/>
+              <a:t>を公開する</a:t>
+            </a:r>
+          </a:p>
+        </p:txBody>
+      </p:sp>
+      <p:sp>
+        <p:nvSpPr>
+          <p:cNvPr id="6" name="四角形: 角を丸くする 5">
+            <a:extLst>
+              <a:ext uri="{FF2B5EF4-FFF2-40B4-BE49-F238E27FC236}">
+                <a16:creationId xmlns:a16="http://schemas.microsoft.com/office/drawing/2014/main" id="{E218F8B0-D376-43FE-1DBB-42C671F9C2FE}"/>
               </a:ext>
             </a:extLst>
           </p:cNvPr>
@@ -4382,8 +4231,8 @@
         </p:nvSpPr>
         <p:spPr>
           <a:xfrm>
-            <a:off x="5364088" y="2492896"/>
-            <a:ext cx="648072" cy="144016"/>
+            <a:off x="5436096" y="2132856"/>
+            <a:ext cx="720080" cy="288032"/>
           </a:xfrm>
           <a:prstGeom prst="roundRect">
             <a:avLst/>
@@ -4420,10 +4269,507 @@
           </a:p>
         </p:txBody>
       </p:sp>
+      <p:sp>
+        <p:nvSpPr>
+          <p:cNvPr id="7" name="楕円 6">
+            <a:extLst>
+              <a:ext uri="{FF2B5EF4-FFF2-40B4-BE49-F238E27FC236}">
+                <a16:creationId xmlns:a16="http://schemas.microsoft.com/office/drawing/2014/main" id="{4DFD7C65-C45F-11F1-3A67-2D84848AD21F}"/>
+              </a:ext>
+            </a:extLst>
+          </p:cNvPr>
+          <p:cNvSpPr/>
+          <p:nvPr/>
+        </p:nvSpPr>
+        <p:spPr>
+          <a:xfrm>
+            <a:off x="5004048" y="2060848"/>
+            <a:ext cx="360040" cy="360040"/>
+          </a:xfrm>
+          <a:prstGeom prst="ellipse">
+            <a:avLst/>
+          </a:prstGeom>
+          <a:solidFill>
+            <a:srgbClr val="FF0000"/>
+          </a:solidFill>
+          <a:ln>
+            <a:solidFill>
+              <a:schemeClr val="tx1"/>
+            </a:solidFill>
+          </a:ln>
+        </p:spPr>
+        <p:style>
+          <a:lnRef idx="2">
+            <a:schemeClr val="accent1">
+              <a:shade val="50000"/>
+            </a:schemeClr>
+          </a:lnRef>
+          <a:fillRef idx="1">
+            <a:schemeClr val="accent1"/>
+          </a:fillRef>
+          <a:effectRef idx="0">
+            <a:schemeClr val="accent1"/>
+          </a:effectRef>
+          <a:fontRef idx="minor">
+            <a:schemeClr val="lt1"/>
+          </a:fontRef>
+        </p:style>
+        <p:txBody>
+          <a:bodyPr rtlCol="0" anchor="ctr"/>
+          <a:lstStyle/>
+          <a:p>
+            <a:pPr algn="ctr"/>
+            <a:r>
+              <a:rPr kumimoji="1" lang="ja-JP" altLang="en-US" dirty="0"/>
+              <a:t>１</a:t>
+            </a:r>
+          </a:p>
+        </p:txBody>
+      </p:sp>
+      <p:sp>
+        <p:nvSpPr>
+          <p:cNvPr id="8" name="四角形: 角を丸くする 7">
+            <a:extLst>
+              <a:ext uri="{FF2B5EF4-FFF2-40B4-BE49-F238E27FC236}">
+                <a16:creationId xmlns:a16="http://schemas.microsoft.com/office/drawing/2014/main" id="{7E43048B-C9F0-E67D-3CE8-BFCBD6FE0D36}"/>
+              </a:ext>
+            </a:extLst>
+          </p:cNvPr>
+          <p:cNvSpPr/>
+          <p:nvPr/>
+        </p:nvSpPr>
+        <p:spPr>
+          <a:xfrm>
+            <a:off x="683568" y="5517232"/>
+            <a:ext cx="720080" cy="288032"/>
+          </a:xfrm>
+          <a:prstGeom prst="roundRect">
+            <a:avLst/>
+          </a:prstGeom>
+          <a:noFill/>
+          <a:ln w="38100">
+            <a:solidFill>
+              <a:srgbClr val="FF0000"/>
+            </a:solidFill>
+          </a:ln>
+        </p:spPr>
+        <p:style>
+          <a:lnRef idx="2">
+            <a:schemeClr val="accent1">
+              <a:shade val="50000"/>
+            </a:schemeClr>
+          </a:lnRef>
+          <a:fillRef idx="1">
+            <a:schemeClr val="accent1"/>
+          </a:fillRef>
+          <a:effectRef idx="0">
+            <a:schemeClr val="accent1"/>
+          </a:effectRef>
+          <a:fontRef idx="minor">
+            <a:schemeClr val="lt1"/>
+          </a:fontRef>
+        </p:style>
+        <p:txBody>
+          <a:bodyPr rtlCol="0" anchor="ctr"/>
+          <a:lstStyle/>
+          <a:p>
+            <a:pPr algn="ctr"/>
+            <a:endParaRPr kumimoji="1" lang="ja-JP" altLang="en-US"/>
+          </a:p>
+        </p:txBody>
+      </p:sp>
+      <p:sp>
+        <p:nvSpPr>
+          <p:cNvPr id="9" name="楕円 8">
+            <a:extLst>
+              <a:ext uri="{FF2B5EF4-FFF2-40B4-BE49-F238E27FC236}">
+                <a16:creationId xmlns:a16="http://schemas.microsoft.com/office/drawing/2014/main" id="{8D4D37CE-0F83-D5B5-FC95-85C247B1BC7A}"/>
+              </a:ext>
+            </a:extLst>
+          </p:cNvPr>
+          <p:cNvSpPr/>
+          <p:nvPr/>
+        </p:nvSpPr>
+        <p:spPr>
+          <a:xfrm>
+            <a:off x="179512" y="5301208"/>
+            <a:ext cx="360040" cy="360040"/>
+          </a:xfrm>
+          <a:prstGeom prst="ellipse">
+            <a:avLst/>
+          </a:prstGeom>
+          <a:solidFill>
+            <a:srgbClr val="FF0000"/>
+          </a:solidFill>
+          <a:ln>
+            <a:solidFill>
+              <a:schemeClr val="tx1"/>
+            </a:solidFill>
+          </a:ln>
+        </p:spPr>
+        <p:style>
+          <a:lnRef idx="2">
+            <a:schemeClr val="accent1">
+              <a:shade val="50000"/>
+            </a:schemeClr>
+          </a:lnRef>
+          <a:fillRef idx="1">
+            <a:schemeClr val="accent1"/>
+          </a:fillRef>
+          <a:effectRef idx="0">
+            <a:schemeClr val="accent1"/>
+          </a:effectRef>
+          <a:fontRef idx="minor">
+            <a:schemeClr val="lt1"/>
+          </a:fontRef>
+        </p:style>
+        <p:txBody>
+          <a:bodyPr rtlCol="0" anchor="ctr"/>
+          <a:lstStyle/>
+          <a:p>
+            <a:pPr algn="ctr"/>
+            <a:r>
+              <a:rPr lang="en-US" altLang="ja-JP" dirty="0"/>
+              <a:t>2</a:t>
+            </a:r>
+            <a:endParaRPr kumimoji="1" lang="ja-JP" altLang="en-US" dirty="0"/>
+          </a:p>
+        </p:txBody>
+      </p:sp>
+      <p:sp>
+        <p:nvSpPr>
+          <p:cNvPr id="11" name="四角形: 角を丸くする 10">
+            <a:extLst>
+              <a:ext uri="{FF2B5EF4-FFF2-40B4-BE49-F238E27FC236}">
+                <a16:creationId xmlns:a16="http://schemas.microsoft.com/office/drawing/2014/main" id="{CCAE42E0-4EA6-D1FC-A52A-2E30D0725FA5}"/>
+              </a:ext>
+            </a:extLst>
+          </p:cNvPr>
+          <p:cNvSpPr/>
+          <p:nvPr/>
+        </p:nvSpPr>
+        <p:spPr>
+          <a:xfrm>
+            <a:off x="2627784" y="4509120"/>
+            <a:ext cx="720080" cy="288032"/>
+          </a:xfrm>
+          <a:prstGeom prst="roundRect">
+            <a:avLst/>
+          </a:prstGeom>
+          <a:noFill/>
+          <a:ln w="38100">
+            <a:solidFill>
+              <a:srgbClr val="FF0000"/>
+            </a:solidFill>
+          </a:ln>
+        </p:spPr>
+        <p:style>
+          <a:lnRef idx="2">
+            <a:schemeClr val="accent1">
+              <a:shade val="50000"/>
+            </a:schemeClr>
+          </a:lnRef>
+          <a:fillRef idx="1">
+            <a:schemeClr val="accent1"/>
+          </a:fillRef>
+          <a:effectRef idx="0">
+            <a:schemeClr val="accent1"/>
+          </a:effectRef>
+          <a:fontRef idx="minor">
+            <a:schemeClr val="lt1"/>
+          </a:fontRef>
+        </p:style>
+        <p:txBody>
+          <a:bodyPr rtlCol="0" anchor="ctr"/>
+          <a:lstStyle/>
+          <a:p>
+            <a:pPr algn="ctr"/>
+            <a:endParaRPr kumimoji="1" lang="ja-JP" altLang="en-US"/>
+          </a:p>
+        </p:txBody>
+      </p:sp>
+      <p:sp>
+        <p:nvSpPr>
+          <p:cNvPr id="12" name="四角形: 角を丸くする 11">
+            <a:extLst>
+              <a:ext uri="{FF2B5EF4-FFF2-40B4-BE49-F238E27FC236}">
+                <a16:creationId xmlns:a16="http://schemas.microsoft.com/office/drawing/2014/main" id="{145B58E6-DAB9-CB98-E0EF-08ABF7929EE0}"/>
+              </a:ext>
+            </a:extLst>
+          </p:cNvPr>
+          <p:cNvSpPr/>
+          <p:nvPr/>
+        </p:nvSpPr>
+        <p:spPr>
+          <a:xfrm>
+            <a:off x="3419872" y="4509120"/>
+            <a:ext cx="720080" cy="288032"/>
+          </a:xfrm>
+          <a:prstGeom prst="roundRect">
+            <a:avLst/>
+          </a:prstGeom>
+          <a:noFill/>
+          <a:ln w="38100">
+            <a:solidFill>
+              <a:srgbClr val="FF0000"/>
+            </a:solidFill>
+          </a:ln>
+        </p:spPr>
+        <p:style>
+          <a:lnRef idx="2">
+            <a:schemeClr val="accent1">
+              <a:shade val="50000"/>
+            </a:schemeClr>
+          </a:lnRef>
+          <a:fillRef idx="1">
+            <a:schemeClr val="accent1"/>
+          </a:fillRef>
+          <a:effectRef idx="0">
+            <a:schemeClr val="accent1"/>
+          </a:effectRef>
+          <a:fontRef idx="minor">
+            <a:schemeClr val="lt1"/>
+          </a:fontRef>
+        </p:style>
+        <p:txBody>
+          <a:bodyPr rtlCol="0" anchor="ctr"/>
+          <a:lstStyle/>
+          <a:p>
+            <a:pPr algn="ctr"/>
+            <a:endParaRPr kumimoji="1" lang="ja-JP" altLang="en-US"/>
+          </a:p>
+        </p:txBody>
+      </p:sp>
+      <p:sp>
+        <p:nvSpPr>
+          <p:cNvPr id="13" name="四角形: 角を丸くする 12">
+            <a:extLst>
+              <a:ext uri="{FF2B5EF4-FFF2-40B4-BE49-F238E27FC236}">
+                <a16:creationId xmlns:a16="http://schemas.microsoft.com/office/drawing/2014/main" id="{C169C979-5B92-CF7B-12C9-A122D88541A1}"/>
+              </a:ext>
+            </a:extLst>
+          </p:cNvPr>
+          <p:cNvSpPr/>
+          <p:nvPr/>
+        </p:nvSpPr>
+        <p:spPr>
+          <a:xfrm>
+            <a:off x="4211960" y="4509120"/>
+            <a:ext cx="432048" cy="288032"/>
+          </a:xfrm>
+          <a:prstGeom prst="roundRect">
+            <a:avLst/>
+          </a:prstGeom>
+          <a:noFill/>
+          <a:ln w="38100">
+            <a:solidFill>
+              <a:srgbClr val="FF0000"/>
+            </a:solidFill>
+          </a:ln>
+        </p:spPr>
+        <p:style>
+          <a:lnRef idx="2">
+            <a:schemeClr val="accent1">
+              <a:shade val="50000"/>
+            </a:schemeClr>
+          </a:lnRef>
+          <a:fillRef idx="1">
+            <a:schemeClr val="accent1"/>
+          </a:fillRef>
+          <a:effectRef idx="0">
+            <a:schemeClr val="accent1"/>
+          </a:effectRef>
+          <a:fontRef idx="minor">
+            <a:schemeClr val="lt1"/>
+          </a:fontRef>
+        </p:style>
+        <p:txBody>
+          <a:bodyPr rtlCol="0" anchor="ctr"/>
+          <a:lstStyle/>
+          <a:p>
+            <a:pPr algn="ctr"/>
+            <a:endParaRPr kumimoji="1" lang="ja-JP" altLang="en-US"/>
+          </a:p>
+        </p:txBody>
+      </p:sp>
+      <p:sp>
+        <p:nvSpPr>
+          <p:cNvPr id="14" name="楕円 13">
+            <a:extLst>
+              <a:ext uri="{FF2B5EF4-FFF2-40B4-BE49-F238E27FC236}">
+                <a16:creationId xmlns:a16="http://schemas.microsoft.com/office/drawing/2014/main" id="{7225A527-2ACB-ADCA-9CC8-66FFB3521800}"/>
+              </a:ext>
+            </a:extLst>
+          </p:cNvPr>
+          <p:cNvSpPr/>
+          <p:nvPr/>
+        </p:nvSpPr>
+        <p:spPr>
+          <a:xfrm>
+            <a:off x="2843808" y="4869160"/>
+            <a:ext cx="360040" cy="360040"/>
+          </a:xfrm>
+          <a:prstGeom prst="ellipse">
+            <a:avLst/>
+          </a:prstGeom>
+          <a:solidFill>
+            <a:srgbClr val="FF0000"/>
+          </a:solidFill>
+          <a:ln>
+            <a:solidFill>
+              <a:schemeClr val="tx1"/>
+            </a:solidFill>
+          </a:ln>
+        </p:spPr>
+        <p:style>
+          <a:lnRef idx="2">
+            <a:schemeClr val="accent1">
+              <a:shade val="50000"/>
+            </a:schemeClr>
+          </a:lnRef>
+          <a:fillRef idx="1">
+            <a:schemeClr val="accent1"/>
+          </a:fillRef>
+          <a:effectRef idx="0">
+            <a:schemeClr val="accent1"/>
+          </a:effectRef>
+          <a:fontRef idx="minor">
+            <a:schemeClr val="lt1"/>
+          </a:fontRef>
+        </p:style>
+        <p:txBody>
+          <a:bodyPr rtlCol="0" anchor="ctr"/>
+          <a:lstStyle/>
+          <a:p>
+            <a:pPr algn="ctr"/>
+            <a:r>
+              <a:rPr lang="en-US" altLang="ja-JP"/>
+              <a:t>3</a:t>
+            </a:r>
+            <a:endParaRPr kumimoji="1" lang="ja-JP" altLang="en-US"/>
+          </a:p>
+        </p:txBody>
+      </p:sp>
+      <p:sp>
+        <p:nvSpPr>
+          <p:cNvPr id="15" name="楕円 14">
+            <a:extLst>
+              <a:ext uri="{FF2B5EF4-FFF2-40B4-BE49-F238E27FC236}">
+                <a16:creationId xmlns:a16="http://schemas.microsoft.com/office/drawing/2014/main" id="{10C134D9-D681-12F9-A298-FFA7FB73922A}"/>
+              </a:ext>
+            </a:extLst>
+          </p:cNvPr>
+          <p:cNvSpPr/>
+          <p:nvPr/>
+        </p:nvSpPr>
+        <p:spPr>
+          <a:xfrm>
+            <a:off x="3563888" y="4869160"/>
+            <a:ext cx="360040" cy="360040"/>
+          </a:xfrm>
+          <a:prstGeom prst="ellipse">
+            <a:avLst/>
+          </a:prstGeom>
+          <a:solidFill>
+            <a:srgbClr val="FF0000"/>
+          </a:solidFill>
+          <a:ln>
+            <a:solidFill>
+              <a:schemeClr val="tx1"/>
+            </a:solidFill>
+          </a:ln>
+        </p:spPr>
+        <p:style>
+          <a:lnRef idx="2">
+            <a:schemeClr val="accent1">
+              <a:shade val="50000"/>
+            </a:schemeClr>
+          </a:lnRef>
+          <a:fillRef idx="1">
+            <a:schemeClr val="accent1"/>
+          </a:fillRef>
+          <a:effectRef idx="0">
+            <a:schemeClr val="accent1"/>
+          </a:effectRef>
+          <a:fontRef idx="minor">
+            <a:schemeClr val="lt1"/>
+          </a:fontRef>
+        </p:style>
+        <p:txBody>
+          <a:bodyPr rtlCol="0" anchor="ctr"/>
+          <a:lstStyle/>
+          <a:p>
+            <a:pPr algn="ctr"/>
+            <a:r>
+              <a:rPr kumimoji="1" lang="en-US" altLang="ja-JP"/>
+              <a:t>4</a:t>
+            </a:r>
+            <a:endParaRPr kumimoji="1" lang="ja-JP" altLang="en-US"/>
+          </a:p>
+        </p:txBody>
+      </p:sp>
+      <p:sp>
+        <p:nvSpPr>
+          <p:cNvPr id="16" name="楕円 15">
+            <a:extLst>
+              <a:ext uri="{FF2B5EF4-FFF2-40B4-BE49-F238E27FC236}">
+                <a16:creationId xmlns:a16="http://schemas.microsoft.com/office/drawing/2014/main" id="{D7D46F37-FCB6-649D-9E5A-F937476E40C3}"/>
+              </a:ext>
+            </a:extLst>
+          </p:cNvPr>
+          <p:cNvSpPr/>
+          <p:nvPr/>
+        </p:nvSpPr>
+        <p:spPr>
+          <a:xfrm>
+            <a:off x="4211960" y="4869160"/>
+            <a:ext cx="360040" cy="360040"/>
+          </a:xfrm>
+          <a:prstGeom prst="ellipse">
+            <a:avLst/>
+          </a:prstGeom>
+          <a:solidFill>
+            <a:srgbClr val="FF0000"/>
+          </a:solidFill>
+          <a:ln>
+            <a:solidFill>
+              <a:schemeClr val="tx1"/>
+            </a:solidFill>
+          </a:ln>
+        </p:spPr>
+        <p:style>
+          <a:lnRef idx="2">
+            <a:schemeClr val="accent1">
+              <a:shade val="50000"/>
+            </a:schemeClr>
+          </a:lnRef>
+          <a:fillRef idx="1">
+            <a:schemeClr val="accent1"/>
+          </a:fillRef>
+          <a:effectRef idx="0">
+            <a:schemeClr val="accent1"/>
+          </a:effectRef>
+          <a:fontRef idx="minor">
+            <a:schemeClr val="lt1"/>
+          </a:fontRef>
+        </p:style>
+        <p:txBody>
+          <a:bodyPr rtlCol="0" anchor="ctr"/>
+          <a:lstStyle/>
+          <a:p>
+            <a:pPr algn="ctr"/>
+            <a:r>
+              <a:rPr lang="en-US" altLang="ja-JP"/>
+              <a:t>5</a:t>
+            </a:r>
+            <a:endParaRPr kumimoji="1" lang="ja-JP" altLang="en-US"/>
+          </a:p>
+        </p:txBody>
+      </p:sp>
     </p:spTree>
     <p:extLst>
       <p:ext uri="{BB962C8B-B14F-4D97-AF65-F5344CB8AC3E}">
-        <p14:creationId xmlns:p14="http://schemas.microsoft.com/office/powerpoint/2010/main" val="2255261583"/>
+        <p14:creationId xmlns:p14="http://schemas.microsoft.com/office/powerpoint/2010/main" val="1198718295"/>
       </p:ext>
     </p:extLst>
   </p:cSld>
@@ -4452,10 +4798,10 @@
       </p:grpSpPr>
       <p:pic>
         <p:nvPicPr>
-          <p:cNvPr id="10" name="図 9">
-            <a:extLst>
-              <a:ext uri="{FF2B5EF4-FFF2-40B4-BE49-F238E27FC236}">
-                <a16:creationId xmlns:a16="http://schemas.microsoft.com/office/drawing/2014/main" id="{999F7510-B6E0-F3B9-8984-7475E31465DE}"/>
+          <p:cNvPr id="9" name="図 8">
+            <a:extLst>
+              <a:ext uri="{FF2B5EF4-FFF2-40B4-BE49-F238E27FC236}">
+                <a16:creationId xmlns:a16="http://schemas.microsoft.com/office/drawing/2014/main" id="{9C91A637-76AF-AEBA-3A7F-A9141295F0AC}"/>
               </a:ext>
             </a:extLst>
           </p:cNvPr>
@@ -4472,8 +4818,8 @@
         </p:blipFill>
         <p:spPr>
           <a:xfrm>
-            <a:off x="611560" y="1772816"/>
-            <a:ext cx="6804248" cy="4394852"/>
+            <a:off x="323528" y="1556792"/>
+            <a:ext cx="7779656" cy="4302077"/>
           </a:xfrm>
           <a:prstGeom prst="rect">
             <a:avLst/>
@@ -4485,7 +4831,7 @@
           <p:cNvPr id="2" name="テキスト プレースホルダー 1">
             <a:extLst>
               <a:ext uri="{FF2B5EF4-FFF2-40B4-BE49-F238E27FC236}">
-                <a16:creationId xmlns:a16="http://schemas.microsoft.com/office/drawing/2014/main" id="{0186960E-25EF-3397-B016-9E71BBF77056}"/>
+                <a16:creationId xmlns:a16="http://schemas.microsoft.com/office/drawing/2014/main" id="{B35E5322-0F05-CEC8-95E6-F665D156146A}"/>
               </a:ext>
             </a:extLst>
           </p:cNvPr>
@@ -4518,7 +4864,7 @@
           <p:cNvPr id="5" name="テキスト ボックス 4">
             <a:extLst>
               <a:ext uri="{FF2B5EF4-FFF2-40B4-BE49-F238E27FC236}">
-                <a16:creationId xmlns:a16="http://schemas.microsoft.com/office/drawing/2014/main" id="{383546F6-9E37-75FD-3398-5B07AB81C498}"/>
+                <a16:creationId xmlns:a16="http://schemas.microsoft.com/office/drawing/2014/main" id="{FE9B12E9-2B90-F993-15B8-2263C015919E}"/>
               </a:ext>
             </a:extLst>
           </p:cNvPr>
@@ -4527,8 +4873,8 @@
         </p:nvSpPr>
         <p:spPr>
           <a:xfrm>
-            <a:off x="323528" y="1124744"/>
-            <a:ext cx="5674951" cy="461665"/>
+            <a:off x="539552" y="908720"/>
+            <a:ext cx="6426759" cy="461665"/>
           </a:xfrm>
           <a:prstGeom prst="rect">
             <a:avLst/>
@@ -4542,16 +4888,24 @@
           <a:lstStyle/>
           <a:p>
             <a:r>
+              <a:rPr lang="en-US" altLang="ja-JP" sz="2400" dirty="0"/>
+              <a:t>Save</a:t>
+            </a:r>
+            <a:r>
+              <a:rPr lang="ja-JP" altLang="en-US" sz="2400" dirty="0"/>
+              <a:t>ボタンを押して</a:t>
+            </a:r>
+            <a:r>
+              <a:rPr kumimoji="1" lang="ja-JP" altLang="en-US" sz="2400" dirty="0">
+                <a:solidFill>
+                  <a:srgbClr val="FF0000"/>
+                </a:solidFill>
+              </a:rPr>
+              <a:t>数分待ってから</a:t>
+            </a:r>
+            <a:r>
               <a:rPr kumimoji="1" lang="ja-JP" altLang="en-US" sz="2400" dirty="0"/>
-              <a:t>先ほどと同様の手順で</a:t>
-            </a:r>
-            <a:r>
-              <a:rPr kumimoji="1" lang="en-US" altLang="ja-JP" sz="2400" dirty="0"/>
-              <a:t>Pages</a:t>
-            </a:r>
-            <a:r>
-              <a:rPr kumimoji="1" lang="ja-JP" altLang="en-US" sz="2400" dirty="0"/>
-              <a:t>を公開する</a:t>
+              <a:t>リロード</a:t>
             </a:r>
           </a:p>
         </p:txBody>
@@ -4561,7 +4915,7 @@
           <p:cNvPr id="6" name="四角形: 角を丸くする 5">
             <a:extLst>
               <a:ext uri="{FF2B5EF4-FFF2-40B4-BE49-F238E27FC236}">
-                <a16:creationId xmlns:a16="http://schemas.microsoft.com/office/drawing/2014/main" id="{E218F8B0-D376-43FE-1DBB-42C671F9C2FE}"/>
+                <a16:creationId xmlns:a16="http://schemas.microsoft.com/office/drawing/2014/main" id="{62B490BC-44B7-C386-DAD8-484DF89850AB}"/>
               </a:ext>
             </a:extLst>
           </p:cNvPr>
@@ -4570,11 +4924,13 @@
         </p:nvSpPr>
         <p:spPr>
           <a:xfrm>
-            <a:off x="5436096" y="2132856"/>
+            <a:off x="6804248" y="3429000"/>
             <a:ext cx="720080" cy="288032"/>
           </a:xfrm>
           <a:prstGeom prst="roundRect">
-            <a:avLst/>
+            <a:avLst>
+              <a:gd name="adj" fmla="val 27521"/>
+            </a:avLst>
           </a:prstGeom>
           <a:noFill/>
           <a:ln w="38100">
@@ -4610,505 +4966,112 @@
       </p:sp>
       <p:sp>
         <p:nvSpPr>
-          <p:cNvPr id="7" name="楕円 6">
-            <a:extLst>
-              <a:ext uri="{FF2B5EF4-FFF2-40B4-BE49-F238E27FC236}">
-                <a16:creationId xmlns:a16="http://schemas.microsoft.com/office/drawing/2014/main" id="{4DFD7C65-C45F-11F1-3A67-2D84848AD21F}"/>
-              </a:ext>
-            </a:extLst>
-          </p:cNvPr>
-          <p:cNvSpPr/>
-          <p:nvPr/>
-        </p:nvSpPr>
-        <p:spPr>
-          <a:xfrm>
-            <a:off x="5004048" y="2060848"/>
-            <a:ext cx="360040" cy="360040"/>
-          </a:xfrm>
-          <a:prstGeom prst="ellipse">
-            <a:avLst/>
-          </a:prstGeom>
-          <a:solidFill>
-            <a:srgbClr val="FF0000"/>
-          </a:solidFill>
+          <p:cNvPr id="7" name="テキスト ボックス 6">
+            <a:extLst>
+              <a:ext uri="{FF2B5EF4-FFF2-40B4-BE49-F238E27FC236}">
+                <a16:creationId xmlns:a16="http://schemas.microsoft.com/office/drawing/2014/main" id="{19C6BD22-6D0F-D802-06BD-8FAA9E9C8CD8}"/>
+              </a:ext>
+            </a:extLst>
+          </p:cNvPr>
+          <p:cNvSpPr txBox="1"/>
+          <p:nvPr/>
+        </p:nvSpPr>
+        <p:spPr>
+          <a:xfrm>
+            <a:off x="467544" y="6237312"/>
+            <a:ext cx="7533152" cy="369332"/>
+          </a:xfrm>
+          <a:prstGeom prst="rect">
+            <a:avLst/>
+          </a:prstGeom>
+          <a:noFill/>
+        </p:spPr>
+        <p:txBody>
+          <a:bodyPr wrap="none" rtlCol="0">
+            <a:spAutoFit/>
+          </a:bodyPr>
+          <a:lstStyle/>
+          <a:p>
+            <a:r>
+              <a:rPr kumimoji="1" lang="ja-JP" altLang="en-US" dirty="0"/>
+              <a:t>「</a:t>
+            </a:r>
+            <a:r>
+              <a:rPr kumimoji="1" lang="en-US" altLang="ja-JP" dirty="0"/>
+              <a:t>Your site is live at ....</a:t>
+            </a:r>
+            <a:r>
+              <a:rPr kumimoji="1" lang="ja-JP" altLang="en-US" dirty="0"/>
+              <a:t>」という表示が現れた</a:t>
+            </a:r>
+            <a:r>
+              <a:rPr lang="ja-JP" altLang="en-US" dirty="0"/>
+              <a:t>ら「</a:t>
+            </a:r>
+            <a:r>
+              <a:rPr lang="en-US" altLang="ja-JP" dirty="0"/>
+              <a:t>Visit site</a:t>
+            </a:r>
+            <a:r>
+              <a:rPr lang="ja-JP" altLang="en-US" dirty="0"/>
+              <a:t>」をクリック</a:t>
+            </a:r>
+            <a:endParaRPr kumimoji="1" lang="ja-JP" altLang="en-US" dirty="0"/>
+          </a:p>
+        </p:txBody>
+      </p:sp>
+      <p:cxnSp>
+        <p:nvCxnSpPr>
+          <p:cNvPr id="8" name="コネクタ: カギ線 7">
+            <a:extLst>
+              <a:ext uri="{FF2B5EF4-FFF2-40B4-BE49-F238E27FC236}">
+                <a16:creationId xmlns:a16="http://schemas.microsoft.com/office/drawing/2014/main" id="{7BDCA510-86ED-61CE-84CF-65DD4A8985B7}"/>
+              </a:ext>
+            </a:extLst>
+          </p:cNvPr>
+          <p:cNvCxnSpPr>
+            <a:stCxn id="7" idx="3"/>
+            <a:endCxn id="6" idx="3"/>
+          </p:cNvCxnSpPr>
+          <p:nvPr/>
+        </p:nvCxnSpPr>
+        <p:spPr>
+          <a:xfrm flipH="1" flipV="1">
+            <a:off x="7524328" y="3573016"/>
+            <a:ext cx="476368" cy="2848962"/>
+          </a:xfrm>
+          <a:prstGeom prst="bentConnector3">
+            <a:avLst>
+              <a:gd name="adj1" fmla="val -47988"/>
+            </a:avLst>
+          </a:prstGeom>
           <a:ln>
             <a:solidFill>
               <a:schemeClr val="tx1"/>
             </a:solidFill>
+            <a:headEnd type="none" w="med" len="med"/>
+            <a:tailEnd type="triangle"/>
           </a:ln>
         </p:spPr>
         <p:style>
-          <a:lnRef idx="2">
-            <a:schemeClr val="accent1">
-              <a:shade val="50000"/>
-            </a:schemeClr>
+          <a:lnRef idx="1">
+            <a:schemeClr val="accent1"/>
           </a:lnRef>
-          <a:fillRef idx="1">
+          <a:fillRef idx="0">
             <a:schemeClr val="accent1"/>
           </a:fillRef>
           <a:effectRef idx="0">
             <a:schemeClr val="accent1"/>
           </a:effectRef>
           <a:fontRef idx="minor">
-            <a:schemeClr val="lt1"/>
+            <a:schemeClr val="tx1"/>
           </a:fontRef>
         </p:style>
-        <p:txBody>
-          <a:bodyPr rtlCol="0" anchor="ctr"/>
-          <a:lstStyle/>
-          <a:p>
-            <a:pPr algn="ctr"/>
-            <a:r>
-              <a:rPr kumimoji="1" lang="ja-JP" altLang="en-US" dirty="0"/>
-              <a:t>１</a:t>
-            </a:r>
-          </a:p>
-        </p:txBody>
-      </p:sp>
-      <p:sp>
-        <p:nvSpPr>
-          <p:cNvPr id="8" name="四角形: 角を丸くする 7">
-            <a:extLst>
-              <a:ext uri="{FF2B5EF4-FFF2-40B4-BE49-F238E27FC236}">
-                <a16:creationId xmlns:a16="http://schemas.microsoft.com/office/drawing/2014/main" id="{7E43048B-C9F0-E67D-3CE8-BFCBD6FE0D36}"/>
-              </a:ext>
-            </a:extLst>
-          </p:cNvPr>
-          <p:cNvSpPr/>
-          <p:nvPr/>
-        </p:nvSpPr>
-        <p:spPr>
-          <a:xfrm>
-            <a:off x="683568" y="5517232"/>
-            <a:ext cx="720080" cy="288032"/>
-          </a:xfrm>
-          <a:prstGeom prst="roundRect">
-            <a:avLst/>
-          </a:prstGeom>
-          <a:noFill/>
-          <a:ln w="38100">
-            <a:solidFill>
-              <a:srgbClr val="FF0000"/>
-            </a:solidFill>
-          </a:ln>
-        </p:spPr>
-        <p:style>
-          <a:lnRef idx="2">
-            <a:schemeClr val="accent1">
-              <a:shade val="50000"/>
-            </a:schemeClr>
-          </a:lnRef>
-          <a:fillRef idx="1">
-            <a:schemeClr val="accent1"/>
-          </a:fillRef>
-          <a:effectRef idx="0">
-            <a:schemeClr val="accent1"/>
-          </a:effectRef>
-          <a:fontRef idx="minor">
-            <a:schemeClr val="lt1"/>
-          </a:fontRef>
-        </p:style>
-        <p:txBody>
-          <a:bodyPr rtlCol="0" anchor="ctr"/>
-          <a:lstStyle/>
-          <a:p>
-            <a:pPr algn="ctr"/>
-            <a:endParaRPr kumimoji="1" lang="ja-JP" altLang="en-US"/>
-          </a:p>
-        </p:txBody>
-      </p:sp>
-      <p:sp>
-        <p:nvSpPr>
-          <p:cNvPr id="9" name="楕円 8">
-            <a:extLst>
-              <a:ext uri="{FF2B5EF4-FFF2-40B4-BE49-F238E27FC236}">
-                <a16:creationId xmlns:a16="http://schemas.microsoft.com/office/drawing/2014/main" id="{8D4D37CE-0F83-D5B5-FC95-85C247B1BC7A}"/>
-              </a:ext>
-            </a:extLst>
-          </p:cNvPr>
-          <p:cNvSpPr/>
-          <p:nvPr/>
-        </p:nvSpPr>
-        <p:spPr>
-          <a:xfrm>
-            <a:off x="179512" y="5301208"/>
-            <a:ext cx="360040" cy="360040"/>
-          </a:xfrm>
-          <a:prstGeom prst="ellipse">
-            <a:avLst/>
-          </a:prstGeom>
-          <a:solidFill>
-            <a:srgbClr val="FF0000"/>
-          </a:solidFill>
-          <a:ln>
-            <a:solidFill>
-              <a:schemeClr val="tx1"/>
-            </a:solidFill>
-          </a:ln>
-        </p:spPr>
-        <p:style>
-          <a:lnRef idx="2">
-            <a:schemeClr val="accent1">
-              <a:shade val="50000"/>
-            </a:schemeClr>
-          </a:lnRef>
-          <a:fillRef idx="1">
-            <a:schemeClr val="accent1"/>
-          </a:fillRef>
-          <a:effectRef idx="0">
-            <a:schemeClr val="accent1"/>
-          </a:effectRef>
-          <a:fontRef idx="minor">
-            <a:schemeClr val="lt1"/>
-          </a:fontRef>
-        </p:style>
-        <p:txBody>
-          <a:bodyPr rtlCol="0" anchor="ctr"/>
-          <a:lstStyle/>
-          <a:p>
-            <a:pPr algn="ctr"/>
-            <a:r>
-              <a:rPr lang="en-US" altLang="ja-JP" dirty="0"/>
-              <a:t>2</a:t>
-            </a:r>
-            <a:endParaRPr kumimoji="1" lang="ja-JP" altLang="en-US" dirty="0"/>
-          </a:p>
-        </p:txBody>
-      </p:sp>
-      <p:sp>
-        <p:nvSpPr>
-          <p:cNvPr id="11" name="四角形: 角を丸くする 10">
-            <a:extLst>
-              <a:ext uri="{FF2B5EF4-FFF2-40B4-BE49-F238E27FC236}">
-                <a16:creationId xmlns:a16="http://schemas.microsoft.com/office/drawing/2014/main" id="{CCAE42E0-4EA6-D1FC-A52A-2E30D0725FA5}"/>
-              </a:ext>
-            </a:extLst>
-          </p:cNvPr>
-          <p:cNvSpPr/>
-          <p:nvPr/>
-        </p:nvSpPr>
-        <p:spPr>
-          <a:xfrm>
-            <a:off x="2627784" y="4509120"/>
-            <a:ext cx="720080" cy="288032"/>
-          </a:xfrm>
-          <a:prstGeom prst="roundRect">
-            <a:avLst/>
-          </a:prstGeom>
-          <a:noFill/>
-          <a:ln w="38100">
-            <a:solidFill>
-              <a:srgbClr val="FF0000"/>
-            </a:solidFill>
-          </a:ln>
-        </p:spPr>
-        <p:style>
-          <a:lnRef idx="2">
-            <a:schemeClr val="accent1">
-              <a:shade val="50000"/>
-            </a:schemeClr>
-          </a:lnRef>
-          <a:fillRef idx="1">
-            <a:schemeClr val="accent1"/>
-          </a:fillRef>
-          <a:effectRef idx="0">
-            <a:schemeClr val="accent1"/>
-          </a:effectRef>
-          <a:fontRef idx="minor">
-            <a:schemeClr val="lt1"/>
-          </a:fontRef>
-        </p:style>
-        <p:txBody>
-          <a:bodyPr rtlCol="0" anchor="ctr"/>
-          <a:lstStyle/>
-          <a:p>
-            <a:pPr algn="ctr"/>
-            <a:endParaRPr kumimoji="1" lang="ja-JP" altLang="en-US"/>
-          </a:p>
-        </p:txBody>
-      </p:sp>
-      <p:sp>
-        <p:nvSpPr>
-          <p:cNvPr id="12" name="四角形: 角を丸くする 11">
-            <a:extLst>
-              <a:ext uri="{FF2B5EF4-FFF2-40B4-BE49-F238E27FC236}">
-                <a16:creationId xmlns:a16="http://schemas.microsoft.com/office/drawing/2014/main" id="{145B58E6-DAB9-CB98-E0EF-08ABF7929EE0}"/>
-              </a:ext>
-            </a:extLst>
-          </p:cNvPr>
-          <p:cNvSpPr/>
-          <p:nvPr/>
-        </p:nvSpPr>
-        <p:spPr>
-          <a:xfrm>
-            <a:off x="3419872" y="4509120"/>
-            <a:ext cx="720080" cy="288032"/>
-          </a:xfrm>
-          <a:prstGeom prst="roundRect">
-            <a:avLst/>
-          </a:prstGeom>
-          <a:noFill/>
-          <a:ln w="38100">
-            <a:solidFill>
-              <a:srgbClr val="FF0000"/>
-            </a:solidFill>
-          </a:ln>
-        </p:spPr>
-        <p:style>
-          <a:lnRef idx="2">
-            <a:schemeClr val="accent1">
-              <a:shade val="50000"/>
-            </a:schemeClr>
-          </a:lnRef>
-          <a:fillRef idx="1">
-            <a:schemeClr val="accent1"/>
-          </a:fillRef>
-          <a:effectRef idx="0">
-            <a:schemeClr val="accent1"/>
-          </a:effectRef>
-          <a:fontRef idx="minor">
-            <a:schemeClr val="lt1"/>
-          </a:fontRef>
-        </p:style>
-        <p:txBody>
-          <a:bodyPr rtlCol="0" anchor="ctr"/>
-          <a:lstStyle/>
-          <a:p>
-            <a:pPr algn="ctr"/>
-            <a:endParaRPr kumimoji="1" lang="ja-JP" altLang="en-US"/>
-          </a:p>
-        </p:txBody>
-      </p:sp>
-      <p:sp>
-        <p:nvSpPr>
-          <p:cNvPr id="13" name="四角形: 角を丸くする 12">
-            <a:extLst>
-              <a:ext uri="{FF2B5EF4-FFF2-40B4-BE49-F238E27FC236}">
-                <a16:creationId xmlns:a16="http://schemas.microsoft.com/office/drawing/2014/main" id="{C169C979-5B92-CF7B-12C9-A122D88541A1}"/>
-              </a:ext>
-            </a:extLst>
-          </p:cNvPr>
-          <p:cNvSpPr/>
-          <p:nvPr/>
-        </p:nvSpPr>
-        <p:spPr>
-          <a:xfrm>
-            <a:off x="4211960" y="4509120"/>
-            <a:ext cx="432048" cy="288032"/>
-          </a:xfrm>
-          <a:prstGeom prst="roundRect">
-            <a:avLst/>
-          </a:prstGeom>
-          <a:noFill/>
-          <a:ln w="38100">
-            <a:solidFill>
-              <a:srgbClr val="FF0000"/>
-            </a:solidFill>
-          </a:ln>
-        </p:spPr>
-        <p:style>
-          <a:lnRef idx="2">
-            <a:schemeClr val="accent1">
-              <a:shade val="50000"/>
-            </a:schemeClr>
-          </a:lnRef>
-          <a:fillRef idx="1">
-            <a:schemeClr val="accent1"/>
-          </a:fillRef>
-          <a:effectRef idx="0">
-            <a:schemeClr val="accent1"/>
-          </a:effectRef>
-          <a:fontRef idx="minor">
-            <a:schemeClr val="lt1"/>
-          </a:fontRef>
-        </p:style>
-        <p:txBody>
-          <a:bodyPr rtlCol="0" anchor="ctr"/>
-          <a:lstStyle/>
-          <a:p>
-            <a:pPr algn="ctr"/>
-            <a:endParaRPr kumimoji="1" lang="ja-JP" altLang="en-US"/>
-          </a:p>
-        </p:txBody>
-      </p:sp>
-      <p:sp>
-        <p:nvSpPr>
-          <p:cNvPr id="14" name="楕円 13">
-            <a:extLst>
-              <a:ext uri="{FF2B5EF4-FFF2-40B4-BE49-F238E27FC236}">
-                <a16:creationId xmlns:a16="http://schemas.microsoft.com/office/drawing/2014/main" id="{7225A527-2ACB-ADCA-9CC8-66FFB3521800}"/>
-              </a:ext>
-            </a:extLst>
-          </p:cNvPr>
-          <p:cNvSpPr/>
-          <p:nvPr/>
-        </p:nvSpPr>
-        <p:spPr>
-          <a:xfrm>
-            <a:off x="2843808" y="4869160"/>
-            <a:ext cx="360040" cy="360040"/>
-          </a:xfrm>
-          <a:prstGeom prst="ellipse">
-            <a:avLst/>
-          </a:prstGeom>
-          <a:solidFill>
-            <a:srgbClr val="FF0000"/>
-          </a:solidFill>
-          <a:ln>
-            <a:solidFill>
-              <a:schemeClr val="tx1"/>
-            </a:solidFill>
-          </a:ln>
-        </p:spPr>
-        <p:style>
-          <a:lnRef idx="2">
-            <a:schemeClr val="accent1">
-              <a:shade val="50000"/>
-            </a:schemeClr>
-          </a:lnRef>
-          <a:fillRef idx="1">
-            <a:schemeClr val="accent1"/>
-          </a:fillRef>
-          <a:effectRef idx="0">
-            <a:schemeClr val="accent1"/>
-          </a:effectRef>
-          <a:fontRef idx="minor">
-            <a:schemeClr val="lt1"/>
-          </a:fontRef>
-        </p:style>
-        <p:txBody>
-          <a:bodyPr rtlCol="0" anchor="ctr"/>
-          <a:lstStyle/>
-          <a:p>
-            <a:pPr algn="ctr"/>
-            <a:r>
-              <a:rPr lang="en-US" altLang="ja-JP"/>
-              <a:t>3</a:t>
-            </a:r>
-            <a:endParaRPr kumimoji="1" lang="ja-JP" altLang="en-US"/>
-          </a:p>
-        </p:txBody>
-      </p:sp>
-      <p:sp>
-        <p:nvSpPr>
-          <p:cNvPr id="15" name="楕円 14">
-            <a:extLst>
-              <a:ext uri="{FF2B5EF4-FFF2-40B4-BE49-F238E27FC236}">
-                <a16:creationId xmlns:a16="http://schemas.microsoft.com/office/drawing/2014/main" id="{10C134D9-D681-12F9-A298-FFA7FB73922A}"/>
-              </a:ext>
-            </a:extLst>
-          </p:cNvPr>
-          <p:cNvSpPr/>
-          <p:nvPr/>
-        </p:nvSpPr>
-        <p:spPr>
-          <a:xfrm>
-            <a:off x="3563888" y="4869160"/>
-            <a:ext cx="360040" cy="360040"/>
-          </a:xfrm>
-          <a:prstGeom prst="ellipse">
-            <a:avLst/>
-          </a:prstGeom>
-          <a:solidFill>
-            <a:srgbClr val="FF0000"/>
-          </a:solidFill>
-          <a:ln>
-            <a:solidFill>
-              <a:schemeClr val="tx1"/>
-            </a:solidFill>
-          </a:ln>
-        </p:spPr>
-        <p:style>
-          <a:lnRef idx="2">
-            <a:schemeClr val="accent1">
-              <a:shade val="50000"/>
-            </a:schemeClr>
-          </a:lnRef>
-          <a:fillRef idx="1">
-            <a:schemeClr val="accent1"/>
-          </a:fillRef>
-          <a:effectRef idx="0">
-            <a:schemeClr val="accent1"/>
-          </a:effectRef>
-          <a:fontRef idx="minor">
-            <a:schemeClr val="lt1"/>
-          </a:fontRef>
-        </p:style>
-        <p:txBody>
-          <a:bodyPr rtlCol="0" anchor="ctr"/>
-          <a:lstStyle/>
-          <a:p>
-            <a:pPr algn="ctr"/>
-            <a:r>
-              <a:rPr kumimoji="1" lang="en-US" altLang="ja-JP"/>
-              <a:t>4</a:t>
-            </a:r>
-            <a:endParaRPr kumimoji="1" lang="ja-JP" altLang="en-US"/>
-          </a:p>
-        </p:txBody>
-      </p:sp>
-      <p:sp>
-        <p:nvSpPr>
-          <p:cNvPr id="16" name="楕円 15">
-            <a:extLst>
-              <a:ext uri="{FF2B5EF4-FFF2-40B4-BE49-F238E27FC236}">
-                <a16:creationId xmlns:a16="http://schemas.microsoft.com/office/drawing/2014/main" id="{D7D46F37-FCB6-649D-9E5A-F937476E40C3}"/>
-              </a:ext>
-            </a:extLst>
-          </p:cNvPr>
-          <p:cNvSpPr/>
-          <p:nvPr/>
-        </p:nvSpPr>
-        <p:spPr>
-          <a:xfrm>
-            <a:off x="4211960" y="4869160"/>
-            <a:ext cx="360040" cy="360040"/>
-          </a:xfrm>
-          <a:prstGeom prst="ellipse">
-            <a:avLst/>
-          </a:prstGeom>
-          <a:solidFill>
-            <a:srgbClr val="FF0000"/>
-          </a:solidFill>
-          <a:ln>
-            <a:solidFill>
-              <a:schemeClr val="tx1"/>
-            </a:solidFill>
-          </a:ln>
-        </p:spPr>
-        <p:style>
-          <a:lnRef idx="2">
-            <a:schemeClr val="accent1">
-              <a:shade val="50000"/>
-            </a:schemeClr>
-          </a:lnRef>
-          <a:fillRef idx="1">
-            <a:schemeClr val="accent1"/>
-          </a:fillRef>
-          <a:effectRef idx="0">
-            <a:schemeClr val="accent1"/>
-          </a:effectRef>
-          <a:fontRef idx="minor">
-            <a:schemeClr val="lt1"/>
-          </a:fontRef>
-        </p:style>
-        <p:txBody>
-          <a:bodyPr rtlCol="0" anchor="ctr"/>
-          <a:lstStyle/>
-          <a:p>
-            <a:pPr algn="ctr"/>
-            <a:r>
-              <a:rPr lang="en-US" altLang="ja-JP"/>
-              <a:t>5</a:t>
-            </a:r>
-            <a:endParaRPr kumimoji="1" lang="ja-JP" altLang="en-US"/>
-          </a:p>
-        </p:txBody>
-      </p:sp>
+      </p:cxnSp>
     </p:spTree>
     <p:extLst>
       <p:ext uri="{BB962C8B-B14F-4D97-AF65-F5344CB8AC3E}">
-        <p14:creationId xmlns:p14="http://schemas.microsoft.com/office/powerpoint/2010/main" val="1198718295"/>
+        <p14:creationId xmlns:p14="http://schemas.microsoft.com/office/powerpoint/2010/main" val="322500871"/>
       </p:ext>
     </p:extLst>
   </p:cSld>
@@ -5135,12 +5098,45 @@
           <a:chExt cx="0" cy="0"/>
         </a:xfrm>
       </p:grpSpPr>
+      <p:sp>
+        <p:nvSpPr>
+          <p:cNvPr id="2" name="テキスト プレースホルダー 1">
+            <a:extLst>
+              <a:ext uri="{FF2B5EF4-FFF2-40B4-BE49-F238E27FC236}">
+                <a16:creationId xmlns:a16="http://schemas.microsoft.com/office/drawing/2014/main" id="{4400C90D-A223-47C6-AA95-3812923A72C6}"/>
+              </a:ext>
+            </a:extLst>
+          </p:cNvPr>
+          <p:cNvSpPr>
+            <a:spLocks noGrp="1"/>
+          </p:cNvSpPr>
+          <p:nvPr>
+            <p:ph type="body" sz="quarter" idx="10"/>
+          </p:nvPr>
+        </p:nvSpPr>
+        <p:spPr/>
+        <p:txBody>
+          <a:bodyPr/>
+          <a:lstStyle/>
+          <a:p>
+            <a:r>
+              <a:rPr lang="ja-JP" altLang="en-US"/>
+              <a:t>課題</a:t>
+            </a:r>
+            <a:r>
+              <a:rPr lang="en-US" altLang="ja-JP"/>
+              <a:t>2 - Step 2</a:t>
+            </a:r>
+            <a:endParaRPr kumimoji="1" lang="ja-JP" altLang="en-US"/>
+          </a:p>
+        </p:txBody>
+      </p:sp>
       <p:pic>
         <p:nvPicPr>
-          <p:cNvPr id="9" name="図 8">
-            <a:extLst>
-              <a:ext uri="{FF2B5EF4-FFF2-40B4-BE49-F238E27FC236}">
-                <a16:creationId xmlns:a16="http://schemas.microsoft.com/office/drawing/2014/main" id="{9C91A637-76AF-AEBA-3A7F-A9141295F0AC}"/>
+          <p:cNvPr id="4" name="図 3">
+            <a:extLst>
+              <a:ext uri="{FF2B5EF4-FFF2-40B4-BE49-F238E27FC236}">
+                <a16:creationId xmlns:a16="http://schemas.microsoft.com/office/drawing/2014/main" id="{971DCBC3-E82B-4BA8-992E-EAF24076ABD1}"/>
               </a:ext>
             </a:extLst>
           </p:cNvPr>
@@ -5157,8 +5153,8 @@
         </p:blipFill>
         <p:spPr>
           <a:xfrm>
-            <a:off x="323528" y="1556792"/>
-            <a:ext cx="7779656" cy="4302077"/>
+            <a:off x="251520" y="2276872"/>
+            <a:ext cx="8662039" cy="3384376"/>
           </a:xfrm>
           <a:prstGeom prst="rect">
             <a:avLst/>
@@ -5167,43 +5163,10 @@
       </p:pic>
       <p:sp>
         <p:nvSpPr>
-          <p:cNvPr id="2" name="テキスト プレースホルダー 1">
-            <a:extLst>
-              <a:ext uri="{FF2B5EF4-FFF2-40B4-BE49-F238E27FC236}">
-                <a16:creationId xmlns:a16="http://schemas.microsoft.com/office/drawing/2014/main" id="{B35E5322-0F05-CEC8-95E6-F665D156146A}"/>
-              </a:ext>
-            </a:extLst>
-          </p:cNvPr>
-          <p:cNvSpPr>
-            <a:spLocks noGrp="1"/>
-          </p:cNvSpPr>
-          <p:nvPr>
-            <p:ph type="body" sz="quarter" idx="10"/>
-          </p:nvPr>
-        </p:nvSpPr>
-        <p:spPr/>
-        <p:txBody>
-          <a:bodyPr/>
-          <a:lstStyle/>
-          <a:p>
-            <a:r>
-              <a:rPr lang="ja-JP" altLang="en-US" dirty="0"/>
-              <a:t>課題</a:t>
-            </a:r>
-            <a:r>
-              <a:rPr lang="en-US" altLang="ja-JP" dirty="0"/>
-              <a:t>2 - Step 2</a:t>
-            </a:r>
-            <a:endParaRPr kumimoji="1" lang="ja-JP" altLang="en-US" dirty="0"/>
-          </a:p>
-        </p:txBody>
-      </p:sp>
-      <p:sp>
-        <p:nvSpPr>
           <p:cNvPr id="5" name="テキスト ボックス 4">
             <a:extLst>
               <a:ext uri="{FF2B5EF4-FFF2-40B4-BE49-F238E27FC236}">
-                <a16:creationId xmlns:a16="http://schemas.microsoft.com/office/drawing/2014/main" id="{FE9B12E9-2B90-F993-15B8-2263C015919E}"/>
+                <a16:creationId xmlns:a16="http://schemas.microsoft.com/office/drawing/2014/main" id="{165B1961-526D-4A22-B4EB-EFD8954685B8}"/>
               </a:ext>
             </a:extLst>
           </p:cNvPr>
@@ -5212,8 +5175,8 @@
         </p:nvSpPr>
         <p:spPr>
           <a:xfrm>
-            <a:off x="539552" y="908720"/>
-            <a:ext cx="6426759" cy="461665"/>
+            <a:off x="323528" y="1268760"/>
+            <a:ext cx="4493538" cy="954107"/>
           </a:xfrm>
           <a:prstGeom prst="rect">
             <a:avLst/>
@@ -5227,88 +5190,26 @@
           <a:lstStyle/>
           <a:p>
             <a:r>
-              <a:rPr lang="en-US" altLang="ja-JP" sz="2400" dirty="0"/>
-              <a:t>Save</a:t>
-            </a:r>
-            <a:r>
-              <a:rPr lang="ja-JP" altLang="en-US" sz="2400" dirty="0"/>
-              <a:t>ボタンを押して</a:t>
-            </a:r>
-            <a:r>
-              <a:rPr kumimoji="1" lang="ja-JP" altLang="en-US" sz="2400" dirty="0">
-                <a:solidFill>
-                  <a:srgbClr val="FF0000"/>
-                </a:solidFill>
-              </a:rPr>
-              <a:t>数分待ってから</a:t>
-            </a:r>
-            <a:r>
-              <a:rPr kumimoji="1" lang="ja-JP" altLang="en-US" sz="2400" dirty="0"/>
-              <a:t>リロード</a:t>
-            </a:r>
-          </a:p>
-        </p:txBody>
-      </p:sp>
-      <p:sp>
-        <p:nvSpPr>
-          <p:cNvPr id="6" name="四角形: 角を丸くする 5">
-            <a:extLst>
-              <a:ext uri="{FF2B5EF4-FFF2-40B4-BE49-F238E27FC236}">
-                <a16:creationId xmlns:a16="http://schemas.microsoft.com/office/drawing/2014/main" id="{62B490BC-44B7-C386-DAD8-484DF89850AB}"/>
-              </a:ext>
-            </a:extLst>
-          </p:cNvPr>
-          <p:cNvSpPr/>
-          <p:nvPr/>
-        </p:nvSpPr>
-        <p:spPr>
-          <a:xfrm>
-            <a:off x="6804248" y="3429000"/>
-            <a:ext cx="720080" cy="288032"/>
-          </a:xfrm>
-          <a:prstGeom prst="roundRect">
-            <a:avLst>
-              <a:gd name="adj" fmla="val 27521"/>
-            </a:avLst>
-          </a:prstGeom>
-          <a:noFill/>
-          <a:ln w="38100">
-            <a:solidFill>
-              <a:srgbClr val="FF0000"/>
-            </a:solidFill>
-          </a:ln>
-        </p:spPr>
-        <p:style>
-          <a:lnRef idx="2">
-            <a:schemeClr val="accent1">
-              <a:shade val="50000"/>
-            </a:schemeClr>
-          </a:lnRef>
-          <a:fillRef idx="1">
-            <a:schemeClr val="accent1"/>
-          </a:fillRef>
-          <a:effectRef idx="0">
-            <a:schemeClr val="accent1"/>
-          </a:effectRef>
-          <a:fontRef idx="minor">
-            <a:schemeClr val="lt1"/>
-          </a:fontRef>
-        </p:style>
-        <p:txBody>
-          <a:bodyPr rtlCol="0" anchor="ctr"/>
-          <a:lstStyle/>
-          <a:p>
-            <a:pPr algn="ctr"/>
-            <a:endParaRPr kumimoji="1" lang="ja-JP" altLang="en-US"/>
-          </a:p>
-        </p:txBody>
-      </p:sp>
-      <p:sp>
-        <p:nvSpPr>
-          <p:cNvPr id="7" name="テキスト ボックス 6">
-            <a:extLst>
-              <a:ext uri="{FF2B5EF4-FFF2-40B4-BE49-F238E27FC236}">
-                <a16:creationId xmlns:a16="http://schemas.microsoft.com/office/drawing/2014/main" id="{19C6BD22-6D0F-D802-06BD-8FAA9E9C8CD8}"/>
+              <a:rPr kumimoji="1" lang="ja-JP" altLang="en-US" sz="2800"/>
+              <a:t>こんな画面が出たら成功</a:t>
+            </a:r>
+            <a:endParaRPr kumimoji="1" lang="en-US" altLang="ja-JP" sz="2800"/>
+          </a:p>
+          <a:p>
+            <a:r>
+              <a:rPr kumimoji="1" lang="ja-JP" altLang="en-US" sz="2800"/>
+              <a:t>テストプレイをしてみよう</a:t>
+            </a:r>
+            <a:endParaRPr kumimoji="1" lang="en-US" altLang="ja-JP" sz="2800"/>
+          </a:p>
+        </p:txBody>
+      </p:sp>
+      <p:sp>
+        <p:nvSpPr>
+          <p:cNvPr id="6" name="テキスト ボックス 5">
+            <a:extLst>
+              <a:ext uri="{FF2B5EF4-FFF2-40B4-BE49-F238E27FC236}">
+                <a16:creationId xmlns:a16="http://schemas.microsoft.com/office/drawing/2014/main" id="{EDDC528F-3756-41B1-8E8D-10070006AE33}"/>
               </a:ext>
             </a:extLst>
           </p:cNvPr>
@@ -5317,8 +5218,8 @@
         </p:nvSpPr>
         <p:spPr>
           <a:xfrm>
-            <a:off x="467544" y="6237312"/>
-            <a:ext cx="7533152" cy="369332"/>
+            <a:off x="611560" y="5877272"/>
+            <a:ext cx="5416868" cy="830997"/>
           </a:xfrm>
           <a:prstGeom prst="rect">
             <a:avLst/>
@@ -5332,85 +5233,23 @@
           <a:lstStyle/>
           <a:p>
             <a:r>
-              <a:rPr kumimoji="1" lang="ja-JP" altLang="en-US" dirty="0"/>
-              <a:t>「</a:t>
-            </a:r>
-            <a:r>
-              <a:rPr kumimoji="1" lang="en-US" altLang="ja-JP" dirty="0"/>
-              <a:t>Your site is live at ....</a:t>
-            </a:r>
-            <a:r>
-              <a:rPr kumimoji="1" lang="ja-JP" altLang="en-US" dirty="0"/>
-              <a:t>」という表示が現れた</a:t>
-            </a:r>
-            <a:r>
-              <a:rPr lang="ja-JP" altLang="en-US" dirty="0"/>
-              <a:t>ら「</a:t>
-            </a:r>
-            <a:r>
-              <a:rPr lang="en-US" altLang="ja-JP" dirty="0"/>
-              <a:t>Visit site</a:t>
-            </a:r>
-            <a:r>
-              <a:rPr lang="ja-JP" altLang="en-US" dirty="0"/>
-              <a:t>」をクリック</a:t>
-            </a:r>
-            <a:endParaRPr kumimoji="1" lang="ja-JP" altLang="en-US" dirty="0"/>
-          </a:p>
-        </p:txBody>
-      </p:sp>
-      <p:cxnSp>
-        <p:nvCxnSpPr>
-          <p:cNvPr id="8" name="コネクタ: カギ線 7">
-            <a:extLst>
-              <a:ext uri="{FF2B5EF4-FFF2-40B4-BE49-F238E27FC236}">
-                <a16:creationId xmlns:a16="http://schemas.microsoft.com/office/drawing/2014/main" id="{7BDCA510-86ED-61CE-84CF-65DD4A8985B7}"/>
-              </a:ext>
-            </a:extLst>
-          </p:cNvPr>
-          <p:cNvCxnSpPr>
-            <a:stCxn id="7" idx="3"/>
-            <a:endCxn id="6" idx="3"/>
-          </p:cNvCxnSpPr>
-          <p:nvPr/>
-        </p:nvCxnSpPr>
-        <p:spPr>
-          <a:xfrm flipH="1" flipV="1">
-            <a:off x="7524328" y="3573016"/>
-            <a:ext cx="476368" cy="2848962"/>
-          </a:xfrm>
-          <a:prstGeom prst="bentConnector3">
-            <a:avLst>
-              <a:gd name="adj1" fmla="val -47988"/>
-            </a:avLst>
-          </a:prstGeom>
-          <a:ln>
-            <a:solidFill>
-              <a:schemeClr val="tx1"/>
-            </a:solidFill>
-            <a:headEnd type="none" w="med" len="med"/>
-            <a:tailEnd type="triangle"/>
-          </a:ln>
-        </p:spPr>
-        <p:style>
-          <a:lnRef idx="1">
-            <a:schemeClr val="accent1"/>
-          </a:lnRef>
-          <a:fillRef idx="0">
-            <a:schemeClr val="accent1"/>
-          </a:fillRef>
-          <a:effectRef idx="0">
-            <a:schemeClr val="accent1"/>
-          </a:effectRef>
-          <a:fontRef idx="minor">
-            <a:schemeClr val="tx1"/>
-          </a:fontRef>
-        </p:style>
-      </p:cxnSp>
+              <a:rPr kumimoji="1" lang="ja-JP" altLang="en-US" sz="2400" dirty="0"/>
+              <a:t>マウスクリックでメッセージ送り</a:t>
+            </a:r>
+            <a:endParaRPr kumimoji="1" lang="en-US" altLang="ja-JP" sz="2400" dirty="0"/>
+          </a:p>
+          <a:p>
+            <a:r>
+              <a:rPr kumimoji="1" lang="ja-JP" altLang="en-US" sz="2400" dirty="0"/>
+              <a:t>選択肢が出たらマウスクリックで選ぶ</a:t>
+            </a:r>
+          </a:p>
+        </p:txBody>
+      </p:sp>
     </p:spTree>
     <p:extLst>
       <p:ext uri="{BB962C8B-B14F-4D97-AF65-F5344CB8AC3E}">
-        <p14:creationId xmlns:p14="http://schemas.microsoft.com/office/powerpoint/2010/main" val="322500871"/>
+        <p14:creationId xmlns:p14="http://schemas.microsoft.com/office/powerpoint/2010/main" val="3740385715"/>
       </p:ext>
     </p:extLst>
   </p:cSld>
@@ -5565,45 +5404,12 @@
           <a:chExt cx="0" cy="0"/>
         </a:xfrm>
       </p:grpSpPr>
-      <p:sp>
-        <p:nvSpPr>
-          <p:cNvPr id="2" name="テキスト プレースホルダー 1">
-            <a:extLst>
-              <a:ext uri="{FF2B5EF4-FFF2-40B4-BE49-F238E27FC236}">
-                <a16:creationId xmlns:a16="http://schemas.microsoft.com/office/drawing/2014/main" id="{4400C90D-A223-47C6-AA95-3812923A72C6}"/>
-              </a:ext>
-            </a:extLst>
-          </p:cNvPr>
-          <p:cNvSpPr>
-            <a:spLocks noGrp="1"/>
-          </p:cNvSpPr>
-          <p:nvPr>
-            <p:ph type="body" sz="quarter" idx="10"/>
-          </p:nvPr>
-        </p:nvSpPr>
-        <p:spPr/>
-        <p:txBody>
-          <a:bodyPr/>
-          <a:lstStyle/>
-          <a:p>
-            <a:r>
-              <a:rPr lang="ja-JP" altLang="en-US"/>
-              <a:t>課題</a:t>
-            </a:r>
-            <a:r>
-              <a:rPr lang="en-US" altLang="ja-JP"/>
-              <a:t>2 - Step 2</a:t>
-            </a:r>
-            <a:endParaRPr kumimoji="1" lang="ja-JP" altLang="en-US"/>
-          </a:p>
-        </p:txBody>
-      </p:sp>
       <p:pic>
         <p:nvPicPr>
-          <p:cNvPr id="4" name="図 3">
-            <a:extLst>
-              <a:ext uri="{FF2B5EF4-FFF2-40B4-BE49-F238E27FC236}">
-                <a16:creationId xmlns:a16="http://schemas.microsoft.com/office/drawing/2014/main" id="{971DCBC3-E82B-4BA8-992E-EAF24076ABD1}"/>
+          <p:cNvPr id="6" name="図 5">
+            <a:extLst>
+              <a:ext uri="{FF2B5EF4-FFF2-40B4-BE49-F238E27FC236}">
+                <a16:creationId xmlns:a16="http://schemas.microsoft.com/office/drawing/2014/main" id="{AC85D889-0969-A12E-DEAD-CB7AF2D32D95}"/>
               </a:ext>
             </a:extLst>
           </p:cNvPr>
@@ -5620,8 +5426,8 @@
         </p:blipFill>
         <p:spPr>
           <a:xfrm>
-            <a:off x="251520" y="2276872"/>
-            <a:ext cx="8662039" cy="3384376"/>
+            <a:off x="395536" y="2420888"/>
+            <a:ext cx="7244137" cy="4293096"/>
           </a:xfrm>
           <a:prstGeom prst="rect">
             <a:avLst/>
@@ -5630,10 +5436,43 @@
       </p:pic>
       <p:sp>
         <p:nvSpPr>
-          <p:cNvPr id="5" name="テキスト ボックス 4">
-            <a:extLst>
-              <a:ext uri="{FF2B5EF4-FFF2-40B4-BE49-F238E27FC236}">
-                <a16:creationId xmlns:a16="http://schemas.microsoft.com/office/drawing/2014/main" id="{165B1961-526D-4A22-B4EB-EFD8954685B8}"/>
+          <p:cNvPr id="2" name="テキスト プレースホルダー 1">
+            <a:extLst>
+              <a:ext uri="{FF2B5EF4-FFF2-40B4-BE49-F238E27FC236}">
+                <a16:creationId xmlns:a16="http://schemas.microsoft.com/office/drawing/2014/main" id="{812C5709-3489-431B-AAAC-E3096D65E9EC}"/>
+              </a:ext>
+            </a:extLst>
+          </p:cNvPr>
+          <p:cNvSpPr>
+            <a:spLocks noGrp="1"/>
+          </p:cNvSpPr>
+          <p:nvPr>
+            <p:ph type="body" sz="quarter" idx="10"/>
+          </p:nvPr>
+        </p:nvSpPr>
+        <p:spPr/>
+        <p:txBody>
+          <a:bodyPr/>
+          <a:lstStyle/>
+          <a:p>
+            <a:r>
+              <a:rPr lang="ja-JP" altLang="en-US"/>
+              <a:t>課題</a:t>
+            </a:r>
+            <a:r>
+              <a:rPr lang="en-US" altLang="ja-JP"/>
+              <a:t>2 - Step 3</a:t>
+            </a:r>
+            <a:endParaRPr kumimoji="1" lang="ja-JP" altLang="en-US"/>
+          </a:p>
+        </p:txBody>
+      </p:sp>
+      <p:sp>
+        <p:nvSpPr>
+          <p:cNvPr id="3" name="テキスト ボックス 2">
+            <a:extLst>
+              <a:ext uri="{FF2B5EF4-FFF2-40B4-BE49-F238E27FC236}">
+                <a16:creationId xmlns:a16="http://schemas.microsoft.com/office/drawing/2014/main" id="{5027C318-1CB1-41EB-900A-C2A174A886B7}"/>
               </a:ext>
             </a:extLst>
           </p:cNvPr>
@@ -5642,8 +5481,8 @@
         </p:nvSpPr>
         <p:spPr>
           <a:xfrm>
-            <a:off x="323528" y="1268760"/>
-            <a:ext cx="4493538" cy="954107"/>
+            <a:off x="179512" y="1052736"/>
+            <a:ext cx="8804013" cy="523220"/>
           </a:xfrm>
           <a:prstGeom prst="rect">
             <a:avLst/>
@@ -5658,25 +5497,465 @@
           <a:p>
             <a:r>
               <a:rPr kumimoji="1" lang="ja-JP" altLang="en-US" sz="2800"/>
-              <a:t>こんな画面が出たら成功</a:t>
-            </a:r>
-            <a:endParaRPr kumimoji="1" lang="en-US" altLang="ja-JP" sz="2800"/>
-          </a:p>
-          <a:p>
+              <a:t>リポジトリのクローンのため、リモート</a:t>
+            </a:r>
+            <a:r>
+              <a:rPr kumimoji="1" lang="en-US" altLang="ja-JP" sz="2800"/>
+              <a:t>URL</a:t>
+            </a:r>
             <a:r>
               <a:rPr kumimoji="1" lang="ja-JP" altLang="en-US" sz="2800"/>
-              <a:t>テストプレイをしてみよう</a:t>
-            </a:r>
-            <a:endParaRPr kumimoji="1" lang="en-US" altLang="ja-JP" sz="2800"/>
-          </a:p>
-        </p:txBody>
-      </p:sp>
-      <p:sp>
-        <p:nvSpPr>
-          <p:cNvPr id="6" name="テキスト ボックス 5">
-            <a:extLst>
-              <a:ext uri="{FF2B5EF4-FFF2-40B4-BE49-F238E27FC236}">
-                <a16:creationId xmlns:a16="http://schemas.microsoft.com/office/drawing/2014/main" id="{EDDC528F-3756-41B1-8E8D-10070006AE33}"/>
+              <a:t>をコピー</a:t>
+            </a:r>
+          </a:p>
+        </p:txBody>
+      </p:sp>
+      <p:sp>
+        <p:nvSpPr>
+          <p:cNvPr id="7" name="四角形: 角を丸くする 6">
+            <a:extLst>
+              <a:ext uri="{FF2B5EF4-FFF2-40B4-BE49-F238E27FC236}">
+                <a16:creationId xmlns:a16="http://schemas.microsoft.com/office/drawing/2014/main" id="{E53D6DE6-45C8-4550-83A3-571EED161350}"/>
+              </a:ext>
+            </a:extLst>
+          </p:cNvPr>
+          <p:cNvSpPr/>
+          <p:nvPr/>
+        </p:nvSpPr>
+        <p:spPr>
+          <a:xfrm>
+            <a:off x="827584" y="2420888"/>
+            <a:ext cx="1944216" cy="360040"/>
+          </a:xfrm>
+          <a:prstGeom prst="roundRect">
+            <a:avLst/>
+          </a:prstGeom>
+          <a:noFill/>
+          <a:ln w="38100">
+            <a:solidFill>
+              <a:srgbClr val="FF0000"/>
+            </a:solidFill>
+          </a:ln>
+        </p:spPr>
+        <p:style>
+          <a:lnRef idx="2">
+            <a:schemeClr val="accent1">
+              <a:shade val="50000"/>
+            </a:schemeClr>
+          </a:lnRef>
+          <a:fillRef idx="1">
+            <a:schemeClr val="accent1"/>
+          </a:fillRef>
+          <a:effectRef idx="0">
+            <a:schemeClr val="accent1"/>
+          </a:effectRef>
+          <a:fontRef idx="minor">
+            <a:schemeClr val="lt1"/>
+          </a:fontRef>
+        </p:style>
+        <p:txBody>
+          <a:bodyPr rtlCol="0" anchor="ctr"/>
+          <a:lstStyle/>
+          <a:p>
+            <a:pPr algn="ctr"/>
+            <a:endParaRPr kumimoji="1" lang="ja-JP" altLang="en-US"/>
+          </a:p>
+        </p:txBody>
+      </p:sp>
+      <p:sp>
+        <p:nvSpPr>
+          <p:cNvPr id="8" name="楕円 7">
+            <a:extLst>
+              <a:ext uri="{FF2B5EF4-FFF2-40B4-BE49-F238E27FC236}">
+                <a16:creationId xmlns:a16="http://schemas.microsoft.com/office/drawing/2014/main" id="{57B147E2-162B-4C3B-A948-7118DEE10863}"/>
+              </a:ext>
+            </a:extLst>
+          </p:cNvPr>
+          <p:cNvSpPr/>
+          <p:nvPr/>
+        </p:nvSpPr>
+        <p:spPr>
+          <a:xfrm>
+            <a:off x="395536" y="2420888"/>
+            <a:ext cx="360040" cy="360040"/>
+          </a:xfrm>
+          <a:prstGeom prst="ellipse">
+            <a:avLst/>
+          </a:prstGeom>
+          <a:solidFill>
+            <a:srgbClr val="FF0000"/>
+          </a:solidFill>
+          <a:ln>
+            <a:solidFill>
+              <a:schemeClr val="tx1"/>
+            </a:solidFill>
+          </a:ln>
+        </p:spPr>
+        <p:style>
+          <a:lnRef idx="2">
+            <a:schemeClr val="accent1">
+              <a:shade val="50000"/>
+            </a:schemeClr>
+          </a:lnRef>
+          <a:fillRef idx="1">
+            <a:schemeClr val="accent1"/>
+          </a:fillRef>
+          <a:effectRef idx="0">
+            <a:schemeClr val="accent1"/>
+          </a:effectRef>
+          <a:fontRef idx="minor">
+            <a:schemeClr val="lt1"/>
+          </a:fontRef>
+        </p:style>
+        <p:txBody>
+          <a:bodyPr rtlCol="0" anchor="ctr"/>
+          <a:lstStyle/>
+          <a:p>
+            <a:pPr algn="ctr"/>
+            <a:r>
+              <a:rPr kumimoji="1" lang="en-US" altLang="ja-JP"/>
+              <a:t>1</a:t>
+            </a:r>
+            <a:endParaRPr kumimoji="1" lang="ja-JP" altLang="en-US"/>
+          </a:p>
+        </p:txBody>
+      </p:sp>
+      <p:sp>
+        <p:nvSpPr>
+          <p:cNvPr id="9" name="楕円 8">
+            <a:extLst>
+              <a:ext uri="{FF2B5EF4-FFF2-40B4-BE49-F238E27FC236}">
+                <a16:creationId xmlns:a16="http://schemas.microsoft.com/office/drawing/2014/main" id="{D63A72CB-9DD5-4E29-8A35-D5EFA85ECD4A}"/>
+              </a:ext>
+            </a:extLst>
+          </p:cNvPr>
+          <p:cNvSpPr/>
+          <p:nvPr/>
+        </p:nvSpPr>
+        <p:spPr>
+          <a:xfrm>
+            <a:off x="4283968" y="3861048"/>
+            <a:ext cx="360040" cy="360040"/>
+          </a:xfrm>
+          <a:prstGeom prst="ellipse">
+            <a:avLst/>
+          </a:prstGeom>
+          <a:solidFill>
+            <a:srgbClr val="FF0000"/>
+          </a:solidFill>
+          <a:ln>
+            <a:solidFill>
+              <a:schemeClr val="tx1"/>
+            </a:solidFill>
+          </a:ln>
+        </p:spPr>
+        <p:style>
+          <a:lnRef idx="2">
+            <a:schemeClr val="accent1">
+              <a:shade val="50000"/>
+            </a:schemeClr>
+          </a:lnRef>
+          <a:fillRef idx="1">
+            <a:schemeClr val="accent1"/>
+          </a:fillRef>
+          <a:effectRef idx="0">
+            <a:schemeClr val="accent1"/>
+          </a:effectRef>
+          <a:fontRef idx="minor">
+            <a:schemeClr val="lt1"/>
+          </a:fontRef>
+        </p:style>
+        <p:txBody>
+          <a:bodyPr rtlCol="0" anchor="ctr"/>
+          <a:lstStyle/>
+          <a:p>
+            <a:pPr algn="ctr"/>
+            <a:r>
+              <a:rPr kumimoji="1" lang="en-US" altLang="ja-JP"/>
+              <a:t>2</a:t>
+            </a:r>
+            <a:endParaRPr kumimoji="1" lang="ja-JP" altLang="en-US"/>
+          </a:p>
+        </p:txBody>
+      </p:sp>
+      <p:sp>
+        <p:nvSpPr>
+          <p:cNvPr id="10" name="四角形: 角を丸くする 9">
+            <a:extLst>
+              <a:ext uri="{FF2B5EF4-FFF2-40B4-BE49-F238E27FC236}">
+                <a16:creationId xmlns:a16="http://schemas.microsoft.com/office/drawing/2014/main" id="{63565B92-1236-41F0-8DA1-8F15CE4E71D7}"/>
+              </a:ext>
+            </a:extLst>
+          </p:cNvPr>
+          <p:cNvSpPr/>
+          <p:nvPr/>
+        </p:nvSpPr>
+        <p:spPr>
+          <a:xfrm>
+            <a:off x="4644008" y="3861048"/>
+            <a:ext cx="864096" cy="288032"/>
+          </a:xfrm>
+          <a:prstGeom prst="roundRect">
+            <a:avLst/>
+          </a:prstGeom>
+          <a:noFill/>
+          <a:ln w="38100">
+            <a:solidFill>
+              <a:srgbClr val="FF0000"/>
+            </a:solidFill>
+          </a:ln>
+        </p:spPr>
+        <p:style>
+          <a:lnRef idx="2">
+            <a:schemeClr val="accent1">
+              <a:shade val="50000"/>
+            </a:schemeClr>
+          </a:lnRef>
+          <a:fillRef idx="1">
+            <a:schemeClr val="accent1"/>
+          </a:fillRef>
+          <a:effectRef idx="0">
+            <a:schemeClr val="accent1"/>
+          </a:effectRef>
+          <a:fontRef idx="minor">
+            <a:schemeClr val="lt1"/>
+          </a:fontRef>
+        </p:style>
+        <p:txBody>
+          <a:bodyPr rtlCol="0" anchor="ctr"/>
+          <a:lstStyle/>
+          <a:p>
+            <a:pPr algn="ctr"/>
+            <a:endParaRPr kumimoji="1" lang="ja-JP" altLang="en-US"/>
+          </a:p>
+        </p:txBody>
+      </p:sp>
+      <p:sp>
+        <p:nvSpPr>
+          <p:cNvPr id="11" name="四角形: 角を丸くする 10">
+            <a:extLst>
+              <a:ext uri="{FF2B5EF4-FFF2-40B4-BE49-F238E27FC236}">
+                <a16:creationId xmlns:a16="http://schemas.microsoft.com/office/drawing/2014/main" id="{919C4ADA-88E1-45EE-ACFD-8B7F3AEC97A1}"/>
+              </a:ext>
+            </a:extLst>
+          </p:cNvPr>
+          <p:cNvSpPr/>
+          <p:nvPr/>
+        </p:nvSpPr>
+        <p:spPr>
+          <a:xfrm>
+            <a:off x="3131840" y="4941168"/>
+            <a:ext cx="288032" cy="144016"/>
+          </a:xfrm>
+          <a:prstGeom prst="roundRect">
+            <a:avLst/>
+          </a:prstGeom>
+          <a:noFill/>
+          <a:ln w="38100">
+            <a:solidFill>
+              <a:srgbClr val="FF0000"/>
+            </a:solidFill>
+          </a:ln>
+        </p:spPr>
+        <p:style>
+          <a:lnRef idx="2">
+            <a:schemeClr val="accent1">
+              <a:shade val="50000"/>
+            </a:schemeClr>
+          </a:lnRef>
+          <a:fillRef idx="1">
+            <a:schemeClr val="accent1"/>
+          </a:fillRef>
+          <a:effectRef idx="0">
+            <a:schemeClr val="accent1"/>
+          </a:effectRef>
+          <a:fontRef idx="minor">
+            <a:schemeClr val="lt1"/>
+          </a:fontRef>
+        </p:style>
+        <p:txBody>
+          <a:bodyPr rtlCol="0" anchor="ctr"/>
+          <a:lstStyle/>
+          <a:p>
+            <a:pPr algn="ctr"/>
+            <a:endParaRPr kumimoji="1" lang="ja-JP" altLang="en-US"/>
+          </a:p>
+        </p:txBody>
+      </p:sp>
+      <p:sp>
+        <p:nvSpPr>
+          <p:cNvPr id="12" name="楕円 11">
+            <a:extLst>
+              <a:ext uri="{FF2B5EF4-FFF2-40B4-BE49-F238E27FC236}">
+                <a16:creationId xmlns:a16="http://schemas.microsoft.com/office/drawing/2014/main" id="{9D706025-1675-4D50-9BDB-CB2228825D52}"/>
+              </a:ext>
+            </a:extLst>
+          </p:cNvPr>
+          <p:cNvSpPr/>
+          <p:nvPr/>
+        </p:nvSpPr>
+        <p:spPr>
+          <a:xfrm>
+            <a:off x="3059832" y="4509120"/>
+            <a:ext cx="360040" cy="360040"/>
+          </a:xfrm>
+          <a:prstGeom prst="ellipse">
+            <a:avLst/>
+          </a:prstGeom>
+          <a:solidFill>
+            <a:srgbClr val="FF0000"/>
+          </a:solidFill>
+          <a:ln>
+            <a:solidFill>
+              <a:schemeClr val="tx1"/>
+            </a:solidFill>
+          </a:ln>
+        </p:spPr>
+        <p:style>
+          <a:lnRef idx="2">
+            <a:schemeClr val="accent1">
+              <a:shade val="50000"/>
+            </a:schemeClr>
+          </a:lnRef>
+          <a:fillRef idx="1">
+            <a:schemeClr val="accent1"/>
+          </a:fillRef>
+          <a:effectRef idx="0">
+            <a:schemeClr val="accent1"/>
+          </a:effectRef>
+          <a:fontRef idx="minor">
+            <a:schemeClr val="lt1"/>
+          </a:fontRef>
+        </p:style>
+        <p:txBody>
+          <a:bodyPr rtlCol="0" anchor="ctr"/>
+          <a:lstStyle/>
+          <a:p>
+            <a:pPr algn="ctr"/>
+            <a:r>
+              <a:rPr kumimoji="1" lang="en-US" altLang="ja-JP"/>
+              <a:t>3</a:t>
+            </a:r>
+            <a:endParaRPr kumimoji="1" lang="ja-JP" altLang="en-US"/>
+          </a:p>
+        </p:txBody>
+      </p:sp>
+      <p:sp>
+        <p:nvSpPr>
+          <p:cNvPr id="13" name="四角形: 角を丸くする 12">
+            <a:extLst>
+              <a:ext uri="{FF2B5EF4-FFF2-40B4-BE49-F238E27FC236}">
+                <a16:creationId xmlns:a16="http://schemas.microsoft.com/office/drawing/2014/main" id="{C2150B63-C299-492F-8613-184A8D4F10DD}"/>
+              </a:ext>
+            </a:extLst>
+          </p:cNvPr>
+          <p:cNvSpPr/>
+          <p:nvPr/>
+        </p:nvSpPr>
+        <p:spPr>
+          <a:xfrm>
+            <a:off x="5076056" y="5239265"/>
+            <a:ext cx="336203" cy="277967"/>
+          </a:xfrm>
+          <a:prstGeom prst="roundRect">
+            <a:avLst/>
+          </a:prstGeom>
+          <a:noFill/>
+          <a:ln w="38100">
+            <a:solidFill>
+              <a:srgbClr val="FF0000"/>
+            </a:solidFill>
+          </a:ln>
+        </p:spPr>
+        <p:style>
+          <a:lnRef idx="2">
+            <a:schemeClr val="accent1">
+              <a:shade val="50000"/>
+            </a:schemeClr>
+          </a:lnRef>
+          <a:fillRef idx="1">
+            <a:schemeClr val="accent1"/>
+          </a:fillRef>
+          <a:effectRef idx="0">
+            <a:schemeClr val="accent1"/>
+          </a:effectRef>
+          <a:fontRef idx="minor">
+            <a:schemeClr val="lt1"/>
+          </a:fontRef>
+        </p:style>
+        <p:txBody>
+          <a:bodyPr rtlCol="0" anchor="ctr"/>
+          <a:lstStyle/>
+          <a:p>
+            <a:pPr algn="ctr"/>
+            <a:endParaRPr kumimoji="1" lang="ja-JP" altLang="en-US"/>
+          </a:p>
+        </p:txBody>
+      </p:sp>
+      <p:sp>
+        <p:nvSpPr>
+          <p:cNvPr id="14" name="楕円 13">
+            <a:extLst>
+              <a:ext uri="{FF2B5EF4-FFF2-40B4-BE49-F238E27FC236}">
+                <a16:creationId xmlns:a16="http://schemas.microsoft.com/office/drawing/2014/main" id="{BA2C4269-16C3-43F9-B1F6-04C2AC76AA81}"/>
+              </a:ext>
+            </a:extLst>
+          </p:cNvPr>
+          <p:cNvSpPr/>
+          <p:nvPr/>
+        </p:nvSpPr>
+        <p:spPr>
+          <a:xfrm>
+            <a:off x="5076056" y="4869160"/>
+            <a:ext cx="360040" cy="360040"/>
+          </a:xfrm>
+          <a:prstGeom prst="ellipse">
+            <a:avLst/>
+          </a:prstGeom>
+          <a:solidFill>
+            <a:srgbClr val="FF0000"/>
+          </a:solidFill>
+          <a:ln>
+            <a:solidFill>
+              <a:schemeClr val="tx1"/>
+            </a:solidFill>
+          </a:ln>
+        </p:spPr>
+        <p:style>
+          <a:lnRef idx="2">
+            <a:schemeClr val="accent1">
+              <a:shade val="50000"/>
+            </a:schemeClr>
+          </a:lnRef>
+          <a:fillRef idx="1">
+            <a:schemeClr val="accent1"/>
+          </a:fillRef>
+          <a:effectRef idx="0">
+            <a:schemeClr val="accent1"/>
+          </a:effectRef>
+          <a:fontRef idx="minor">
+            <a:schemeClr val="lt1"/>
+          </a:fontRef>
+        </p:style>
+        <p:txBody>
+          <a:bodyPr rtlCol="0" anchor="ctr"/>
+          <a:lstStyle/>
+          <a:p>
+            <a:pPr algn="ctr"/>
+            <a:r>
+              <a:rPr kumimoji="1" lang="en-US" altLang="ja-JP"/>
+              <a:t>4</a:t>
+            </a:r>
+            <a:endParaRPr kumimoji="1" lang="ja-JP" altLang="en-US"/>
+          </a:p>
+        </p:txBody>
+      </p:sp>
+      <p:sp>
+        <p:nvSpPr>
+          <p:cNvPr id="15" name="テキスト ボックス 14">
+            <a:extLst>
+              <a:ext uri="{FF2B5EF4-FFF2-40B4-BE49-F238E27FC236}">
+                <a16:creationId xmlns:a16="http://schemas.microsoft.com/office/drawing/2014/main" id="{70EEBF0B-0158-44C4-86D5-49C2A7A3371E}"/>
               </a:ext>
             </a:extLst>
           </p:cNvPr>
@@ -5685,8 +5964,8 @@
         </p:nvSpPr>
         <p:spPr>
           <a:xfrm>
-            <a:off x="611560" y="5877272"/>
-            <a:ext cx="5416868" cy="830997"/>
+            <a:off x="129510" y="1916832"/>
+            <a:ext cx="9123010" cy="369332"/>
           </a:xfrm>
           <a:prstGeom prst="rect">
             <a:avLst/>
@@ -5700,15 +5979,36 @@
           <a:lstStyle/>
           <a:p>
             <a:r>
-              <a:rPr kumimoji="1" lang="ja-JP" altLang="en-US" sz="2400" dirty="0"/>
-              <a:t>マウスクリックでメッセージ送り</a:t>
-            </a:r>
-            <a:endParaRPr kumimoji="1" lang="en-US" altLang="ja-JP" sz="2400" dirty="0"/>
-          </a:p>
-          <a:p>
-            <a:r>
-              <a:rPr kumimoji="1" lang="ja-JP" altLang="en-US" sz="2400" dirty="0"/>
-              <a:t>選択肢が出たらマウスクリックで選ぶ</a:t>
+              <a:rPr kumimoji="1" lang="en-US" altLang="ja-JP"/>
+              <a:t>1. </a:t>
+            </a:r>
+            <a:r>
+              <a:rPr kumimoji="1" lang="ja-JP" altLang="en-US"/>
+              <a:t>自分のアカウントの </a:t>
+            </a:r>
+            <a:r>
+              <a:rPr kumimoji="1" lang="en-US" altLang="ja-JP"/>
+              <a:t>2. Code</a:t>
+            </a:r>
+            <a:r>
+              <a:rPr kumimoji="1" lang="ja-JP" altLang="en-US"/>
+              <a:t>をクリックし </a:t>
+            </a:r>
+            <a:r>
+              <a:rPr kumimoji="1" lang="en-US" altLang="ja-JP"/>
+              <a:t>3. SSH</a:t>
+            </a:r>
+            <a:r>
+              <a:rPr kumimoji="1" lang="ja-JP" altLang="en-US"/>
+              <a:t>を選んで </a:t>
+            </a:r>
+            <a:r>
+              <a:rPr kumimoji="1" lang="en-US" altLang="ja-JP"/>
+              <a:t>4. </a:t>
+            </a:r>
+            <a:r>
+              <a:rPr kumimoji="1" lang="ja-JP" altLang="en-US"/>
+              <a:t>コピーボタンを押す</a:t>
             </a:r>
           </a:p>
         </p:txBody>
@@ -5716,7 +6016,7 @@
     </p:spTree>
     <p:extLst>
       <p:ext uri="{BB962C8B-B14F-4D97-AF65-F5344CB8AC3E}">
-        <p14:creationId xmlns:p14="http://schemas.microsoft.com/office/powerpoint/2010/main" val="3740385715"/>
+        <p14:creationId xmlns:p14="http://schemas.microsoft.com/office/powerpoint/2010/main" val="2794258674"/>
       </p:ext>
     </p:extLst>
   </p:cSld>
@@ -5743,42 +6043,12 @@
           <a:chExt cx="0" cy="0"/>
         </a:xfrm>
       </p:grpSpPr>
-      <p:pic>
-        <p:nvPicPr>
-          <p:cNvPr id="6" name="図 5">
-            <a:extLst>
-              <a:ext uri="{FF2B5EF4-FFF2-40B4-BE49-F238E27FC236}">
-                <a16:creationId xmlns:a16="http://schemas.microsoft.com/office/drawing/2014/main" id="{AC85D889-0969-A12E-DEAD-CB7AF2D32D95}"/>
-              </a:ext>
-            </a:extLst>
-          </p:cNvPr>
-          <p:cNvPicPr>
-            <a:picLocks noChangeAspect="1"/>
-          </p:cNvPicPr>
-          <p:nvPr/>
-        </p:nvPicPr>
-        <p:blipFill>
-          <a:blip r:embed="rId2"/>
-          <a:stretch>
-            <a:fillRect/>
-          </a:stretch>
-        </p:blipFill>
-        <p:spPr>
-          <a:xfrm>
-            <a:off x="395536" y="2420888"/>
-            <a:ext cx="7244137" cy="4293096"/>
-          </a:xfrm>
-          <a:prstGeom prst="rect">
-            <a:avLst/>
-          </a:prstGeom>
-        </p:spPr>
-      </p:pic>
       <p:sp>
         <p:nvSpPr>
           <p:cNvPr id="2" name="テキスト プレースホルダー 1">
             <a:extLst>
               <a:ext uri="{FF2B5EF4-FFF2-40B4-BE49-F238E27FC236}">
-                <a16:creationId xmlns:a16="http://schemas.microsoft.com/office/drawing/2014/main" id="{812C5709-3489-431B-AAAC-E3096D65E9EC}"/>
+                <a16:creationId xmlns:a16="http://schemas.microsoft.com/office/drawing/2014/main" id="{2F0FA607-9011-4295-A85B-89A4632F2FE4}"/>
               </a:ext>
             </a:extLst>
           </p:cNvPr>
@@ -5808,10 +6078,10 @@
       </p:sp>
       <p:sp>
         <p:nvSpPr>
-          <p:cNvPr id="3" name="テキスト ボックス 2">
-            <a:extLst>
-              <a:ext uri="{FF2B5EF4-FFF2-40B4-BE49-F238E27FC236}">
-                <a16:creationId xmlns:a16="http://schemas.microsoft.com/office/drawing/2014/main" id="{5027C318-1CB1-41EB-900A-C2A174A886B7}"/>
+          <p:cNvPr id="4" name="テキスト ボックス 3">
+            <a:extLst>
+              <a:ext uri="{FF2B5EF4-FFF2-40B4-BE49-F238E27FC236}">
+                <a16:creationId xmlns:a16="http://schemas.microsoft.com/office/drawing/2014/main" id="{69B31432-F7C9-48AC-936C-0D1BEFA2202F}"/>
               </a:ext>
             </a:extLst>
           </p:cNvPr>
@@ -5820,542 +6090,238 @@
         </p:nvSpPr>
         <p:spPr>
           <a:xfrm>
-            <a:off x="179512" y="1052736"/>
-            <a:ext cx="8804013" cy="523220"/>
-          </a:xfrm>
-          <a:prstGeom prst="rect">
-            <a:avLst/>
-          </a:prstGeom>
-          <a:noFill/>
-        </p:spPr>
-        <p:txBody>
-          <a:bodyPr wrap="none" rtlCol="0">
-            <a:spAutoFit/>
-          </a:bodyPr>
-          <a:lstStyle/>
-          <a:p>
-            <a:r>
-              <a:rPr kumimoji="1" lang="ja-JP" altLang="en-US" sz="2800"/>
-              <a:t>リポジトリのクローンのため、リモート</a:t>
-            </a:r>
-            <a:r>
-              <a:rPr kumimoji="1" lang="en-US" altLang="ja-JP" sz="2800"/>
-              <a:t>URL</a:t>
-            </a:r>
-            <a:r>
-              <a:rPr kumimoji="1" lang="ja-JP" altLang="en-US" sz="2800"/>
-              <a:t>をコピー</a:t>
-            </a:r>
-          </a:p>
-        </p:txBody>
-      </p:sp>
-      <p:sp>
-        <p:nvSpPr>
-          <p:cNvPr id="7" name="四角形: 角を丸くする 6">
-            <a:extLst>
-              <a:ext uri="{FF2B5EF4-FFF2-40B4-BE49-F238E27FC236}">
-                <a16:creationId xmlns:a16="http://schemas.microsoft.com/office/drawing/2014/main" id="{E53D6DE6-45C8-4550-83A3-571EED161350}"/>
-              </a:ext>
-            </a:extLst>
-          </p:cNvPr>
-          <p:cNvSpPr/>
-          <p:nvPr/>
-        </p:nvSpPr>
-        <p:spPr>
-          <a:xfrm>
-            <a:off x="827584" y="2420888"/>
-            <a:ext cx="1944216" cy="360040"/>
-          </a:xfrm>
-          <a:prstGeom prst="roundRect">
-            <a:avLst/>
-          </a:prstGeom>
-          <a:noFill/>
-          <a:ln w="38100">
-            <a:solidFill>
-              <a:srgbClr val="FF0000"/>
-            </a:solidFill>
-          </a:ln>
-        </p:spPr>
-        <p:style>
-          <a:lnRef idx="2">
-            <a:schemeClr val="accent1">
-              <a:shade val="50000"/>
-            </a:schemeClr>
-          </a:lnRef>
-          <a:fillRef idx="1">
-            <a:schemeClr val="accent1"/>
-          </a:fillRef>
-          <a:effectRef idx="0">
-            <a:schemeClr val="accent1"/>
-          </a:effectRef>
-          <a:fontRef idx="minor">
-            <a:schemeClr val="lt1"/>
-          </a:fontRef>
-        </p:style>
-        <p:txBody>
-          <a:bodyPr rtlCol="0" anchor="ctr"/>
-          <a:lstStyle/>
-          <a:p>
-            <a:pPr algn="ctr"/>
-            <a:endParaRPr kumimoji="1" lang="ja-JP" altLang="en-US"/>
-          </a:p>
-        </p:txBody>
-      </p:sp>
-      <p:sp>
-        <p:nvSpPr>
-          <p:cNvPr id="8" name="楕円 7">
-            <a:extLst>
-              <a:ext uri="{FF2B5EF4-FFF2-40B4-BE49-F238E27FC236}">
-                <a16:creationId xmlns:a16="http://schemas.microsoft.com/office/drawing/2014/main" id="{57B147E2-162B-4C3B-A948-7118DEE10863}"/>
-              </a:ext>
-            </a:extLst>
-          </p:cNvPr>
-          <p:cNvSpPr/>
-          <p:nvPr/>
-        </p:nvSpPr>
-        <p:spPr>
-          <a:xfrm>
-            <a:off x="395536" y="2420888"/>
-            <a:ext cx="360040" cy="360040"/>
-          </a:xfrm>
-          <a:prstGeom prst="ellipse">
-            <a:avLst/>
-          </a:prstGeom>
-          <a:solidFill>
-            <a:srgbClr val="FF0000"/>
-          </a:solidFill>
+            <a:off x="251520" y="1916832"/>
+            <a:ext cx="8496944" cy="1323439"/>
+          </a:xfrm>
+          <a:prstGeom prst="rect">
+            <a:avLst/>
+          </a:prstGeom>
+          <a:noFill/>
           <a:ln>
             <a:solidFill>
               <a:schemeClr val="tx1"/>
             </a:solidFill>
           </a:ln>
         </p:spPr>
-        <p:style>
-          <a:lnRef idx="2">
-            <a:schemeClr val="accent1">
-              <a:shade val="50000"/>
-            </a:schemeClr>
-          </a:lnRef>
-          <a:fillRef idx="1">
-            <a:schemeClr val="accent1"/>
-          </a:fillRef>
-          <a:effectRef idx="0">
-            <a:schemeClr val="accent1"/>
-          </a:effectRef>
-          <a:fontRef idx="minor">
-            <a:schemeClr val="lt1"/>
-          </a:fontRef>
-        </p:style>
-        <p:txBody>
-          <a:bodyPr rtlCol="0" anchor="ctr"/>
-          <a:lstStyle/>
-          <a:p>
-            <a:pPr algn="ctr"/>
+        <p:txBody>
+          <a:bodyPr wrap="square">
+            <a:spAutoFit/>
+          </a:bodyPr>
+          <a:lstStyle/>
+          <a:p>
+            <a:r>
+              <a:rPr lang="en-US" altLang="ja-JP" sz="2000" dirty="0">
+                <a:latin typeface="Consolas" panose="020B0609020204030204" pitchFamily="49" charset="0"/>
+              </a:rPr>
+              <a:t>cd</a:t>
+            </a:r>
+          </a:p>
+          <a:p>
+            <a:r>
+              <a:rPr lang="en-US" altLang="ja-JP" sz="2000" dirty="0">
+                <a:latin typeface="Consolas" panose="020B0609020204030204" pitchFamily="49" charset="0"/>
+              </a:rPr>
+              <a:t>cd </a:t>
+            </a:r>
+            <a:r>
+              <a:rPr lang="en-US" altLang="ja-JP" sz="2000" dirty="0" err="1">
+                <a:latin typeface="Consolas" panose="020B0609020204030204" pitchFamily="49" charset="0"/>
+              </a:rPr>
+              <a:t>github</a:t>
+            </a:r>
+            <a:endParaRPr lang="en-US" altLang="ja-JP" sz="2000" dirty="0">
+              <a:latin typeface="Consolas" panose="020B0609020204030204" pitchFamily="49" charset="0"/>
+            </a:endParaRPr>
+          </a:p>
+          <a:p>
+            <a:r>
+              <a:rPr lang="en-US" altLang="ja-JP" sz="2000" dirty="0">
+                <a:latin typeface="Consolas" panose="020B0609020204030204" pitchFamily="49" charset="0"/>
+              </a:rPr>
+              <a:t>git clone </a:t>
+            </a:r>
+            <a:r>
+              <a:rPr lang="en-US" altLang="ja-JP" sz="2000" dirty="0" err="1">
+                <a:solidFill>
+                  <a:srgbClr val="FF0000"/>
+                </a:solidFill>
+                <a:latin typeface="Consolas" panose="020B0609020204030204" pitchFamily="49" charset="0"/>
+              </a:rPr>
+              <a:t>git@github.com:github-watanabe</a:t>
+            </a:r>
+            <a:r>
+              <a:rPr lang="en-US" altLang="ja-JP" sz="2000" dirty="0">
+                <a:solidFill>
+                  <a:srgbClr val="FF0000"/>
+                </a:solidFill>
+                <a:latin typeface="Consolas" panose="020B0609020204030204" pitchFamily="49" charset="0"/>
+              </a:rPr>
+              <a:t>/</a:t>
+            </a:r>
+            <a:r>
+              <a:rPr lang="en-US" altLang="ja-JP" sz="2000" dirty="0" err="1">
+                <a:solidFill>
+                  <a:srgbClr val="FF0000"/>
+                </a:solidFill>
+                <a:latin typeface="Consolas" panose="020B0609020204030204" pitchFamily="49" charset="0"/>
+              </a:rPr>
+              <a:t>tyrano_sample.git</a:t>
+            </a:r>
+            <a:endParaRPr lang="en-US" altLang="ja-JP" sz="2000" dirty="0">
+              <a:solidFill>
+                <a:srgbClr val="FF0000"/>
+              </a:solidFill>
+              <a:latin typeface="Consolas" panose="020B0609020204030204" pitchFamily="49" charset="0"/>
+            </a:endParaRPr>
+          </a:p>
+          <a:p>
+            <a:r>
+              <a:rPr lang="en-US" altLang="ja-JP" sz="2000" dirty="0">
+                <a:latin typeface="Consolas" panose="020B0609020204030204" pitchFamily="49" charset="0"/>
+              </a:rPr>
+              <a:t>cd </a:t>
+            </a:r>
+            <a:r>
+              <a:rPr lang="en-US" altLang="ja-JP" sz="2000" dirty="0" err="1">
+                <a:latin typeface="Consolas" panose="020B0609020204030204" pitchFamily="49" charset="0"/>
+              </a:rPr>
+              <a:t>tyrano_sample</a:t>
+            </a:r>
+            <a:endParaRPr lang="en-US" altLang="ja-JP" sz="2000" dirty="0">
+              <a:latin typeface="Consolas" panose="020B0609020204030204" pitchFamily="49" charset="0"/>
+            </a:endParaRPr>
+          </a:p>
+        </p:txBody>
+      </p:sp>
+      <p:sp>
+        <p:nvSpPr>
+          <p:cNvPr id="5" name="テキスト ボックス 4">
+            <a:extLst>
+              <a:ext uri="{FF2B5EF4-FFF2-40B4-BE49-F238E27FC236}">
+                <a16:creationId xmlns:a16="http://schemas.microsoft.com/office/drawing/2014/main" id="{C45384CE-6A62-416E-B99E-F4B9BE5FC64A}"/>
+              </a:ext>
+            </a:extLst>
+          </p:cNvPr>
+          <p:cNvSpPr txBox="1"/>
+          <p:nvPr/>
+        </p:nvSpPr>
+        <p:spPr>
+          <a:xfrm>
+            <a:off x="107504" y="1124744"/>
+            <a:ext cx="4219425" cy="584775"/>
+          </a:xfrm>
+          <a:prstGeom prst="rect">
+            <a:avLst/>
+          </a:prstGeom>
+          <a:noFill/>
+        </p:spPr>
+        <p:txBody>
+          <a:bodyPr wrap="none" rtlCol="0">
+            <a:spAutoFit/>
+          </a:bodyPr>
+          <a:lstStyle/>
+          <a:p>
+            <a:r>
+              <a:rPr kumimoji="1" lang="en-US" altLang="ja-JP" sz="3200"/>
+              <a:t>Git Bash</a:t>
+            </a:r>
+            <a:r>
+              <a:rPr kumimoji="1" lang="ja-JP" altLang="en-US" sz="3200"/>
+              <a:t>で以下を実行</a:t>
+            </a:r>
+          </a:p>
+        </p:txBody>
+      </p:sp>
+      <p:sp>
+        <p:nvSpPr>
+          <p:cNvPr id="6" name="テキスト ボックス 5">
+            <a:extLst>
+              <a:ext uri="{FF2B5EF4-FFF2-40B4-BE49-F238E27FC236}">
+                <a16:creationId xmlns:a16="http://schemas.microsoft.com/office/drawing/2014/main" id="{454079E6-DC99-4663-8764-0A9DE27615B4}"/>
+              </a:ext>
+            </a:extLst>
+          </p:cNvPr>
+          <p:cNvSpPr txBox="1"/>
+          <p:nvPr/>
+        </p:nvSpPr>
+        <p:spPr>
+          <a:xfrm>
+            <a:off x="1675289" y="3861048"/>
+            <a:ext cx="7468711" cy="369332"/>
+          </a:xfrm>
+          <a:prstGeom prst="rect">
+            <a:avLst/>
+          </a:prstGeom>
+          <a:noFill/>
+        </p:spPr>
+        <p:txBody>
+          <a:bodyPr wrap="none" rtlCol="0">
+            <a:spAutoFit/>
+          </a:bodyPr>
+          <a:lstStyle/>
+          <a:p>
+            <a:r>
+              <a:rPr kumimoji="1" lang="ja-JP" altLang="en-US"/>
+              <a:t>ここはコピーされているはずなので、マウス右クリックから「</a:t>
+            </a:r>
             <a:r>
               <a:rPr kumimoji="1" lang="en-US" altLang="ja-JP"/>
-              <a:t>1</a:t>
-            </a:r>
-            <a:endParaRPr kumimoji="1" lang="ja-JP" altLang="en-US"/>
-          </a:p>
-        </p:txBody>
-      </p:sp>
-      <p:sp>
-        <p:nvSpPr>
-          <p:cNvPr id="9" name="楕円 8">
-            <a:extLst>
-              <a:ext uri="{FF2B5EF4-FFF2-40B4-BE49-F238E27FC236}">
-                <a16:creationId xmlns:a16="http://schemas.microsoft.com/office/drawing/2014/main" id="{D63A72CB-9DD5-4E29-8A35-D5EFA85ECD4A}"/>
-              </a:ext>
-            </a:extLst>
-          </p:cNvPr>
-          <p:cNvSpPr/>
-          <p:nvPr/>
-        </p:nvSpPr>
-        <p:spPr>
-          <a:xfrm>
-            <a:off x="4283968" y="3861048"/>
-            <a:ext cx="360040" cy="360040"/>
-          </a:xfrm>
-          <a:prstGeom prst="ellipse">
-            <a:avLst/>
-          </a:prstGeom>
-          <a:solidFill>
-            <a:srgbClr val="FF0000"/>
-          </a:solidFill>
+              <a:t>Paste</a:t>
+            </a:r>
+            <a:r>
+              <a:rPr kumimoji="1" lang="ja-JP" altLang="en-US"/>
+              <a:t>」</a:t>
+            </a:r>
+          </a:p>
+        </p:txBody>
+      </p:sp>
+      <p:cxnSp>
+        <p:nvCxnSpPr>
+          <p:cNvPr id="7" name="直線矢印コネクタ 6">
+            <a:extLst>
+              <a:ext uri="{FF2B5EF4-FFF2-40B4-BE49-F238E27FC236}">
+                <a16:creationId xmlns:a16="http://schemas.microsoft.com/office/drawing/2014/main" id="{1996A328-0833-0159-7F3F-19099274D116}"/>
+              </a:ext>
+            </a:extLst>
+          </p:cNvPr>
+          <p:cNvCxnSpPr/>
+          <p:nvPr/>
+        </p:nvCxnSpPr>
+        <p:spPr>
+          <a:xfrm flipV="1">
+            <a:off x="5220072" y="2924944"/>
+            <a:ext cx="0" cy="864096"/>
+          </a:xfrm>
+          <a:prstGeom prst="straightConnector1">
+            <a:avLst/>
+          </a:prstGeom>
           <a:ln>
             <a:solidFill>
               <a:schemeClr val="tx1"/>
             </a:solidFill>
+            <a:headEnd type="none" w="med" len="med"/>
+            <a:tailEnd type="triangle"/>
           </a:ln>
         </p:spPr>
         <p:style>
-          <a:lnRef idx="2">
-            <a:schemeClr val="accent1">
-              <a:shade val="50000"/>
-            </a:schemeClr>
+          <a:lnRef idx="1">
+            <a:schemeClr val="accent1"/>
           </a:lnRef>
-          <a:fillRef idx="1">
+          <a:fillRef idx="0">
             <a:schemeClr val="accent1"/>
           </a:fillRef>
           <a:effectRef idx="0">
             <a:schemeClr val="accent1"/>
           </a:effectRef>
           <a:fontRef idx="minor">
-            <a:schemeClr val="lt1"/>
+            <a:schemeClr val="tx1"/>
           </a:fontRef>
         </p:style>
-        <p:txBody>
-          <a:bodyPr rtlCol="0" anchor="ctr"/>
-          <a:lstStyle/>
-          <a:p>
-            <a:pPr algn="ctr"/>
-            <a:r>
-              <a:rPr kumimoji="1" lang="en-US" altLang="ja-JP"/>
-              <a:t>2</a:t>
-            </a:r>
-            <a:endParaRPr kumimoji="1" lang="ja-JP" altLang="en-US"/>
-          </a:p>
-        </p:txBody>
-      </p:sp>
-      <p:sp>
-        <p:nvSpPr>
-          <p:cNvPr id="10" name="四角形: 角を丸くする 9">
-            <a:extLst>
-              <a:ext uri="{FF2B5EF4-FFF2-40B4-BE49-F238E27FC236}">
-                <a16:creationId xmlns:a16="http://schemas.microsoft.com/office/drawing/2014/main" id="{63565B92-1236-41F0-8DA1-8F15CE4E71D7}"/>
-              </a:ext>
-            </a:extLst>
-          </p:cNvPr>
-          <p:cNvSpPr/>
-          <p:nvPr/>
-        </p:nvSpPr>
-        <p:spPr>
-          <a:xfrm>
-            <a:off x="4644008" y="3861048"/>
-            <a:ext cx="864096" cy="288032"/>
-          </a:xfrm>
-          <a:prstGeom prst="roundRect">
-            <a:avLst/>
-          </a:prstGeom>
-          <a:noFill/>
-          <a:ln w="38100">
-            <a:solidFill>
-              <a:srgbClr val="FF0000"/>
-            </a:solidFill>
-          </a:ln>
-        </p:spPr>
-        <p:style>
-          <a:lnRef idx="2">
-            <a:schemeClr val="accent1">
-              <a:shade val="50000"/>
-            </a:schemeClr>
-          </a:lnRef>
-          <a:fillRef idx="1">
-            <a:schemeClr val="accent1"/>
-          </a:fillRef>
-          <a:effectRef idx="0">
-            <a:schemeClr val="accent1"/>
-          </a:effectRef>
-          <a:fontRef idx="minor">
-            <a:schemeClr val="lt1"/>
-          </a:fontRef>
-        </p:style>
-        <p:txBody>
-          <a:bodyPr rtlCol="0" anchor="ctr"/>
-          <a:lstStyle/>
-          <a:p>
-            <a:pPr algn="ctr"/>
-            <a:endParaRPr kumimoji="1" lang="ja-JP" altLang="en-US"/>
-          </a:p>
-        </p:txBody>
-      </p:sp>
-      <p:sp>
-        <p:nvSpPr>
-          <p:cNvPr id="11" name="四角形: 角を丸くする 10">
-            <a:extLst>
-              <a:ext uri="{FF2B5EF4-FFF2-40B4-BE49-F238E27FC236}">
-                <a16:creationId xmlns:a16="http://schemas.microsoft.com/office/drawing/2014/main" id="{919C4ADA-88E1-45EE-ACFD-8B7F3AEC97A1}"/>
-              </a:ext>
-            </a:extLst>
-          </p:cNvPr>
-          <p:cNvSpPr/>
-          <p:nvPr/>
-        </p:nvSpPr>
-        <p:spPr>
-          <a:xfrm>
-            <a:off x="3131840" y="4941168"/>
-            <a:ext cx="288032" cy="144016"/>
-          </a:xfrm>
-          <a:prstGeom prst="roundRect">
-            <a:avLst/>
-          </a:prstGeom>
-          <a:noFill/>
-          <a:ln w="38100">
-            <a:solidFill>
-              <a:srgbClr val="FF0000"/>
-            </a:solidFill>
-          </a:ln>
-        </p:spPr>
-        <p:style>
-          <a:lnRef idx="2">
-            <a:schemeClr val="accent1">
-              <a:shade val="50000"/>
-            </a:schemeClr>
-          </a:lnRef>
-          <a:fillRef idx="1">
-            <a:schemeClr val="accent1"/>
-          </a:fillRef>
-          <a:effectRef idx="0">
-            <a:schemeClr val="accent1"/>
-          </a:effectRef>
-          <a:fontRef idx="minor">
-            <a:schemeClr val="lt1"/>
-          </a:fontRef>
-        </p:style>
-        <p:txBody>
-          <a:bodyPr rtlCol="0" anchor="ctr"/>
-          <a:lstStyle/>
-          <a:p>
-            <a:pPr algn="ctr"/>
-            <a:endParaRPr kumimoji="1" lang="ja-JP" altLang="en-US"/>
-          </a:p>
-        </p:txBody>
-      </p:sp>
-      <p:sp>
-        <p:nvSpPr>
-          <p:cNvPr id="12" name="楕円 11">
-            <a:extLst>
-              <a:ext uri="{FF2B5EF4-FFF2-40B4-BE49-F238E27FC236}">
-                <a16:creationId xmlns:a16="http://schemas.microsoft.com/office/drawing/2014/main" id="{9D706025-1675-4D50-9BDB-CB2228825D52}"/>
-              </a:ext>
-            </a:extLst>
-          </p:cNvPr>
-          <p:cNvSpPr/>
-          <p:nvPr/>
-        </p:nvSpPr>
-        <p:spPr>
-          <a:xfrm>
-            <a:off x="3059832" y="4509120"/>
-            <a:ext cx="360040" cy="360040"/>
-          </a:xfrm>
-          <a:prstGeom prst="ellipse">
-            <a:avLst/>
-          </a:prstGeom>
-          <a:solidFill>
-            <a:srgbClr val="FF0000"/>
-          </a:solidFill>
-          <a:ln>
-            <a:solidFill>
-              <a:schemeClr val="tx1"/>
-            </a:solidFill>
-          </a:ln>
-        </p:spPr>
-        <p:style>
-          <a:lnRef idx="2">
-            <a:schemeClr val="accent1">
-              <a:shade val="50000"/>
-            </a:schemeClr>
-          </a:lnRef>
-          <a:fillRef idx="1">
-            <a:schemeClr val="accent1"/>
-          </a:fillRef>
-          <a:effectRef idx="0">
-            <a:schemeClr val="accent1"/>
-          </a:effectRef>
-          <a:fontRef idx="minor">
-            <a:schemeClr val="lt1"/>
-          </a:fontRef>
-        </p:style>
-        <p:txBody>
-          <a:bodyPr rtlCol="0" anchor="ctr"/>
-          <a:lstStyle/>
-          <a:p>
-            <a:pPr algn="ctr"/>
-            <a:r>
-              <a:rPr kumimoji="1" lang="en-US" altLang="ja-JP"/>
-              <a:t>3</a:t>
-            </a:r>
-            <a:endParaRPr kumimoji="1" lang="ja-JP" altLang="en-US"/>
-          </a:p>
-        </p:txBody>
-      </p:sp>
-      <p:sp>
-        <p:nvSpPr>
-          <p:cNvPr id="13" name="四角形: 角を丸くする 12">
-            <a:extLst>
-              <a:ext uri="{FF2B5EF4-FFF2-40B4-BE49-F238E27FC236}">
-                <a16:creationId xmlns:a16="http://schemas.microsoft.com/office/drawing/2014/main" id="{C2150B63-C299-492F-8613-184A8D4F10DD}"/>
-              </a:ext>
-            </a:extLst>
-          </p:cNvPr>
-          <p:cNvSpPr/>
-          <p:nvPr/>
-        </p:nvSpPr>
-        <p:spPr>
-          <a:xfrm>
-            <a:off x="5076056" y="5239265"/>
-            <a:ext cx="336203" cy="277967"/>
-          </a:xfrm>
-          <a:prstGeom prst="roundRect">
-            <a:avLst/>
-          </a:prstGeom>
-          <a:noFill/>
-          <a:ln w="38100">
-            <a:solidFill>
-              <a:srgbClr val="FF0000"/>
-            </a:solidFill>
-          </a:ln>
-        </p:spPr>
-        <p:style>
-          <a:lnRef idx="2">
-            <a:schemeClr val="accent1">
-              <a:shade val="50000"/>
-            </a:schemeClr>
-          </a:lnRef>
-          <a:fillRef idx="1">
-            <a:schemeClr val="accent1"/>
-          </a:fillRef>
-          <a:effectRef idx="0">
-            <a:schemeClr val="accent1"/>
-          </a:effectRef>
-          <a:fontRef idx="minor">
-            <a:schemeClr val="lt1"/>
-          </a:fontRef>
-        </p:style>
-        <p:txBody>
-          <a:bodyPr rtlCol="0" anchor="ctr"/>
-          <a:lstStyle/>
-          <a:p>
-            <a:pPr algn="ctr"/>
-            <a:endParaRPr kumimoji="1" lang="ja-JP" altLang="en-US"/>
-          </a:p>
-        </p:txBody>
-      </p:sp>
-      <p:sp>
-        <p:nvSpPr>
-          <p:cNvPr id="14" name="楕円 13">
-            <a:extLst>
-              <a:ext uri="{FF2B5EF4-FFF2-40B4-BE49-F238E27FC236}">
-                <a16:creationId xmlns:a16="http://schemas.microsoft.com/office/drawing/2014/main" id="{BA2C4269-16C3-43F9-B1F6-04C2AC76AA81}"/>
-              </a:ext>
-            </a:extLst>
-          </p:cNvPr>
-          <p:cNvSpPr/>
-          <p:nvPr/>
-        </p:nvSpPr>
-        <p:spPr>
-          <a:xfrm>
-            <a:off x="5076056" y="4869160"/>
-            <a:ext cx="360040" cy="360040"/>
-          </a:xfrm>
-          <a:prstGeom prst="ellipse">
-            <a:avLst/>
-          </a:prstGeom>
-          <a:solidFill>
-            <a:srgbClr val="FF0000"/>
-          </a:solidFill>
-          <a:ln>
-            <a:solidFill>
-              <a:schemeClr val="tx1"/>
-            </a:solidFill>
-          </a:ln>
-        </p:spPr>
-        <p:style>
-          <a:lnRef idx="2">
-            <a:schemeClr val="accent1">
-              <a:shade val="50000"/>
-            </a:schemeClr>
-          </a:lnRef>
-          <a:fillRef idx="1">
-            <a:schemeClr val="accent1"/>
-          </a:fillRef>
-          <a:effectRef idx="0">
-            <a:schemeClr val="accent1"/>
-          </a:effectRef>
-          <a:fontRef idx="minor">
-            <a:schemeClr val="lt1"/>
-          </a:fontRef>
-        </p:style>
-        <p:txBody>
-          <a:bodyPr rtlCol="0" anchor="ctr"/>
-          <a:lstStyle/>
-          <a:p>
-            <a:pPr algn="ctr"/>
-            <a:r>
-              <a:rPr kumimoji="1" lang="en-US" altLang="ja-JP"/>
-              <a:t>4</a:t>
-            </a:r>
-            <a:endParaRPr kumimoji="1" lang="ja-JP" altLang="en-US"/>
-          </a:p>
-        </p:txBody>
-      </p:sp>
-      <p:sp>
-        <p:nvSpPr>
-          <p:cNvPr id="15" name="テキスト ボックス 14">
-            <a:extLst>
-              <a:ext uri="{FF2B5EF4-FFF2-40B4-BE49-F238E27FC236}">
-                <a16:creationId xmlns:a16="http://schemas.microsoft.com/office/drawing/2014/main" id="{70EEBF0B-0158-44C4-86D5-49C2A7A3371E}"/>
-              </a:ext>
-            </a:extLst>
-          </p:cNvPr>
-          <p:cNvSpPr txBox="1"/>
-          <p:nvPr/>
-        </p:nvSpPr>
-        <p:spPr>
-          <a:xfrm>
-            <a:off x="129510" y="1916832"/>
-            <a:ext cx="9123010" cy="369332"/>
-          </a:xfrm>
-          <a:prstGeom prst="rect">
-            <a:avLst/>
-          </a:prstGeom>
-          <a:noFill/>
-        </p:spPr>
-        <p:txBody>
-          <a:bodyPr wrap="none" rtlCol="0">
-            <a:spAutoFit/>
-          </a:bodyPr>
-          <a:lstStyle/>
-          <a:p>
-            <a:r>
-              <a:rPr kumimoji="1" lang="en-US" altLang="ja-JP"/>
-              <a:t>1. </a:t>
-            </a:r>
-            <a:r>
-              <a:rPr kumimoji="1" lang="ja-JP" altLang="en-US"/>
-              <a:t>自分のアカウントの </a:t>
-            </a:r>
-            <a:r>
-              <a:rPr kumimoji="1" lang="en-US" altLang="ja-JP"/>
-              <a:t>2. Code</a:t>
-            </a:r>
-            <a:r>
-              <a:rPr kumimoji="1" lang="ja-JP" altLang="en-US"/>
-              <a:t>をクリックし </a:t>
-            </a:r>
-            <a:r>
-              <a:rPr kumimoji="1" lang="en-US" altLang="ja-JP"/>
-              <a:t>3. SSH</a:t>
-            </a:r>
-            <a:r>
-              <a:rPr kumimoji="1" lang="ja-JP" altLang="en-US"/>
-              <a:t>を選んで </a:t>
-            </a:r>
-            <a:r>
-              <a:rPr kumimoji="1" lang="en-US" altLang="ja-JP"/>
-              <a:t>4. </a:t>
-            </a:r>
-            <a:r>
-              <a:rPr kumimoji="1" lang="ja-JP" altLang="en-US"/>
-              <a:t>コピーボタンを押す</a:t>
-            </a:r>
-          </a:p>
-        </p:txBody>
-      </p:sp>
+      </p:cxnSp>
     </p:spTree>
     <p:extLst>
       <p:ext uri="{BB962C8B-B14F-4D97-AF65-F5344CB8AC3E}">
-        <p14:creationId xmlns:p14="http://schemas.microsoft.com/office/powerpoint/2010/main" val="2794258674"/>
+        <p14:creationId xmlns:p14="http://schemas.microsoft.com/office/powerpoint/2010/main" val="2354510424"/>
       </p:ext>
     </p:extLst>
   </p:cSld>
@@ -6387,7 +6353,7 @@
           <p:cNvPr id="2" name="テキスト プレースホルダー 1">
             <a:extLst>
               <a:ext uri="{FF2B5EF4-FFF2-40B4-BE49-F238E27FC236}">
-                <a16:creationId xmlns:a16="http://schemas.microsoft.com/office/drawing/2014/main" id="{2F0FA607-9011-4295-A85B-89A4632F2FE4}"/>
+                <a16:creationId xmlns:a16="http://schemas.microsoft.com/office/drawing/2014/main" id="{7C084AF3-E764-4511-AB89-AAF594B578E7}"/>
               </a:ext>
             </a:extLst>
           </p:cNvPr>
@@ -6409,7 +6375,11 @@
             </a:r>
             <a:r>
               <a:rPr lang="en-US" altLang="ja-JP"/>
-              <a:t>2 - Step 3</a:t>
+              <a:t>2 - Step </a:t>
+            </a:r>
+            <a:r>
+              <a:rPr lang="ja-JP" altLang="en-US"/>
+              <a:t>３</a:t>
             </a:r>
             <a:endParaRPr kumimoji="1" lang="ja-JP" altLang="en-US"/>
           </a:p>
@@ -6417,10 +6387,10 @@
       </p:sp>
       <p:sp>
         <p:nvSpPr>
-          <p:cNvPr id="4" name="テキスト ボックス 3">
-            <a:extLst>
-              <a:ext uri="{FF2B5EF4-FFF2-40B4-BE49-F238E27FC236}">
-                <a16:creationId xmlns:a16="http://schemas.microsoft.com/office/drawing/2014/main" id="{69B31432-F7C9-48AC-936C-0D1BEFA2202F}"/>
+          <p:cNvPr id="3" name="テキスト ボックス 2">
+            <a:extLst>
+              <a:ext uri="{FF2B5EF4-FFF2-40B4-BE49-F238E27FC236}">
+                <a16:creationId xmlns:a16="http://schemas.microsoft.com/office/drawing/2014/main" id="{B4138397-3A94-483A-A78D-48AF60704EA1}"/>
               </a:ext>
             </a:extLst>
           </p:cNvPr>
@@ -6429,125 +6399,8 @@
         </p:nvSpPr>
         <p:spPr>
           <a:xfrm>
-            <a:off x="251520" y="1916832"/>
-            <a:ext cx="8496944" cy="1323439"/>
-          </a:xfrm>
-          <a:prstGeom prst="rect">
-            <a:avLst/>
-          </a:prstGeom>
-          <a:noFill/>
-          <a:ln>
-            <a:solidFill>
-              <a:schemeClr val="tx1"/>
-            </a:solidFill>
-          </a:ln>
-        </p:spPr>
-        <p:txBody>
-          <a:bodyPr wrap="square">
-            <a:spAutoFit/>
-          </a:bodyPr>
-          <a:lstStyle/>
-          <a:p>
-            <a:r>
-              <a:rPr lang="en-US" altLang="ja-JP" sz="2000" dirty="0">
-                <a:latin typeface="Consolas" panose="020B0609020204030204" pitchFamily="49" charset="0"/>
-              </a:rPr>
-              <a:t>cd</a:t>
-            </a:r>
-          </a:p>
-          <a:p>
-            <a:r>
-              <a:rPr lang="en-US" altLang="ja-JP" sz="2000" dirty="0">
-                <a:latin typeface="Consolas" panose="020B0609020204030204" pitchFamily="49" charset="0"/>
-              </a:rPr>
-              <a:t>cd </a:t>
-            </a:r>
-            <a:r>
-              <a:rPr lang="en-US" altLang="ja-JP" sz="2000" dirty="0" err="1">
-                <a:latin typeface="Consolas" panose="020B0609020204030204" pitchFamily="49" charset="0"/>
-              </a:rPr>
-              <a:t>github</a:t>
-            </a:r>
-            <a:endParaRPr lang="en-US" altLang="ja-JP" sz="2000" dirty="0">
-              <a:latin typeface="Consolas" panose="020B0609020204030204" pitchFamily="49" charset="0"/>
-            </a:endParaRPr>
-          </a:p>
-          <a:p>
-            <a:r>
-              <a:rPr lang="en-US" altLang="ja-JP" sz="2000" dirty="0">
-                <a:latin typeface="Consolas" panose="020B0609020204030204" pitchFamily="49" charset="0"/>
-              </a:rPr>
-              <a:t>git clone </a:t>
-            </a:r>
-            <a:r>
-              <a:rPr lang="en-US" altLang="ja-JP" sz="2000" dirty="0" err="1">
-                <a:solidFill>
-                  <a:srgbClr val="FF0000"/>
-                </a:solidFill>
-                <a:latin typeface="Consolas" panose="020B0609020204030204" pitchFamily="49" charset="0"/>
-              </a:rPr>
-              <a:t>git@github.com:github-watanabe</a:t>
-            </a:r>
-            <a:r>
-              <a:rPr lang="en-US" altLang="ja-JP" sz="2000" dirty="0">
-                <a:solidFill>
-                  <a:srgbClr val="FF0000"/>
-                </a:solidFill>
-                <a:latin typeface="Consolas" panose="020B0609020204030204" pitchFamily="49" charset="0"/>
-              </a:rPr>
-              <a:t>/</a:t>
-            </a:r>
-            <a:r>
-              <a:rPr lang="en-US" altLang="ja-JP" sz="2000" dirty="0" err="1">
-                <a:solidFill>
-                  <a:srgbClr val="FF0000"/>
-                </a:solidFill>
-                <a:latin typeface="Consolas" panose="020B0609020204030204" pitchFamily="49" charset="0"/>
-              </a:rPr>
-              <a:t>tyrano_sample.git</a:t>
-            </a:r>
-            <a:endParaRPr lang="en-US" altLang="ja-JP" sz="2000" dirty="0">
-              <a:solidFill>
-                <a:srgbClr val="FF0000"/>
-              </a:solidFill>
-              <a:latin typeface="Consolas" panose="020B0609020204030204" pitchFamily="49" charset="0"/>
-            </a:endParaRPr>
-          </a:p>
-          <a:p>
-            <a:r>
-              <a:rPr lang="en-US" altLang="ja-JP" sz="2000" dirty="0">
-                <a:latin typeface="Consolas" panose="020B0609020204030204" pitchFamily="49" charset="0"/>
-              </a:rPr>
-              <a:t>cd </a:t>
-            </a:r>
-            <a:r>
-              <a:rPr lang="en-US" altLang="ja-JP" sz="2000" dirty="0" err="1">
-                <a:latin typeface="Consolas" panose="020B0609020204030204" pitchFamily="49" charset="0"/>
-              </a:rPr>
-              <a:t>tyrano_sample</a:t>
-            </a:r>
-            <a:endParaRPr lang="en-US" altLang="ja-JP" sz="2000" dirty="0">
-              <a:latin typeface="Consolas" panose="020B0609020204030204" pitchFamily="49" charset="0"/>
-            </a:endParaRPr>
-          </a:p>
-        </p:txBody>
-      </p:sp>
-      <p:sp>
-        <p:nvSpPr>
-          <p:cNvPr id="5" name="テキスト ボックス 4">
-            <a:extLst>
-              <a:ext uri="{FF2B5EF4-FFF2-40B4-BE49-F238E27FC236}">
-                <a16:creationId xmlns:a16="http://schemas.microsoft.com/office/drawing/2014/main" id="{C45384CE-6A62-416E-B99E-F4B9BE5FC64A}"/>
-              </a:ext>
-            </a:extLst>
-          </p:cNvPr>
-          <p:cNvSpPr txBox="1"/>
-          <p:nvPr/>
-        </p:nvSpPr>
-        <p:spPr>
-          <a:xfrm>
-            <a:off x="107504" y="1124744"/>
-            <a:ext cx="4219425" cy="584775"/>
+            <a:off x="179512" y="1196752"/>
+            <a:ext cx="8292655" cy="400110"/>
           </a:xfrm>
           <a:prstGeom prst="rect">
             <a:avLst/>
@@ -6561,22 +6414,125 @@
           <a:lstStyle/>
           <a:p>
             <a:r>
-              <a:rPr kumimoji="1" lang="en-US" altLang="ja-JP" sz="3200"/>
-              <a:t>Git Bash</a:t>
-            </a:r>
-            <a:r>
-              <a:rPr kumimoji="1" lang="ja-JP" altLang="en-US" sz="3200"/>
-              <a:t>で以下を実行</a:t>
-            </a:r>
-          </a:p>
-        </p:txBody>
-      </p:sp>
-      <p:sp>
-        <p:nvSpPr>
-          <p:cNvPr id="6" name="テキスト ボックス 5">
-            <a:extLst>
-              <a:ext uri="{FF2B5EF4-FFF2-40B4-BE49-F238E27FC236}">
-                <a16:creationId xmlns:a16="http://schemas.microsoft.com/office/drawing/2014/main" id="{454079E6-DC99-4663-8764-0A9DE27615B4}"/>
+              <a:rPr kumimoji="1" lang="en-US" altLang="ja-JP" sz="2000" dirty="0"/>
+              <a:t>VS Code</a:t>
+            </a:r>
+            <a:r>
+              <a:rPr kumimoji="1" lang="ja-JP" altLang="en-US" sz="2000" dirty="0"/>
+              <a:t>の「フォルダーを開く」で「</a:t>
+            </a:r>
+            <a:r>
+              <a:rPr lang="en-US" altLang="ja-JP" sz="2000" dirty="0"/>
+              <a:t>/z/</a:t>
+            </a:r>
+            <a:r>
+              <a:rPr lang="en-US" altLang="ja-JP" sz="2000" dirty="0" err="1"/>
+              <a:t>github</a:t>
+            </a:r>
+            <a:r>
+              <a:rPr lang="en-US" altLang="ja-JP" sz="2000" dirty="0"/>
+              <a:t>/</a:t>
+            </a:r>
+            <a:r>
+              <a:rPr lang="en-US" altLang="ja-JP" sz="2000" dirty="0" err="1"/>
+              <a:t>tyrano_sample</a:t>
+            </a:r>
+            <a:r>
+              <a:rPr lang="ja-JP" altLang="en-US" sz="2000" dirty="0"/>
+              <a:t>」を開く</a:t>
+            </a:r>
+            <a:endParaRPr kumimoji="1" lang="ja-JP" altLang="en-US" sz="2000" dirty="0"/>
+          </a:p>
+        </p:txBody>
+      </p:sp>
+      <p:pic>
+        <p:nvPicPr>
+          <p:cNvPr id="6" name="図 5">
+            <a:extLst>
+              <a:ext uri="{FF2B5EF4-FFF2-40B4-BE49-F238E27FC236}">
+                <a16:creationId xmlns:a16="http://schemas.microsoft.com/office/drawing/2014/main" id="{AE3B296E-B6BB-4476-9DFE-4CD0282397C4}"/>
+              </a:ext>
+            </a:extLst>
+          </p:cNvPr>
+          <p:cNvPicPr>
+            <a:picLocks noChangeAspect="1"/>
+          </p:cNvPicPr>
+          <p:nvPr/>
+        </p:nvPicPr>
+        <p:blipFill>
+          <a:blip r:embed="rId2"/>
+          <a:stretch>
+            <a:fillRect/>
+          </a:stretch>
+        </p:blipFill>
+        <p:spPr>
+          <a:xfrm>
+            <a:off x="395536" y="1916832"/>
+            <a:ext cx="3231517" cy="4270220"/>
+          </a:xfrm>
+          <a:prstGeom prst="rect">
+            <a:avLst/>
+          </a:prstGeom>
+        </p:spPr>
+      </p:pic>
+      <p:sp>
+        <p:nvSpPr>
+          <p:cNvPr id="7" name="四角形: 角を丸くする 6">
+            <a:extLst>
+              <a:ext uri="{FF2B5EF4-FFF2-40B4-BE49-F238E27FC236}">
+                <a16:creationId xmlns:a16="http://schemas.microsoft.com/office/drawing/2014/main" id="{5E5BBBC0-3485-4284-98EF-A7172DE2D619}"/>
+              </a:ext>
+            </a:extLst>
+          </p:cNvPr>
+          <p:cNvSpPr/>
+          <p:nvPr/>
+        </p:nvSpPr>
+        <p:spPr>
+          <a:xfrm>
+            <a:off x="1331640" y="2996952"/>
+            <a:ext cx="1872208" cy="360040"/>
+          </a:xfrm>
+          <a:prstGeom prst="roundRect">
+            <a:avLst/>
+          </a:prstGeom>
+          <a:noFill/>
+          <a:ln w="38100">
+            <a:solidFill>
+              <a:srgbClr val="FF0000"/>
+            </a:solidFill>
+          </a:ln>
+        </p:spPr>
+        <p:style>
+          <a:lnRef idx="2">
+            <a:schemeClr val="accent1">
+              <a:shade val="50000"/>
+            </a:schemeClr>
+          </a:lnRef>
+          <a:fillRef idx="1">
+            <a:schemeClr val="accent1"/>
+          </a:fillRef>
+          <a:effectRef idx="0">
+            <a:schemeClr val="accent1"/>
+          </a:effectRef>
+          <a:fontRef idx="minor">
+            <a:schemeClr val="lt1"/>
+          </a:fontRef>
+        </p:style>
+        <p:txBody>
+          <a:bodyPr rtlCol="0" anchor="ctr"/>
+          <a:lstStyle/>
+          <a:p>
+            <a:pPr algn="ctr"/>
+            <a:endParaRPr kumimoji="1" lang="ja-JP" altLang="en-US"/>
+          </a:p>
+        </p:txBody>
+      </p:sp>
+      <p:sp>
+        <p:nvSpPr>
+          <p:cNvPr id="8" name="テキスト ボックス 7">
+            <a:extLst>
+              <a:ext uri="{FF2B5EF4-FFF2-40B4-BE49-F238E27FC236}">
+                <a16:creationId xmlns:a16="http://schemas.microsoft.com/office/drawing/2014/main" id="{E8B64837-0310-4EE5-8B22-A5562545C390}"/>
               </a:ext>
             </a:extLst>
           </p:cNvPr>
@@ -6585,8 +6541,8 @@
         </p:nvSpPr>
         <p:spPr>
           <a:xfrm>
-            <a:off x="1675289" y="3861048"/>
-            <a:ext cx="7468711" cy="369332"/>
+            <a:off x="4139952" y="2132856"/>
+            <a:ext cx="4288353" cy="369332"/>
           </a:xfrm>
           <a:prstGeom prst="rect">
             <a:avLst/>
@@ -6600,43 +6556,47 @@
           <a:lstStyle/>
           <a:p>
             <a:r>
-              <a:rPr kumimoji="1" lang="ja-JP" altLang="en-US"/>
-              <a:t>ここはコピーされているはずなので、マウス右クリックから「</a:t>
-            </a:r>
-            <a:r>
-              <a:rPr kumimoji="1" lang="en-US" altLang="ja-JP"/>
-              <a:t>Paste</a:t>
-            </a:r>
-            <a:r>
-              <a:rPr kumimoji="1" lang="ja-JP" altLang="en-US"/>
-              <a:t>」</a:t>
-            </a:r>
+              <a:rPr lang="ja-JP" altLang="en-US"/>
+              <a:t>ここに</a:t>
+            </a:r>
+            <a:r>
+              <a:rPr lang="en-US" altLang="ja-JP"/>
+              <a:t>TYRANO_SAMPLE</a:t>
+            </a:r>
+            <a:r>
+              <a:rPr lang="ja-JP" altLang="en-US"/>
+              <a:t>と表示される</a:t>
+            </a:r>
+            <a:endParaRPr kumimoji="1" lang="ja-JP" altLang="en-US"/>
           </a:p>
         </p:txBody>
       </p:sp>
       <p:cxnSp>
         <p:nvCxnSpPr>
-          <p:cNvPr id="7" name="直線矢印コネクタ 6">
-            <a:extLst>
-              <a:ext uri="{FF2B5EF4-FFF2-40B4-BE49-F238E27FC236}">
-                <a16:creationId xmlns:a16="http://schemas.microsoft.com/office/drawing/2014/main" id="{1996A328-0833-0159-7F3F-19099274D116}"/>
-              </a:ext>
-            </a:extLst>
-          </p:cNvPr>
-          <p:cNvCxnSpPr/>
+          <p:cNvPr id="9" name="コネクタ: カギ線 8">
+            <a:extLst>
+              <a:ext uri="{FF2B5EF4-FFF2-40B4-BE49-F238E27FC236}">
+                <a16:creationId xmlns:a16="http://schemas.microsoft.com/office/drawing/2014/main" id="{62B39A55-72F3-436E-9B40-3EE7E2092161}"/>
+              </a:ext>
+            </a:extLst>
+          </p:cNvPr>
+          <p:cNvCxnSpPr>
+            <a:cxnSpLocks/>
+            <a:stCxn id="8" idx="2"/>
+          </p:cNvCxnSpPr>
           <p:nvPr/>
         </p:nvCxnSpPr>
         <p:spPr>
-          <a:xfrm flipV="1">
-            <a:off x="5220072" y="2924944"/>
-            <a:ext cx="0" cy="864096"/>
-          </a:xfrm>
-          <a:prstGeom prst="straightConnector1">
-            <a:avLst/>
-          </a:prstGeom>
-          <a:ln>
+          <a:xfrm rot="5400000">
+            <a:off x="4388594" y="1317443"/>
+            <a:ext cx="710790" cy="3080281"/>
+          </a:xfrm>
+          <a:prstGeom prst="bentConnector2">
+            <a:avLst/>
+          </a:prstGeom>
+          <a:ln w="28575">
             <a:solidFill>
-              <a:schemeClr val="tx1"/>
+              <a:srgbClr val="FF0000"/>
             </a:solidFill>
             <a:headEnd type="none" w="med" len="med"/>
             <a:tailEnd type="triangle"/>
@@ -6660,7 +6620,7 @@
     </p:spTree>
     <p:extLst>
       <p:ext uri="{BB962C8B-B14F-4D97-AF65-F5344CB8AC3E}">
-        <p14:creationId xmlns:p14="http://schemas.microsoft.com/office/powerpoint/2010/main" val="2354510424"/>
+        <p14:creationId xmlns:p14="http://schemas.microsoft.com/office/powerpoint/2010/main" val="3706782819"/>
       </p:ext>
     </p:extLst>
   </p:cSld>
@@ -6692,7 +6652,7 @@
           <p:cNvPr id="2" name="テキスト プレースホルダー 1">
             <a:extLst>
               <a:ext uri="{FF2B5EF4-FFF2-40B4-BE49-F238E27FC236}">
-                <a16:creationId xmlns:a16="http://schemas.microsoft.com/office/drawing/2014/main" id="{7C084AF3-E764-4511-AB89-AAF594B578E7}"/>
+                <a16:creationId xmlns:a16="http://schemas.microsoft.com/office/drawing/2014/main" id="{AA4E3CB1-1DC6-436B-B556-90619A54EE3F}"/>
               </a:ext>
             </a:extLst>
           </p:cNvPr>
@@ -6709,18 +6669,9 @@
           <a:lstStyle/>
           <a:p>
             <a:r>
-              <a:rPr lang="ja-JP" altLang="en-US"/>
-              <a:t>課題</a:t>
-            </a:r>
-            <a:r>
-              <a:rPr lang="en-US" altLang="ja-JP"/>
-              <a:t>2 - Step </a:t>
-            </a:r>
-            <a:r>
-              <a:rPr lang="ja-JP" altLang="en-US"/>
-              <a:t>３</a:t>
-            </a:r>
-            <a:endParaRPr kumimoji="1" lang="ja-JP" altLang="en-US"/>
+              <a:rPr kumimoji="1" lang="ja-JP" altLang="en-US"/>
+              <a:t>ブラウザのセキュリティ</a:t>
+            </a:r>
           </a:p>
         </p:txBody>
       </p:sp>
@@ -6729,7 +6680,7 @@
           <p:cNvPr id="3" name="テキスト ボックス 2">
             <a:extLst>
               <a:ext uri="{FF2B5EF4-FFF2-40B4-BE49-F238E27FC236}">
-                <a16:creationId xmlns:a16="http://schemas.microsoft.com/office/drawing/2014/main" id="{B4138397-3A94-483A-A78D-48AF60704EA1}"/>
+                <a16:creationId xmlns:a16="http://schemas.microsoft.com/office/drawing/2014/main" id="{A46A6BCD-071A-43F4-A749-971DE130EF49}"/>
               </a:ext>
             </a:extLst>
           </p:cNvPr>
@@ -6738,8 +6689,8 @@
         </p:nvSpPr>
         <p:spPr>
           <a:xfrm>
-            <a:off x="179512" y="1196752"/>
-            <a:ext cx="8292655" cy="400110"/>
+            <a:off x="395536" y="1052736"/>
+            <a:ext cx="7879080" cy="1200329"/>
           </a:xfrm>
           <a:prstGeom prst="rect">
             <a:avLst/>
@@ -6753,73 +6704,209 @@
           <a:lstStyle/>
           <a:p>
             <a:r>
-              <a:rPr kumimoji="1" lang="en-US" altLang="ja-JP" sz="2000" dirty="0"/>
-              <a:t>VS Code</a:t>
-            </a:r>
-            <a:r>
-              <a:rPr kumimoji="1" lang="ja-JP" altLang="en-US" sz="2000" dirty="0"/>
-              <a:t>の「フォルダーを開く」で「</a:t>
-            </a:r>
-            <a:r>
-              <a:rPr lang="en-US" altLang="ja-JP" sz="2000" dirty="0"/>
-              <a:t>/z/</a:t>
-            </a:r>
-            <a:r>
-              <a:rPr lang="en-US" altLang="ja-JP" sz="2000" dirty="0" err="1"/>
-              <a:t>github</a:t>
-            </a:r>
-            <a:r>
-              <a:rPr lang="en-US" altLang="ja-JP" sz="2000" dirty="0"/>
-              <a:t>/</a:t>
-            </a:r>
-            <a:r>
-              <a:rPr lang="en-US" altLang="ja-JP" sz="2000" dirty="0" err="1"/>
-              <a:t>tyrano_sample</a:t>
-            </a:r>
-            <a:r>
-              <a:rPr lang="ja-JP" altLang="en-US" sz="2000" dirty="0"/>
-              <a:t>」を開く</a:t>
-            </a:r>
-            <a:endParaRPr kumimoji="1" lang="ja-JP" altLang="en-US" sz="2000" dirty="0"/>
+              <a:rPr kumimoji="1" lang="ja-JP" altLang="en-US" sz="2400"/>
+              <a:t>ブラウザは勝手にローカルファイルにアクセスできない</a:t>
+            </a:r>
+            <a:endParaRPr kumimoji="1" lang="en-US" altLang="ja-JP" sz="2400"/>
+          </a:p>
+          <a:p>
+            <a:r>
+              <a:rPr lang="ja-JP" altLang="en-US" sz="2400"/>
+              <a:t>もしアクセスできると、悪意あるサイトに個人情報を</a:t>
+            </a:r>
+            <a:endParaRPr lang="en-US" altLang="ja-JP" sz="2400"/>
+          </a:p>
+          <a:p>
+            <a:r>
+              <a:rPr kumimoji="1" lang="ja-JP" altLang="en-US" sz="2400"/>
+              <a:t>引き抜かれる可能性がある</a:t>
+            </a:r>
+            <a:endParaRPr kumimoji="1" lang="en-US" altLang="ja-JP" sz="2400"/>
           </a:p>
         </p:txBody>
       </p:sp>
       <p:pic>
         <p:nvPicPr>
-          <p:cNvPr id="6" name="図 5">
-            <a:extLst>
-              <a:ext uri="{FF2B5EF4-FFF2-40B4-BE49-F238E27FC236}">
-                <a16:creationId xmlns:a16="http://schemas.microsoft.com/office/drawing/2014/main" id="{AE3B296E-B6BB-4476-9DFE-4CD0282397C4}"/>
+          <p:cNvPr id="2052" name="Picture 4" descr="ハッカーのイラスト（笑顔）">
+            <a:extLst>
+              <a:ext uri="{FF2B5EF4-FFF2-40B4-BE49-F238E27FC236}">
+                <a16:creationId xmlns:a16="http://schemas.microsoft.com/office/drawing/2014/main" id="{FED8C577-F5C5-4D50-B638-82AD560FF33D}"/>
               </a:ext>
             </a:extLst>
           </p:cNvPr>
           <p:cNvPicPr>
-            <a:picLocks noChangeAspect="1"/>
+            <a:picLocks noChangeAspect="1" noChangeArrowheads="1"/>
           </p:cNvPicPr>
           <p:nvPr/>
         </p:nvPicPr>
         <p:blipFill>
-          <a:blip r:embed="rId2"/>
+          <a:blip r:embed="rId2">
+            <a:extLst>
+              <a:ext uri="{28A0092B-C50C-407E-A947-70E740481C1C}">
+                <a14:useLocalDpi xmlns:a14="http://schemas.microsoft.com/office/drawing/2010/main" val="0"/>
+              </a:ext>
+            </a:extLst>
+          </a:blip>
+          <a:srcRect/>
           <a:stretch>
             <a:fillRect/>
           </a:stretch>
         </p:blipFill>
-        <p:spPr>
-          <a:xfrm>
-            <a:off x="395536" y="1916832"/>
-            <a:ext cx="3231517" cy="4270220"/>
-          </a:xfrm>
-          <a:prstGeom prst="rect">
-            <a:avLst/>
-          </a:prstGeom>
+        <p:spPr bwMode="auto">
+          <a:xfrm>
+            <a:off x="7668344" y="3429000"/>
+            <a:ext cx="1085850" cy="1428750"/>
+          </a:xfrm>
+          <a:prstGeom prst="rect">
+            <a:avLst/>
+          </a:prstGeom>
+          <a:noFill/>
+          <a:extLst>
+            <a:ext uri="{909E8E84-426E-40DD-AFC4-6F175D3DCCD1}">
+              <a14:hiddenFill xmlns:a14="http://schemas.microsoft.com/office/drawing/2010/main">
+                <a:solidFill>
+                  <a:srgbClr val="FFFFFF"/>
+                </a:solidFill>
+              </a14:hiddenFill>
+            </a:ext>
+          </a:extLst>
         </p:spPr>
       </p:pic>
       <p:sp>
         <p:nvSpPr>
-          <p:cNvPr id="7" name="四角形: 角を丸くする 6">
-            <a:extLst>
-              <a:ext uri="{FF2B5EF4-FFF2-40B4-BE49-F238E27FC236}">
-                <a16:creationId xmlns:a16="http://schemas.microsoft.com/office/drawing/2014/main" id="{5E5BBBC0-3485-4284-98EF-A7172DE2D619}"/>
+          <p:cNvPr id="6" name="テキスト ボックス 5">
+            <a:extLst>
+              <a:ext uri="{FF2B5EF4-FFF2-40B4-BE49-F238E27FC236}">
+                <a16:creationId xmlns:a16="http://schemas.microsoft.com/office/drawing/2014/main" id="{0FE84345-8982-4789-BAFE-FC014C6C64A8}"/>
+              </a:ext>
+            </a:extLst>
+          </p:cNvPr>
+          <p:cNvSpPr txBox="1"/>
+          <p:nvPr/>
+        </p:nvSpPr>
+        <p:spPr>
+          <a:xfrm>
+            <a:off x="2627784" y="2636912"/>
+            <a:ext cx="1569660" cy="369332"/>
+          </a:xfrm>
+          <a:prstGeom prst="rect">
+            <a:avLst/>
+          </a:prstGeom>
+          <a:noFill/>
+        </p:spPr>
+        <p:txBody>
+          <a:bodyPr wrap="none" rtlCol="0">
+            <a:spAutoFit/>
+          </a:bodyPr>
+          <a:lstStyle/>
+          <a:p>
+            <a:r>
+              <a:rPr kumimoji="1" lang="ja-JP" altLang="en-US" dirty="0"/>
+              <a:t>クライアント</a:t>
+            </a:r>
+          </a:p>
+        </p:txBody>
+      </p:sp>
+      <p:pic>
+        <p:nvPicPr>
+          <p:cNvPr id="9" name="Picture 4">
+            <a:extLst>
+              <a:ext uri="{FF2B5EF4-FFF2-40B4-BE49-F238E27FC236}">
+                <a16:creationId xmlns:a16="http://schemas.microsoft.com/office/drawing/2014/main" id="{ED643405-3582-4B67-8DDF-286B804141B7}"/>
+              </a:ext>
+            </a:extLst>
+          </p:cNvPr>
+          <p:cNvPicPr>
+            <a:picLocks noChangeAspect="1" noChangeArrowheads="1"/>
+          </p:cNvPicPr>
+          <p:nvPr/>
+        </p:nvPicPr>
+        <p:blipFill>
+          <a:blip r:embed="rId3" cstate="print">
+            <a:extLst>
+              <a:ext uri="{28A0092B-C50C-407E-A947-70E740481C1C}">
+                <a14:useLocalDpi xmlns:a14="http://schemas.microsoft.com/office/drawing/2010/main" val="0"/>
+              </a:ext>
+            </a:extLst>
+          </a:blip>
+          <a:srcRect/>
+          <a:stretch>
+            <a:fillRect/>
+          </a:stretch>
+        </p:blipFill>
+        <p:spPr bwMode="auto">
+          <a:xfrm>
+            <a:off x="2843808" y="3356992"/>
+            <a:ext cx="1080120" cy="1080120"/>
+          </a:xfrm>
+          <a:prstGeom prst="rect">
+            <a:avLst/>
+          </a:prstGeom>
+          <a:noFill/>
+          <a:extLst>
+            <a:ext uri="{909E8E84-426E-40DD-AFC4-6F175D3DCCD1}">
+              <a14:hiddenFill xmlns:a14="http://schemas.microsoft.com/office/drawing/2010/main">
+                <a:solidFill>
+                  <a:srgbClr val="FFFFFF"/>
+                </a:solidFill>
+              </a14:hiddenFill>
+            </a:ext>
+          </a:extLst>
+        </p:spPr>
+      </p:pic>
+      <p:pic>
+        <p:nvPicPr>
+          <p:cNvPr id="10" name="Picture 6" descr="データセンターのイラスト（単体）">
+            <a:extLst>
+              <a:ext uri="{FF2B5EF4-FFF2-40B4-BE49-F238E27FC236}">
+                <a16:creationId xmlns:a16="http://schemas.microsoft.com/office/drawing/2014/main" id="{51C002EE-E2E5-4209-BFF7-26CD4C798502}"/>
+              </a:ext>
+            </a:extLst>
+          </p:cNvPr>
+          <p:cNvPicPr>
+            <a:picLocks noChangeAspect="1" noChangeArrowheads="1"/>
+          </p:cNvPicPr>
+          <p:nvPr/>
+        </p:nvPicPr>
+        <p:blipFill>
+          <a:blip r:embed="rId4" cstate="print">
+            <a:extLst>
+              <a:ext uri="{28A0092B-C50C-407E-A947-70E740481C1C}">
+                <a14:useLocalDpi xmlns:a14="http://schemas.microsoft.com/office/drawing/2010/main" val="0"/>
+              </a:ext>
+            </a:extLst>
+          </a:blip>
+          <a:srcRect/>
+          <a:stretch>
+            <a:fillRect/>
+          </a:stretch>
+        </p:blipFill>
+        <p:spPr bwMode="auto">
+          <a:xfrm>
+            <a:off x="6372200" y="3140968"/>
+            <a:ext cx="1097090" cy="1649760"/>
+          </a:xfrm>
+          <a:prstGeom prst="rect">
+            <a:avLst/>
+          </a:prstGeom>
+          <a:noFill/>
+          <a:extLst>
+            <a:ext uri="{909E8E84-426E-40DD-AFC4-6F175D3DCCD1}">
+              <a14:hiddenFill xmlns:a14="http://schemas.microsoft.com/office/drawing/2010/main">
+                <a:solidFill>
+                  <a:srgbClr val="FFFFFF"/>
+                </a:solidFill>
+              </a14:hiddenFill>
+            </a:ext>
+          </a:extLst>
+        </p:spPr>
+      </p:pic>
+      <p:sp>
+        <p:nvSpPr>
+          <p:cNvPr id="12" name="矢印: 左右 11">
+            <a:extLst>
+              <a:ext uri="{FF2B5EF4-FFF2-40B4-BE49-F238E27FC236}">
+                <a16:creationId xmlns:a16="http://schemas.microsoft.com/office/drawing/2014/main" id="{BF1E826F-9A29-43C8-9983-E538CD0F6CD4}"/>
               </a:ext>
             </a:extLst>
           </p:cNvPr>
@@ -6828,16 +6915,18 @@
         </p:nvSpPr>
         <p:spPr>
           <a:xfrm>
-            <a:off x="1331640" y="2996952"/>
-            <a:ext cx="1872208" cy="360040"/>
-          </a:xfrm>
-          <a:prstGeom prst="roundRect">
-            <a:avLst/>
-          </a:prstGeom>
-          <a:noFill/>
-          <a:ln w="38100">
+            <a:off x="4499992" y="3645024"/>
+            <a:ext cx="1224136" cy="432048"/>
+          </a:xfrm>
+          <a:prstGeom prst="leftRightArrow">
+            <a:avLst/>
+          </a:prstGeom>
+          <a:solidFill>
+            <a:srgbClr val="FF0000"/>
+          </a:solidFill>
+          <a:ln>
             <a:solidFill>
-              <a:srgbClr val="FF0000"/>
+              <a:schemeClr val="tx1"/>
             </a:solidFill>
           </a:ln>
         </p:spPr>
@@ -6868,10 +6957,10 @@
       </p:sp>
       <p:sp>
         <p:nvSpPr>
-          <p:cNvPr id="8" name="テキスト ボックス 7">
-            <a:extLst>
-              <a:ext uri="{FF2B5EF4-FFF2-40B4-BE49-F238E27FC236}">
-                <a16:creationId xmlns:a16="http://schemas.microsoft.com/office/drawing/2014/main" id="{E8B64837-0310-4EE5-8B22-A5562545C390}"/>
+          <p:cNvPr id="13" name="テキスト ボックス 12">
+            <a:extLst>
+              <a:ext uri="{FF2B5EF4-FFF2-40B4-BE49-F238E27FC236}">
+                <a16:creationId xmlns:a16="http://schemas.microsoft.com/office/drawing/2014/main" id="{CD51B2AD-8509-4730-A58E-3FF832460BD6}"/>
               </a:ext>
             </a:extLst>
           </p:cNvPr>
@@ -6880,8 +6969,8 @@
         </p:nvSpPr>
         <p:spPr>
           <a:xfrm>
-            <a:off x="4139952" y="2132856"/>
-            <a:ext cx="4288353" cy="369332"/>
+            <a:off x="6228184" y="2708920"/>
+            <a:ext cx="1569660" cy="369332"/>
           </a:xfrm>
           <a:prstGeom prst="rect">
             <a:avLst/>
@@ -6895,71 +6984,216 @@
           <a:lstStyle/>
           <a:p>
             <a:r>
-              <a:rPr lang="ja-JP" altLang="en-US"/>
-              <a:t>ここに</a:t>
-            </a:r>
-            <a:r>
-              <a:rPr lang="en-US" altLang="ja-JP"/>
-              <a:t>TYRANO_SAMPLE</a:t>
-            </a:r>
-            <a:r>
-              <a:rPr lang="ja-JP" altLang="en-US"/>
-              <a:t>と表示される</a:t>
-            </a:r>
-            <a:endParaRPr kumimoji="1" lang="ja-JP" altLang="en-US"/>
-          </a:p>
-        </p:txBody>
-      </p:sp>
-      <p:cxnSp>
-        <p:nvCxnSpPr>
-          <p:cNvPr id="9" name="コネクタ: カギ線 8">
-            <a:extLst>
-              <a:ext uri="{FF2B5EF4-FFF2-40B4-BE49-F238E27FC236}">
-                <a16:creationId xmlns:a16="http://schemas.microsoft.com/office/drawing/2014/main" id="{62B39A55-72F3-436E-9B40-3EE7E2092161}"/>
-              </a:ext>
-            </a:extLst>
-          </p:cNvPr>
-          <p:cNvCxnSpPr>
-            <a:cxnSpLocks/>
-            <a:stCxn id="8" idx="2"/>
-          </p:cNvCxnSpPr>
-          <p:nvPr/>
-        </p:nvCxnSpPr>
-        <p:spPr>
-          <a:xfrm rot="5400000">
-            <a:off x="4388594" y="1317443"/>
-            <a:ext cx="710790" cy="3080281"/>
-          </a:xfrm>
-          <a:prstGeom prst="bentConnector2">
-            <a:avLst/>
-          </a:prstGeom>
-          <a:ln w="28575">
+              <a:rPr kumimoji="1" lang="ja-JP" altLang="en-US" dirty="0"/>
+              <a:t>ウェブサーバ</a:t>
+            </a:r>
+          </a:p>
+        </p:txBody>
+      </p:sp>
+      <p:sp>
+        <p:nvSpPr>
+          <p:cNvPr id="18" name="矢印: 左右 17">
+            <a:extLst>
+              <a:ext uri="{FF2B5EF4-FFF2-40B4-BE49-F238E27FC236}">
+                <a16:creationId xmlns:a16="http://schemas.microsoft.com/office/drawing/2014/main" id="{15520441-D7A1-4F36-B0A0-FDD44B535BDA}"/>
+              </a:ext>
+            </a:extLst>
+          </p:cNvPr>
+          <p:cNvSpPr/>
+          <p:nvPr/>
+        </p:nvSpPr>
+        <p:spPr>
+          <a:xfrm rot="18900000">
+            <a:off x="1593153" y="4734630"/>
+            <a:ext cx="1224136" cy="432048"/>
+          </a:xfrm>
+          <a:prstGeom prst="leftRightArrow">
+            <a:avLst/>
+          </a:prstGeom>
+          <a:solidFill>
+            <a:srgbClr val="FF0000"/>
+          </a:solidFill>
+          <a:ln>
             <a:solidFill>
-              <a:srgbClr val="FF0000"/>
+              <a:schemeClr val="tx1"/>
             </a:solidFill>
-            <a:headEnd type="none" w="med" len="med"/>
-            <a:tailEnd type="triangle"/>
           </a:ln>
         </p:spPr>
         <p:style>
-          <a:lnRef idx="1">
-            <a:schemeClr val="accent1"/>
+          <a:lnRef idx="2">
+            <a:schemeClr val="accent1">
+              <a:shade val="50000"/>
+            </a:schemeClr>
           </a:lnRef>
-          <a:fillRef idx="0">
+          <a:fillRef idx="1">
             <a:schemeClr val="accent1"/>
           </a:fillRef>
           <a:effectRef idx="0">
             <a:schemeClr val="accent1"/>
           </a:effectRef>
           <a:fontRef idx="minor">
-            <a:schemeClr val="tx1"/>
+            <a:schemeClr val="lt1"/>
           </a:fontRef>
         </p:style>
-      </p:cxnSp>
+        <p:txBody>
+          <a:bodyPr rtlCol="0" anchor="ctr"/>
+          <a:lstStyle/>
+          <a:p>
+            <a:pPr algn="ctr"/>
+            <a:endParaRPr kumimoji="1" lang="ja-JP" altLang="en-US"/>
+          </a:p>
+        </p:txBody>
+      </p:sp>
+      <p:sp>
+        <p:nvSpPr>
+          <p:cNvPr id="19" name="フローチャート: 磁気ディスク 18">
+            <a:extLst>
+              <a:ext uri="{FF2B5EF4-FFF2-40B4-BE49-F238E27FC236}">
+                <a16:creationId xmlns:a16="http://schemas.microsoft.com/office/drawing/2014/main" id="{D458549B-87E5-4F7A-9F6C-69C2AB55C634}"/>
+              </a:ext>
+            </a:extLst>
+          </p:cNvPr>
+          <p:cNvSpPr/>
+          <p:nvPr/>
+        </p:nvSpPr>
+        <p:spPr>
+          <a:xfrm>
+            <a:off x="755576" y="5517232"/>
+            <a:ext cx="864096" cy="792088"/>
+          </a:xfrm>
+          <a:prstGeom prst="flowChartMagneticDisk">
+            <a:avLst/>
+          </a:prstGeom>
+          <a:solidFill>
+            <a:schemeClr val="bg1">
+              <a:lumMod val="85000"/>
+            </a:schemeClr>
+          </a:solidFill>
+          <a:ln>
+            <a:solidFill>
+              <a:schemeClr val="tx1"/>
+            </a:solidFill>
+          </a:ln>
+        </p:spPr>
+        <p:style>
+          <a:lnRef idx="2">
+            <a:schemeClr val="accent1">
+              <a:shade val="50000"/>
+            </a:schemeClr>
+          </a:lnRef>
+          <a:fillRef idx="1">
+            <a:schemeClr val="accent1"/>
+          </a:fillRef>
+          <a:effectRef idx="0">
+            <a:schemeClr val="accent1"/>
+          </a:effectRef>
+          <a:fontRef idx="minor">
+            <a:schemeClr val="lt1"/>
+          </a:fontRef>
+        </p:style>
+        <p:txBody>
+          <a:bodyPr rtlCol="0" anchor="ctr"/>
+          <a:lstStyle/>
+          <a:p>
+            <a:pPr algn="ctr"/>
+            <a:endParaRPr kumimoji="1" lang="ja-JP" altLang="en-US"/>
+          </a:p>
+        </p:txBody>
+      </p:sp>
+      <p:pic>
+        <p:nvPicPr>
+          <p:cNvPr id="2054" name="Picture 6" descr="パソコンを使う人のイラスト（男性・泣いた顔）">
+            <a:extLst>
+              <a:ext uri="{FF2B5EF4-FFF2-40B4-BE49-F238E27FC236}">
+                <a16:creationId xmlns:a16="http://schemas.microsoft.com/office/drawing/2014/main" id="{331581C5-1725-45AE-A22C-DB965BB37188}"/>
+              </a:ext>
+            </a:extLst>
+          </p:cNvPr>
+          <p:cNvPicPr>
+            <a:picLocks noChangeAspect="1" noChangeArrowheads="1"/>
+          </p:cNvPicPr>
+          <p:nvPr/>
+        </p:nvPicPr>
+        <p:blipFill>
+          <a:blip r:embed="rId5" cstate="print">
+            <a:extLst>
+              <a:ext uri="{28A0092B-C50C-407E-A947-70E740481C1C}">
+                <a14:useLocalDpi xmlns:a14="http://schemas.microsoft.com/office/drawing/2010/main" val="0"/>
+              </a:ext>
+            </a:extLst>
+          </a:blip>
+          <a:srcRect/>
+          <a:stretch>
+            <a:fillRect/>
+          </a:stretch>
+        </p:blipFill>
+        <p:spPr bwMode="auto">
+          <a:xfrm>
+            <a:off x="971600" y="3573016"/>
+            <a:ext cx="850266" cy="1234827"/>
+          </a:xfrm>
+          <a:prstGeom prst="rect">
+            <a:avLst/>
+          </a:prstGeom>
+          <a:noFill/>
+          <a:extLst>
+            <a:ext uri="{909E8E84-426E-40DD-AFC4-6F175D3DCCD1}">
+              <a14:hiddenFill xmlns:a14="http://schemas.microsoft.com/office/drawing/2010/main">
+                <a:solidFill>
+                  <a:srgbClr val="FFFFFF"/>
+                </a:solidFill>
+              </a14:hiddenFill>
+            </a:ext>
+          </a:extLst>
+        </p:spPr>
+      </p:pic>
+      <p:sp>
+        <p:nvSpPr>
+          <p:cNvPr id="4" name="テキスト ボックス 3">
+            <a:extLst>
+              <a:ext uri="{FF2B5EF4-FFF2-40B4-BE49-F238E27FC236}">
+                <a16:creationId xmlns:a16="http://schemas.microsoft.com/office/drawing/2014/main" id="{CBA64D53-920E-43A7-8C67-648923E13119}"/>
+              </a:ext>
+            </a:extLst>
+          </p:cNvPr>
+          <p:cNvSpPr txBox="1"/>
+          <p:nvPr/>
+        </p:nvSpPr>
+        <p:spPr>
+          <a:xfrm>
+            <a:off x="2051720" y="5517232"/>
+            <a:ext cx="6955750" cy="830997"/>
+          </a:xfrm>
+          <a:prstGeom prst="rect">
+            <a:avLst/>
+          </a:prstGeom>
+          <a:noFill/>
+        </p:spPr>
+        <p:txBody>
+          <a:bodyPr wrap="none" rtlCol="0">
+            <a:spAutoFit/>
+          </a:bodyPr>
+          <a:lstStyle/>
+          <a:p>
+            <a:r>
+              <a:rPr kumimoji="1" lang="ja-JP" altLang="en-US" sz="2400"/>
+              <a:t>原則として、ユーザが直接指定したファイルのみ</a:t>
+            </a:r>
+            <a:endParaRPr kumimoji="1" lang="en-US" altLang="ja-JP" sz="2400"/>
+          </a:p>
+          <a:p>
+            <a:r>
+              <a:rPr lang="ja-JP" altLang="en-US" sz="2400"/>
+              <a:t>サーバに送信できる</a:t>
+            </a:r>
+            <a:endParaRPr lang="en-US" altLang="ja-JP" sz="2400"/>
+          </a:p>
+        </p:txBody>
+      </p:sp>
     </p:spTree>
     <p:extLst>
       <p:ext uri="{BB962C8B-B14F-4D97-AF65-F5344CB8AC3E}">
-        <p14:creationId xmlns:p14="http://schemas.microsoft.com/office/powerpoint/2010/main" val="3706782819"/>
+        <p14:creationId xmlns:p14="http://schemas.microsoft.com/office/powerpoint/2010/main" val="1128540872"/>
       </p:ext>
     </p:extLst>
   </p:cSld>
@@ -6991,7 +7225,7 @@
           <p:cNvPr id="2" name="テキスト プレースホルダー 1">
             <a:extLst>
               <a:ext uri="{FF2B5EF4-FFF2-40B4-BE49-F238E27FC236}">
-                <a16:creationId xmlns:a16="http://schemas.microsoft.com/office/drawing/2014/main" id="{AA4E3CB1-1DC6-436B-B556-90619A54EE3F}"/>
+                <a16:creationId xmlns:a16="http://schemas.microsoft.com/office/drawing/2014/main" id="{6CAD3FE7-AD00-4589-A1BB-87A442789ECC}"/>
               </a:ext>
             </a:extLst>
           </p:cNvPr>
@@ -7019,7 +7253,7 @@
           <p:cNvPr id="3" name="テキスト ボックス 2">
             <a:extLst>
               <a:ext uri="{FF2B5EF4-FFF2-40B4-BE49-F238E27FC236}">
-                <a16:creationId xmlns:a16="http://schemas.microsoft.com/office/drawing/2014/main" id="{A46A6BCD-071A-43F4-A749-971DE130EF49}"/>
+                <a16:creationId xmlns:a16="http://schemas.microsoft.com/office/drawing/2014/main" id="{7DEB91D4-BC98-440D-8637-DA80399E2EFA}"/>
               </a:ext>
             </a:extLst>
           </p:cNvPr>
@@ -7029,7 +7263,7 @@
         <p:spPr>
           <a:xfrm>
             <a:off x="395536" y="1052736"/>
-            <a:ext cx="7879080" cy="1200329"/>
+            <a:ext cx="8186857" cy="830997"/>
           </a:xfrm>
           <a:prstGeom prst="rect">
             <a:avLst/>
@@ -7043,33 +7277,112 @@
           <a:lstStyle/>
           <a:p>
             <a:r>
+              <a:rPr lang="ja-JP" altLang="en-US" sz="2400"/>
+              <a:t>ブラウザはローカルファイルを自由に見ることができない</a:t>
+            </a:r>
+            <a:endParaRPr lang="en-US" altLang="ja-JP" sz="2400"/>
+          </a:p>
+          <a:p>
+            <a:r>
               <a:rPr kumimoji="1" lang="ja-JP" altLang="en-US" sz="2400"/>
-              <a:t>ブラウザは勝手にローカルファイルにアクセスできない</a:t>
+              <a:t>→ ブラウザゲームのローカルでのテストができない</a:t>
             </a:r>
             <a:endParaRPr kumimoji="1" lang="en-US" altLang="ja-JP" sz="2400"/>
           </a:p>
-          <a:p>
+        </p:txBody>
+      </p:sp>
+      <p:sp>
+        <p:nvSpPr>
+          <p:cNvPr id="6" name="テキスト ボックス 5">
+            <a:extLst>
+              <a:ext uri="{FF2B5EF4-FFF2-40B4-BE49-F238E27FC236}">
+                <a16:creationId xmlns:a16="http://schemas.microsoft.com/office/drawing/2014/main" id="{9890CBD9-BE31-427D-9E29-8EB10F0E5FED}"/>
+              </a:ext>
+            </a:extLst>
+          </p:cNvPr>
+          <p:cNvSpPr txBox="1"/>
+          <p:nvPr/>
+        </p:nvSpPr>
+        <p:spPr>
+          <a:xfrm>
+            <a:off x="395536" y="1949931"/>
+            <a:ext cx="8392041" cy="830997"/>
+          </a:xfrm>
+          <a:prstGeom prst="rect">
+            <a:avLst/>
+          </a:prstGeom>
+          <a:noFill/>
+        </p:spPr>
+        <p:txBody>
+          <a:bodyPr wrap="none" rtlCol="0">
+            <a:spAutoFit/>
+          </a:bodyPr>
+          <a:lstStyle/>
+          <a:p>
+            <a:r>
+              <a:rPr kumimoji="1" lang="ja-JP" altLang="en-US" sz="2400"/>
+              <a:t>解決策</a:t>
+            </a:r>
             <a:r>
               <a:rPr lang="ja-JP" altLang="en-US" sz="2400"/>
-              <a:t>もしアクセスできると、悪意あるサイトに個人情報を</a:t>
-            </a:r>
-            <a:endParaRPr lang="en-US" altLang="ja-JP" sz="2400"/>
-          </a:p>
-          <a:p>
+              <a:t>１</a:t>
+            </a:r>
             <a:r>
               <a:rPr kumimoji="1" lang="ja-JP" altLang="en-US" sz="2400"/>
-              <a:t>引き抜かれる可能性がある</a:t>
-            </a:r>
-            <a:endParaRPr kumimoji="1" lang="en-US" altLang="ja-JP" sz="2400"/>
+              <a:t>：ブラウザのセキュリティレベルを下げる</a:t>
+            </a:r>
+            <a:r>
+              <a:rPr kumimoji="1" lang="en-US" altLang="ja-JP" sz="2400"/>
+              <a:t>(</a:t>
+            </a:r>
+            <a:r>
+              <a:rPr kumimoji="1" lang="ja-JP" altLang="en-US" sz="2400"/>
+              <a:t>非推奨</a:t>
+            </a:r>
+            <a:r>
+              <a:rPr kumimoji="1" lang="en-US" altLang="ja-JP" sz="2400"/>
+              <a:t>)</a:t>
+            </a:r>
+          </a:p>
+          <a:p>
+            <a:r>
+              <a:rPr kumimoji="1" lang="ja-JP" altLang="en-US" sz="2400">
+                <a:solidFill>
+                  <a:srgbClr val="FF0000"/>
+                </a:solidFill>
+              </a:rPr>
+              <a:t>解決策</a:t>
+            </a:r>
+            <a:r>
+              <a:rPr lang="ja-JP" altLang="en-US" sz="2400">
+                <a:solidFill>
+                  <a:srgbClr val="FF0000"/>
+                </a:solidFill>
+              </a:rPr>
+              <a:t>２</a:t>
+            </a:r>
+            <a:r>
+              <a:rPr kumimoji="1" lang="ja-JP" altLang="en-US" sz="2400">
+                <a:solidFill>
+                  <a:srgbClr val="FF0000"/>
+                </a:solidFill>
+              </a:rPr>
+              <a:t>：ローカルにウェブサーバを立てる</a:t>
+            </a:r>
+            <a:endParaRPr kumimoji="1" lang="en-US" altLang="ja-JP" sz="2400">
+              <a:solidFill>
+                <a:srgbClr val="FF0000"/>
+              </a:solidFill>
+            </a:endParaRPr>
           </a:p>
         </p:txBody>
       </p:sp>
       <p:pic>
         <p:nvPicPr>
-          <p:cNvPr id="2052" name="Picture 4" descr="ハッカーのイラスト（笑顔）">
-            <a:extLst>
-              <a:ext uri="{FF2B5EF4-FFF2-40B4-BE49-F238E27FC236}">
-                <a16:creationId xmlns:a16="http://schemas.microsoft.com/office/drawing/2014/main" id="{FED8C577-F5C5-4D50-B638-82AD560FF33D}"/>
+          <p:cNvPr id="7" name="Picture 2" descr="パソコンを使う人のイラスト（男性・笑顔）">
+            <a:extLst>
+              <a:ext uri="{FF2B5EF4-FFF2-40B4-BE49-F238E27FC236}">
+                <a16:creationId xmlns:a16="http://schemas.microsoft.com/office/drawing/2014/main" id="{82ED6AE7-9573-49F9-A068-4B9EC6203B78}"/>
               </a:ext>
             </a:extLst>
           </p:cNvPr>
@@ -7079,7 +7392,7 @@
           <p:nvPr/>
         </p:nvPicPr>
         <p:blipFill>
-          <a:blip r:embed="rId2">
+          <a:blip r:embed="rId2" cstate="print">
             <a:extLst>
               <a:ext uri="{28A0092B-C50C-407E-A947-70E740481C1C}">
                 <a14:useLocalDpi xmlns:a14="http://schemas.microsoft.com/office/drawing/2010/main" val="0"/>
@@ -7093,8 +7406,8 @@
         </p:blipFill>
         <p:spPr bwMode="auto">
           <a:xfrm>
-            <a:off x="7668344" y="3429000"/>
-            <a:ext cx="1085850" cy="1428750"/>
+            <a:off x="1979712" y="5301208"/>
+            <a:ext cx="808046" cy="1173510"/>
           </a:xfrm>
           <a:prstGeom prst="rect">
             <a:avLst/>
@@ -7113,139 +7426,10 @@
       </p:pic>
       <p:sp>
         <p:nvSpPr>
-          <p:cNvPr id="6" name="テキスト ボックス 5">
-            <a:extLst>
-              <a:ext uri="{FF2B5EF4-FFF2-40B4-BE49-F238E27FC236}">
-                <a16:creationId xmlns:a16="http://schemas.microsoft.com/office/drawing/2014/main" id="{0FE84345-8982-4789-BAFE-FC014C6C64A8}"/>
-              </a:ext>
-            </a:extLst>
-          </p:cNvPr>
-          <p:cNvSpPr txBox="1"/>
-          <p:nvPr/>
-        </p:nvSpPr>
-        <p:spPr>
-          <a:xfrm>
-            <a:off x="2627784" y="2636912"/>
-            <a:ext cx="1569660" cy="369332"/>
-          </a:xfrm>
-          <a:prstGeom prst="rect">
-            <a:avLst/>
-          </a:prstGeom>
-          <a:noFill/>
-        </p:spPr>
-        <p:txBody>
-          <a:bodyPr wrap="none" rtlCol="0">
-            <a:spAutoFit/>
-          </a:bodyPr>
-          <a:lstStyle/>
-          <a:p>
-            <a:r>
-              <a:rPr kumimoji="1" lang="ja-JP" altLang="en-US" dirty="0"/>
-              <a:t>クライアント</a:t>
-            </a:r>
-          </a:p>
-        </p:txBody>
-      </p:sp>
-      <p:pic>
-        <p:nvPicPr>
-          <p:cNvPr id="9" name="Picture 4">
-            <a:extLst>
-              <a:ext uri="{FF2B5EF4-FFF2-40B4-BE49-F238E27FC236}">
-                <a16:creationId xmlns:a16="http://schemas.microsoft.com/office/drawing/2014/main" id="{ED643405-3582-4B67-8DDF-286B804141B7}"/>
-              </a:ext>
-            </a:extLst>
-          </p:cNvPr>
-          <p:cNvPicPr>
-            <a:picLocks noChangeAspect="1" noChangeArrowheads="1"/>
-          </p:cNvPicPr>
-          <p:nvPr/>
-        </p:nvPicPr>
-        <p:blipFill>
-          <a:blip r:embed="rId3" cstate="print">
-            <a:extLst>
-              <a:ext uri="{28A0092B-C50C-407E-A947-70E740481C1C}">
-                <a14:useLocalDpi xmlns:a14="http://schemas.microsoft.com/office/drawing/2010/main" val="0"/>
-              </a:ext>
-            </a:extLst>
-          </a:blip>
-          <a:srcRect/>
-          <a:stretch>
-            <a:fillRect/>
-          </a:stretch>
-        </p:blipFill>
-        <p:spPr bwMode="auto">
-          <a:xfrm>
-            <a:off x="2843808" y="3356992"/>
-            <a:ext cx="1080120" cy="1080120"/>
-          </a:xfrm>
-          <a:prstGeom prst="rect">
-            <a:avLst/>
-          </a:prstGeom>
-          <a:noFill/>
-          <a:extLst>
-            <a:ext uri="{909E8E84-426E-40DD-AFC4-6F175D3DCCD1}">
-              <a14:hiddenFill xmlns:a14="http://schemas.microsoft.com/office/drawing/2010/main">
-                <a:solidFill>
-                  <a:srgbClr val="FFFFFF"/>
-                </a:solidFill>
-              </a14:hiddenFill>
-            </a:ext>
-          </a:extLst>
-        </p:spPr>
-      </p:pic>
-      <p:pic>
-        <p:nvPicPr>
-          <p:cNvPr id="10" name="Picture 6" descr="データセンターのイラスト（単体）">
-            <a:extLst>
-              <a:ext uri="{FF2B5EF4-FFF2-40B4-BE49-F238E27FC236}">
-                <a16:creationId xmlns:a16="http://schemas.microsoft.com/office/drawing/2014/main" id="{51C002EE-E2E5-4209-BFF7-26CD4C798502}"/>
-              </a:ext>
-            </a:extLst>
-          </p:cNvPr>
-          <p:cNvPicPr>
-            <a:picLocks noChangeAspect="1" noChangeArrowheads="1"/>
-          </p:cNvPicPr>
-          <p:nvPr/>
-        </p:nvPicPr>
-        <p:blipFill>
-          <a:blip r:embed="rId4" cstate="print">
-            <a:extLst>
-              <a:ext uri="{28A0092B-C50C-407E-A947-70E740481C1C}">
-                <a14:useLocalDpi xmlns:a14="http://schemas.microsoft.com/office/drawing/2010/main" val="0"/>
-              </a:ext>
-            </a:extLst>
-          </a:blip>
-          <a:srcRect/>
-          <a:stretch>
-            <a:fillRect/>
-          </a:stretch>
-        </p:blipFill>
-        <p:spPr bwMode="auto">
-          <a:xfrm>
-            <a:off x="6372200" y="3140968"/>
-            <a:ext cx="1097090" cy="1649760"/>
-          </a:xfrm>
-          <a:prstGeom prst="rect">
-            <a:avLst/>
-          </a:prstGeom>
-          <a:noFill/>
-          <a:extLst>
-            <a:ext uri="{909E8E84-426E-40DD-AFC4-6F175D3DCCD1}">
-              <a14:hiddenFill xmlns:a14="http://schemas.microsoft.com/office/drawing/2010/main">
-                <a:solidFill>
-                  <a:srgbClr val="FFFFFF"/>
-                </a:solidFill>
-              </a14:hiddenFill>
-            </a:ext>
-          </a:extLst>
-        </p:spPr>
-      </p:pic>
-      <p:sp>
-        <p:nvSpPr>
-          <p:cNvPr id="12" name="矢印: 左右 11">
-            <a:extLst>
-              <a:ext uri="{FF2B5EF4-FFF2-40B4-BE49-F238E27FC236}">
-                <a16:creationId xmlns:a16="http://schemas.microsoft.com/office/drawing/2014/main" id="{BF1E826F-9A29-43C8-9983-E538CD0F6CD4}"/>
+          <p:cNvPr id="8" name="フローチャート: 磁気ディスク 7">
+            <a:extLst>
+              <a:ext uri="{FF2B5EF4-FFF2-40B4-BE49-F238E27FC236}">
+                <a16:creationId xmlns:a16="http://schemas.microsoft.com/office/drawing/2014/main" id="{37D2F1D4-C315-48DA-BBC1-E2F6FFE089E0}"/>
               </a:ext>
             </a:extLst>
           </p:cNvPr>
@@ -7254,151 +7438,8 @@
         </p:nvSpPr>
         <p:spPr>
           <a:xfrm>
-            <a:off x="4499992" y="3645024"/>
-            <a:ext cx="1224136" cy="432048"/>
-          </a:xfrm>
-          <a:prstGeom prst="leftRightArrow">
-            <a:avLst/>
-          </a:prstGeom>
-          <a:solidFill>
-            <a:srgbClr val="FF0000"/>
-          </a:solidFill>
-          <a:ln>
-            <a:solidFill>
-              <a:schemeClr val="tx1"/>
-            </a:solidFill>
-          </a:ln>
-        </p:spPr>
-        <p:style>
-          <a:lnRef idx="2">
-            <a:schemeClr val="accent1">
-              <a:shade val="50000"/>
-            </a:schemeClr>
-          </a:lnRef>
-          <a:fillRef idx="1">
-            <a:schemeClr val="accent1"/>
-          </a:fillRef>
-          <a:effectRef idx="0">
-            <a:schemeClr val="accent1"/>
-          </a:effectRef>
-          <a:fontRef idx="minor">
-            <a:schemeClr val="lt1"/>
-          </a:fontRef>
-        </p:style>
-        <p:txBody>
-          <a:bodyPr rtlCol="0" anchor="ctr"/>
-          <a:lstStyle/>
-          <a:p>
-            <a:pPr algn="ctr"/>
-            <a:endParaRPr kumimoji="1" lang="ja-JP" altLang="en-US"/>
-          </a:p>
-        </p:txBody>
-      </p:sp>
-      <p:sp>
-        <p:nvSpPr>
-          <p:cNvPr id="13" name="テキスト ボックス 12">
-            <a:extLst>
-              <a:ext uri="{FF2B5EF4-FFF2-40B4-BE49-F238E27FC236}">
-                <a16:creationId xmlns:a16="http://schemas.microsoft.com/office/drawing/2014/main" id="{CD51B2AD-8509-4730-A58E-3FF832460BD6}"/>
-              </a:ext>
-            </a:extLst>
-          </p:cNvPr>
-          <p:cNvSpPr txBox="1"/>
-          <p:nvPr/>
-        </p:nvSpPr>
-        <p:spPr>
-          <a:xfrm>
-            <a:off x="6228184" y="2708920"/>
-            <a:ext cx="1569660" cy="369332"/>
-          </a:xfrm>
-          <a:prstGeom prst="rect">
-            <a:avLst/>
-          </a:prstGeom>
-          <a:noFill/>
-        </p:spPr>
-        <p:txBody>
-          <a:bodyPr wrap="none" rtlCol="0">
-            <a:spAutoFit/>
-          </a:bodyPr>
-          <a:lstStyle/>
-          <a:p>
-            <a:r>
-              <a:rPr kumimoji="1" lang="ja-JP" altLang="en-US" dirty="0"/>
-              <a:t>ウェブサーバ</a:t>
-            </a:r>
-          </a:p>
-        </p:txBody>
-      </p:sp>
-      <p:sp>
-        <p:nvSpPr>
-          <p:cNvPr id="18" name="矢印: 左右 17">
-            <a:extLst>
-              <a:ext uri="{FF2B5EF4-FFF2-40B4-BE49-F238E27FC236}">
-                <a16:creationId xmlns:a16="http://schemas.microsoft.com/office/drawing/2014/main" id="{15520441-D7A1-4F36-B0A0-FDD44B535BDA}"/>
-              </a:ext>
-            </a:extLst>
-          </p:cNvPr>
-          <p:cNvSpPr/>
-          <p:nvPr/>
-        </p:nvSpPr>
-        <p:spPr>
-          <a:xfrm rot="18900000">
-            <a:off x="1593153" y="4734630"/>
-            <a:ext cx="1224136" cy="432048"/>
-          </a:xfrm>
-          <a:prstGeom prst="leftRightArrow">
-            <a:avLst/>
-          </a:prstGeom>
-          <a:solidFill>
-            <a:srgbClr val="FF0000"/>
-          </a:solidFill>
-          <a:ln>
-            <a:solidFill>
-              <a:schemeClr val="tx1"/>
-            </a:solidFill>
-          </a:ln>
-        </p:spPr>
-        <p:style>
-          <a:lnRef idx="2">
-            <a:schemeClr val="accent1">
-              <a:shade val="50000"/>
-            </a:schemeClr>
-          </a:lnRef>
-          <a:fillRef idx="1">
-            <a:schemeClr val="accent1"/>
-          </a:fillRef>
-          <a:effectRef idx="0">
-            <a:schemeClr val="accent1"/>
-          </a:effectRef>
-          <a:fontRef idx="minor">
-            <a:schemeClr val="lt1"/>
-          </a:fontRef>
-        </p:style>
-        <p:txBody>
-          <a:bodyPr rtlCol="0" anchor="ctr"/>
-          <a:lstStyle/>
-          <a:p>
-            <a:pPr algn="ctr"/>
-            <a:endParaRPr kumimoji="1" lang="ja-JP" altLang="en-US"/>
-          </a:p>
-        </p:txBody>
-      </p:sp>
-      <p:sp>
-        <p:nvSpPr>
-          <p:cNvPr id="19" name="フローチャート: 磁気ディスク 18">
-            <a:extLst>
-              <a:ext uri="{FF2B5EF4-FFF2-40B4-BE49-F238E27FC236}">
-                <a16:creationId xmlns:a16="http://schemas.microsoft.com/office/drawing/2014/main" id="{D458549B-87E5-4F7A-9F6C-69C2AB55C634}"/>
-              </a:ext>
-            </a:extLst>
-          </p:cNvPr>
-          <p:cNvSpPr/>
-          <p:nvPr/>
-        </p:nvSpPr>
-        <p:spPr>
-          <a:xfrm>
-            <a:off x="755576" y="5517232"/>
-            <a:ext cx="864096" cy="792088"/>
+            <a:off x="4572000" y="5517232"/>
+            <a:ext cx="1008112" cy="792088"/>
           </a:xfrm>
           <a:prstGeom prst="flowChartMagneticDisk">
             <a:avLst/>
@@ -7439,12 +7480,102 @@
           </a:p>
         </p:txBody>
       </p:sp>
+      <p:sp>
+        <p:nvSpPr>
+          <p:cNvPr id="9" name="矢印: 左右 8">
+            <a:extLst>
+              <a:ext uri="{FF2B5EF4-FFF2-40B4-BE49-F238E27FC236}">
+                <a16:creationId xmlns:a16="http://schemas.microsoft.com/office/drawing/2014/main" id="{C7C278CC-07E4-4318-875D-2DDB254459D8}"/>
+              </a:ext>
+            </a:extLst>
+          </p:cNvPr>
+          <p:cNvSpPr/>
+          <p:nvPr/>
+        </p:nvSpPr>
+        <p:spPr>
+          <a:xfrm>
+            <a:off x="2987824" y="5661248"/>
+            <a:ext cx="1224136" cy="432048"/>
+          </a:xfrm>
+          <a:prstGeom prst="leftRightArrow">
+            <a:avLst/>
+          </a:prstGeom>
+          <a:solidFill>
+            <a:srgbClr val="FF0000"/>
+          </a:solidFill>
+          <a:ln>
+            <a:solidFill>
+              <a:schemeClr val="tx1"/>
+            </a:solidFill>
+          </a:ln>
+        </p:spPr>
+        <p:style>
+          <a:lnRef idx="2">
+            <a:schemeClr val="accent1">
+              <a:shade val="50000"/>
+            </a:schemeClr>
+          </a:lnRef>
+          <a:fillRef idx="1">
+            <a:schemeClr val="accent1"/>
+          </a:fillRef>
+          <a:effectRef idx="0">
+            <a:schemeClr val="accent1"/>
+          </a:effectRef>
+          <a:fontRef idx="minor">
+            <a:schemeClr val="lt1"/>
+          </a:fontRef>
+        </p:style>
+        <p:txBody>
+          <a:bodyPr rtlCol="0" anchor="ctr"/>
+          <a:lstStyle/>
+          <a:p>
+            <a:pPr algn="ctr"/>
+            <a:endParaRPr kumimoji="1" lang="ja-JP" altLang="en-US"/>
+          </a:p>
+        </p:txBody>
+      </p:sp>
+      <p:sp>
+        <p:nvSpPr>
+          <p:cNvPr id="10" name="テキスト ボックス 9">
+            <a:extLst>
+              <a:ext uri="{FF2B5EF4-FFF2-40B4-BE49-F238E27FC236}">
+                <a16:creationId xmlns:a16="http://schemas.microsoft.com/office/drawing/2014/main" id="{EF20B80D-C4E0-4F9B-94D7-8E92014A0052}"/>
+              </a:ext>
+            </a:extLst>
+          </p:cNvPr>
+          <p:cNvSpPr txBox="1"/>
+          <p:nvPr/>
+        </p:nvSpPr>
+        <p:spPr>
+          <a:xfrm>
+            <a:off x="3923928" y="6381328"/>
+            <a:ext cx="2262158" cy="369332"/>
+          </a:xfrm>
+          <a:prstGeom prst="rect">
+            <a:avLst/>
+          </a:prstGeom>
+          <a:noFill/>
+        </p:spPr>
+        <p:txBody>
+          <a:bodyPr wrap="none" rtlCol="0">
+            <a:spAutoFit/>
+          </a:bodyPr>
+          <a:lstStyle/>
+          <a:p>
+            <a:r>
+              <a:rPr lang="ja-JP" altLang="en-US"/>
+              <a:t>ローカルストレージ</a:t>
+            </a:r>
+            <a:endParaRPr kumimoji="1" lang="ja-JP" altLang="en-US"/>
+          </a:p>
+        </p:txBody>
+      </p:sp>
       <p:pic>
         <p:nvPicPr>
-          <p:cNvPr id="2054" name="Picture 6" descr="パソコンを使う人のイラスト（男性・泣いた顔）">
-            <a:extLst>
-              <a:ext uri="{FF2B5EF4-FFF2-40B4-BE49-F238E27FC236}">
-                <a16:creationId xmlns:a16="http://schemas.microsoft.com/office/drawing/2014/main" id="{331581C5-1725-45AE-A22C-DB965BB37188}"/>
+          <p:cNvPr id="11" name="Picture 6" descr="データセンターのイラスト（単体）">
+            <a:extLst>
+              <a:ext uri="{FF2B5EF4-FFF2-40B4-BE49-F238E27FC236}">
+                <a16:creationId xmlns:a16="http://schemas.microsoft.com/office/drawing/2014/main" id="{EB07BBD1-4387-46B6-8F2B-0F47CBE506F7}"/>
               </a:ext>
             </a:extLst>
           </p:cNvPr>
@@ -7454,7 +7585,7 @@
           <p:nvPr/>
         </p:nvPicPr>
         <p:blipFill>
-          <a:blip r:embed="rId5" cstate="print">
+          <a:blip r:embed="rId3" cstate="print">
             <a:extLst>
               <a:ext uri="{28A0092B-C50C-407E-A947-70E740481C1C}">
                 <a14:useLocalDpi xmlns:a14="http://schemas.microsoft.com/office/drawing/2010/main" val="0"/>
@@ -7468,8 +7599,8 @@
         </p:blipFill>
         <p:spPr bwMode="auto">
           <a:xfrm>
-            <a:off x="971600" y="3573016"/>
-            <a:ext cx="850266" cy="1234827"/>
+            <a:off x="4716016" y="3429000"/>
+            <a:ext cx="761893" cy="1145704"/>
           </a:xfrm>
           <a:prstGeom prst="rect">
             <a:avLst/>
@@ -7488,10 +7619,10 @@
       </p:pic>
       <p:sp>
         <p:nvSpPr>
-          <p:cNvPr id="4" name="テキスト ボックス 3">
-            <a:extLst>
-              <a:ext uri="{FF2B5EF4-FFF2-40B4-BE49-F238E27FC236}">
-                <a16:creationId xmlns:a16="http://schemas.microsoft.com/office/drawing/2014/main" id="{CBA64D53-920E-43A7-8C67-648923E13119}"/>
+          <p:cNvPr id="12" name="テキスト ボックス 11">
+            <a:extLst>
+              <a:ext uri="{FF2B5EF4-FFF2-40B4-BE49-F238E27FC236}">
+                <a16:creationId xmlns:a16="http://schemas.microsoft.com/office/drawing/2014/main" id="{A64266E6-A983-45DC-908D-05CAB819A677}"/>
               </a:ext>
             </a:extLst>
           </p:cNvPr>
@@ -7500,8 +7631,8 @@
         </p:nvSpPr>
         <p:spPr>
           <a:xfrm>
-            <a:off x="2051720" y="5517232"/>
-            <a:ext cx="6955750" cy="830997"/>
+            <a:off x="4283968" y="3068960"/>
+            <a:ext cx="1569660" cy="369332"/>
           </a:xfrm>
           <a:prstGeom prst="rect">
             <a:avLst/>
@@ -7515,24 +7646,374 @@
           <a:lstStyle/>
           <a:p>
             <a:r>
-              <a:rPr kumimoji="1" lang="ja-JP" altLang="en-US" sz="2400"/>
-              <a:t>原則として、ユーザが直接指定したファイルのみ</a:t>
-            </a:r>
-            <a:endParaRPr kumimoji="1" lang="en-US" altLang="ja-JP" sz="2400"/>
-          </a:p>
-          <a:p>
-            <a:r>
-              <a:rPr lang="ja-JP" altLang="en-US" sz="2400"/>
-              <a:t>サーバに送信できる</a:t>
-            </a:r>
-            <a:endParaRPr lang="en-US" altLang="ja-JP" sz="2400"/>
+              <a:rPr lang="ja-JP" altLang="en-US"/>
+              <a:t>ウェブサーバ</a:t>
+            </a:r>
+            <a:endParaRPr kumimoji="1" lang="ja-JP" altLang="en-US"/>
+          </a:p>
+        </p:txBody>
+      </p:sp>
+      <p:pic>
+        <p:nvPicPr>
+          <p:cNvPr id="13" name="Picture 4">
+            <a:extLst>
+              <a:ext uri="{FF2B5EF4-FFF2-40B4-BE49-F238E27FC236}">
+                <a16:creationId xmlns:a16="http://schemas.microsoft.com/office/drawing/2014/main" id="{0930E5E4-08D6-4A4F-86EB-7DF6020628ED}"/>
+              </a:ext>
+            </a:extLst>
+          </p:cNvPr>
+          <p:cNvPicPr>
+            <a:picLocks noChangeAspect="1" noChangeArrowheads="1"/>
+          </p:cNvPicPr>
+          <p:nvPr/>
+        </p:nvPicPr>
+        <p:blipFill>
+          <a:blip r:embed="rId4" cstate="print">
+            <a:extLst>
+              <a:ext uri="{28A0092B-C50C-407E-A947-70E740481C1C}">
+                <a14:useLocalDpi xmlns:a14="http://schemas.microsoft.com/office/drawing/2010/main" val="0"/>
+              </a:ext>
+            </a:extLst>
+          </a:blip>
+          <a:srcRect/>
+          <a:stretch>
+            <a:fillRect/>
+          </a:stretch>
+        </p:blipFill>
+        <p:spPr bwMode="auto">
+          <a:xfrm>
+            <a:off x="2051720" y="3501008"/>
+            <a:ext cx="792088" cy="792088"/>
+          </a:xfrm>
+          <a:prstGeom prst="rect">
+            <a:avLst/>
+          </a:prstGeom>
+          <a:noFill/>
+          <a:extLst>
+            <a:ext uri="{909E8E84-426E-40DD-AFC4-6F175D3DCCD1}">
+              <a14:hiddenFill xmlns:a14="http://schemas.microsoft.com/office/drawing/2010/main">
+                <a:solidFill>
+                  <a:srgbClr val="FFFFFF"/>
+                </a:solidFill>
+              </a14:hiddenFill>
+            </a:ext>
+          </a:extLst>
+        </p:spPr>
+      </p:pic>
+      <p:sp>
+        <p:nvSpPr>
+          <p:cNvPr id="14" name="矢印: 左右 13">
+            <a:extLst>
+              <a:ext uri="{FF2B5EF4-FFF2-40B4-BE49-F238E27FC236}">
+                <a16:creationId xmlns:a16="http://schemas.microsoft.com/office/drawing/2014/main" id="{146BE311-D0A6-4B81-B626-36174CBE51CA}"/>
+              </a:ext>
+            </a:extLst>
+          </p:cNvPr>
+          <p:cNvSpPr/>
+          <p:nvPr/>
+        </p:nvSpPr>
+        <p:spPr>
+          <a:xfrm rot="5400000">
+            <a:off x="4644008" y="4797152"/>
+            <a:ext cx="792088" cy="360040"/>
+          </a:xfrm>
+          <a:prstGeom prst="leftRightArrow">
+            <a:avLst/>
+          </a:prstGeom>
+          <a:solidFill>
+            <a:srgbClr val="FF0000"/>
+          </a:solidFill>
+          <a:ln>
+            <a:solidFill>
+              <a:schemeClr val="tx1"/>
+            </a:solidFill>
+          </a:ln>
+        </p:spPr>
+        <p:style>
+          <a:lnRef idx="2">
+            <a:schemeClr val="accent1">
+              <a:shade val="50000"/>
+            </a:schemeClr>
+          </a:lnRef>
+          <a:fillRef idx="1">
+            <a:schemeClr val="accent1"/>
+          </a:fillRef>
+          <a:effectRef idx="0">
+            <a:schemeClr val="accent1"/>
+          </a:effectRef>
+          <a:fontRef idx="minor">
+            <a:schemeClr val="lt1"/>
+          </a:fontRef>
+        </p:style>
+        <p:txBody>
+          <a:bodyPr rtlCol="0" anchor="ctr"/>
+          <a:lstStyle/>
+          <a:p>
+            <a:pPr algn="ctr"/>
+            <a:endParaRPr kumimoji="1" lang="ja-JP" altLang="en-US"/>
+          </a:p>
+        </p:txBody>
+      </p:sp>
+      <p:sp>
+        <p:nvSpPr>
+          <p:cNvPr id="15" name="テキスト ボックス 14">
+            <a:extLst>
+              <a:ext uri="{FF2B5EF4-FFF2-40B4-BE49-F238E27FC236}">
+                <a16:creationId xmlns:a16="http://schemas.microsoft.com/office/drawing/2014/main" id="{F8278653-A99A-40C6-89DA-249735E9ACE4}"/>
+              </a:ext>
+            </a:extLst>
+          </p:cNvPr>
+          <p:cNvSpPr txBox="1"/>
+          <p:nvPr/>
+        </p:nvSpPr>
+        <p:spPr>
+          <a:xfrm>
+            <a:off x="5508104" y="4653136"/>
+            <a:ext cx="3416320" cy="646331"/>
+          </a:xfrm>
+          <a:prstGeom prst="rect">
+            <a:avLst/>
+          </a:prstGeom>
+          <a:noFill/>
+        </p:spPr>
+        <p:txBody>
+          <a:bodyPr wrap="none" rtlCol="0">
+            <a:spAutoFit/>
+          </a:bodyPr>
+          <a:lstStyle/>
+          <a:p>
+            <a:r>
+              <a:rPr kumimoji="1" lang="ja-JP" altLang="en-US"/>
+              <a:t>ウェブサーバの</a:t>
+            </a:r>
+            <a:endParaRPr kumimoji="1" lang="en-US" altLang="ja-JP"/>
+          </a:p>
+          <a:p>
+            <a:r>
+              <a:rPr kumimoji="1" lang="ja-JP" altLang="en-US"/>
+              <a:t>ローカルなのでアクセスできる</a:t>
+            </a:r>
+          </a:p>
+        </p:txBody>
+      </p:sp>
+      <p:sp>
+        <p:nvSpPr>
+          <p:cNvPr id="16" name="矢印: 左右 15">
+            <a:extLst>
+              <a:ext uri="{FF2B5EF4-FFF2-40B4-BE49-F238E27FC236}">
+                <a16:creationId xmlns:a16="http://schemas.microsoft.com/office/drawing/2014/main" id="{18D8D041-08C7-4E75-8EA7-61FABC2A80B7}"/>
+              </a:ext>
+            </a:extLst>
+          </p:cNvPr>
+          <p:cNvSpPr/>
+          <p:nvPr/>
+        </p:nvSpPr>
+        <p:spPr>
+          <a:xfrm>
+            <a:off x="3059832" y="3645024"/>
+            <a:ext cx="1224136" cy="432048"/>
+          </a:xfrm>
+          <a:prstGeom prst="leftRightArrow">
+            <a:avLst/>
+          </a:prstGeom>
+          <a:solidFill>
+            <a:srgbClr val="FF0000"/>
+          </a:solidFill>
+          <a:ln>
+            <a:solidFill>
+              <a:schemeClr val="tx1"/>
+            </a:solidFill>
+          </a:ln>
+        </p:spPr>
+        <p:style>
+          <a:lnRef idx="2">
+            <a:schemeClr val="accent1">
+              <a:shade val="50000"/>
+            </a:schemeClr>
+          </a:lnRef>
+          <a:fillRef idx="1">
+            <a:schemeClr val="accent1"/>
+          </a:fillRef>
+          <a:effectRef idx="0">
+            <a:schemeClr val="accent1"/>
+          </a:effectRef>
+          <a:fontRef idx="minor">
+            <a:schemeClr val="lt1"/>
+          </a:fontRef>
+        </p:style>
+        <p:txBody>
+          <a:bodyPr rtlCol="0" anchor="ctr"/>
+          <a:lstStyle/>
+          <a:p>
+            <a:pPr algn="ctr"/>
+            <a:endParaRPr kumimoji="1" lang="ja-JP" altLang="en-US"/>
+          </a:p>
+        </p:txBody>
+      </p:sp>
+      <p:sp>
+        <p:nvSpPr>
+          <p:cNvPr id="17" name="テキスト ボックス 16">
+            <a:extLst>
+              <a:ext uri="{FF2B5EF4-FFF2-40B4-BE49-F238E27FC236}">
+                <a16:creationId xmlns:a16="http://schemas.microsoft.com/office/drawing/2014/main" id="{D7DC7C37-99FB-4FFE-8401-8B2ED3F5CC37}"/>
+              </a:ext>
+            </a:extLst>
+          </p:cNvPr>
+          <p:cNvSpPr txBox="1"/>
+          <p:nvPr/>
+        </p:nvSpPr>
+        <p:spPr>
+          <a:xfrm>
+            <a:off x="1835696" y="2996952"/>
+            <a:ext cx="1107996" cy="369332"/>
+          </a:xfrm>
+          <a:prstGeom prst="rect">
+            <a:avLst/>
+          </a:prstGeom>
+          <a:noFill/>
+        </p:spPr>
+        <p:txBody>
+          <a:bodyPr wrap="none" rtlCol="0">
+            <a:spAutoFit/>
+          </a:bodyPr>
+          <a:lstStyle/>
+          <a:p>
+            <a:r>
+              <a:rPr lang="ja-JP" altLang="en-US"/>
+              <a:t>ブラウザ</a:t>
+            </a:r>
+            <a:endParaRPr kumimoji="1" lang="ja-JP" altLang="en-US"/>
+          </a:p>
+        </p:txBody>
+      </p:sp>
+      <p:sp>
+        <p:nvSpPr>
+          <p:cNvPr id="18" name="矢印: 左右 17">
+            <a:extLst>
+              <a:ext uri="{FF2B5EF4-FFF2-40B4-BE49-F238E27FC236}">
+                <a16:creationId xmlns:a16="http://schemas.microsoft.com/office/drawing/2014/main" id="{5F59A37E-5243-4FC5-BF12-C9FF860B5953}"/>
+              </a:ext>
+            </a:extLst>
+          </p:cNvPr>
+          <p:cNvSpPr/>
+          <p:nvPr/>
+        </p:nvSpPr>
+        <p:spPr>
+          <a:xfrm rot="5400000">
+            <a:off x="1979712" y="4653136"/>
+            <a:ext cx="792088" cy="360040"/>
+          </a:xfrm>
+          <a:prstGeom prst="leftRightArrow">
+            <a:avLst/>
+          </a:prstGeom>
+          <a:solidFill>
+            <a:srgbClr val="FF0000"/>
+          </a:solidFill>
+          <a:ln>
+            <a:solidFill>
+              <a:schemeClr val="tx1"/>
+            </a:solidFill>
+          </a:ln>
+        </p:spPr>
+        <p:style>
+          <a:lnRef idx="2">
+            <a:schemeClr val="accent1">
+              <a:shade val="50000"/>
+            </a:schemeClr>
+          </a:lnRef>
+          <a:fillRef idx="1">
+            <a:schemeClr val="accent1"/>
+          </a:fillRef>
+          <a:effectRef idx="0">
+            <a:schemeClr val="accent1"/>
+          </a:effectRef>
+          <a:fontRef idx="minor">
+            <a:schemeClr val="lt1"/>
+          </a:fontRef>
+        </p:style>
+        <p:txBody>
+          <a:bodyPr rtlCol="0" anchor="ctr"/>
+          <a:lstStyle/>
+          <a:p>
+            <a:pPr algn="ctr"/>
+            <a:endParaRPr kumimoji="1" lang="ja-JP" altLang="en-US"/>
+          </a:p>
+        </p:txBody>
+      </p:sp>
+      <p:sp>
+        <p:nvSpPr>
+          <p:cNvPr id="19" name="テキスト ボックス 18">
+            <a:extLst>
+              <a:ext uri="{FF2B5EF4-FFF2-40B4-BE49-F238E27FC236}">
+                <a16:creationId xmlns:a16="http://schemas.microsoft.com/office/drawing/2014/main" id="{DDF13C3B-A4AC-4C56-962D-68F37E3C50C5}"/>
+              </a:ext>
+            </a:extLst>
+          </p:cNvPr>
+          <p:cNvSpPr txBox="1"/>
+          <p:nvPr/>
+        </p:nvSpPr>
+        <p:spPr>
+          <a:xfrm>
+            <a:off x="971600" y="4581128"/>
+            <a:ext cx="1107996" cy="369332"/>
+          </a:xfrm>
+          <a:prstGeom prst="rect">
+            <a:avLst/>
+          </a:prstGeom>
+          <a:noFill/>
+        </p:spPr>
+        <p:txBody>
+          <a:bodyPr wrap="none" rtlCol="0">
+            <a:spAutoFit/>
+          </a:bodyPr>
+          <a:lstStyle/>
+          <a:p>
+            <a:r>
+              <a:rPr kumimoji="1" lang="ja-JP" altLang="en-US"/>
+              <a:t>動作確認</a:t>
+            </a:r>
+          </a:p>
+        </p:txBody>
+      </p:sp>
+      <p:sp>
+        <p:nvSpPr>
+          <p:cNvPr id="20" name="テキスト ボックス 19">
+            <a:extLst>
+              <a:ext uri="{FF2B5EF4-FFF2-40B4-BE49-F238E27FC236}">
+                <a16:creationId xmlns:a16="http://schemas.microsoft.com/office/drawing/2014/main" id="{2268E9D5-9C27-4128-BC11-D7758A87A1D8}"/>
+              </a:ext>
+            </a:extLst>
+          </p:cNvPr>
+          <p:cNvSpPr txBox="1"/>
+          <p:nvPr/>
+        </p:nvSpPr>
+        <p:spPr>
+          <a:xfrm>
+            <a:off x="2843808" y="5301208"/>
+            <a:ext cx="1569660" cy="369332"/>
+          </a:xfrm>
+          <a:prstGeom prst="rect">
+            <a:avLst/>
+          </a:prstGeom>
+          <a:noFill/>
+        </p:spPr>
+        <p:txBody>
+          <a:bodyPr wrap="none" rtlCol="0">
+            <a:spAutoFit/>
+          </a:bodyPr>
+          <a:lstStyle/>
+          <a:p>
+            <a:r>
+              <a:rPr kumimoji="1" lang="ja-JP" altLang="en-US"/>
+              <a:t>ファイル修正</a:t>
+            </a:r>
           </a:p>
         </p:txBody>
       </p:sp>
     </p:spTree>
     <p:extLst>
       <p:ext uri="{BB962C8B-B14F-4D97-AF65-F5344CB8AC3E}">
-        <p14:creationId xmlns:p14="http://schemas.microsoft.com/office/powerpoint/2010/main" val="1128540872"/>
+        <p14:creationId xmlns:p14="http://schemas.microsoft.com/office/powerpoint/2010/main" val="4001331816"/>
       </p:ext>
     </p:extLst>
   </p:cSld>
@@ -7564,7 +8045,7 @@
           <p:cNvPr id="2" name="テキスト プレースホルダー 1">
             <a:extLst>
               <a:ext uri="{FF2B5EF4-FFF2-40B4-BE49-F238E27FC236}">
-                <a16:creationId xmlns:a16="http://schemas.microsoft.com/office/drawing/2014/main" id="{6CAD3FE7-AD00-4589-A1BB-87A442789ECC}"/>
+                <a16:creationId xmlns:a16="http://schemas.microsoft.com/office/drawing/2014/main" id="{EA5F53A1-3CB1-415F-B91C-F1A7DDC68AE9}"/>
               </a:ext>
             </a:extLst>
           </p:cNvPr>
@@ -7581,194 +8062,53 @@
           <a:lstStyle/>
           <a:p>
             <a:r>
-              <a:rPr kumimoji="1" lang="ja-JP" altLang="en-US"/>
-              <a:t>ブラウザのセキュリティ</a:t>
-            </a:r>
-          </a:p>
-        </p:txBody>
-      </p:sp>
-      <p:sp>
-        <p:nvSpPr>
-          <p:cNvPr id="3" name="テキスト ボックス 2">
-            <a:extLst>
-              <a:ext uri="{FF2B5EF4-FFF2-40B4-BE49-F238E27FC236}">
-                <a16:creationId xmlns:a16="http://schemas.microsoft.com/office/drawing/2014/main" id="{7DEB91D4-BC98-440D-8637-DA80399E2EFA}"/>
-              </a:ext>
-            </a:extLst>
-          </p:cNvPr>
-          <p:cNvSpPr txBox="1"/>
-          <p:nvPr/>
-        </p:nvSpPr>
-        <p:spPr>
-          <a:xfrm>
-            <a:off x="395536" y="1052736"/>
-            <a:ext cx="8186857" cy="830997"/>
-          </a:xfrm>
-          <a:prstGeom prst="rect">
-            <a:avLst/>
-          </a:prstGeom>
-          <a:noFill/>
-        </p:spPr>
-        <p:txBody>
-          <a:bodyPr wrap="none" rtlCol="0">
-            <a:spAutoFit/>
-          </a:bodyPr>
-          <a:lstStyle/>
-          <a:p>
-            <a:r>
-              <a:rPr lang="ja-JP" altLang="en-US" sz="2400"/>
-              <a:t>ブラウザはローカルファイルを自由に見ることができない</a:t>
-            </a:r>
-            <a:endParaRPr lang="en-US" altLang="ja-JP" sz="2400"/>
-          </a:p>
-          <a:p>
-            <a:r>
-              <a:rPr kumimoji="1" lang="ja-JP" altLang="en-US" sz="2400"/>
-              <a:t>→ ブラウザゲームのローカルでのテストができない</a:t>
-            </a:r>
-            <a:endParaRPr kumimoji="1" lang="en-US" altLang="ja-JP" sz="2400"/>
-          </a:p>
-        </p:txBody>
-      </p:sp>
-      <p:sp>
-        <p:nvSpPr>
-          <p:cNvPr id="6" name="テキスト ボックス 5">
-            <a:extLst>
-              <a:ext uri="{FF2B5EF4-FFF2-40B4-BE49-F238E27FC236}">
-                <a16:creationId xmlns:a16="http://schemas.microsoft.com/office/drawing/2014/main" id="{9890CBD9-BE31-427D-9E29-8EB10F0E5FED}"/>
-              </a:ext>
-            </a:extLst>
-          </p:cNvPr>
-          <p:cNvSpPr txBox="1"/>
-          <p:nvPr/>
-        </p:nvSpPr>
-        <p:spPr>
-          <a:xfrm>
-            <a:off x="395536" y="1949931"/>
-            <a:ext cx="8392041" cy="830997"/>
-          </a:xfrm>
-          <a:prstGeom prst="rect">
-            <a:avLst/>
-          </a:prstGeom>
-          <a:noFill/>
-        </p:spPr>
-        <p:txBody>
-          <a:bodyPr wrap="none" rtlCol="0">
-            <a:spAutoFit/>
-          </a:bodyPr>
-          <a:lstStyle/>
-          <a:p>
-            <a:r>
-              <a:rPr kumimoji="1" lang="ja-JP" altLang="en-US" sz="2400"/>
-              <a:t>解決策</a:t>
-            </a:r>
-            <a:r>
-              <a:rPr lang="ja-JP" altLang="en-US" sz="2400"/>
-              <a:t>１</a:t>
-            </a:r>
-            <a:r>
-              <a:rPr kumimoji="1" lang="ja-JP" altLang="en-US" sz="2400"/>
-              <a:t>：ブラウザのセキュリティレベルを下げる</a:t>
-            </a:r>
-            <a:r>
-              <a:rPr kumimoji="1" lang="en-US" altLang="ja-JP" sz="2400"/>
-              <a:t>(</a:t>
-            </a:r>
-            <a:r>
-              <a:rPr kumimoji="1" lang="ja-JP" altLang="en-US" sz="2400"/>
-              <a:t>非推奨</a:t>
-            </a:r>
-            <a:r>
-              <a:rPr kumimoji="1" lang="en-US" altLang="ja-JP" sz="2400"/>
-              <a:t>)</a:t>
-            </a:r>
-          </a:p>
-          <a:p>
-            <a:r>
-              <a:rPr kumimoji="1" lang="ja-JP" altLang="en-US" sz="2400">
-                <a:solidFill>
-                  <a:srgbClr val="FF0000"/>
-                </a:solidFill>
-              </a:rPr>
-              <a:t>解決策</a:t>
-            </a:r>
-            <a:r>
-              <a:rPr lang="ja-JP" altLang="en-US" sz="2400">
-                <a:solidFill>
-                  <a:srgbClr val="FF0000"/>
-                </a:solidFill>
-              </a:rPr>
-              <a:t>２</a:t>
-            </a:r>
-            <a:r>
-              <a:rPr kumimoji="1" lang="ja-JP" altLang="en-US" sz="2400">
-                <a:solidFill>
-                  <a:srgbClr val="FF0000"/>
-                </a:solidFill>
-              </a:rPr>
-              <a:t>：ローカルにウェブサーバを立てる</a:t>
-            </a:r>
-            <a:endParaRPr kumimoji="1" lang="en-US" altLang="ja-JP" sz="2400">
-              <a:solidFill>
-                <a:srgbClr val="FF0000"/>
-              </a:solidFill>
-            </a:endParaRPr>
+              <a:rPr lang="ja-JP" altLang="en-US"/>
+              <a:t>課題</a:t>
+            </a:r>
+            <a:r>
+              <a:rPr lang="en-US" altLang="ja-JP"/>
+              <a:t>2 - Step 4</a:t>
+            </a:r>
+            <a:endParaRPr kumimoji="1" lang="ja-JP" altLang="en-US"/>
           </a:p>
         </p:txBody>
       </p:sp>
       <p:pic>
         <p:nvPicPr>
-          <p:cNvPr id="7" name="Picture 2" descr="パソコンを使う人のイラスト（男性・笑顔）">
-            <a:extLst>
-              <a:ext uri="{FF2B5EF4-FFF2-40B4-BE49-F238E27FC236}">
-                <a16:creationId xmlns:a16="http://schemas.microsoft.com/office/drawing/2014/main" id="{82ED6AE7-9573-49F9-A068-4B9EC6203B78}"/>
+          <p:cNvPr id="4" name="図 3">
+            <a:extLst>
+              <a:ext uri="{FF2B5EF4-FFF2-40B4-BE49-F238E27FC236}">
+                <a16:creationId xmlns:a16="http://schemas.microsoft.com/office/drawing/2014/main" id="{F9820444-49FF-4F57-9B96-37196BB3D328}"/>
               </a:ext>
             </a:extLst>
           </p:cNvPr>
           <p:cNvPicPr>
-            <a:picLocks noChangeAspect="1" noChangeArrowheads="1"/>
+            <a:picLocks noChangeAspect="1"/>
           </p:cNvPicPr>
           <p:nvPr/>
         </p:nvPicPr>
         <p:blipFill>
-          <a:blip r:embed="rId2" cstate="print">
-            <a:extLst>
-              <a:ext uri="{28A0092B-C50C-407E-A947-70E740481C1C}">
-                <a14:useLocalDpi xmlns:a14="http://schemas.microsoft.com/office/drawing/2010/main" val="0"/>
-              </a:ext>
-            </a:extLst>
-          </a:blip>
-          <a:srcRect/>
+          <a:blip r:embed="rId2"/>
           <a:stretch>
             <a:fillRect/>
           </a:stretch>
         </p:blipFill>
-        <p:spPr bwMode="auto">
-          <a:xfrm>
-            <a:off x="1979712" y="5301208"/>
-            <a:ext cx="808046" cy="1173510"/>
-          </a:xfrm>
-          <a:prstGeom prst="rect">
-            <a:avLst/>
-          </a:prstGeom>
-          <a:noFill/>
-          <a:extLst>
-            <a:ext uri="{909E8E84-426E-40DD-AFC4-6F175D3DCCD1}">
-              <a14:hiddenFill xmlns:a14="http://schemas.microsoft.com/office/drawing/2010/main">
-                <a:solidFill>
-                  <a:srgbClr val="FFFFFF"/>
-                </a:solidFill>
-              </a14:hiddenFill>
-            </a:ext>
-          </a:extLst>
+        <p:spPr>
+          <a:xfrm>
+            <a:off x="467544" y="1556792"/>
+            <a:ext cx="8415895" cy="5184576"/>
+          </a:xfrm>
+          <a:prstGeom prst="rect">
+            <a:avLst/>
+          </a:prstGeom>
         </p:spPr>
       </p:pic>
       <p:sp>
         <p:nvSpPr>
-          <p:cNvPr id="8" name="フローチャート: 磁気ディスク 7">
-            <a:extLst>
-              <a:ext uri="{FF2B5EF4-FFF2-40B4-BE49-F238E27FC236}">
-                <a16:creationId xmlns:a16="http://schemas.microsoft.com/office/drawing/2014/main" id="{37D2F1D4-C315-48DA-BBC1-E2F6FFE089E0}"/>
+          <p:cNvPr id="5" name="四角形: 角を丸くする 4">
+            <a:extLst>
+              <a:ext uri="{FF2B5EF4-FFF2-40B4-BE49-F238E27FC236}">
+                <a16:creationId xmlns:a16="http://schemas.microsoft.com/office/drawing/2014/main" id="{07D13061-4370-45F4-AFA4-6D8F544D6A8C}"/>
               </a:ext>
             </a:extLst>
           </p:cNvPr>
@@ -7777,20 +8117,16 @@
         </p:nvSpPr>
         <p:spPr>
           <a:xfrm>
-            <a:off x="4572000" y="5517232"/>
-            <a:ext cx="1008112" cy="792088"/>
-          </a:xfrm>
-          <a:prstGeom prst="flowChartMagneticDisk">
-            <a:avLst/>
-          </a:prstGeom>
-          <a:solidFill>
-            <a:schemeClr val="bg1">
-              <a:lumMod val="85000"/>
-            </a:schemeClr>
-          </a:solidFill>
-          <a:ln>
+            <a:off x="395537" y="4293096"/>
+            <a:ext cx="504056" cy="360040"/>
+          </a:xfrm>
+          <a:prstGeom prst="roundRect">
+            <a:avLst/>
+          </a:prstGeom>
+          <a:noFill/>
+          <a:ln w="38100">
             <a:solidFill>
-              <a:schemeClr val="tx1"/>
+              <a:srgbClr val="FF0000"/>
             </a:solidFill>
           </a:ln>
         </p:spPr>
@@ -7821,10 +8157,10 @@
       </p:sp>
       <p:sp>
         <p:nvSpPr>
-          <p:cNvPr id="9" name="矢印: 左右 8">
-            <a:extLst>
-              <a:ext uri="{FF2B5EF4-FFF2-40B4-BE49-F238E27FC236}">
-                <a16:creationId xmlns:a16="http://schemas.microsoft.com/office/drawing/2014/main" id="{C7C278CC-07E4-4318-875D-2DDB254459D8}"/>
+          <p:cNvPr id="6" name="四角形: 角を丸くする 5">
+            <a:extLst>
+              <a:ext uri="{FF2B5EF4-FFF2-40B4-BE49-F238E27FC236}">
+                <a16:creationId xmlns:a16="http://schemas.microsoft.com/office/drawing/2014/main" id="{45DA501C-832C-49B8-8D98-9924DC43C2DF}"/>
               </a:ext>
             </a:extLst>
           </p:cNvPr>
@@ -7833,18 +8169,16 @@
         </p:nvSpPr>
         <p:spPr>
           <a:xfrm>
-            <a:off x="2987824" y="5661248"/>
-            <a:ext cx="1224136" cy="432048"/>
-          </a:xfrm>
-          <a:prstGeom prst="leftRightArrow">
-            <a:avLst/>
-          </a:prstGeom>
-          <a:solidFill>
-            <a:srgbClr val="FF0000"/>
-          </a:solidFill>
-          <a:ln>
+            <a:off x="1115616" y="2276872"/>
+            <a:ext cx="1728192" cy="360040"/>
+          </a:xfrm>
+          <a:prstGeom prst="roundRect">
+            <a:avLst/>
+          </a:prstGeom>
+          <a:noFill/>
+          <a:ln w="38100">
             <a:solidFill>
-              <a:schemeClr val="tx1"/>
+              <a:srgbClr val="FF0000"/>
             </a:solidFill>
           </a:ln>
         </p:spPr>
@@ -7875,176 +8209,10 @@
       </p:sp>
       <p:sp>
         <p:nvSpPr>
-          <p:cNvPr id="10" name="テキスト ボックス 9">
-            <a:extLst>
-              <a:ext uri="{FF2B5EF4-FFF2-40B4-BE49-F238E27FC236}">
-                <a16:creationId xmlns:a16="http://schemas.microsoft.com/office/drawing/2014/main" id="{EF20B80D-C4E0-4F9B-94D7-8E92014A0052}"/>
-              </a:ext>
-            </a:extLst>
-          </p:cNvPr>
-          <p:cNvSpPr txBox="1"/>
-          <p:nvPr/>
-        </p:nvSpPr>
-        <p:spPr>
-          <a:xfrm>
-            <a:off x="3923928" y="6381328"/>
-            <a:ext cx="2262158" cy="369332"/>
-          </a:xfrm>
-          <a:prstGeom prst="rect">
-            <a:avLst/>
-          </a:prstGeom>
-          <a:noFill/>
-        </p:spPr>
-        <p:txBody>
-          <a:bodyPr wrap="none" rtlCol="0">
-            <a:spAutoFit/>
-          </a:bodyPr>
-          <a:lstStyle/>
-          <a:p>
-            <a:r>
-              <a:rPr lang="ja-JP" altLang="en-US"/>
-              <a:t>ローカルストレージ</a:t>
-            </a:r>
-            <a:endParaRPr kumimoji="1" lang="ja-JP" altLang="en-US"/>
-          </a:p>
-        </p:txBody>
-      </p:sp>
-      <p:pic>
-        <p:nvPicPr>
-          <p:cNvPr id="11" name="Picture 6" descr="データセンターのイラスト（単体）">
-            <a:extLst>
-              <a:ext uri="{FF2B5EF4-FFF2-40B4-BE49-F238E27FC236}">
-                <a16:creationId xmlns:a16="http://schemas.microsoft.com/office/drawing/2014/main" id="{EB07BBD1-4387-46B6-8F2B-0F47CBE506F7}"/>
-              </a:ext>
-            </a:extLst>
-          </p:cNvPr>
-          <p:cNvPicPr>
-            <a:picLocks noChangeAspect="1" noChangeArrowheads="1"/>
-          </p:cNvPicPr>
-          <p:nvPr/>
-        </p:nvPicPr>
-        <p:blipFill>
-          <a:blip r:embed="rId3" cstate="print">
-            <a:extLst>
-              <a:ext uri="{28A0092B-C50C-407E-A947-70E740481C1C}">
-                <a14:useLocalDpi xmlns:a14="http://schemas.microsoft.com/office/drawing/2010/main" val="0"/>
-              </a:ext>
-            </a:extLst>
-          </a:blip>
-          <a:srcRect/>
-          <a:stretch>
-            <a:fillRect/>
-          </a:stretch>
-        </p:blipFill>
-        <p:spPr bwMode="auto">
-          <a:xfrm>
-            <a:off x="4716016" y="3429000"/>
-            <a:ext cx="761893" cy="1145704"/>
-          </a:xfrm>
-          <a:prstGeom prst="rect">
-            <a:avLst/>
-          </a:prstGeom>
-          <a:noFill/>
-          <a:extLst>
-            <a:ext uri="{909E8E84-426E-40DD-AFC4-6F175D3DCCD1}">
-              <a14:hiddenFill xmlns:a14="http://schemas.microsoft.com/office/drawing/2010/main">
-                <a:solidFill>
-                  <a:srgbClr val="FFFFFF"/>
-                </a:solidFill>
-              </a14:hiddenFill>
-            </a:ext>
-          </a:extLst>
-        </p:spPr>
-      </p:pic>
-      <p:sp>
-        <p:nvSpPr>
-          <p:cNvPr id="12" name="テキスト ボックス 11">
-            <a:extLst>
-              <a:ext uri="{FF2B5EF4-FFF2-40B4-BE49-F238E27FC236}">
-                <a16:creationId xmlns:a16="http://schemas.microsoft.com/office/drawing/2014/main" id="{A64266E6-A983-45DC-908D-05CAB819A677}"/>
-              </a:ext>
-            </a:extLst>
-          </p:cNvPr>
-          <p:cNvSpPr txBox="1"/>
-          <p:nvPr/>
-        </p:nvSpPr>
-        <p:spPr>
-          <a:xfrm>
-            <a:off x="4283968" y="3068960"/>
-            <a:ext cx="1569660" cy="369332"/>
-          </a:xfrm>
-          <a:prstGeom prst="rect">
-            <a:avLst/>
-          </a:prstGeom>
-          <a:noFill/>
-        </p:spPr>
-        <p:txBody>
-          <a:bodyPr wrap="none" rtlCol="0">
-            <a:spAutoFit/>
-          </a:bodyPr>
-          <a:lstStyle/>
-          <a:p>
-            <a:r>
-              <a:rPr lang="ja-JP" altLang="en-US"/>
-              <a:t>ウェブサーバ</a:t>
-            </a:r>
-            <a:endParaRPr kumimoji="1" lang="ja-JP" altLang="en-US"/>
-          </a:p>
-        </p:txBody>
-      </p:sp>
-      <p:pic>
-        <p:nvPicPr>
-          <p:cNvPr id="13" name="Picture 4">
-            <a:extLst>
-              <a:ext uri="{FF2B5EF4-FFF2-40B4-BE49-F238E27FC236}">
-                <a16:creationId xmlns:a16="http://schemas.microsoft.com/office/drawing/2014/main" id="{0930E5E4-08D6-4A4F-86EB-7DF6020628ED}"/>
-              </a:ext>
-            </a:extLst>
-          </p:cNvPr>
-          <p:cNvPicPr>
-            <a:picLocks noChangeAspect="1" noChangeArrowheads="1"/>
-          </p:cNvPicPr>
-          <p:nvPr/>
-        </p:nvPicPr>
-        <p:blipFill>
-          <a:blip r:embed="rId4" cstate="print">
-            <a:extLst>
-              <a:ext uri="{28A0092B-C50C-407E-A947-70E740481C1C}">
-                <a14:useLocalDpi xmlns:a14="http://schemas.microsoft.com/office/drawing/2010/main" val="0"/>
-              </a:ext>
-            </a:extLst>
-          </a:blip>
-          <a:srcRect/>
-          <a:stretch>
-            <a:fillRect/>
-          </a:stretch>
-        </p:blipFill>
-        <p:spPr bwMode="auto">
-          <a:xfrm>
-            <a:off x="2051720" y="3501008"/>
-            <a:ext cx="792088" cy="792088"/>
-          </a:xfrm>
-          <a:prstGeom prst="rect">
-            <a:avLst/>
-          </a:prstGeom>
-          <a:noFill/>
-          <a:extLst>
-            <a:ext uri="{909E8E84-426E-40DD-AFC4-6F175D3DCCD1}">
-              <a14:hiddenFill xmlns:a14="http://schemas.microsoft.com/office/drawing/2010/main">
-                <a:solidFill>
-                  <a:srgbClr val="FFFFFF"/>
-                </a:solidFill>
-              </a14:hiddenFill>
-            </a:ext>
-          </a:extLst>
-        </p:spPr>
-      </p:pic>
-      <p:sp>
-        <p:nvSpPr>
-          <p:cNvPr id="14" name="矢印: 左右 13">
-            <a:extLst>
-              <a:ext uri="{FF2B5EF4-FFF2-40B4-BE49-F238E27FC236}">
-                <a16:creationId xmlns:a16="http://schemas.microsoft.com/office/drawing/2014/main" id="{146BE311-D0A6-4B81-B626-36174CBE51CA}"/>
+          <p:cNvPr id="7" name="四角形: 角を丸くする 6">
+            <a:extLst>
+              <a:ext uri="{FF2B5EF4-FFF2-40B4-BE49-F238E27FC236}">
+                <a16:creationId xmlns:a16="http://schemas.microsoft.com/office/drawing/2014/main" id="{DCD9CB09-9728-4C54-BE54-F7418BD581E8}"/>
               </a:ext>
             </a:extLst>
           </p:cNvPr>
@@ -8052,19 +8220,17 @@
           <p:nvPr/>
         </p:nvSpPr>
         <p:spPr>
-          <a:xfrm rot="5400000">
-            <a:off x="4644008" y="4797152"/>
-            <a:ext cx="792088" cy="360040"/>
-          </a:xfrm>
-          <a:prstGeom prst="leftRightArrow">
-            <a:avLst/>
-          </a:prstGeom>
-          <a:solidFill>
-            <a:srgbClr val="FF0000"/>
-          </a:solidFill>
-          <a:ln>
+          <a:xfrm>
+            <a:off x="2051720" y="3284984"/>
+            <a:ext cx="792088" cy="216024"/>
+          </a:xfrm>
+          <a:prstGeom prst="roundRect">
+            <a:avLst/>
+          </a:prstGeom>
+          <a:noFill/>
+          <a:ln w="38100">
             <a:solidFill>
-              <a:schemeClr val="tx1"/>
+              <a:srgbClr val="FF0000"/>
             </a:solidFill>
           </a:ln>
         </p:spPr>
@@ -8095,10 +8261,10 @@
       </p:sp>
       <p:sp>
         <p:nvSpPr>
-          <p:cNvPr id="15" name="テキスト ボックス 14">
-            <a:extLst>
-              <a:ext uri="{FF2B5EF4-FFF2-40B4-BE49-F238E27FC236}">
-                <a16:creationId xmlns:a16="http://schemas.microsoft.com/office/drawing/2014/main" id="{F8278653-A99A-40C6-89DA-249735E9ACE4}"/>
+          <p:cNvPr id="8" name="テキスト ボックス 7">
+            <a:extLst>
+              <a:ext uri="{FF2B5EF4-FFF2-40B4-BE49-F238E27FC236}">
+                <a16:creationId xmlns:a16="http://schemas.microsoft.com/office/drawing/2014/main" id="{6DA2A16D-0A29-4CA7-9313-053E4CD97032}"/>
               </a:ext>
             </a:extLst>
           </p:cNvPr>
@@ -8107,8 +8273,8 @@
         </p:nvSpPr>
         <p:spPr>
           <a:xfrm>
-            <a:off x="5508104" y="4653136"/>
-            <a:ext cx="3416320" cy="646331"/>
+            <a:off x="539552" y="1052736"/>
+            <a:ext cx="7789312" cy="369332"/>
           </a:xfrm>
           <a:prstGeom prst="rect">
             <a:avLst/>
@@ -8122,229 +8288,36 @@
           <a:lstStyle/>
           <a:p>
             <a:r>
+              <a:rPr kumimoji="1" lang="en-US" altLang="ja-JP"/>
+              <a:t>1. </a:t>
+            </a:r>
+            <a:r>
               <a:rPr kumimoji="1" lang="ja-JP" altLang="en-US"/>
-              <a:t>ウェブサーバの</a:t>
-            </a:r>
-            <a:endParaRPr kumimoji="1" lang="en-US" altLang="ja-JP"/>
-          </a:p>
-          <a:p>
+              <a:t>拡張機能をクリック </a:t>
+            </a:r>
+            <a:r>
+              <a:rPr kumimoji="1" lang="en-US" altLang="ja-JP"/>
+              <a:t>2. </a:t>
+            </a:r>
             <a:r>
               <a:rPr kumimoji="1" lang="ja-JP" altLang="en-US"/>
-              <a:t>ローカルなのでアクセスできる</a:t>
-            </a:r>
-          </a:p>
-        </p:txBody>
-      </p:sp>
-      <p:sp>
-        <p:nvSpPr>
-          <p:cNvPr id="16" name="矢印: 左右 15">
-            <a:extLst>
-              <a:ext uri="{FF2B5EF4-FFF2-40B4-BE49-F238E27FC236}">
-                <a16:creationId xmlns:a16="http://schemas.microsoft.com/office/drawing/2014/main" id="{18D8D041-08C7-4E75-8EA7-61FABC2A80B7}"/>
-              </a:ext>
-            </a:extLst>
-          </p:cNvPr>
-          <p:cNvSpPr/>
-          <p:nvPr/>
-        </p:nvSpPr>
-        <p:spPr>
-          <a:xfrm>
-            <a:off x="3059832" y="3645024"/>
-            <a:ext cx="1224136" cy="432048"/>
-          </a:xfrm>
-          <a:prstGeom prst="leftRightArrow">
-            <a:avLst/>
-          </a:prstGeom>
-          <a:solidFill>
-            <a:srgbClr val="FF0000"/>
-          </a:solidFill>
-          <a:ln>
-            <a:solidFill>
-              <a:schemeClr val="tx1"/>
-            </a:solidFill>
-          </a:ln>
-        </p:spPr>
-        <p:style>
-          <a:lnRef idx="2">
-            <a:schemeClr val="accent1">
-              <a:shade val="50000"/>
-            </a:schemeClr>
-          </a:lnRef>
-          <a:fillRef idx="1">
-            <a:schemeClr val="accent1"/>
-          </a:fillRef>
-          <a:effectRef idx="0">
-            <a:schemeClr val="accent1"/>
-          </a:effectRef>
-          <a:fontRef idx="minor">
-            <a:schemeClr val="lt1"/>
-          </a:fontRef>
-        </p:style>
-        <p:txBody>
-          <a:bodyPr rtlCol="0" anchor="ctr"/>
-          <a:lstStyle/>
-          <a:p>
-            <a:pPr algn="ctr"/>
-            <a:endParaRPr kumimoji="1" lang="ja-JP" altLang="en-US"/>
-          </a:p>
-        </p:txBody>
-      </p:sp>
-      <p:sp>
-        <p:nvSpPr>
-          <p:cNvPr id="17" name="テキスト ボックス 16">
-            <a:extLst>
-              <a:ext uri="{FF2B5EF4-FFF2-40B4-BE49-F238E27FC236}">
-                <a16:creationId xmlns:a16="http://schemas.microsoft.com/office/drawing/2014/main" id="{D7DC7C37-99FB-4FFE-8401-8B2ED3F5CC37}"/>
-              </a:ext>
-            </a:extLst>
-          </p:cNvPr>
-          <p:cNvSpPr txBox="1"/>
-          <p:nvPr/>
-        </p:nvSpPr>
-        <p:spPr>
-          <a:xfrm>
-            <a:off x="1835696" y="2996952"/>
-            <a:ext cx="1107996" cy="369332"/>
-          </a:xfrm>
-          <a:prstGeom prst="rect">
-            <a:avLst/>
-          </a:prstGeom>
-          <a:noFill/>
-        </p:spPr>
-        <p:txBody>
-          <a:bodyPr wrap="none" rtlCol="0">
-            <a:spAutoFit/>
-          </a:bodyPr>
-          <a:lstStyle/>
-          <a:p>
-            <a:r>
-              <a:rPr lang="ja-JP" altLang="en-US"/>
-              <a:t>ブラウザ</a:t>
-            </a:r>
-            <a:endParaRPr kumimoji="1" lang="ja-JP" altLang="en-US"/>
-          </a:p>
-        </p:txBody>
-      </p:sp>
-      <p:sp>
-        <p:nvSpPr>
-          <p:cNvPr id="18" name="矢印: 左右 17">
-            <a:extLst>
-              <a:ext uri="{FF2B5EF4-FFF2-40B4-BE49-F238E27FC236}">
-                <a16:creationId xmlns:a16="http://schemas.microsoft.com/office/drawing/2014/main" id="{5F59A37E-5243-4FC5-BF12-C9FF860B5953}"/>
-              </a:ext>
-            </a:extLst>
-          </p:cNvPr>
-          <p:cNvSpPr/>
-          <p:nvPr/>
-        </p:nvSpPr>
-        <p:spPr>
-          <a:xfrm rot="5400000">
-            <a:off x="1979712" y="4653136"/>
-            <a:ext cx="792088" cy="360040"/>
-          </a:xfrm>
-          <a:prstGeom prst="leftRightArrow">
-            <a:avLst/>
-          </a:prstGeom>
-          <a:solidFill>
-            <a:srgbClr val="FF0000"/>
-          </a:solidFill>
-          <a:ln>
-            <a:solidFill>
-              <a:schemeClr val="tx1"/>
-            </a:solidFill>
-          </a:ln>
-        </p:spPr>
-        <p:style>
-          <a:lnRef idx="2">
-            <a:schemeClr val="accent1">
-              <a:shade val="50000"/>
-            </a:schemeClr>
-          </a:lnRef>
-          <a:fillRef idx="1">
-            <a:schemeClr val="accent1"/>
-          </a:fillRef>
-          <a:effectRef idx="0">
-            <a:schemeClr val="accent1"/>
-          </a:effectRef>
-          <a:fontRef idx="minor">
-            <a:schemeClr val="lt1"/>
-          </a:fontRef>
-        </p:style>
-        <p:txBody>
-          <a:bodyPr rtlCol="0" anchor="ctr"/>
-          <a:lstStyle/>
-          <a:p>
-            <a:pPr algn="ctr"/>
-            <a:endParaRPr kumimoji="1" lang="ja-JP" altLang="en-US"/>
-          </a:p>
-        </p:txBody>
-      </p:sp>
-      <p:sp>
-        <p:nvSpPr>
-          <p:cNvPr id="19" name="テキスト ボックス 18">
-            <a:extLst>
-              <a:ext uri="{FF2B5EF4-FFF2-40B4-BE49-F238E27FC236}">
-                <a16:creationId xmlns:a16="http://schemas.microsoft.com/office/drawing/2014/main" id="{DDF13C3B-A4AC-4C56-962D-68F37E3C50C5}"/>
-              </a:ext>
-            </a:extLst>
-          </p:cNvPr>
-          <p:cNvSpPr txBox="1"/>
-          <p:nvPr/>
-        </p:nvSpPr>
-        <p:spPr>
-          <a:xfrm>
-            <a:off x="971600" y="4581128"/>
-            <a:ext cx="1107996" cy="369332"/>
-          </a:xfrm>
-          <a:prstGeom prst="rect">
-            <a:avLst/>
-          </a:prstGeom>
-          <a:noFill/>
-        </p:spPr>
-        <p:txBody>
-          <a:bodyPr wrap="none" rtlCol="0">
-            <a:spAutoFit/>
-          </a:bodyPr>
-          <a:lstStyle/>
-          <a:p>
+              <a:t>検索窓に「</a:t>
+            </a:r>
+            <a:r>
+              <a:rPr kumimoji="1" lang="en-US" altLang="ja-JP"/>
+              <a:t>Live Server</a:t>
+            </a:r>
             <a:r>
               <a:rPr kumimoji="1" lang="ja-JP" altLang="en-US"/>
-              <a:t>動作確認</a:t>
-            </a:r>
-          </a:p>
-        </p:txBody>
-      </p:sp>
-      <p:sp>
-        <p:nvSpPr>
-          <p:cNvPr id="20" name="テキスト ボックス 19">
-            <a:extLst>
-              <a:ext uri="{FF2B5EF4-FFF2-40B4-BE49-F238E27FC236}">
-                <a16:creationId xmlns:a16="http://schemas.microsoft.com/office/drawing/2014/main" id="{2268E9D5-9C27-4128-BC11-D7758A87A1D8}"/>
-              </a:ext>
-            </a:extLst>
-          </p:cNvPr>
-          <p:cNvSpPr txBox="1"/>
-          <p:nvPr/>
-        </p:nvSpPr>
-        <p:spPr>
-          <a:xfrm>
-            <a:off x="2843808" y="5301208"/>
-            <a:ext cx="1569660" cy="369332"/>
-          </a:xfrm>
-          <a:prstGeom prst="rect">
-            <a:avLst/>
-          </a:prstGeom>
-          <a:noFill/>
-        </p:spPr>
-        <p:txBody>
-          <a:bodyPr wrap="none" rtlCol="0">
-            <a:spAutoFit/>
-          </a:bodyPr>
-          <a:lstStyle/>
-          <a:p>
+              <a:t>」と入力 </a:t>
+            </a:r>
+            <a:r>
+              <a:rPr kumimoji="1" lang="en-US" altLang="ja-JP"/>
+              <a:t>3. </a:t>
+            </a:r>
             <a:r>
               <a:rPr kumimoji="1" lang="ja-JP" altLang="en-US"/>
-              <a:t>ファイル修正</a:t>
+              <a:t>インストール</a:t>
             </a:r>
           </a:p>
         </p:txBody>
@@ -8352,7 +8325,7 @@
     </p:spTree>
     <p:extLst>
       <p:ext uri="{BB962C8B-B14F-4D97-AF65-F5344CB8AC3E}">
-        <p14:creationId xmlns:p14="http://schemas.microsoft.com/office/powerpoint/2010/main" val="4001331816"/>
+        <p14:creationId xmlns:p14="http://schemas.microsoft.com/office/powerpoint/2010/main" val="3069352372"/>
       </p:ext>
     </p:extLst>
   </p:cSld>
@@ -8384,7 +8357,7 @@
           <p:cNvPr id="2" name="テキスト プレースホルダー 1">
             <a:extLst>
               <a:ext uri="{FF2B5EF4-FFF2-40B4-BE49-F238E27FC236}">
-                <a16:creationId xmlns:a16="http://schemas.microsoft.com/office/drawing/2014/main" id="{EA5F53A1-3CB1-415F-B91C-F1A7DDC68AE9}"/>
+                <a16:creationId xmlns:a16="http://schemas.microsoft.com/office/drawing/2014/main" id="{AB29F8BF-9E30-4320-8780-15405B2C6AE2}"/>
               </a:ext>
             </a:extLst>
           </p:cNvPr>
@@ -8414,10 +8387,10 @@
       </p:sp>
       <p:pic>
         <p:nvPicPr>
-          <p:cNvPr id="4" name="図 3">
-            <a:extLst>
-              <a:ext uri="{FF2B5EF4-FFF2-40B4-BE49-F238E27FC236}">
-                <a16:creationId xmlns:a16="http://schemas.microsoft.com/office/drawing/2014/main" id="{F9820444-49FF-4F57-9B96-37196BB3D328}"/>
+          <p:cNvPr id="6" name="図 5">
+            <a:extLst>
+              <a:ext uri="{FF2B5EF4-FFF2-40B4-BE49-F238E27FC236}">
+                <a16:creationId xmlns:a16="http://schemas.microsoft.com/office/drawing/2014/main" id="{2EE263F4-8A63-4C0D-B7A3-D818F7CC9367}"/>
               </a:ext>
             </a:extLst>
           </p:cNvPr>
@@ -8434,20 +8407,50 @@
         </p:blipFill>
         <p:spPr>
           <a:xfrm>
-            <a:off x="467544" y="1556792"/>
-            <a:ext cx="8415895" cy="5184576"/>
+            <a:off x="251520" y="1268760"/>
+            <a:ext cx="3689002" cy="4392488"/>
           </a:xfrm>
           <a:prstGeom prst="rect">
             <a:avLst/>
           </a:prstGeom>
         </p:spPr>
       </p:pic>
-      <p:sp>
-        <p:nvSpPr>
-          <p:cNvPr id="5" name="四角形: 角を丸くする 4">
-            <a:extLst>
-              <a:ext uri="{FF2B5EF4-FFF2-40B4-BE49-F238E27FC236}">
-                <a16:creationId xmlns:a16="http://schemas.microsoft.com/office/drawing/2014/main" id="{07D13061-4370-45F4-AFA4-6D8F544D6A8C}"/>
+      <p:pic>
+        <p:nvPicPr>
+          <p:cNvPr id="8" name="図 7">
+            <a:extLst>
+              <a:ext uri="{FF2B5EF4-FFF2-40B4-BE49-F238E27FC236}">
+                <a16:creationId xmlns:a16="http://schemas.microsoft.com/office/drawing/2014/main" id="{A3115DBD-466C-49B2-B25E-2CC59EAD9B39}"/>
+              </a:ext>
+            </a:extLst>
+          </p:cNvPr>
+          <p:cNvPicPr>
+            <a:picLocks noChangeAspect="1"/>
+          </p:cNvPicPr>
+          <p:nvPr/>
+        </p:nvPicPr>
+        <p:blipFill>
+          <a:blip r:embed="rId3"/>
+          <a:stretch>
+            <a:fillRect/>
+          </a:stretch>
+        </p:blipFill>
+        <p:spPr>
+          <a:xfrm>
+            <a:off x="179512" y="5877272"/>
+            <a:ext cx="7994799" cy="746502"/>
+          </a:xfrm>
+          <a:prstGeom prst="rect">
+            <a:avLst/>
+          </a:prstGeom>
+        </p:spPr>
+      </p:pic>
+      <p:sp>
+        <p:nvSpPr>
+          <p:cNvPr id="9" name="四角形: 角を丸くする 8">
+            <a:extLst>
+              <a:ext uri="{FF2B5EF4-FFF2-40B4-BE49-F238E27FC236}">
+                <a16:creationId xmlns:a16="http://schemas.microsoft.com/office/drawing/2014/main" id="{049741E5-CF7F-46F7-ACA1-8949D8EEDE1F}"/>
               </a:ext>
             </a:extLst>
           </p:cNvPr>
@@ -8456,8 +8459,8 @@
         </p:nvSpPr>
         <p:spPr>
           <a:xfrm>
-            <a:off x="395537" y="4293096"/>
-            <a:ext cx="504056" cy="360040"/>
+            <a:off x="1619672" y="4509120"/>
+            <a:ext cx="1872208" cy="360040"/>
           </a:xfrm>
           <a:prstGeom prst="roundRect">
             <a:avLst/>
@@ -8496,10 +8499,139 @@
       </p:sp>
       <p:sp>
         <p:nvSpPr>
-          <p:cNvPr id="6" name="四角形: 角を丸くする 5">
-            <a:extLst>
-              <a:ext uri="{FF2B5EF4-FFF2-40B4-BE49-F238E27FC236}">
-                <a16:creationId xmlns:a16="http://schemas.microsoft.com/office/drawing/2014/main" id="{45DA501C-832C-49B8-8D98-9924DC43C2DF}"/>
+          <p:cNvPr id="10" name="テキスト ボックス 9">
+            <a:extLst>
+              <a:ext uri="{FF2B5EF4-FFF2-40B4-BE49-F238E27FC236}">
+                <a16:creationId xmlns:a16="http://schemas.microsoft.com/office/drawing/2014/main" id="{59FBE452-68D8-4EDA-989F-1EAB83E15ACB}"/>
+              </a:ext>
+            </a:extLst>
+          </p:cNvPr>
+          <p:cNvSpPr txBox="1"/>
+          <p:nvPr/>
+        </p:nvSpPr>
+        <p:spPr>
+          <a:xfrm>
+            <a:off x="4211960" y="1916832"/>
+            <a:ext cx="4717958" cy="584775"/>
+          </a:xfrm>
+          <a:prstGeom prst="rect">
+            <a:avLst/>
+          </a:prstGeom>
+          <a:noFill/>
+        </p:spPr>
+        <p:txBody>
+          <a:bodyPr wrap="none" rtlCol="0">
+            <a:spAutoFit/>
+          </a:bodyPr>
+          <a:lstStyle/>
+          <a:p>
+            <a:r>
+              <a:rPr lang="en-US" altLang="ja-JP" sz="3200"/>
+              <a:t>1. docs/index.html</a:t>
+            </a:r>
+            <a:r>
+              <a:rPr lang="ja-JP" altLang="en-US" sz="3200"/>
+              <a:t>を開く</a:t>
+            </a:r>
+            <a:endParaRPr kumimoji="1" lang="ja-JP" altLang="en-US" sz="3200"/>
+          </a:p>
+        </p:txBody>
+      </p:sp>
+      <p:cxnSp>
+        <p:nvCxnSpPr>
+          <p:cNvPr id="11" name="コネクタ: カギ線 10">
+            <a:extLst>
+              <a:ext uri="{FF2B5EF4-FFF2-40B4-BE49-F238E27FC236}">
+                <a16:creationId xmlns:a16="http://schemas.microsoft.com/office/drawing/2014/main" id="{448590C9-F6A1-44C0-A1D9-0E2FA7F493B8}"/>
+              </a:ext>
+            </a:extLst>
+          </p:cNvPr>
+          <p:cNvCxnSpPr>
+            <a:cxnSpLocks/>
+            <a:stCxn id="10" idx="2"/>
+            <a:endCxn id="9" idx="0"/>
+          </p:cNvCxnSpPr>
+          <p:nvPr/>
+        </p:nvCxnSpPr>
+        <p:spPr>
+          <a:xfrm rot="5400000">
+            <a:off x="3559602" y="1497782"/>
+            <a:ext cx="2007513" cy="4015163"/>
+          </a:xfrm>
+          <a:prstGeom prst="bentConnector3">
+            <a:avLst>
+              <a:gd name="adj1" fmla="val 50000"/>
+            </a:avLst>
+          </a:prstGeom>
+          <a:ln w="28575">
+            <a:solidFill>
+              <a:srgbClr val="FF0000"/>
+            </a:solidFill>
+            <a:headEnd type="none" w="med" len="med"/>
+            <a:tailEnd type="triangle"/>
+          </a:ln>
+        </p:spPr>
+        <p:style>
+          <a:lnRef idx="1">
+            <a:schemeClr val="accent1"/>
+          </a:lnRef>
+          <a:fillRef idx="0">
+            <a:schemeClr val="accent1"/>
+          </a:fillRef>
+          <a:effectRef idx="0">
+            <a:schemeClr val="accent1"/>
+          </a:effectRef>
+          <a:fontRef idx="minor">
+            <a:schemeClr val="tx1"/>
+          </a:fontRef>
+        </p:style>
+      </p:cxnSp>
+      <p:sp>
+        <p:nvSpPr>
+          <p:cNvPr id="14" name="テキスト ボックス 13">
+            <a:extLst>
+              <a:ext uri="{FF2B5EF4-FFF2-40B4-BE49-F238E27FC236}">
+                <a16:creationId xmlns:a16="http://schemas.microsoft.com/office/drawing/2014/main" id="{31A75A33-4C33-4243-A147-5BAF5F4571D7}"/>
+              </a:ext>
+            </a:extLst>
+          </p:cNvPr>
+          <p:cNvSpPr txBox="1"/>
+          <p:nvPr/>
+        </p:nvSpPr>
+        <p:spPr>
+          <a:xfrm>
+            <a:off x="4283968" y="3789040"/>
+            <a:ext cx="4104009" cy="584775"/>
+          </a:xfrm>
+          <a:prstGeom prst="rect">
+            <a:avLst/>
+          </a:prstGeom>
+          <a:noFill/>
+        </p:spPr>
+        <p:txBody>
+          <a:bodyPr wrap="none" rtlCol="0">
+            <a:spAutoFit/>
+          </a:bodyPr>
+          <a:lstStyle/>
+          <a:p>
+            <a:r>
+              <a:rPr lang="en-US" altLang="ja-JP" sz="3200"/>
+              <a:t>2. Go Live</a:t>
+            </a:r>
+            <a:r>
+              <a:rPr lang="ja-JP" altLang="en-US" sz="3200"/>
+              <a:t>をクリック</a:t>
+            </a:r>
+            <a:endParaRPr kumimoji="1" lang="ja-JP" altLang="en-US" sz="3200"/>
+          </a:p>
+        </p:txBody>
+      </p:sp>
+      <p:sp>
+        <p:nvSpPr>
+          <p:cNvPr id="15" name="四角形: 角を丸くする 14">
+            <a:extLst>
+              <a:ext uri="{FF2B5EF4-FFF2-40B4-BE49-F238E27FC236}">
+                <a16:creationId xmlns:a16="http://schemas.microsoft.com/office/drawing/2014/main" id="{1D39AB62-16DC-4A48-A1A1-EE99B68E463B}"/>
               </a:ext>
             </a:extLst>
           </p:cNvPr>
@@ -8508,8 +8640,8 @@
         </p:nvSpPr>
         <p:spPr>
           <a:xfrm>
-            <a:off x="1115616" y="2276872"/>
-            <a:ext cx="1728192" cy="360040"/>
+            <a:off x="6516216" y="6165304"/>
+            <a:ext cx="1728192" cy="504056"/>
           </a:xfrm>
           <a:prstGeom prst="roundRect">
             <a:avLst/>
@@ -8546,125 +8678,59 @@
           </a:p>
         </p:txBody>
       </p:sp>
-      <p:sp>
-        <p:nvSpPr>
-          <p:cNvPr id="7" name="四角形: 角を丸くする 6">
-            <a:extLst>
-              <a:ext uri="{FF2B5EF4-FFF2-40B4-BE49-F238E27FC236}">
-                <a16:creationId xmlns:a16="http://schemas.microsoft.com/office/drawing/2014/main" id="{DCD9CB09-9728-4C54-BE54-F7418BD581E8}"/>
-              </a:ext>
-            </a:extLst>
-          </p:cNvPr>
-          <p:cNvSpPr/>
-          <p:nvPr/>
-        </p:nvSpPr>
-        <p:spPr>
-          <a:xfrm>
-            <a:off x="2051720" y="3284984"/>
-            <a:ext cx="792088" cy="216024"/>
-          </a:xfrm>
-          <a:prstGeom prst="roundRect">
-            <a:avLst/>
-          </a:prstGeom>
-          <a:noFill/>
-          <a:ln w="38100">
+      <p:cxnSp>
+        <p:nvCxnSpPr>
+          <p:cNvPr id="16" name="コネクタ: カギ線 15">
+            <a:extLst>
+              <a:ext uri="{FF2B5EF4-FFF2-40B4-BE49-F238E27FC236}">
+                <a16:creationId xmlns:a16="http://schemas.microsoft.com/office/drawing/2014/main" id="{B813599B-5906-4ABF-A63C-3365AE11C38D}"/>
+              </a:ext>
+            </a:extLst>
+          </p:cNvPr>
+          <p:cNvCxnSpPr>
+            <a:cxnSpLocks/>
+            <a:stCxn id="14" idx="2"/>
+            <a:endCxn id="15" idx="0"/>
+          </p:cNvCxnSpPr>
+          <p:nvPr/>
+        </p:nvCxnSpPr>
+        <p:spPr>
+          <a:xfrm rot="16200000" flipH="1">
+            <a:off x="5962398" y="4747389"/>
+            <a:ext cx="1791489" cy="1044339"/>
+          </a:xfrm>
+          <a:prstGeom prst="bentConnector3">
+            <a:avLst>
+              <a:gd name="adj1" fmla="val 50000"/>
+            </a:avLst>
+          </a:prstGeom>
+          <a:ln w="28575">
             <a:solidFill>
               <a:srgbClr val="FF0000"/>
             </a:solidFill>
+            <a:headEnd type="none" w="med" len="med"/>
+            <a:tailEnd type="triangle"/>
           </a:ln>
         </p:spPr>
         <p:style>
-          <a:lnRef idx="2">
-            <a:schemeClr val="accent1">
-              <a:shade val="50000"/>
-            </a:schemeClr>
+          <a:lnRef idx="1">
+            <a:schemeClr val="accent1"/>
           </a:lnRef>
-          <a:fillRef idx="1">
+          <a:fillRef idx="0">
             <a:schemeClr val="accent1"/>
           </a:fillRef>
           <a:effectRef idx="0">
             <a:schemeClr val="accent1"/>
           </a:effectRef>
           <a:fontRef idx="minor">
-            <a:schemeClr val="lt1"/>
+            <a:schemeClr val="tx1"/>
           </a:fontRef>
         </p:style>
-        <p:txBody>
-          <a:bodyPr rtlCol="0" anchor="ctr"/>
-          <a:lstStyle/>
-          <a:p>
-            <a:pPr algn="ctr"/>
-            <a:endParaRPr kumimoji="1" lang="ja-JP" altLang="en-US"/>
-          </a:p>
-        </p:txBody>
-      </p:sp>
-      <p:sp>
-        <p:nvSpPr>
-          <p:cNvPr id="8" name="テキスト ボックス 7">
-            <a:extLst>
-              <a:ext uri="{FF2B5EF4-FFF2-40B4-BE49-F238E27FC236}">
-                <a16:creationId xmlns:a16="http://schemas.microsoft.com/office/drawing/2014/main" id="{6DA2A16D-0A29-4CA7-9313-053E4CD97032}"/>
-              </a:ext>
-            </a:extLst>
-          </p:cNvPr>
-          <p:cNvSpPr txBox="1"/>
-          <p:nvPr/>
-        </p:nvSpPr>
-        <p:spPr>
-          <a:xfrm>
-            <a:off x="539552" y="1052736"/>
-            <a:ext cx="7789312" cy="369332"/>
-          </a:xfrm>
-          <a:prstGeom prst="rect">
-            <a:avLst/>
-          </a:prstGeom>
-          <a:noFill/>
-        </p:spPr>
-        <p:txBody>
-          <a:bodyPr wrap="none" rtlCol="0">
-            <a:spAutoFit/>
-          </a:bodyPr>
-          <a:lstStyle/>
-          <a:p>
-            <a:r>
-              <a:rPr kumimoji="1" lang="en-US" altLang="ja-JP"/>
-              <a:t>1. </a:t>
-            </a:r>
-            <a:r>
-              <a:rPr kumimoji="1" lang="ja-JP" altLang="en-US"/>
-              <a:t>拡張機能をクリック </a:t>
-            </a:r>
-            <a:r>
-              <a:rPr kumimoji="1" lang="en-US" altLang="ja-JP"/>
-              <a:t>2. </a:t>
-            </a:r>
-            <a:r>
-              <a:rPr kumimoji="1" lang="ja-JP" altLang="en-US"/>
-              <a:t>検索窓に「</a:t>
-            </a:r>
-            <a:r>
-              <a:rPr kumimoji="1" lang="en-US" altLang="ja-JP"/>
-              <a:t>Live Server</a:t>
-            </a:r>
-            <a:r>
-              <a:rPr kumimoji="1" lang="ja-JP" altLang="en-US"/>
-              <a:t>」と入力 </a:t>
-            </a:r>
-            <a:r>
-              <a:rPr kumimoji="1" lang="en-US" altLang="ja-JP"/>
-              <a:t>3. </a:t>
-            </a:r>
-            <a:r>
-              <a:rPr kumimoji="1" lang="ja-JP" altLang="en-US"/>
-              <a:t>インストール</a:t>
-            </a:r>
-          </a:p>
-        </p:txBody>
-      </p:sp>
+      </p:cxnSp>
     </p:spTree>
     <p:extLst>
       <p:ext uri="{BB962C8B-B14F-4D97-AF65-F5344CB8AC3E}">
-        <p14:creationId xmlns:p14="http://schemas.microsoft.com/office/powerpoint/2010/main" val="3069352372"/>
+        <p14:creationId xmlns:p14="http://schemas.microsoft.com/office/powerpoint/2010/main" val="2638546528"/>
       </p:ext>
     </p:extLst>
   </p:cSld>
@@ -8696,7 +8762,7 @@
           <p:cNvPr id="2" name="テキスト プレースホルダー 1">
             <a:extLst>
               <a:ext uri="{FF2B5EF4-FFF2-40B4-BE49-F238E27FC236}">
-                <a16:creationId xmlns:a16="http://schemas.microsoft.com/office/drawing/2014/main" id="{AB29F8BF-9E30-4320-8780-15405B2C6AE2}"/>
+                <a16:creationId xmlns:a16="http://schemas.microsoft.com/office/drawing/2014/main" id="{5B5E8DCF-EB67-44A3-89B4-E45F5A1124C6}"/>
               </a:ext>
             </a:extLst>
           </p:cNvPr>
@@ -8724,12 +8790,48 @@
           </a:p>
         </p:txBody>
       </p:sp>
+      <p:sp>
+        <p:nvSpPr>
+          <p:cNvPr id="5" name="テキスト ボックス 4">
+            <a:extLst>
+              <a:ext uri="{FF2B5EF4-FFF2-40B4-BE49-F238E27FC236}">
+                <a16:creationId xmlns:a16="http://schemas.microsoft.com/office/drawing/2014/main" id="{C5D09ED4-C0D4-4DB2-B9F7-83E48E7CCE64}"/>
+              </a:ext>
+            </a:extLst>
+          </p:cNvPr>
+          <p:cNvSpPr txBox="1"/>
+          <p:nvPr/>
+        </p:nvSpPr>
+        <p:spPr>
+          <a:xfrm>
+            <a:off x="1331640" y="980728"/>
+            <a:ext cx="5724644" cy="461665"/>
+          </a:xfrm>
+          <a:prstGeom prst="rect">
+            <a:avLst/>
+          </a:prstGeom>
+          <a:noFill/>
+        </p:spPr>
+        <p:txBody>
+          <a:bodyPr wrap="none" rtlCol="0">
+            <a:spAutoFit/>
+          </a:bodyPr>
+          <a:lstStyle/>
+          <a:p>
+            <a:r>
+              <a:rPr lang="ja-JP" altLang="en-US" sz="2400" dirty="0"/>
+              <a:t>ブラウザが開いてゲームができれば成功</a:t>
+            </a:r>
+            <a:endParaRPr kumimoji="1" lang="ja-JP" altLang="en-US" sz="2400" dirty="0"/>
+          </a:p>
+        </p:txBody>
+      </p:sp>
       <p:pic>
         <p:nvPicPr>
-          <p:cNvPr id="6" name="図 5">
-            <a:extLst>
-              <a:ext uri="{FF2B5EF4-FFF2-40B4-BE49-F238E27FC236}">
-                <a16:creationId xmlns:a16="http://schemas.microsoft.com/office/drawing/2014/main" id="{2EE263F4-8A63-4C0D-B7A3-D818F7CC9367}"/>
+          <p:cNvPr id="7" name="図 6">
+            <a:extLst>
+              <a:ext uri="{FF2B5EF4-FFF2-40B4-BE49-F238E27FC236}">
+                <a16:creationId xmlns:a16="http://schemas.microsoft.com/office/drawing/2014/main" id="{E36141E7-394E-47D5-B351-B98C23729F14}"/>
               </a:ext>
             </a:extLst>
           </p:cNvPr>
@@ -8746,102 +8848,20 @@
         </p:blipFill>
         <p:spPr>
           <a:xfrm>
-            <a:off x="251520" y="1268760"/>
-            <a:ext cx="3689002" cy="4392488"/>
+            <a:off x="611560" y="1412776"/>
+            <a:ext cx="7488832" cy="4836537"/>
           </a:xfrm>
           <a:prstGeom prst="rect">
             <a:avLst/>
           </a:prstGeom>
         </p:spPr>
       </p:pic>
-      <p:pic>
-        <p:nvPicPr>
-          <p:cNvPr id="8" name="図 7">
-            <a:extLst>
-              <a:ext uri="{FF2B5EF4-FFF2-40B4-BE49-F238E27FC236}">
-                <a16:creationId xmlns:a16="http://schemas.microsoft.com/office/drawing/2014/main" id="{A3115DBD-466C-49B2-B25E-2CC59EAD9B39}"/>
-              </a:ext>
-            </a:extLst>
-          </p:cNvPr>
-          <p:cNvPicPr>
-            <a:picLocks noChangeAspect="1"/>
-          </p:cNvPicPr>
-          <p:nvPr/>
-        </p:nvPicPr>
-        <p:blipFill>
-          <a:blip r:embed="rId3"/>
-          <a:stretch>
-            <a:fillRect/>
-          </a:stretch>
-        </p:blipFill>
-        <p:spPr>
-          <a:xfrm>
-            <a:off x="179512" y="5877272"/>
-            <a:ext cx="7994799" cy="746502"/>
-          </a:xfrm>
-          <a:prstGeom prst="rect">
-            <a:avLst/>
-          </a:prstGeom>
-        </p:spPr>
-      </p:pic>
-      <p:sp>
-        <p:nvSpPr>
-          <p:cNvPr id="9" name="四角形: 角を丸くする 8">
-            <a:extLst>
-              <a:ext uri="{FF2B5EF4-FFF2-40B4-BE49-F238E27FC236}">
-                <a16:creationId xmlns:a16="http://schemas.microsoft.com/office/drawing/2014/main" id="{049741E5-CF7F-46F7-ACA1-8949D8EEDE1F}"/>
-              </a:ext>
-            </a:extLst>
-          </p:cNvPr>
-          <p:cNvSpPr/>
-          <p:nvPr/>
-        </p:nvSpPr>
-        <p:spPr>
-          <a:xfrm>
-            <a:off x="1619672" y="4509120"/>
-            <a:ext cx="1872208" cy="360040"/>
-          </a:xfrm>
-          <a:prstGeom prst="roundRect">
-            <a:avLst/>
-          </a:prstGeom>
-          <a:noFill/>
-          <a:ln w="38100">
-            <a:solidFill>
-              <a:srgbClr val="FF0000"/>
-            </a:solidFill>
-          </a:ln>
-        </p:spPr>
-        <p:style>
-          <a:lnRef idx="2">
-            <a:schemeClr val="accent1">
-              <a:shade val="50000"/>
-            </a:schemeClr>
-          </a:lnRef>
-          <a:fillRef idx="1">
-            <a:schemeClr val="accent1"/>
-          </a:fillRef>
-          <a:effectRef idx="0">
-            <a:schemeClr val="accent1"/>
-          </a:effectRef>
-          <a:fontRef idx="minor">
-            <a:schemeClr val="lt1"/>
-          </a:fontRef>
-        </p:style>
-        <p:txBody>
-          <a:bodyPr rtlCol="0" anchor="ctr"/>
-          <a:lstStyle/>
-          <a:p>
-            <a:pPr algn="ctr"/>
-            <a:endParaRPr kumimoji="1" lang="ja-JP" altLang="en-US"/>
-          </a:p>
-        </p:txBody>
-      </p:sp>
-      <p:sp>
-        <p:nvSpPr>
-          <p:cNvPr id="10" name="テキスト ボックス 9">
-            <a:extLst>
-              <a:ext uri="{FF2B5EF4-FFF2-40B4-BE49-F238E27FC236}">
-                <a16:creationId xmlns:a16="http://schemas.microsoft.com/office/drawing/2014/main" id="{59FBE452-68D8-4EDA-989F-1EAB83E15ACB}"/>
+      <p:sp>
+        <p:nvSpPr>
+          <p:cNvPr id="3" name="テキスト ボックス 2">
+            <a:extLst>
+              <a:ext uri="{FF2B5EF4-FFF2-40B4-BE49-F238E27FC236}">
+                <a16:creationId xmlns:a16="http://schemas.microsoft.com/office/drawing/2014/main" id="{85C61F87-F191-6B9D-EBDD-0BBE98F5A75E}"/>
               </a:ext>
             </a:extLst>
           </p:cNvPr>
@@ -8850,8 +8870,8 @@
         </p:nvSpPr>
         <p:spPr>
           <a:xfrm>
-            <a:off x="4211960" y="1916832"/>
-            <a:ext cx="4717958" cy="584775"/>
+            <a:off x="2195736" y="6309320"/>
+            <a:ext cx="4570482" cy="369332"/>
           </a:xfrm>
           <a:prstGeom prst="rect">
             <a:avLst/>
@@ -8865,211 +8885,17 @@
           <a:lstStyle/>
           <a:p>
             <a:r>
-              <a:rPr lang="en-US" altLang="ja-JP" sz="3200"/>
-              <a:t>1. docs/index.html</a:t>
-            </a:r>
-            <a:r>
-              <a:rPr lang="ja-JP" altLang="en-US" sz="3200"/>
-              <a:t>を開く</a:t>
-            </a:r>
-            <a:endParaRPr kumimoji="1" lang="ja-JP" altLang="en-US" sz="3200"/>
-          </a:p>
-        </p:txBody>
-      </p:sp>
-      <p:cxnSp>
-        <p:nvCxnSpPr>
-          <p:cNvPr id="11" name="コネクタ: カギ線 10">
-            <a:extLst>
-              <a:ext uri="{FF2B5EF4-FFF2-40B4-BE49-F238E27FC236}">
-                <a16:creationId xmlns:a16="http://schemas.microsoft.com/office/drawing/2014/main" id="{448590C9-F6A1-44C0-A1D9-0E2FA7F493B8}"/>
-              </a:ext>
-            </a:extLst>
-          </p:cNvPr>
-          <p:cNvCxnSpPr>
-            <a:cxnSpLocks/>
-            <a:stCxn id="10" idx="2"/>
-            <a:endCxn id="9" idx="0"/>
-          </p:cNvCxnSpPr>
-          <p:nvPr/>
-        </p:nvCxnSpPr>
-        <p:spPr>
-          <a:xfrm rot="5400000">
-            <a:off x="3559602" y="1497782"/>
-            <a:ext cx="2007513" cy="4015163"/>
-          </a:xfrm>
-          <a:prstGeom prst="bentConnector3">
-            <a:avLst>
-              <a:gd name="adj1" fmla="val 50000"/>
-            </a:avLst>
-          </a:prstGeom>
-          <a:ln w="28575">
-            <a:solidFill>
-              <a:srgbClr val="FF0000"/>
-            </a:solidFill>
-            <a:headEnd type="none" w="med" len="med"/>
-            <a:tailEnd type="triangle"/>
-          </a:ln>
-        </p:spPr>
-        <p:style>
-          <a:lnRef idx="1">
-            <a:schemeClr val="accent1"/>
-          </a:lnRef>
-          <a:fillRef idx="0">
-            <a:schemeClr val="accent1"/>
-          </a:fillRef>
-          <a:effectRef idx="0">
-            <a:schemeClr val="accent1"/>
-          </a:effectRef>
-          <a:fontRef idx="minor">
-            <a:schemeClr val="tx1"/>
-          </a:fontRef>
-        </p:style>
-      </p:cxnSp>
-      <p:sp>
-        <p:nvSpPr>
-          <p:cNvPr id="14" name="テキスト ボックス 13">
-            <a:extLst>
-              <a:ext uri="{FF2B5EF4-FFF2-40B4-BE49-F238E27FC236}">
-                <a16:creationId xmlns:a16="http://schemas.microsoft.com/office/drawing/2014/main" id="{31A75A33-4C33-4243-A147-5BAF5F4571D7}"/>
-              </a:ext>
-            </a:extLst>
-          </p:cNvPr>
-          <p:cNvSpPr txBox="1"/>
-          <p:nvPr/>
-        </p:nvSpPr>
-        <p:spPr>
-          <a:xfrm>
-            <a:off x="4283968" y="3789040"/>
-            <a:ext cx="4104009" cy="584775"/>
-          </a:xfrm>
-          <a:prstGeom prst="rect">
-            <a:avLst/>
-          </a:prstGeom>
-          <a:noFill/>
-        </p:spPr>
-        <p:txBody>
-          <a:bodyPr wrap="none" rtlCol="0">
-            <a:spAutoFit/>
-          </a:bodyPr>
-          <a:lstStyle/>
-          <a:p>
-            <a:r>
-              <a:rPr lang="en-US" altLang="ja-JP" sz="3200"/>
-              <a:t>2. Go Live</a:t>
-            </a:r>
-            <a:r>
-              <a:rPr lang="ja-JP" altLang="en-US" sz="3200"/>
-              <a:t>をクリック</a:t>
-            </a:r>
-            <a:endParaRPr kumimoji="1" lang="ja-JP" altLang="en-US" sz="3200"/>
-          </a:p>
-        </p:txBody>
-      </p:sp>
-      <p:sp>
-        <p:nvSpPr>
-          <p:cNvPr id="15" name="四角形: 角を丸くする 14">
-            <a:extLst>
-              <a:ext uri="{FF2B5EF4-FFF2-40B4-BE49-F238E27FC236}">
-                <a16:creationId xmlns:a16="http://schemas.microsoft.com/office/drawing/2014/main" id="{1D39AB62-16DC-4A48-A1A1-EE99B68E463B}"/>
-              </a:ext>
-            </a:extLst>
-          </p:cNvPr>
-          <p:cNvSpPr/>
-          <p:nvPr/>
-        </p:nvSpPr>
-        <p:spPr>
-          <a:xfrm>
-            <a:off x="6516216" y="6165304"/>
-            <a:ext cx="1728192" cy="504056"/>
-          </a:xfrm>
-          <a:prstGeom prst="roundRect">
-            <a:avLst/>
-          </a:prstGeom>
-          <a:noFill/>
-          <a:ln w="38100">
-            <a:solidFill>
-              <a:srgbClr val="FF0000"/>
-            </a:solidFill>
-          </a:ln>
-        </p:spPr>
-        <p:style>
-          <a:lnRef idx="2">
-            <a:schemeClr val="accent1">
-              <a:shade val="50000"/>
-            </a:schemeClr>
-          </a:lnRef>
-          <a:fillRef idx="1">
-            <a:schemeClr val="accent1"/>
-          </a:fillRef>
-          <a:effectRef idx="0">
-            <a:schemeClr val="accent1"/>
-          </a:effectRef>
-          <a:fontRef idx="minor">
-            <a:schemeClr val="lt1"/>
-          </a:fontRef>
-        </p:style>
-        <p:txBody>
-          <a:bodyPr rtlCol="0" anchor="ctr"/>
-          <a:lstStyle/>
-          <a:p>
-            <a:pPr algn="ctr"/>
-            <a:endParaRPr kumimoji="1" lang="ja-JP" altLang="en-US"/>
-          </a:p>
-        </p:txBody>
-      </p:sp>
-      <p:cxnSp>
-        <p:nvCxnSpPr>
-          <p:cNvPr id="16" name="コネクタ: カギ線 15">
-            <a:extLst>
-              <a:ext uri="{FF2B5EF4-FFF2-40B4-BE49-F238E27FC236}">
-                <a16:creationId xmlns:a16="http://schemas.microsoft.com/office/drawing/2014/main" id="{B813599B-5906-4ABF-A63C-3365AE11C38D}"/>
-              </a:ext>
-            </a:extLst>
-          </p:cNvPr>
-          <p:cNvCxnSpPr>
-            <a:cxnSpLocks/>
-            <a:stCxn id="14" idx="2"/>
-            <a:endCxn id="15" idx="0"/>
-          </p:cNvCxnSpPr>
-          <p:nvPr/>
-        </p:nvCxnSpPr>
-        <p:spPr>
-          <a:xfrm rot="16200000" flipH="1">
-            <a:off x="5962398" y="4747389"/>
-            <a:ext cx="1791489" cy="1044339"/>
-          </a:xfrm>
-          <a:prstGeom prst="bentConnector3">
-            <a:avLst>
-              <a:gd name="adj1" fmla="val 50000"/>
-            </a:avLst>
-          </a:prstGeom>
-          <a:ln w="28575">
-            <a:solidFill>
-              <a:srgbClr val="FF0000"/>
-            </a:solidFill>
-            <a:headEnd type="none" w="med" len="med"/>
-            <a:tailEnd type="triangle"/>
-          </a:ln>
-        </p:spPr>
-        <p:style>
-          <a:lnRef idx="1">
-            <a:schemeClr val="accent1"/>
-          </a:lnRef>
-          <a:fillRef idx="0">
-            <a:schemeClr val="accent1"/>
-          </a:fillRef>
-          <a:effectRef idx="0">
-            <a:schemeClr val="accent1"/>
-          </a:effectRef>
-          <a:fontRef idx="minor">
-            <a:schemeClr val="tx1"/>
-          </a:fontRef>
-        </p:style>
-      </p:cxnSp>
+              <a:rPr lang="ja-JP" altLang="en-US" dirty="0"/>
+              <a:t>このタブはデバッグに使うので閉じない事</a:t>
+            </a:r>
+            <a:endParaRPr kumimoji="1" lang="ja-JP" altLang="en-US" dirty="0"/>
+          </a:p>
+        </p:txBody>
+      </p:sp>
     </p:spTree>
     <p:extLst>
       <p:ext uri="{BB962C8B-B14F-4D97-AF65-F5344CB8AC3E}">
-        <p14:creationId xmlns:p14="http://schemas.microsoft.com/office/powerpoint/2010/main" val="2638546528"/>
+        <p14:creationId xmlns:p14="http://schemas.microsoft.com/office/powerpoint/2010/main" val="1989445412"/>
       </p:ext>
     </p:extLst>
   </p:cSld>
@@ -9101,7 +8927,7 @@
           <p:cNvPr id="2" name="テキスト プレースホルダー 1">
             <a:extLst>
               <a:ext uri="{FF2B5EF4-FFF2-40B4-BE49-F238E27FC236}">
-                <a16:creationId xmlns:a16="http://schemas.microsoft.com/office/drawing/2014/main" id="{5B5E8DCF-EB67-44A3-89B4-E45F5A1124C6}"/>
+                <a16:creationId xmlns:a16="http://schemas.microsoft.com/office/drawing/2014/main" id="{EA014185-02D9-412D-A9DD-33CB68EF0FA6}"/>
               </a:ext>
             </a:extLst>
           </p:cNvPr>
@@ -9123,54 +8949,18 @@
             </a:r>
             <a:r>
               <a:rPr lang="en-US" altLang="ja-JP"/>
-              <a:t>2 - Step 4</a:t>
+              <a:t>2 - Step 5</a:t>
             </a:r>
             <a:endParaRPr kumimoji="1" lang="ja-JP" altLang="en-US"/>
-          </a:p>
-        </p:txBody>
-      </p:sp>
-      <p:sp>
-        <p:nvSpPr>
-          <p:cNvPr id="5" name="テキスト ボックス 4">
-            <a:extLst>
-              <a:ext uri="{FF2B5EF4-FFF2-40B4-BE49-F238E27FC236}">
-                <a16:creationId xmlns:a16="http://schemas.microsoft.com/office/drawing/2014/main" id="{C5D09ED4-C0D4-4DB2-B9F7-83E48E7CCE64}"/>
-              </a:ext>
-            </a:extLst>
-          </p:cNvPr>
-          <p:cNvSpPr txBox="1"/>
-          <p:nvPr/>
-        </p:nvSpPr>
-        <p:spPr>
-          <a:xfrm>
-            <a:off x="1331640" y="980728"/>
-            <a:ext cx="5724644" cy="461665"/>
-          </a:xfrm>
-          <a:prstGeom prst="rect">
-            <a:avLst/>
-          </a:prstGeom>
-          <a:noFill/>
-        </p:spPr>
-        <p:txBody>
-          <a:bodyPr wrap="none" rtlCol="0">
-            <a:spAutoFit/>
-          </a:bodyPr>
-          <a:lstStyle/>
-          <a:p>
-            <a:r>
-              <a:rPr lang="ja-JP" altLang="en-US" sz="2400" dirty="0"/>
-              <a:t>ブラウザが開いてゲームができれば成功</a:t>
-            </a:r>
-            <a:endParaRPr kumimoji="1" lang="ja-JP" altLang="en-US" sz="2400" dirty="0"/>
           </a:p>
         </p:txBody>
       </p:sp>
       <p:pic>
         <p:nvPicPr>
-          <p:cNvPr id="7" name="図 6">
-            <a:extLst>
-              <a:ext uri="{FF2B5EF4-FFF2-40B4-BE49-F238E27FC236}">
-                <a16:creationId xmlns:a16="http://schemas.microsoft.com/office/drawing/2014/main" id="{E36141E7-394E-47D5-B351-B98C23729F14}"/>
+          <p:cNvPr id="4" name="図 3">
+            <a:extLst>
+              <a:ext uri="{FF2B5EF4-FFF2-40B4-BE49-F238E27FC236}">
+                <a16:creationId xmlns:a16="http://schemas.microsoft.com/office/drawing/2014/main" id="{7CC1978C-FFB4-4D14-AAE0-6C83515063D7}"/>
               </a:ext>
             </a:extLst>
           </p:cNvPr>
@@ -9187,8 +8977,8 @@
         </p:blipFill>
         <p:spPr>
           <a:xfrm>
-            <a:off x="611560" y="1412776"/>
-            <a:ext cx="7488832" cy="4836537"/>
+            <a:off x="323528" y="1628800"/>
+            <a:ext cx="3168352" cy="4789029"/>
           </a:xfrm>
           <a:prstGeom prst="rect">
             <a:avLst/>
@@ -9197,10 +8987,62 @@
       </p:pic>
       <p:sp>
         <p:nvSpPr>
-          <p:cNvPr id="3" name="テキスト ボックス 2">
-            <a:extLst>
-              <a:ext uri="{FF2B5EF4-FFF2-40B4-BE49-F238E27FC236}">
-                <a16:creationId xmlns:a16="http://schemas.microsoft.com/office/drawing/2014/main" id="{85C61F87-F191-6B9D-EBDD-0BBE98F5A75E}"/>
+          <p:cNvPr id="5" name="四角形: 角を丸くする 4">
+            <a:extLst>
+              <a:ext uri="{FF2B5EF4-FFF2-40B4-BE49-F238E27FC236}">
+                <a16:creationId xmlns:a16="http://schemas.microsoft.com/office/drawing/2014/main" id="{FD01A4F7-C561-4921-B60D-FF881DD0DD35}"/>
+              </a:ext>
+            </a:extLst>
+          </p:cNvPr>
+          <p:cNvSpPr/>
+          <p:nvPr/>
+        </p:nvSpPr>
+        <p:spPr>
+          <a:xfrm>
+            <a:off x="1475656" y="5373216"/>
+            <a:ext cx="1872208" cy="360040"/>
+          </a:xfrm>
+          <a:prstGeom prst="roundRect">
+            <a:avLst/>
+          </a:prstGeom>
+          <a:noFill/>
+          <a:ln w="38100">
+            <a:solidFill>
+              <a:srgbClr val="FF0000"/>
+            </a:solidFill>
+          </a:ln>
+        </p:spPr>
+        <p:style>
+          <a:lnRef idx="2">
+            <a:schemeClr val="accent1">
+              <a:shade val="50000"/>
+            </a:schemeClr>
+          </a:lnRef>
+          <a:fillRef idx="1">
+            <a:schemeClr val="accent1"/>
+          </a:fillRef>
+          <a:effectRef idx="0">
+            <a:schemeClr val="accent1"/>
+          </a:effectRef>
+          <a:fontRef idx="minor">
+            <a:schemeClr val="lt1"/>
+          </a:fontRef>
+        </p:style>
+        <p:txBody>
+          <a:bodyPr rtlCol="0" anchor="ctr"/>
+          <a:lstStyle/>
+          <a:p>
+            <a:pPr algn="ctr"/>
+            <a:endParaRPr kumimoji="1" lang="ja-JP" altLang="en-US"/>
+          </a:p>
+        </p:txBody>
+      </p:sp>
+      <p:sp>
+        <p:nvSpPr>
+          <p:cNvPr id="6" name="テキスト ボックス 5">
+            <a:extLst>
+              <a:ext uri="{FF2B5EF4-FFF2-40B4-BE49-F238E27FC236}">
+                <a16:creationId xmlns:a16="http://schemas.microsoft.com/office/drawing/2014/main" id="{DF872CB0-96DC-4BBA-BFA0-6DFF59057C16}"/>
               </a:ext>
             </a:extLst>
           </p:cNvPr>
@@ -9209,32 +9051,82 @@
         </p:nvSpPr>
         <p:spPr>
           <a:xfrm>
-            <a:off x="2195736" y="6309320"/>
-            <a:ext cx="4570482" cy="369332"/>
-          </a:xfrm>
-          <a:prstGeom prst="rect">
-            <a:avLst/>
-          </a:prstGeom>
-          <a:noFill/>
-        </p:spPr>
-        <p:txBody>
-          <a:bodyPr wrap="none" rtlCol="0">
+            <a:off x="1547664" y="908720"/>
+            <a:ext cx="6721740" cy="584775"/>
+          </a:xfrm>
+          <a:prstGeom prst="rect">
+            <a:avLst/>
+          </a:prstGeom>
+          <a:noFill/>
+        </p:spPr>
+        <p:txBody>
+          <a:bodyPr wrap="square" rtlCol="0">
             <a:spAutoFit/>
           </a:bodyPr>
           <a:lstStyle/>
           <a:p>
             <a:r>
-              <a:rPr lang="ja-JP" altLang="en-US" dirty="0"/>
-              <a:t>このタブはデバッグに使うので閉じない事</a:t>
-            </a:r>
-            <a:endParaRPr kumimoji="1" lang="ja-JP" altLang="en-US" dirty="0"/>
-          </a:p>
-        </p:txBody>
-      </p:sp>
+              <a:rPr lang="en-US" altLang="ja-JP" sz="3200"/>
+              <a:t>docs/data/scenario/first.ks</a:t>
+            </a:r>
+            <a:r>
+              <a:rPr kumimoji="1" lang="ja-JP" altLang="en-US" sz="3200"/>
+              <a:t>を開く</a:t>
+            </a:r>
+          </a:p>
+        </p:txBody>
+      </p:sp>
+      <p:cxnSp>
+        <p:nvCxnSpPr>
+          <p:cNvPr id="7" name="コネクタ: カギ線 6">
+            <a:extLst>
+              <a:ext uri="{FF2B5EF4-FFF2-40B4-BE49-F238E27FC236}">
+                <a16:creationId xmlns:a16="http://schemas.microsoft.com/office/drawing/2014/main" id="{B5AB4CB2-BAF3-4FFC-9F3E-84C4BDDE96D5}"/>
+              </a:ext>
+            </a:extLst>
+          </p:cNvPr>
+          <p:cNvCxnSpPr>
+            <a:cxnSpLocks/>
+            <a:stCxn id="6" idx="2"/>
+            <a:endCxn id="5" idx="3"/>
+          </p:cNvCxnSpPr>
+          <p:nvPr/>
+        </p:nvCxnSpPr>
+        <p:spPr>
+          <a:xfrm rot="5400000">
+            <a:off x="2098329" y="2743030"/>
+            <a:ext cx="4059741" cy="1560670"/>
+          </a:xfrm>
+          <a:prstGeom prst="bentConnector2">
+            <a:avLst/>
+          </a:prstGeom>
+          <a:ln w="28575">
+            <a:solidFill>
+              <a:srgbClr val="FF0000"/>
+            </a:solidFill>
+            <a:headEnd type="none" w="med" len="med"/>
+            <a:tailEnd type="triangle"/>
+          </a:ln>
+        </p:spPr>
+        <p:style>
+          <a:lnRef idx="1">
+            <a:schemeClr val="accent1"/>
+          </a:lnRef>
+          <a:fillRef idx="0">
+            <a:schemeClr val="accent1"/>
+          </a:fillRef>
+          <a:effectRef idx="0">
+            <a:schemeClr val="accent1"/>
+          </a:effectRef>
+          <a:fontRef idx="minor">
+            <a:schemeClr val="tx1"/>
+          </a:fontRef>
+        </p:style>
+      </p:cxnSp>
     </p:spTree>
     <p:extLst>
       <p:ext uri="{BB962C8B-B14F-4D97-AF65-F5344CB8AC3E}">
-        <p14:creationId xmlns:p14="http://schemas.microsoft.com/office/powerpoint/2010/main" val="1989445412"/>
+        <p14:creationId xmlns:p14="http://schemas.microsoft.com/office/powerpoint/2010/main" val="2689021249"/>
       </p:ext>
     </p:extLst>
   </p:cSld>
@@ -9266,7 +9158,7 @@
           <p:cNvPr id="2" name="テキスト プレースホルダー 1">
             <a:extLst>
               <a:ext uri="{FF2B5EF4-FFF2-40B4-BE49-F238E27FC236}">
-                <a16:creationId xmlns:a16="http://schemas.microsoft.com/office/drawing/2014/main" id="{EA014185-02D9-412D-A9DD-33CB68EF0FA6}"/>
+                <a16:creationId xmlns:a16="http://schemas.microsoft.com/office/drawing/2014/main" id="{C78A5381-F5FB-4985-A2B6-7DDB7988E9B1}"/>
               </a:ext>
             </a:extLst>
           </p:cNvPr>
@@ -9294,178 +9186,129 @@
           </a:p>
         </p:txBody>
       </p:sp>
-      <p:pic>
-        <p:nvPicPr>
-          <p:cNvPr id="4" name="図 3">
-            <a:extLst>
-              <a:ext uri="{FF2B5EF4-FFF2-40B4-BE49-F238E27FC236}">
-                <a16:creationId xmlns:a16="http://schemas.microsoft.com/office/drawing/2014/main" id="{7CC1978C-FFB4-4D14-AAE0-6C83515063D7}"/>
-              </a:ext>
-            </a:extLst>
-          </p:cNvPr>
-          <p:cNvPicPr>
-            <a:picLocks noChangeAspect="1"/>
-          </p:cNvPicPr>
-          <p:nvPr/>
-        </p:nvPicPr>
-        <p:blipFill>
-          <a:blip r:embed="rId2"/>
-          <a:stretch>
-            <a:fillRect/>
-          </a:stretch>
-        </p:blipFill>
-        <p:spPr>
-          <a:xfrm>
-            <a:off x="323528" y="1628800"/>
-            <a:ext cx="3168352" cy="4789029"/>
-          </a:xfrm>
-          <a:prstGeom prst="rect">
-            <a:avLst/>
-          </a:prstGeom>
-        </p:spPr>
-      </p:pic>
-      <p:sp>
-        <p:nvSpPr>
-          <p:cNvPr id="5" name="四角形: 角を丸くする 4">
-            <a:extLst>
-              <a:ext uri="{FF2B5EF4-FFF2-40B4-BE49-F238E27FC236}">
-                <a16:creationId xmlns:a16="http://schemas.microsoft.com/office/drawing/2014/main" id="{FD01A4F7-C561-4921-B60D-FF881DD0DD35}"/>
-              </a:ext>
-            </a:extLst>
-          </p:cNvPr>
-          <p:cNvSpPr/>
-          <p:nvPr/>
-        </p:nvSpPr>
-        <p:spPr>
-          <a:xfrm>
-            <a:off x="1475656" y="5373216"/>
-            <a:ext cx="1872208" cy="360040"/>
-          </a:xfrm>
-          <a:prstGeom prst="roundRect">
-            <a:avLst/>
-          </a:prstGeom>
-          <a:noFill/>
-          <a:ln w="38100">
+      <p:sp>
+        <p:nvSpPr>
+          <p:cNvPr id="4" name="テキスト ボックス 3">
+            <a:extLst>
+              <a:ext uri="{FF2B5EF4-FFF2-40B4-BE49-F238E27FC236}">
+                <a16:creationId xmlns:a16="http://schemas.microsoft.com/office/drawing/2014/main" id="{B6AA573B-786D-493C-9310-59BFBDCDF066}"/>
+              </a:ext>
+            </a:extLst>
+          </p:cNvPr>
+          <p:cNvSpPr txBox="1"/>
+          <p:nvPr/>
+        </p:nvSpPr>
+        <p:spPr>
+          <a:xfrm>
+            <a:off x="251520" y="2348880"/>
+            <a:ext cx="8064896" cy="3416320"/>
+          </a:xfrm>
+          <a:prstGeom prst="rect">
+            <a:avLst/>
+          </a:prstGeom>
+          <a:noFill/>
+          <a:ln>
             <a:solidFill>
-              <a:srgbClr val="FF0000"/>
+              <a:schemeClr val="tx1"/>
             </a:solidFill>
           </a:ln>
         </p:spPr>
-        <p:style>
-          <a:lnRef idx="2">
-            <a:schemeClr val="accent1">
-              <a:shade val="50000"/>
-            </a:schemeClr>
-          </a:lnRef>
-          <a:fillRef idx="1">
-            <a:schemeClr val="accent1"/>
-          </a:fillRef>
-          <a:effectRef idx="0">
-            <a:schemeClr val="accent1"/>
-          </a:effectRef>
-          <a:fontRef idx="minor">
-            <a:schemeClr val="lt1"/>
-          </a:fontRef>
-        </p:style>
-        <p:txBody>
-          <a:bodyPr rtlCol="0" anchor="ctr"/>
-          <a:lstStyle/>
-          <a:p>
-            <a:pPr algn="ctr"/>
-            <a:endParaRPr kumimoji="1" lang="ja-JP" altLang="en-US"/>
-          </a:p>
-        </p:txBody>
-      </p:sp>
-      <p:sp>
-        <p:nvSpPr>
-          <p:cNvPr id="6" name="テキスト ボックス 5">
-            <a:extLst>
-              <a:ext uri="{FF2B5EF4-FFF2-40B4-BE49-F238E27FC236}">
-                <a16:creationId xmlns:a16="http://schemas.microsoft.com/office/drawing/2014/main" id="{DF872CB0-96DC-4BBA-BFA0-6DFF59057C16}"/>
-              </a:ext>
-            </a:extLst>
-          </p:cNvPr>
-          <p:cNvSpPr txBox="1"/>
-          <p:nvPr/>
-        </p:nvSpPr>
-        <p:spPr>
-          <a:xfrm>
-            <a:off x="1547664" y="908720"/>
-            <a:ext cx="6721740" cy="584775"/>
-          </a:xfrm>
-          <a:prstGeom prst="rect">
-            <a:avLst/>
-          </a:prstGeom>
-          <a:noFill/>
-        </p:spPr>
-        <p:txBody>
-          <a:bodyPr wrap="square" rtlCol="0">
+        <p:txBody>
+          <a:bodyPr wrap="square">
             <a:spAutoFit/>
           </a:bodyPr>
           <a:lstStyle/>
           <a:p>
             <a:r>
-              <a:rPr lang="en-US" altLang="ja-JP" sz="3200"/>
-              <a:t>docs/data/scenario/first.ks</a:t>
-            </a:r>
-            <a:r>
-              <a:rPr kumimoji="1" lang="ja-JP" altLang="en-US" sz="3200"/>
-              <a:t>を開く</a:t>
-            </a:r>
-          </a:p>
-        </p:txBody>
-      </p:sp>
-      <p:cxnSp>
-        <p:nvCxnSpPr>
-          <p:cNvPr id="7" name="コネクタ: カギ線 6">
-            <a:extLst>
-              <a:ext uri="{FF2B5EF4-FFF2-40B4-BE49-F238E27FC236}">
-                <a16:creationId xmlns:a16="http://schemas.microsoft.com/office/drawing/2014/main" id="{B5AB4CB2-BAF3-4FFC-9F3E-84C4BDDE96D5}"/>
-              </a:ext>
-            </a:extLst>
-          </p:cNvPr>
-          <p:cNvCxnSpPr>
-            <a:cxnSpLocks/>
-            <a:stCxn id="6" idx="2"/>
-            <a:endCxn id="5" idx="3"/>
-          </p:cNvCxnSpPr>
-          <p:nvPr/>
-        </p:nvCxnSpPr>
-        <p:spPr>
-          <a:xfrm rot="5400000">
-            <a:off x="2098329" y="2743030"/>
-            <a:ext cx="4059741" cy="1560670"/>
-          </a:xfrm>
-          <a:prstGeom prst="bentConnector2">
-            <a:avLst/>
-          </a:prstGeom>
-          <a:ln w="28575">
-            <a:solidFill>
-              <a:srgbClr val="FF0000"/>
-            </a:solidFill>
-            <a:headEnd type="none" w="med" len="med"/>
-            <a:tailEnd type="triangle"/>
-          </a:ln>
-        </p:spPr>
-        <p:style>
-          <a:lnRef idx="1">
-            <a:schemeClr val="accent1"/>
-          </a:lnRef>
-          <a:fillRef idx="0">
-            <a:schemeClr val="accent1"/>
-          </a:fillRef>
-          <a:effectRef idx="0">
-            <a:schemeClr val="accent1"/>
-          </a:effectRef>
-          <a:fontRef idx="minor">
-            <a:schemeClr val="tx1"/>
-          </a:fontRef>
-        </p:style>
-      </p:cxnSp>
+              <a:rPr lang="en-US" altLang="ja-JP" sz="3600"/>
+              <a:t>*start</a:t>
+            </a:r>
+          </a:p>
+          <a:p>
+            <a:endParaRPr lang="en-US" altLang="ja-JP" sz="3600"/>
+          </a:p>
+          <a:p>
+            <a:r>
+              <a:rPr lang="en-US" altLang="ja-JP" sz="3600"/>
+              <a:t>[title name="</a:t>
+            </a:r>
+            <a:r>
+              <a:rPr lang="ja-JP" altLang="en-US" sz="3600">
+                <a:solidFill>
+                  <a:srgbClr val="FF0000"/>
+                </a:solidFill>
+              </a:rPr>
+              <a:t>怒れセリヌンティウス</a:t>
+            </a:r>
+            <a:r>
+              <a:rPr lang="en-US" altLang="ja-JP" sz="3600"/>
+              <a:t>"]</a:t>
+            </a:r>
+          </a:p>
+          <a:p>
+            <a:r>
+              <a:rPr lang="en-US" altLang="ja-JP" sz="3600"/>
+              <a:t>[hidemenubutton]</a:t>
+            </a:r>
+          </a:p>
+          <a:p>
+            <a:r>
+              <a:rPr lang="en-US" altLang="ja-JP" sz="3600"/>
+              <a:t>[wait time=200]</a:t>
+            </a:r>
+          </a:p>
+          <a:p>
+            <a:r>
+              <a:rPr lang="en-US" altLang="ja-JP" sz="3600"/>
+              <a:t>[freeimage layer="base"]</a:t>
+            </a:r>
+          </a:p>
+        </p:txBody>
+      </p:sp>
+      <p:sp>
+        <p:nvSpPr>
+          <p:cNvPr id="5" name="テキスト ボックス 4">
+            <a:extLst>
+              <a:ext uri="{FF2B5EF4-FFF2-40B4-BE49-F238E27FC236}">
+                <a16:creationId xmlns:a16="http://schemas.microsoft.com/office/drawing/2014/main" id="{0BE6AB53-60D6-4F02-AA1B-FD2BE2AA580B}"/>
+              </a:ext>
+            </a:extLst>
+          </p:cNvPr>
+          <p:cNvSpPr txBox="1"/>
+          <p:nvPr/>
+        </p:nvSpPr>
+        <p:spPr>
+          <a:xfrm>
+            <a:off x="251520" y="1124744"/>
+            <a:ext cx="6186309" cy="646331"/>
+          </a:xfrm>
+          <a:prstGeom prst="rect">
+            <a:avLst/>
+          </a:prstGeom>
+          <a:noFill/>
+        </p:spPr>
+        <p:txBody>
+          <a:bodyPr wrap="none" rtlCol="0">
+            <a:spAutoFit/>
+          </a:bodyPr>
+          <a:lstStyle/>
+          <a:p>
+            <a:r>
+              <a:rPr kumimoji="1" lang="ja-JP" altLang="en-US" sz="3600"/>
+              <a:t>タイトルを変更して</a:t>
+            </a:r>
+            <a:r>
+              <a:rPr lang="ja-JP" altLang="en-US" sz="3600"/>
+              <a:t>保存する</a:t>
+            </a:r>
+            <a:endParaRPr kumimoji="1" lang="ja-JP" altLang="en-US" sz="3600"/>
+          </a:p>
+        </p:txBody>
+      </p:sp>
     </p:spTree>
     <p:extLst>
       <p:ext uri="{BB962C8B-B14F-4D97-AF65-F5344CB8AC3E}">
-        <p14:creationId xmlns:p14="http://schemas.microsoft.com/office/powerpoint/2010/main" val="2689021249"/>
+        <p14:creationId xmlns:p14="http://schemas.microsoft.com/office/powerpoint/2010/main" val="1950323826"/>
       </p:ext>
     </p:extLst>
   </p:cSld>
@@ -10163,188 +10006,6 @@
           <p:cNvPr id="2" name="テキスト プレースホルダー 1">
             <a:extLst>
               <a:ext uri="{FF2B5EF4-FFF2-40B4-BE49-F238E27FC236}">
-                <a16:creationId xmlns:a16="http://schemas.microsoft.com/office/drawing/2014/main" id="{C78A5381-F5FB-4985-A2B6-7DDB7988E9B1}"/>
-              </a:ext>
-            </a:extLst>
-          </p:cNvPr>
-          <p:cNvSpPr>
-            <a:spLocks noGrp="1"/>
-          </p:cNvSpPr>
-          <p:nvPr>
-            <p:ph type="body" sz="quarter" idx="10"/>
-          </p:nvPr>
-        </p:nvSpPr>
-        <p:spPr/>
-        <p:txBody>
-          <a:bodyPr/>
-          <a:lstStyle/>
-          <a:p>
-            <a:r>
-              <a:rPr lang="ja-JP" altLang="en-US"/>
-              <a:t>課題</a:t>
-            </a:r>
-            <a:r>
-              <a:rPr lang="en-US" altLang="ja-JP"/>
-              <a:t>2 - Step 5</a:t>
-            </a:r>
-            <a:endParaRPr kumimoji="1" lang="ja-JP" altLang="en-US"/>
-          </a:p>
-        </p:txBody>
-      </p:sp>
-      <p:sp>
-        <p:nvSpPr>
-          <p:cNvPr id="4" name="テキスト ボックス 3">
-            <a:extLst>
-              <a:ext uri="{FF2B5EF4-FFF2-40B4-BE49-F238E27FC236}">
-                <a16:creationId xmlns:a16="http://schemas.microsoft.com/office/drawing/2014/main" id="{B6AA573B-786D-493C-9310-59BFBDCDF066}"/>
-              </a:ext>
-            </a:extLst>
-          </p:cNvPr>
-          <p:cNvSpPr txBox="1"/>
-          <p:nvPr/>
-        </p:nvSpPr>
-        <p:spPr>
-          <a:xfrm>
-            <a:off x="251520" y="2348880"/>
-            <a:ext cx="8064896" cy="3416320"/>
-          </a:xfrm>
-          <a:prstGeom prst="rect">
-            <a:avLst/>
-          </a:prstGeom>
-          <a:noFill/>
-          <a:ln>
-            <a:solidFill>
-              <a:schemeClr val="tx1"/>
-            </a:solidFill>
-          </a:ln>
-        </p:spPr>
-        <p:txBody>
-          <a:bodyPr wrap="square">
-            <a:spAutoFit/>
-          </a:bodyPr>
-          <a:lstStyle/>
-          <a:p>
-            <a:r>
-              <a:rPr lang="en-US" altLang="ja-JP" sz="3600"/>
-              <a:t>*start</a:t>
-            </a:r>
-          </a:p>
-          <a:p>
-            <a:endParaRPr lang="en-US" altLang="ja-JP" sz="3600"/>
-          </a:p>
-          <a:p>
-            <a:r>
-              <a:rPr lang="en-US" altLang="ja-JP" sz="3600"/>
-              <a:t>[title name="</a:t>
-            </a:r>
-            <a:r>
-              <a:rPr lang="ja-JP" altLang="en-US" sz="3600">
-                <a:solidFill>
-                  <a:srgbClr val="FF0000"/>
-                </a:solidFill>
-              </a:rPr>
-              <a:t>怒れセリヌンティウス</a:t>
-            </a:r>
-            <a:r>
-              <a:rPr lang="en-US" altLang="ja-JP" sz="3600"/>
-              <a:t>"]</a:t>
-            </a:r>
-          </a:p>
-          <a:p>
-            <a:r>
-              <a:rPr lang="en-US" altLang="ja-JP" sz="3600"/>
-              <a:t>[hidemenubutton]</a:t>
-            </a:r>
-          </a:p>
-          <a:p>
-            <a:r>
-              <a:rPr lang="en-US" altLang="ja-JP" sz="3600"/>
-              <a:t>[wait time=200]</a:t>
-            </a:r>
-          </a:p>
-          <a:p>
-            <a:r>
-              <a:rPr lang="en-US" altLang="ja-JP" sz="3600"/>
-              <a:t>[freeimage layer="base"]</a:t>
-            </a:r>
-          </a:p>
-        </p:txBody>
-      </p:sp>
-      <p:sp>
-        <p:nvSpPr>
-          <p:cNvPr id="5" name="テキスト ボックス 4">
-            <a:extLst>
-              <a:ext uri="{FF2B5EF4-FFF2-40B4-BE49-F238E27FC236}">
-                <a16:creationId xmlns:a16="http://schemas.microsoft.com/office/drawing/2014/main" id="{0BE6AB53-60D6-4F02-AA1B-FD2BE2AA580B}"/>
-              </a:ext>
-            </a:extLst>
-          </p:cNvPr>
-          <p:cNvSpPr txBox="1"/>
-          <p:nvPr/>
-        </p:nvSpPr>
-        <p:spPr>
-          <a:xfrm>
-            <a:off x="251520" y="1124744"/>
-            <a:ext cx="6186309" cy="646331"/>
-          </a:xfrm>
-          <a:prstGeom prst="rect">
-            <a:avLst/>
-          </a:prstGeom>
-          <a:noFill/>
-        </p:spPr>
-        <p:txBody>
-          <a:bodyPr wrap="none" rtlCol="0">
-            <a:spAutoFit/>
-          </a:bodyPr>
-          <a:lstStyle/>
-          <a:p>
-            <a:r>
-              <a:rPr kumimoji="1" lang="ja-JP" altLang="en-US" sz="3600"/>
-              <a:t>タイトルを変更して</a:t>
-            </a:r>
-            <a:r>
-              <a:rPr lang="ja-JP" altLang="en-US" sz="3600"/>
-              <a:t>保存する</a:t>
-            </a:r>
-            <a:endParaRPr kumimoji="1" lang="ja-JP" altLang="en-US" sz="3600"/>
-          </a:p>
-        </p:txBody>
-      </p:sp>
-    </p:spTree>
-    <p:extLst>
-      <p:ext uri="{BB962C8B-B14F-4D97-AF65-F5344CB8AC3E}">
-        <p14:creationId xmlns:p14="http://schemas.microsoft.com/office/powerpoint/2010/main" val="1950323826"/>
-      </p:ext>
-    </p:extLst>
-  </p:cSld>
-  <p:clrMapOvr>
-    <a:masterClrMapping/>
-  </p:clrMapOvr>
-</p:sld>
-</file>
-
-<file path=ppt/slides/slide31.xml><?xml version="1.0" encoding="utf-8"?>
-<p:sld xmlns:a="http://schemas.openxmlformats.org/drawingml/2006/main" xmlns:r="http://schemas.openxmlformats.org/officeDocument/2006/relationships" xmlns:p="http://schemas.openxmlformats.org/presentationml/2006/main">
-  <p:cSld>
-    <p:spTree>
-      <p:nvGrpSpPr>
-        <p:cNvPr id="1" name=""/>
-        <p:cNvGrpSpPr/>
-        <p:nvPr/>
-      </p:nvGrpSpPr>
-      <p:grpSpPr>
-        <a:xfrm>
-          <a:off x="0" y="0"/>
-          <a:ext cx="0" cy="0"/>
-          <a:chOff x="0" y="0"/>
-          <a:chExt cx="0" cy="0"/>
-        </a:xfrm>
-      </p:grpSpPr>
-      <p:sp>
-        <p:nvSpPr>
-          <p:cNvPr id="2" name="テキスト プレースホルダー 1">
-            <a:extLst>
-              <a:ext uri="{FF2B5EF4-FFF2-40B4-BE49-F238E27FC236}">
                 <a16:creationId xmlns:a16="http://schemas.microsoft.com/office/drawing/2014/main" id="{1F9E80C5-0F3F-4B38-8A9C-142D6B6BD42E}"/>
               </a:ext>
             </a:extLst>
@@ -10503,7 +10164,7 @@
 </p:sld>
 </file>
 
-<file path=ppt/slides/slide32.xml><?xml version="1.0" encoding="utf-8"?>
+<file path=ppt/slides/slide31.xml><?xml version="1.0" encoding="utf-8"?>
 <p:sld xmlns:a="http://schemas.openxmlformats.org/drawingml/2006/main" xmlns:r="http://schemas.openxmlformats.org/officeDocument/2006/relationships" xmlns:p="http://schemas.openxmlformats.org/presentationml/2006/main">
   <p:cSld>
     <p:spTree>
@@ -10783,6 +10444,364 @@
 </p:sld>
 </file>
 
+<file path=ppt/slides/slide32.xml><?xml version="1.0" encoding="utf-8"?>
+<p:sld xmlns:a="http://schemas.openxmlformats.org/drawingml/2006/main" xmlns:r="http://schemas.openxmlformats.org/officeDocument/2006/relationships" xmlns:p="http://schemas.openxmlformats.org/presentationml/2006/main">
+  <p:cSld>
+    <p:spTree>
+      <p:nvGrpSpPr>
+        <p:cNvPr id="1" name=""/>
+        <p:cNvGrpSpPr/>
+        <p:nvPr/>
+      </p:nvGrpSpPr>
+      <p:grpSpPr>
+        <a:xfrm>
+          <a:off x="0" y="0"/>
+          <a:ext cx="0" cy="0"/>
+          <a:chOff x="0" y="0"/>
+          <a:chExt cx="0" cy="0"/>
+        </a:xfrm>
+      </p:grpSpPr>
+      <p:sp>
+        <p:nvSpPr>
+          <p:cNvPr id="2" name="テキスト プレースホルダー 1">
+            <a:extLst>
+              <a:ext uri="{FF2B5EF4-FFF2-40B4-BE49-F238E27FC236}">
+                <a16:creationId xmlns:a16="http://schemas.microsoft.com/office/drawing/2014/main" id="{4557027D-2DCB-498C-3041-767FD1EC55FC}"/>
+              </a:ext>
+            </a:extLst>
+          </p:cNvPr>
+          <p:cNvSpPr>
+            <a:spLocks noGrp="1"/>
+          </p:cNvSpPr>
+          <p:nvPr>
+            <p:ph type="body" sz="quarter" idx="10"/>
+          </p:nvPr>
+        </p:nvSpPr>
+        <p:spPr/>
+        <p:txBody>
+          <a:bodyPr/>
+          <a:lstStyle/>
+          <a:p>
+            <a:r>
+              <a:rPr lang="ja-JP" altLang="en-US"/>
+              <a:t>課題</a:t>
+            </a:r>
+            <a:r>
+              <a:rPr lang="en-US" altLang="ja-JP"/>
+              <a:t>2 - Step 7</a:t>
+            </a:r>
+            <a:endParaRPr kumimoji="1" lang="ja-JP" altLang="en-US"/>
+          </a:p>
+        </p:txBody>
+      </p:sp>
+      <p:pic>
+        <p:nvPicPr>
+          <p:cNvPr id="9" name="図 8">
+            <a:extLst>
+              <a:ext uri="{FF2B5EF4-FFF2-40B4-BE49-F238E27FC236}">
+                <a16:creationId xmlns:a16="http://schemas.microsoft.com/office/drawing/2014/main" id="{8914ACC7-63F4-5652-F718-CE583E5B0BD4}"/>
+              </a:ext>
+            </a:extLst>
+          </p:cNvPr>
+          <p:cNvPicPr>
+            <a:picLocks noChangeAspect="1"/>
+          </p:cNvPicPr>
+          <p:nvPr/>
+        </p:nvPicPr>
+        <p:blipFill>
+          <a:blip r:embed="rId2"/>
+          <a:stretch>
+            <a:fillRect/>
+          </a:stretch>
+        </p:blipFill>
+        <p:spPr>
+          <a:xfrm>
+            <a:off x="395536" y="2348880"/>
+            <a:ext cx="6633765" cy="1713224"/>
+          </a:xfrm>
+          <a:prstGeom prst="rect">
+            <a:avLst/>
+          </a:prstGeom>
+        </p:spPr>
+      </p:pic>
+      <p:sp>
+        <p:nvSpPr>
+          <p:cNvPr id="10" name="四角形: 角を丸くする 9">
+            <a:extLst>
+              <a:ext uri="{FF2B5EF4-FFF2-40B4-BE49-F238E27FC236}">
+                <a16:creationId xmlns:a16="http://schemas.microsoft.com/office/drawing/2014/main" id="{1E2DA6CE-57BE-9A68-3C05-9B63743E3A5D}"/>
+              </a:ext>
+            </a:extLst>
+          </p:cNvPr>
+          <p:cNvSpPr/>
+          <p:nvPr/>
+        </p:nvSpPr>
+        <p:spPr>
+          <a:xfrm>
+            <a:off x="3059832" y="2492896"/>
+            <a:ext cx="504056" cy="504056"/>
+          </a:xfrm>
+          <a:prstGeom prst="roundRect">
+            <a:avLst/>
+          </a:prstGeom>
+          <a:noFill/>
+          <a:ln w="38100">
+            <a:solidFill>
+              <a:srgbClr val="FF0000"/>
+            </a:solidFill>
+          </a:ln>
+        </p:spPr>
+        <p:style>
+          <a:lnRef idx="2">
+            <a:schemeClr val="accent1">
+              <a:shade val="50000"/>
+            </a:schemeClr>
+          </a:lnRef>
+          <a:fillRef idx="1">
+            <a:schemeClr val="accent1"/>
+          </a:fillRef>
+          <a:effectRef idx="0">
+            <a:schemeClr val="accent1"/>
+          </a:effectRef>
+          <a:fontRef idx="minor">
+            <a:schemeClr val="lt1"/>
+          </a:fontRef>
+        </p:style>
+        <p:txBody>
+          <a:bodyPr rtlCol="0" anchor="ctr"/>
+          <a:lstStyle/>
+          <a:p>
+            <a:pPr algn="ctr"/>
+            <a:endParaRPr kumimoji="1" lang="ja-JP" altLang="en-US"/>
+          </a:p>
+        </p:txBody>
+      </p:sp>
+      <p:sp>
+        <p:nvSpPr>
+          <p:cNvPr id="12" name="テキスト ボックス 11">
+            <a:extLst>
+              <a:ext uri="{FF2B5EF4-FFF2-40B4-BE49-F238E27FC236}">
+                <a16:creationId xmlns:a16="http://schemas.microsoft.com/office/drawing/2014/main" id="{8527D627-2469-C737-19E2-CD3FC6F1343A}"/>
+              </a:ext>
+            </a:extLst>
+          </p:cNvPr>
+          <p:cNvSpPr txBox="1"/>
+          <p:nvPr/>
+        </p:nvSpPr>
+        <p:spPr>
+          <a:xfrm>
+            <a:off x="251520" y="1052736"/>
+            <a:ext cx="8424936" cy="523220"/>
+          </a:xfrm>
+          <a:prstGeom prst="rect">
+            <a:avLst/>
+          </a:prstGeom>
+          <a:noFill/>
+        </p:spPr>
+        <p:txBody>
+          <a:bodyPr wrap="square">
+            <a:spAutoFit/>
+          </a:bodyPr>
+          <a:lstStyle/>
+          <a:p>
+            <a:r>
+              <a:rPr lang="en-US" altLang="ja-JP" sz="2800"/>
+              <a:t>first.ks</a:t>
+            </a:r>
+            <a:r>
+              <a:rPr lang="ja-JP" altLang="en-US" sz="2800"/>
+              <a:t>の保存忘れに注意。</a:t>
+            </a:r>
+            <a:r>
+              <a:rPr lang="en-US" altLang="ja-JP" sz="2800"/>
+              <a:t>push</a:t>
+            </a:r>
+            <a:r>
+              <a:rPr lang="ja-JP" altLang="en-US" sz="2800"/>
+              <a:t>前に保存すること。</a:t>
+            </a:r>
+            <a:endParaRPr kumimoji="1" lang="ja-JP" altLang="en-US" sz="2800"/>
+          </a:p>
+        </p:txBody>
+      </p:sp>
+      <p:sp>
+        <p:nvSpPr>
+          <p:cNvPr id="13" name="テキスト ボックス 12">
+            <a:extLst>
+              <a:ext uri="{FF2B5EF4-FFF2-40B4-BE49-F238E27FC236}">
+                <a16:creationId xmlns:a16="http://schemas.microsoft.com/office/drawing/2014/main" id="{3BDFB70F-74EB-35E2-986C-1AB9441C5DDE}"/>
+              </a:ext>
+            </a:extLst>
+          </p:cNvPr>
+          <p:cNvSpPr txBox="1"/>
+          <p:nvPr/>
+        </p:nvSpPr>
+        <p:spPr>
+          <a:xfrm>
+            <a:off x="107504" y="1844824"/>
+            <a:ext cx="8650125" cy="400110"/>
+          </a:xfrm>
+          <a:prstGeom prst="rect">
+            <a:avLst/>
+          </a:prstGeom>
+          <a:noFill/>
+        </p:spPr>
+        <p:txBody>
+          <a:bodyPr wrap="none" rtlCol="0">
+            <a:spAutoFit/>
+          </a:bodyPr>
+          <a:lstStyle/>
+          <a:p>
+            <a:r>
+              <a:rPr kumimoji="1" lang="en-US" altLang="ja-JP" sz="2000"/>
+              <a:t>VS Code</a:t>
+            </a:r>
+            <a:r>
+              <a:rPr kumimoji="1" lang="ja-JP" altLang="en-US" sz="2000"/>
+              <a:t>のファイル名のタブの隣が●になっていたら、保存されていない</a:t>
+            </a:r>
+          </a:p>
+        </p:txBody>
+      </p:sp>
+      <p:pic>
+        <p:nvPicPr>
+          <p:cNvPr id="15" name="図 14">
+            <a:extLst>
+              <a:ext uri="{FF2B5EF4-FFF2-40B4-BE49-F238E27FC236}">
+                <a16:creationId xmlns:a16="http://schemas.microsoft.com/office/drawing/2014/main" id="{18964949-2C2D-0D25-D3D3-2E6992045F56}"/>
+              </a:ext>
+            </a:extLst>
+          </p:cNvPr>
+          <p:cNvPicPr>
+            <a:picLocks noChangeAspect="1"/>
+          </p:cNvPicPr>
+          <p:nvPr/>
+        </p:nvPicPr>
+        <p:blipFill>
+          <a:blip r:embed="rId3"/>
+          <a:stretch>
+            <a:fillRect/>
+          </a:stretch>
+        </p:blipFill>
+        <p:spPr>
+          <a:xfrm>
+            <a:off x="395536" y="5013176"/>
+            <a:ext cx="6702281" cy="1584176"/>
+          </a:xfrm>
+          <a:prstGeom prst="rect">
+            <a:avLst/>
+          </a:prstGeom>
+        </p:spPr>
+      </p:pic>
+      <p:sp>
+        <p:nvSpPr>
+          <p:cNvPr id="16" name="四角形: 角を丸くする 15">
+            <a:extLst>
+              <a:ext uri="{FF2B5EF4-FFF2-40B4-BE49-F238E27FC236}">
+                <a16:creationId xmlns:a16="http://schemas.microsoft.com/office/drawing/2014/main" id="{7F03F20E-6A00-FCBE-4263-19B154E8A2CA}"/>
+              </a:ext>
+            </a:extLst>
+          </p:cNvPr>
+          <p:cNvSpPr/>
+          <p:nvPr/>
+        </p:nvSpPr>
+        <p:spPr>
+          <a:xfrm>
+            <a:off x="2843808" y="5157192"/>
+            <a:ext cx="504056" cy="504056"/>
+          </a:xfrm>
+          <a:prstGeom prst="roundRect">
+            <a:avLst/>
+          </a:prstGeom>
+          <a:noFill/>
+          <a:ln w="38100">
+            <a:solidFill>
+              <a:srgbClr val="FF0000"/>
+            </a:solidFill>
+          </a:ln>
+        </p:spPr>
+        <p:style>
+          <a:lnRef idx="2">
+            <a:schemeClr val="accent1">
+              <a:shade val="50000"/>
+            </a:schemeClr>
+          </a:lnRef>
+          <a:fillRef idx="1">
+            <a:schemeClr val="accent1"/>
+          </a:fillRef>
+          <a:effectRef idx="0">
+            <a:schemeClr val="accent1"/>
+          </a:effectRef>
+          <a:fontRef idx="minor">
+            <a:schemeClr val="lt1"/>
+          </a:fontRef>
+        </p:style>
+        <p:txBody>
+          <a:bodyPr rtlCol="0" anchor="ctr"/>
+          <a:lstStyle/>
+          <a:p>
+            <a:pPr algn="ctr"/>
+            <a:endParaRPr kumimoji="1" lang="ja-JP" altLang="en-US"/>
+          </a:p>
+        </p:txBody>
+      </p:sp>
+      <p:sp>
+        <p:nvSpPr>
+          <p:cNvPr id="17" name="テキスト ボックス 16">
+            <a:extLst>
+              <a:ext uri="{FF2B5EF4-FFF2-40B4-BE49-F238E27FC236}">
+                <a16:creationId xmlns:a16="http://schemas.microsoft.com/office/drawing/2014/main" id="{1645D5B5-ED71-09AF-A108-B6E3FE262147}"/>
+              </a:ext>
+            </a:extLst>
+          </p:cNvPr>
+          <p:cNvSpPr txBox="1"/>
+          <p:nvPr/>
+        </p:nvSpPr>
+        <p:spPr>
+          <a:xfrm>
+            <a:off x="179512" y="4469050"/>
+            <a:ext cx="2920992" cy="400110"/>
+          </a:xfrm>
+          <a:prstGeom prst="rect">
+            <a:avLst/>
+          </a:prstGeom>
+          <a:noFill/>
+        </p:spPr>
+        <p:txBody>
+          <a:bodyPr wrap="none" rtlCol="0">
+            <a:spAutoFit/>
+          </a:bodyPr>
+          <a:lstStyle/>
+          <a:p>
+            <a:r>
+              <a:rPr kumimoji="1" lang="en-US" altLang="ja-JP" sz="2000"/>
+              <a:t>X</a:t>
+            </a:r>
+            <a:r>
+              <a:rPr kumimoji="1" lang="ja-JP" altLang="en-US" sz="2000"/>
+              <a:t>になっていたら</a:t>
+            </a:r>
+            <a:r>
+              <a:rPr lang="ja-JP" altLang="en-US" sz="2000"/>
+              <a:t>大丈夫</a:t>
+            </a:r>
+            <a:endParaRPr kumimoji="1" lang="ja-JP" altLang="en-US" sz="2000"/>
+          </a:p>
+        </p:txBody>
+      </p:sp>
+    </p:spTree>
+    <p:extLst>
+      <p:ext uri="{BB962C8B-B14F-4D97-AF65-F5344CB8AC3E}">
+        <p14:creationId xmlns:p14="http://schemas.microsoft.com/office/powerpoint/2010/main" val="3428738209"/>
+      </p:ext>
+    </p:extLst>
+  </p:cSld>
+  <p:clrMapOvr>
+    <a:masterClrMapping/>
+  </p:clrMapOvr>
+</p:sld>
+</file>
+
 <file path=ppt/slides/slide33.xml><?xml version="1.0" encoding="utf-8"?>
 <p:sld xmlns:a="http://schemas.openxmlformats.org/drawingml/2006/main" xmlns:r="http://schemas.openxmlformats.org/officeDocument/2006/relationships" xmlns:p="http://schemas.openxmlformats.org/presentationml/2006/main">
   <p:cSld>
@@ -10805,7 +10824,7 @@
           <p:cNvPr id="2" name="テキスト プレースホルダー 1">
             <a:extLst>
               <a:ext uri="{FF2B5EF4-FFF2-40B4-BE49-F238E27FC236}">
-                <a16:creationId xmlns:a16="http://schemas.microsoft.com/office/drawing/2014/main" id="{4557027D-2DCB-498C-3041-767FD1EC55FC}"/>
+                <a16:creationId xmlns:a16="http://schemas.microsoft.com/office/drawing/2014/main" id="{F96770C1-35F2-FE68-2CAC-BA2DE31498B3}"/>
               </a:ext>
             </a:extLst>
           </p:cNvPr>
@@ -10833,109 +10852,122 @@
           </a:p>
         </p:txBody>
       </p:sp>
-      <p:pic>
-        <p:nvPicPr>
-          <p:cNvPr id="9" name="図 8">
-            <a:extLst>
-              <a:ext uri="{FF2B5EF4-FFF2-40B4-BE49-F238E27FC236}">
-                <a16:creationId xmlns:a16="http://schemas.microsoft.com/office/drawing/2014/main" id="{8914ACC7-63F4-5652-F718-CE583E5B0BD4}"/>
-              </a:ext>
-            </a:extLst>
-          </p:cNvPr>
-          <p:cNvPicPr>
-            <a:picLocks noChangeAspect="1"/>
-          </p:cNvPicPr>
-          <p:nvPr/>
-        </p:nvPicPr>
-        <p:blipFill>
-          <a:blip r:embed="rId2"/>
-          <a:stretch>
-            <a:fillRect/>
-          </a:stretch>
-        </p:blipFill>
-        <p:spPr>
-          <a:xfrm>
-            <a:off x="395536" y="2348880"/>
-            <a:ext cx="6633765" cy="1713224"/>
-          </a:xfrm>
-          <a:prstGeom prst="rect">
-            <a:avLst/>
-          </a:prstGeom>
-        </p:spPr>
-      </p:pic>
-      <p:sp>
-        <p:nvSpPr>
-          <p:cNvPr id="10" name="四角形: 角を丸くする 9">
-            <a:extLst>
-              <a:ext uri="{FF2B5EF4-FFF2-40B4-BE49-F238E27FC236}">
-                <a16:creationId xmlns:a16="http://schemas.microsoft.com/office/drawing/2014/main" id="{1E2DA6CE-57BE-9A68-3C05-9B63743E3A5D}"/>
-              </a:ext>
-            </a:extLst>
-          </p:cNvPr>
-          <p:cNvSpPr/>
-          <p:nvPr/>
-        </p:nvSpPr>
-        <p:spPr>
-          <a:xfrm>
-            <a:off x="3059832" y="2492896"/>
-            <a:ext cx="504056" cy="504056"/>
-          </a:xfrm>
-          <a:prstGeom prst="roundRect">
-            <a:avLst/>
-          </a:prstGeom>
-          <a:noFill/>
-          <a:ln w="38100">
+      <p:sp>
+        <p:nvSpPr>
+          <p:cNvPr id="3" name="テキスト ボックス 2">
+            <a:extLst>
+              <a:ext uri="{FF2B5EF4-FFF2-40B4-BE49-F238E27FC236}">
+                <a16:creationId xmlns:a16="http://schemas.microsoft.com/office/drawing/2014/main" id="{16471432-847B-A38F-2278-22FC827AC9C4}"/>
+              </a:ext>
+            </a:extLst>
+          </p:cNvPr>
+          <p:cNvSpPr txBox="1"/>
+          <p:nvPr/>
+        </p:nvSpPr>
+        <p:spPr>
+          <a:xfrm>
+            <a:off x="251520" y="1211268"/>
+            <a:ext cx="8208912" cy="954107"/>
+          </a:xfrm>
+          <a:prstGeom prst="rect">
+            <a:avLst/>
+          </a:prstGeom>
+          <a:noFill/>
+        </p:spPr>
+        <p:txBody>
+          <a:bodyPr wrap="square" rtlCol="0">
+            <a:spAutoFit/>
+          </a:bodyPr>
+          <a:lstStyle/>
+          <a:p>
+            <a:r>
+              <a:rPr kumimoji="1" lang="en-US" altLang="ja-JP" sz="2800"/>
+              <a:t>Git Bash</a:t>
+            </a:r>
+            <a:r>
+              <a:rPr kumimoji="1" lang="ja-JP" altLang="en-US" sz="2800"/>
+              <a:t>で、カレントディレクトリが</a:t>
+            </a:r>
+            <a:r>
+              <a:rPr kumimoji="1" lang="en-US" altLang="ja-JP" sz="2800"/>
+              <a:t>/z/github/tyrano_sample</a:t>
+            </a:r>
+            <a:r>
+              <a:rPr kumimoji="1" lang="ja-JP" altLang="en-US" sz="2800"/>
+              <a:t>になっていることを確認</a:t>
+            </a:r>
+          </a:p>
+        </p:txBody>
+      </p:sp>
+      <p:sp>
+        <p:nvSpPr>
+          <p:cNvPr id="4" name="テキスト ボックス 3">
+            <a:extLst>
+              <a:ext uri="{FF2B5EF4-FFF2-40B4-BE49-F238E27FC236}">
+                <a16:creationId xmlns:a16="http://schemas.microsoft.com/office/drawing/2014/main" id="{7AE9E387-4F07-EC09-DA78-B9577DA061F2}"/>
+              </a:ext>
+            </a:extLst>
+          </p:cNvPr>
+          <p:cNvSpPr txBox="1"/>
+          <p:nvPr/>
+        </p:nvSpPr>
+        <p:spPr>
+          <a:xfrm>
+            <a:off x="251520" y="2492896"/>
+            <a:ext cx="3837910" cy="523220"/>
+          </a:xfrm>
+          <a:prstGeom prst="rect">
+            <a:avLst/>
+          </a:prstGeom>
+          <a:noFill/>
+        </p:spPr>
+        <p:txBody>
+          <a:bodyPr wrap="none" rtlCol="0">
+            <a:spAutoFit/>
+          </a:bodyPr>
+          <a:lstStyle/>
+          <a:p>
+            <a:r>
+              <a:rPr kumimoji="1" lang="ja-JP" altLang="en-US" sz="2800"/>
+              <a:t>以下の手順で</a:t>
+            </a:r>
+            <a:r>
+              <a:rPr kumimoji="1" lang="en-US" altLang="ja-JP" sz="2800"/>
+              <a:t>push</a:t>
+            </a:r>
+            <a:r>
+              <a:rPr kumimoji="1" lang="ja-JP" altLang="en-US" sz="2800"/>
+              <a:t>する</a:t>
+            </a:r>
+          </a:p>
+        </p:txBody>
+      </p:sp>
+      <p:sp>
+        <p:nvSpPr>
+          <p:cNvPr id="5" name="テキスト ボックス 4">
+            <a:extLst>
+              <a:ext uri="{FF2B5EF4-FFF2-40B4-BE49-F238E27FC236}">
+                <a16:creationId xmlns:a16="http://schemas.microsoft.com/office/drawing/2014/main" id="{823225D7-A43A-6048-9EE2-C2048CA5B6F4}"/>
+              </a:ext>
+            </a:extLst>
+          </p:cNvPr>
+          <p:cNvSpPr txBox="1"/>
+          <p:nvPr/>
+        </p:nvSpPr>
+        <p:spPr>
+          <a:xfrm>
+            <a:off x="323528" y="3212976"/>
+            <a:ext cx="5544616" cy="1569660"/>
+          </a:xfrm>
+          <a:prstGeom prst="rect">
+            <a:avLst/>
+          </a:prstGeom>
+          <a:noFill/>
+          <a:ln>
             <a:solidFill>
-              <a:srgbClr val="FF0000"/>
+              <a:schemeClr val="tx1"/>
             </a:solidFill>
           </a:ln>
-        </p:spPr>
-        <p:style>
-          <a:lnRef idx="2">
-            <a:schemeClr val="accent1">
-              <a:shade val="50000"/>
-            </a:schemeClr>
-          </a:lnRef>
-          <a:fillRef idx="1">
-            <a:schemeClr val="accent1"/>
-          </a:fillRef>
-          <a:effectRef idx="0">
-            <a:schemeClr val="accent1"/>
-          </a:effectRef>
-          <a:fontRef idx="minor">
-            <a:schemeClr val="lt1"/>
-          </a:fontRef>
-        </p:style>
-        <p:txBody>
-          <a:bodyPr rtlCol="0" anchor="ctr"/>
-          <a:lstStyle/>
-          <a:p>
-            <a:pPr algn="ctr"/>
-            <a:endParaRPr kumimoji="1" lang="ja-JP" altLang="en-US"/>
-          </a:p>
-        </p:txBody>
-      </p:sp>
-      <p:sp>
-        <p:nvSpPr>
-          <p:cNvPr id="12" name="テキスト ボックス 11">
-            <a:extLst>
-              <a:ext uri="{FF2B5EF4-FFF2-40B4-BE49-F238E27FC236}">
-                <a16:creationId xmlns:a16="http://schemas.microsoft.com/office/drawing/2014/main" id="{8527D627-2469-C737-19E2-CD3FC6F1343A}"/>
-              </a:ext>
-            </a:extLst>
-          </p:cNvPr>
-          <p:cNvSpPr txBox="1"/>
-          <p:nvPr/>
-        </p:nvSpPr>
-        <p:spPr>
-          <a:xfrm>
-            <a:off x="251520" y="1052736"/>
-            <a:ext cx="8424936" cy="523220"/>
-          </a:xfrm>
-          <a:prstGeom prst="rect">
-            <a:avLst/>
-          </a:prstGeom>
-          <a:noFill/>
         </p:spPr>
         <p:txBody>
           <a:bodyPr wrap="square">
@@ -10944,194 +10976,61 @@
           <a:lstStyle/>
           <a:p>
             <a:r>
-              <a:rPr lang="en-US" altLang="ja-JP" sz="2800"/>
-              <a:t>first.ks</a:t>
-            </a:r>
-            <a:r>
-              <a:rPr lang="ja-JP" altLang="en-US" sz="2800"/>
-              <a:t>の保存忘れに注意。</a:t>
-            </a:r>
-            <a:r>
-              <a:rPr lang="en-US" altLang="ja-JP" sz="2800"/>
-              <a:t>push</a:t>
-            </a:r>
-            <a:r>
-              <a:rPr lang="ja-JP" altLang="en-US" sz="2800"/>
-              <a:t>前に保存すること。</a:t>
-            </a:r>
-            <a:endParaRPr kumimoji="1" lang="ja-JP" altLang="en-US" sz="2800"/>
-          </a:p>
-        </p:txBody>
-      </p:sp>
-      <p:sp>
-        <p:nvSpPr>
-          <p:cNvPr id="13" name="テキスト ボックス 12">
-            <a:extLst>
-              <a:ext uri="{FF2B5EF4-FFF2-40B4-BE49-F238E27FC236}">
-                <a16:creationId xmlns:a16="http://schemas.microsoft.com/office/drawing/2014/main" id="{3BDFB70F-74EB-35E2-986C-1AB9441C5DDE}"/>
-              </a:ext>
-            </a:extLst>
-          </p:cNvPr>
-          <p:cNvSpPr txBox="1"/>
-          <p:nvPr/>
-        </p:nvSpPr>
-        <p:spPr>
-          <a:xfrm>
-            <a:off x="107504" y="1844824"/>
-            <a:ext cx="8650125" cy="400110"/>
-          </a:xfrm>
-          <a:prstGeom prst="rect">
-            <a:avLst/>
-          </a:prstGeom>
-          <a:noFill/>
-        </p:spPr>
-        <p:txBody>
-          <a:bodyPr wrap="none" rtlCol="0">
-            <a:spAutoFit/>
-          </a:bodyPr>
-          <a:lstStyle/>
-          <a:p>
-            <a:r>
-              <a:rPr kumimoji="1" lang="en-US" altLang="ja-JP" sz="2000"/>
-              <a:t>VS Code</a:t>
-            </a:r>
-            <a:r>
-              <a:rPr kumimoji="1" lang="ja-JP" altLang="en-US" sz="2000"/>
-              <a:t>のファイル名のタブの隣が●になっていたら、保存されていない</a:t>
-            </a:r>
-          </a:p>
-        </p:txBody>
-      </p:sp>
-      <p:pic>
-        <p:nvPicPr>
-          <p:cNvPr id="15" name="図 14">
-            <a:extLst>
-              <a:ext uri="{FF2B5EF4-FFF2-40B4-BE49-F238E27FC236}">
-                <a16:creationId xmlns:a16="http://schemas.microsoft.com/office/drawing/2014/main" id="{18964949-2C2D-0D25-D3D3-2E6992045F56}"/>
-              </a:ext>
-            </a:extLst>
-          </p:cNvPr>
-          <p:cNvPicPr>
-            <a:picLocks noChangeAspect="1"/>
-          </p:cNvPicPr>
-          <p:nvPr/>
-        </p:nvPicPr>
-        <p:blipFill>
-          <a:blip r:embed="rId3"/>
-          <a:stretch>
-            <a:fillRect/>
-          </a:stretch>
-        </p:blipFill>
-        <p:spPr>
-          <a:xfrm>
-            <a:off x="395536" y="5013176"/>
-            <a:ext cx="6702281" cy="1584176"/>
-          </a:xfrm>
-          <a:prstGeom prst="rect">
-            <a:avLst/>
-          </a:prstGeom>
-        </p:spPr>
-      </p:pic>
-      <p:sp>
-        <p:nvSpPr>
-          <p:cNvPr id="16" name="四角形: 角を丸くする 15">
-            <a:extLst>
-              <a:ext uri="{FF2B5EF4-FFF2-40B4-BE49-F238E27FC236}">
-                <a16:creationId xmlns:a16="http://schemas.microsoft.com/office/drawing/2014/main" id="{7F03F20E-6A00-FCBE-4263-19B154E8A2CA}"/>
-              </a:ext>
-            </a:extLst>
-          </p:cNvPr>
-          <p:cNvSpPr/>
-          <p:nvPr/>
-        </p:nvSpPr>
-        <p:spPr>
-          <a:xfrm>
-            <a:off x="2843808" y="5157192"/>
-            <a:ext cx="504056" cy="504056"/>
-          </a:xfrm>
-          <a:prstGeom prst="roundRect">
-            <a:avLst/>
-          </a:prstGeom>
-          <a:noFill/>
-          <a:ln w="38100">
-            <a:solidFill>
-              <a:srgbClr val="FF0000"/>
-            </a:solidFill>
-          </a:ln>
-        </p:spPr>
-        <p:style>
-          <a:lnRef idx="2">
-            <a:schemeClr val="accent1">
-              <a:shade val="50000"/>
-            </a:schemeClr>
-          </a:lnRef>
-          <a:fillRef idx="1">
-            <a:schemeClr val="accent1"/>
-          </a:fillRef>
-          <a:effectRef idx="0">
-            <a:schemeClr val="accent1"/>
-          </a:effectRef>
-          <a:fontRef idx="minor">
-            <a:schemeClr val="lt1"/>
-          </a:fontRef>
-        </p:style>
-        <p:txBody>
-          <a:bodyPr rtlCol="0" anchor="ctr"/>
-          <a:lstStyle/>
-          <a:p>
-            <a:pPr algn="ctr"/>
-            <a:endParaRPr kumimoji="1" lang="ja-JP" altLang="en-US"/>
-          </a:p>
-        </p:txBody>
-      </p:sp>
-      <p:sp>
-        <p:nvSpPr>
-          <p:cNvPr id="17" name="テキスト ボックス 16">
-            <a:extLst>
-              <a:ext uri="{FF2B5EF4-FFF2-40B4-BE49-F238E27FC236}">
-                <a16:creationId xmlns:a16="http://schemas.microsoft.com/office/drawing/2014/main" id="{1645D5B5-ED71-09AF-A108-B6E3FE262147}"/>
-              </a:ext>
-            </a:extLst>
-          </p:cNvPr>
-          <p:cNvSpPr txBox="1"/>
-          <p:nvPr/>
-        </p:nvSpPr>
-        <p:spPr>
-          <a:xfrm>
-            <a:off x="179512" y="4469050"/>
-            <a:ext cx="2920992" cy="400110"/>
-          </a:xfrm>
-          <a:prstGeom prst="rect">
-            <a:avLst/>
-          </a:prstGeom>
-          <a:noFill/>
-        </p:spPr>
-        <p:txBody>
-          <a:bodyPr wrap="none" rtlCol="0">
-            <a:spAutoFit/>
-          </a:bodyPr>
-          <a:lstStyle/>
-          <a:p>
-            <a:r>
-              <a:rPr kumimoji="1" lang="en-US" altLang="ja-JP" sz="2000"/>
-              <a:t>X</a:t>
-            </a:r>
-            <a:r>
-              <a:rPr kumimoji="1" lang="ja-JP" altLang="en-US" sz="2000"/>
-              <a:t>になっていたら</a:t>
-            </a:r>
-            <a:r>
-              <a:rPr lang="ja-JP" altLang="en-US" sz="2000"/>
-              <a:t>大丈夫</a:t>
-            </a:r>
-            <a:endParaRPr kumimoji="1" lang="ja-JP" altLang="en-US" sz="2000"/>
+              <a:rPr lang="en-US" altLang="ja-JP" sz="3200">
+                <a:latin typeface="Consolas" panose="020B0609020204030204" pitchFamily="49" charset="0"/>
+              </a:rPr>
+              <a:t>git</a:t>
+            </a:r>
+            <a:r>
+              <a:rPr lang="ja-JP" altLang="en-US" sz="3200">
+                <a:latin typeface="Consolas" panose="020B0609020204030204" pitchFamily="49" charset="0"/>
+              </a:rPr>
+              <a:t> </a:t>
+            </a:r>
+            <a:r>
+              <a:rPr lang="en-US" altLang="ja-JP" sz="3200">
+                <a:latin typeface="Consolas" panose="020B0609020204030204" pitchFamily="49" charset="0"/>
+              </a:rPr>
+              <a:t>add</a:t>
+            </a:r>
+            <a:r>
+              <a:rPr lang="ja-JP" altLang="en-US" sz="3200">
+                <a:latin typeface="Consolas" panose="020B0609020204030204" pitchFamily="49" charset="0"/>
+              </a:rPr>
+              <a:t> </a:t>
+            </a:r>
+            <a:r>
+              <a:rPr lang="en-US" altLang="ja-JP" sz="3200">
+                <a:latin typeface="Consolas" panose="020B0609020204030204" pitchFamily="49" charset="0"/>
+              </a:rPr>
+              <a:t>.</a:t>
+            </a:r>
+          </a:p>
+          <a:p>
+            <a:r>
+              <a:rPr lang="en-US" altLang="ja-JP" sz="3200">
+                <a:latin typeface="Consolas" panose="020B0609020204030204" pitchFamily="49" charset="0"/>
+              </a:rPr>
+              <a:t>git commit -m “updates”</a:t>
+            </a:r>
+          </a:p>
+          <a:p>
+            <a:r>
+              <a:rPr lang="en-US" altLang="ja-JP" sz="3200">
+                <a:latin typeface="Consolas" panose="020B0609020204030204" pitchFamily="49" charset="0"/>
+              </a:rPr>
+              <a:t>git push</a:t>
+            </a:r>
+            <a:endParaRPr lang="en-US" altLang="ja-JP" sz="3200" dirty="0">
+              <a:latin typeface="Consolas" panose="020B0609020204030204" pitchFamily="49" charset="0"/>
+            </a:endParaRPr>
           </a:p>
         </p:txBody>
       </p:sp>
     </p:spTree>
     <p:extLst>
       <p:ext uri="{BB962C8B-B14F-4D97-AF65-F5344CB8AC3E}">
-        <p14:creationId xmlns:p14="http://schemas.microsoft.com/office/powerpoint/2010/main" val="3428738209"/>
+        <p14:creationId xmlns:p14="http://schemas.microsoft.com/office/powerpoint/2010/main" val="1242742599"/>
       </p:ext>
     </p:extLst>
   </p:cSld>
@@ -11163,244 +11062,6 @@
           <p:cNvPr id="2" name="テキスト プレースホルダー 1">
             <a:extLst>
               <a:ext uri="{FF2B5EF4-FFF2-40B4-BE49-F238E27FC236}">
-                <a16:creationId xmlns:a16="http://schemas.microsoft.com/office/drawing/2014/main" id="{F96770C1-35F2-FE68-2CAC-BA2DE31498B3}"/>
-              </a:ext>
-            </a:extLst>
-          </p:cNvPr>
-          <p:cNvSpPr>
-            <a:spLocks noGrp="1"/>
-          </p:cNvSpPr>
-          <p:nvPr>
-            <p:ph type="body" sz="quarter" idx="10"/>
-          </p:nvPr>
-        </p:nvSpPr>
-        <p:spPr/>
-        <p:txBody>
-          <a:bodyPr/>
-          <a:lstStyle/>
-          <a:p>
-            <a:r>
-              <a:rPr lang="ja-JP" altLang="en-US"/>
-              <a:t>課題</a:t>
-            </a:r>
-            <a:r>
-              <a:rPr lang="en-US" altLang="ja-JP"/>
-              <a:t>2 - Step 7</a:t>
-            </a:r>
-            <a:endParaRPr kumimoji="1" lang="ja-JP" altLang="en-US"/>
-          </a:p>
-        </p:txBody>
-      </p:sp>
-      <p:sp>
-        <p:nvSpPr>
-          <p:cNvPr id="3" name="テキスト ボックス 2">
-            <a:extLst>
-              <a:ext uri="{FF2B5EF4-FFF2-40B4-BE49-F238E27FC236}">
-                <a16:creationId xmlns:a16="http://schemas.microsoft.com/office/drawing/2014/main" id="{16471432-847B-A38F-2278-22FC827AC9C4}"/>
-              </a:ext>
-            </a:extLst>
-          </p:cNvPr>
-          <p:cNvSpPr txBox="1"/>
-          <p:nvPr/>
-        </p:nvSpPr>
-        <p:spPr>
-          <a:xfrm>
-            <a:off x="251520" y="1211268"/>
-            <a:ext cx="8208912" cy="954107"/>
-          </a:xfrm>
-          <a:prstGeom prst="rect">
-            <a:avLst/>
-          </a:prstGeom>
-          <a:noFill/>
-        </p:spPr>
-        <p:txBody>
-          <a:bodyPr wrap="square" rtlCol="0">
-            <a:spAutoFit/>
-          </a:bodyPr>
-          <a:lstStyle/>
-          <a:p>
-            <a:r>
-              <a:rPr kumimoji="1" lang="en-US" altLang="ja-JP" sz="2800"/>
-              <a:t>Git Bash</a:t>
-            </a:r>
-            <a:r>
-              <a:rPr kumimoji="1" lang="ja-JP" altLang="en-US" sz="2800"/>
-              <a:t>で、カレントディレクトリが</a:t>
-            </a:r>
-            <a:r>
-              <a:rPr kumimoji="1" lang="en-US" altLang="ja-JP" sz="2800"/>
-              <a:t>/z/github/tyrano_sample</a:t>
-            </a:r>
-            <a:r>
-              <a:rPr kumimoji="1" lang="ja-JP" altLang="en-US" sz="2800"/>
-              <a:t>になっていることを確認</a:t>
-            </a:r>
-          </a:p>
-        </p:txBody>
-      </p:sp>
-      <p:sp>
-        <p:nvSpPr>
-          <p:cNvPr id="4" name="テキスト ボックス 3">
-            <a:extLst>
-              <a:ext uri="{FF2B5EF4-FFF2-40B4-BE49-F238E27FC236}">
-                <a16:creationId xmlns:a16="http://schemas.microsoft.com/office/drawing/2014/main" id="{7AE9E387-4F07-EC09-DA78-B9577DA061F2}"/>
-              </a:ext>
-            </a:extLst>
-          </p:cNvPr>
-          <p:cNvSpPr txBox="1"/>
-          <p:nvPr/>
-        </p:nvSpPr>
-        <p:spPr>
-          <a:xfrm>
-            <a:off x="251520" y="2492896"/>
-            <a:ext cx="3837910" cy="523220"/>
-          </a:xfrm>
-          <a:prstGeom prst="rect">
-            <a:avLst/>
-          </a:prstGeom>
-          <a:noFill/>
-        </p:spPr>
-        <p:txBody>
-          <a:bodyPr wrap="none" rtlCol="0">
-            <a:spAutoFit/>
-          </a:bodyPr>
-          <a:lstStyle/>
-          <a:p>
-            <a:r>
-              <a:rPr kumimoji="1" lang="ja-JP" altLang="en-US" sz="2800"/>
-              <a:t>以下の手順で</a:t>
-            </a:r>
-            <a:r>
-              <a:rPr kumimoji="1" lang="en-US" altLang="ja-JP" sz="2800"/>
-              <a:t>push</a:t>
-            </a:r>
-            <a:r>
-              <a:rPr kumimoji="1" lang="ja-JP" altLang="en-US" sz="2800"/>
-              <a:t>する</a:t>
-            </a:r>
-          </a:p>
-        </p:txBody>
-      </p:sp>
-      <p:sp>
-        <p:nvSpPr>
-          <p:cNvPr id="5" name="テキスト ボックス 4">
-            <a:extLst>
-              <a:ext uri="{FF2B5EF4-FFF2-40B4-BE49-F238E27FC236}">
-                <a16:creationId xmlns:a16="http://schemas.microsoft.com/office/drawing/2014/main" id="{823225D7-A43A-6048-9EE2-C2048CA5B6F4}"/>
-              </a:ext>
-            </a:extLst>
-          </p:cNvPr>
-          <p:cNvSpPr txBox="1"/>
-          <p:nvPr/>
-        </p:nvSpPr>
-        <p:spPr>
-          <a:xfrm>
-            <a:off x="323528" y="3212976"/>
-            <a:ext cx="5544616" cy="1569660"/>
-          </a:xfrm>
-          <a:prstGeom prst="rect">
-            <a:avLst/>
-          </a:prstGeom>
-          <a:noFill/>
-          <a:ln>
-            <a:solidFill>
-              <a:schemeClr val="tx1"/>
-            </a:solidFill>
-          </a:ln>
-        </p:spPr>
-        <p:txBody>
-          <a:bodyPr wrap="square">
-            <a:spAutoFit/>
-          </a:bodyPr>
-          <a:lstStyle/>
-          <a:p>
-            <a:r>
-              <a:rPr lang="en-US" altLang="ja-JP" sz="3200">
-                <a:latin typeface="Consolas" panose="020B0609020204030204" pitchFamily="49" charset="0"/>
-              </a:rPr>
-              <a:t>git</a:t>
-            </a:r>
-            <a:r>
-              <a:rPr lang="ja-JP" altLang="en-US" sz="3200">
-                <a:latin typeface="Consolas" panose="020B0609020204030204" pitchFamily="49" charset="0"/>
-              </a:rPr>
-              <a:t> </a:t>
-            </a:r>
-            <a:r>
-              <a:rPr lang="en-US" altLang="ja-JP" sz="3200">
-                <a:latin typeface="Consolas" panose="020B0609020204030204" pitchFamily="49" charset="0"/>
-              </a:rPr>
-              <a:t>add</a:t>
-            </a:r>
-            <a:r>
-              <a:rPr lang="ja-JP" altLang="en-US" sz="3200">
-                <a:latin typeface="Consolas" panose="020B0609020204030204" pitchFamily="49" charset="0"/>
-              </a:rPr>
-              <a:t> </a:t>
-            </a:r>
-            <a:r>
-              <a:rPr lang="en-US" altLang="ja-JP" sz="3200">
-                <a:latin typeface="Consolas" panose="020B0609020204030204" pitchFamily="49" charset="0"/>
-              </a:rPr>
-              <a:t>.</a:t>
-            </a:r>
-          </a:p>
-          <a:p>
-            <a:r>
-              <a:rPr lang="en-US" altLang="ja-JP" sz="3200">
-                <a:latin typeface="Consolas" panose="020B0609020204030204" pitchFamily="49" charset="0"/>
-              </a:rPr>
-              <a:t>git commit -m “updates”</a:t>
-            </a:r>
-          </a:p>
-          <a:p>
-            <a:r>
-              <a:rPr lang="en-US" altLang="ja-JP" sz="3200">
-                <a:latin typeface="Consolas" panose="020B0609020204030204" pitchFamily="49" charset="0"/>
-              </a:rPr>
-              <a:t>git push</a:t>
-            </a:r>
-            <a:endParaRPr lang="en-US" altLang="ja-JP" sz="3200" dirty="0">
-              <a:latin typeface="Consolas" panose="020B0609020204030204" pitchFamily="49" charset="0"/>
-            </a:endParaRPr>
-          </a:p>
-        </p:txBody>
-      </p:sp>
-    </p:spTree>
-    <p:extLst>
-      <p:ext uri="{BB962C8B-B14F-4D97-AF65-F5344CB8AC3E}">
-        <p14:creationId xmlns:p14="http://schemas.microsoft.com/office/powerpoint/2010/main" val="1242742599"/>
-      </p:ext>
-    </p:extLst>
-  </p:cSld>
-  <p:clrMapOvr>
-    <a:masterClrMapping/>
-  </p:clrMapOvr>
-</p:sld>
-</file>
-
-<file path=ppt/slides/slide35.xml><?xml version="1.0" encoding="utf-8"?>
-<p:sld xmlns:a="http://schemas.openxmlformats.org/drawingml/2006/main" xmlns:r="http://schemas.openxmlformats.org/officeDocument/2006/relationships" xmlns:p="http://schemas.openxmlformats.org/presentationml/2006/main">
-  <p:cSld>
-    <p:spTree>
-      <p:nvGrpSpPr>
-        <p:cNvPr id="1" name=""/>
-        <p:cNvGrpSpPr/>
-        <p:nvPr/>
-      </p:nvGrpSpPr>
-      <p:grpSpPr>
-        <a:xfrm>
-          <a:off x="0" y="0"/>
-          <a:ext cx="0" cy="0"/>
-          <a:chOff x="0" y="0"/>
-          <a:chExt cx="0" cy="0"/>
-        </a:xfrm>
-      </p:grpSpPr>
-      <p:sp>
-        <p:nvSpPr>
-          <p:cNvPr id="2" name="テキスト プレースホルダー 1">
-            <a:extLst>
-              <a:ext uri="{FF2B5EF4-FFF2-40B4-BE49-F238E27FC236}">
                 <a16:creationId xmlns:a16="http://schemas.microsoft.com/office/drawing/2014/main" id="{5061B170-2AA3-46CA-305C-3D7F065C2D26}"/>
               </a:ext>
             </a:extLst>
@@ -11929,7 +11590,7 @@
 </p:sld>
 </file>
 
-<file path=ppt/slides/slide36.xml><?xml version="1.0" encoding="utf-8"?>
+<file path=ppt/slides/slide35.xml><?xml version="1.0" encoding="utf-8"?>
 <p:sld xmlns:a="http://schemas.openxmlformats.org/drawingml/2006/main" xmlns:r="http://schemas.openxmlformats.org/officeDocument/2006/relationships" xmlns:p="http://schemas.openxmlformats.org/presentationml/2006/main">
   <p:cSld>
     <p:spTree>
